--- a/lab_meeting/학회포스터_초안.pptx
+++ b/lab_meeting/학회포스터_초안.pptx
@@ -2097,7 +2097,35 @@
                 <a:ea typeface="나눔고딕" pitchFamily="50" charset="-127"/>
                 <a:cs typeface="Arial" panose="020B0604020202020204" pitchFamily="34" charset="0"/>
               </a:rPr>
-              <a:t>의 3단계 프레임워크를 4개 댐 자료에 적용하고, 구축 결과와 질문 처리 과정을 확인함</a:t>
+              <a:t>의 3단계로 이루어진 프레임워크를 구축하여, 운영자가 </a:t>
+            </a:r>
+            <a:r>
+              <a:rPr lang="ko-KR" altLang="en-US" sz="2600" b="1" dirty="0">
+                <a:solidFill>
+                  <a:schemeClr val="tx1">
+                    <a:lumMod val="85000"/>
+                    <a:lumOff val="15000"/>
+                  </a:schemeClr>
+                </a:solidFill>
+                <a:latin typeface="나눔고딕" pitchFamily="50" charset="-127"/>
+                <a:ea typeface="나눔고딕" pitchFamily="50" charset="-127"/>
+                <a:cs typeface="Arial" panose="020B0604020202020204" pitchFamily="34" charset="0"/>
+              </a:rPr>
+              <a:t>근거와 함께 의사결정</a:t>
+            </a:r>
+            <a:r>
+              <a:rPr lang="ko-KR" altLang="en-US" sz="2600" b="0" dirty="0">
+                <a:solidFill>
+                  <a:schemeClr val="tx1">
+                    <a:lumMod val="85000"/>
+                    <a:lumOff val="15000"/>
+                  </a:schemeClr>
+                </a:solidFill>
+                <a:latin typeface="나눔고딕" pitchFamily="50" charset="-127"/>
+                <a:ea typeface="나눔고딕" pitchFamily="50" charset="-127"/>
+                <a:cs typeface="Arial" panose="020B0604020202020204" pitchFamily="34" charset="0"/>
+              </a:rPr>
+              <a:t>할 수 있도록 지원함</a:t>
             </a:r>
           </a:p>
         </p:txBody>
@@ -5609,7 +5637,7 @@
         <p:spPr>
           <a:xfrm>
             <a:off x="15570184" y="19745259"/>
-            <a:ext cx="14113138" cy="1545047"/>
+            <a:ext cx="14113138" cy="1077484"/>
           </a:xfrm>
           <a:prstGeom prst="rect">
             <a:avLst/>
@@ -5676,7 +5704,7 @@
                 <a:ea typeface="나눔고딕" pitchFamily="50" charset="-127"/>
                 <a:cs typeface="Arial" panose="020B0604020202020204" pitchFamily="34" charset="0"/>
               </a:rPr>
-              <a:t>에서 어긋남은 0건이었음. 다만 “댐 → 운영행위 → 승인” 순서로 찾으면 승인 80건 중 74건만 찾아져(변경 승인 6건은 운영행위 없음), </a:t>
+              <a:t>에서 어긋남은 0건이었고, 승인 80건 모두 </a:t>
             </a:r>
             <a:r>
               <a:rPr lang="ko-KR" altLang="en-US" sz="2600" b="1" dirty="0">
@@ -5690,7 +5718,7 @@
                 <a:ea typeface="나눔고딕" pitchFamily="50" charset="-127"/>
                 <a:cs typeface="Arial" panose="020B0604020202020204" pitchFamily="34" charset="0"/>
               </a:rPr>
-              <a:t>승인과 댐을 잇는 관계(concernsDam)</a:t>
+              <a:t>승인–운영행위–댐–상태–근거자료</a:t>
             </a:r>
             <a:r>
               <a:rPr lang="ko-KR" altLang="en-US" sz="2600" b="0" dirty="0">
@@ -5704,35 +5732,7 @@
                 <a:ea typeface="나눔고딕" pitchFamily="50" charset="-127"/>
                 <a:cs typeface="Arial" panose="020B0604020202020204" pitchFamily="34" charset="0"/>
               </a:rPr>
-              <a:t> 를 추가하여 </a:t>
-            </a:r>
-            <a:r>
-              <a:rPr lang="ko-KR" altLang="en-US" sz="2600" b="1" dirty="0">
-                <a:solidFill>
-                  <a:schemeClr val="tx1">
-                    <a:lumMod val="85000"/>
-                    <a:lumOff val="15000"/>
-                  </a:schemeClr>
-                </a:solidFill>
-                <a:latin typeface="나눔고딕" pitchFamily="50" charset="-127"/>
-                <a:ea typeface="나눔고딕" pitchFamily="50" charset="-127"/>
-                <a:cs typeface="Arial" panose="020B0604020202020204" pitchFamily="34" charset="0"/>
-              </a:rPr>
-              <a:t>80건 모두</a:t>
-            </a:r>
-            <a:r>
-              <a:rPr lang="ko-KR" altLang="en-US" sz="2600" b="0" dirty="0">
-                <a:solidFill>
-                  <a:schemeClr val="tx1">
-                    <a:lumMod val="85000"/>
-                    <a:lumOff val="15000"/>
-                  </a:schemeClr>
-                </a:solidFill>
-                <a:latin typeface="나눔고딕" pitchFamily="50" charset="-127"/>
-                <a:ea typeface="나눔고딕" pitchFamily="50" charset="-127"/>
-                <a:cs typeface="Arial" panose="020B0604020202020204" pitchFamily="34" charset="0"/>
-              </a:rPr>
-              <a:t> 찾게 됨</a:t>
+              <a:t>로 이어져 질문 경로를 따라 근거를 찾을 수 있음</a:t>
             </a:r>
           </a:p>
         </p:txBody>
@@ -5745,7 +5745,7 @@
         </p:nvSpPr>
         <p:spPr>
           <a:xfrm>
-            <a:off x="15691431" y="21670306"/>
+            <a:off x="15691431" y="21202743"/>
             <a:ext cx="13943667" cy="1023024"/>
           </a:xfrm>
           <a:prstGeom prst="rect">
@@ -5804,7 +5804,7 @@
         </p:nvSpPr>
         <p:spPr>
           <a:xfrm>
-            <a:off x="15803042" y="22813330"/>
+            <a:off x="15803042" y="22345767"/>
             <a:ext cx="13649422" cy="645985"/>
           </a:xfrm>
           <a:prstGeom prst="rect">
@@ -5877,7 +5877,7 @@
           <p:nvPr/>
         </p:nvGraphicFramePr>
         <p:xfrm>
-          <a:off x="15670184" y="23549315"/>
+          <a:off x="15670184" y="23081752"/>
           <a:ext cx="13600000" cy="4542500"/>
         </p:xfrm>
         <a:graphic>
@@ -6169,7 +6169,7 @@
                           <a:ea typeface="나눔고딕" pitchFamily="50" charset="-127"/>
                           <a:cs typeface="Arial" panose="020B0604020202020204" pitchFamily="34" charset="0"/>
                         </a:rPr>
-                        <a:t>2026-09-28 23:00 수위 185.2644 EL.m, 제한수위 190.3 EL.m → </a:t>
+                        <a:t>수위 185.2644 EL.m, 제한수위 190.3 EL.m → 제한수위보다 </a:t>
                       </a:r>
                       <a:r>
                         <a:rPr lang="ko-KR" altLang="en-US" sz="2200" b="1" dirty="0">
@@ -6183,7 +6183,7 @@
                           <a:ea typeface="나눔고딕" pitchFamily="50" charset="-127"/>
                           <a:cs typeface="Arial" panose="020B0604020202020204" pitchFamily="34" charset="0"/>
                         </a:rPr>
-                        <a:t>−5.04 m</a:t>
+                        <a:t>5.04 m 낮음</a:t>
                       </a:r>
                       <a:r>
                         <a:rPr lang="ko-KR" altLang="en-US" sz="2200" b="0" dirty="0">
@@ -6706,8 +6706,8 @@
         </p:nvSpPr>
         <p:spPr>
           <a:xfrm>
-            <a:off x="15570184" y="28211815"/>
-            <a:ext cx="14113138" cy="2088810"/>
+            <a:off x="15570184" y="27744252"/>
+            <a:ext cx="14113138" cy="1621247"/>
           </a:xfrm>
           <a:prstGeom prst="rect">
             <a:avLst/>
@@ -6829,7 +6829,7 @@
                 <a:ea typeface="나눔고딕" pitchFamily="50" charset="-127"/>
                 <a:cs typeface="Arial" panose="020B0604020202020204" pitchFamily="34" charset="0"/>
               </a:rPr>
-              <a:t>가 하고, LLM은 </a:t>
+              <a:t>가 하고, 답변은 </a:t>
             </a:r>
             <a:r>
               <a:rPr lang="ko-KR" altLang="en-US" sz="2600" b="1" dirty="0">
@@ -6857,7 +6857,7 @@
                 <a:ea typeface="나눔고딕" pitchFamily="50" charset="-127"/>
                 <a:cs typeface="Arial" panose="020B0604020202020204" pitchFamily="34" charset="0"/>
               </a:rPr>
-              <a:t>의 번호 붙은 자료만으로 답변함. 현재 값은 저장된 가장 최근 시각(실시간 아님)이며, 운영행위 시각과 유사도 척도는 연구자 지정 </a:t>
+              <a:t>의 번호 붙은 자료를 바탕으로 </a:t>
             </a:r>
             <a:r>
               <a:rPr lang="ko-KR" altLang="en-US" sz="2600" b="1" dirty="0">
@@ -6871,7 +6871,7 @@
                 <a:ea typeface="나눔고딕" pitchFamily="50" charset="-127"/>
                 <a:cs typeface="Arial" panose="020B0604020202020204" pitchFamily="34" charset="0"/>
               </a:rPr>
-              <a:t>임시 기준</a:t>
+              <a:t>LLM</a:t>
             </a:r>
             <a:r>
               <a:rPr lang="ko-KR" altLang="en-US" sz="2600" b="0" dirty="0">
@@ -6885,7 +6885,7 @@
                 <a:ea typeface="나눔고딕" pitchFamily="50" charset="-127"/>
                 <a:cs typeface="Arial" panose="020B0604020202020204" pitchFamily="34" charset="0"/>
               </a:rPr>
-              <a:t>임</a:t>
+              <a:t>이 작성하여 운영자가 출처를 확인할 수 있음</a:t>
             </a:r>
           </a:p>
         </p:txBody>
@@ -6898,7 +6898,7 @@
         </p:nvSpPr>
         <p:spPr>
           <a:xfrm>
-            <a:off x="15691431" y="30680625"/>
+            <a:off x="15691431" y="29745499"/>
             <a:ext cx="13943667" cy="1023024"/>
           </a:xfrm>
           <a:prstGeom prst="rect">
@@ -6957,8 +6957,8 @@
         </p:nvSpPr>
         <p:spPr>
           <a:xfrm>
-            <a:off x="15570184" y="31823649"/>
-            <a:ext cx="14113138" cy="3100137"/>
+            <a:off x="15570184" y="30888523"/>
+            <a:ext cx="14113138" cy="3567700"/>
           </a:xfrm>
           <a:prstGeom prst="rect">
             <a:avLst/>
@@ -6997,7 +6997,7 @@
                 <a:ea typeface="나눔고딕" pitchFamily="50" charset="-127"/>
                 <a:cs typeface="Arial" panose="020B0604020202020204" pitchFamily="34" charset="0"/>
               </a:rPr>
-              <a:t>댐 운영 자료를 </a:t>
+              <a:t>댐 운영 자료(방류 승인 기록, 수문기상 시간 자료, 규정 별표3)를 </a:t>
             </a:r>
             <a:r>
               <a:rPr lang="ko-KR" altLang="en-US" sz="2600" b="1" dirty="0">
@@ -7025,7 +7025,7 @@
                 <a:ea typeface="나눔고딕" pitchFamily="50" charset="-127"/>
                 <a:cs typeface="Arial" panose="020B0604020202020204" pitchFamily="34" charset="0"/>
               </a:rPr>
-              <a:t> 에 맞춰 KG(개체 273, 관계 457)로 구축하고, 수치·원문은 외부 저장소에 두어 </a:t>
+              <a:t> 에 맞춰 </a:t>
             </a:r>
             <a:r>
               <a:rPr lang="ko-KR" altLang="en-US" sz="2600" b="1" dirty="0">
@@ -7039,7 +7039,7 @@
                 <a:ea typeface="나눔고딕" pitchFamily="50" charset="-127"/>
                 <a:cs typeface="Arial" panose="020B0604020202020204" pitchFamily="34" charset="0"/>
               </a:rPr>
-              <a:t>KG는 연결과 근거 위치만</a:t>
+              <a:t>KG(개체 273, 관계 457)</a:t>
             </a:r>
             <a:r>
               <a:rPr lang="ko-KR" altLang="en-US" sz="2600" b="0" dirty="0">
@@ -7053,7 +7053,7 @@
                 <a:ea typeface="나눔고딕" pitchFamily="50" charset="-127"/>
                 <a:cs typeface="Arial" panose="020B0604020202020204" pitchFamily="34" charset="0"/>
               </a:rPr>
-              <a:t> 담도록 함</a:t>
+              <a:t> 로 구축하고, 수치·원문은 외부 저장소에 두어 KG는 연결과 근거 위치만 담도록 함</a:t>
             </a:r>
           </a:p>
           <a:p>
@@ -7069,7 +7069,7 @@
               </a:buBlip>
             </a:pPr>
             <a:r>
-              <a:rPr lang="ko-KR" altLang="en-US" sz="2600" b="1" dirty="0">
+              <a:rPr lang="ko-KR" altLang="en-US" sz="2600" b="0" dirty="0">
                 <a:solidFill>
                   <a:schemeClr val="tx1">
                     <a:lumMod val="85000"/>
@@ -7080,10 +7080,10 @@
                 <a:ea typeface="나눔고딕" pitchFamily="50" charset="-127"/>
                 <a:cs typeface="Arial" panose="020B0604020202020204" pitchFamily="34" charset="0"/>
               </a:rPr>
-              <a:t>하이브리드 검색</a:t>
-            </a:r>
-            <a:r>
-              <a:rPr lang="ko-KR" altLang="en-US" sz="2600" b="0" dirty="0">
+              <a:t>KG와 측정자료·문서 저장소를 함께 찾는 </a:t>
+            </a:r>
+            <a:r>
+              <a:rPr lang="ko-KR" altLang="en-US" sz="2600" b="1" dirty="0">
                 <a:solidFill>
                   <a:schemeClr val="tx1">
                     <a:lumMod val="85000"/>
@@ -7094,10 +7094,10 @@
                 <a:ea typeface="나눔고딕" pitchFamily="50" charset="-127"/>
                 <a:cs typeface="Arial" panose="020B0604020202020204" pitchFamily="34" charset="0"/>
               </a:rPr>
-              <a:t>(KG → 측정자료·문서 저장소)으로 근거를 모으고, LLM이 </a:t>
-            </a:r>
-            <a:r>
-              <a:rPr lang="ko-KR" altLang="en-US" sz="2600" b="1" dirty="0">
+              <a:t>하이브리드 검색</a:t>
+            </a:r>
+            <a:r>
+              <a:rPr lang="ko-KR" altLang="en-US" sz="2600" b="0" dirty="0">
                 <a:solidFill>
                   <a:schemeClr val="tx1">
                     <a:lumMod val="85000"/>
@@ -7108,10 +7108,10 @@
                 <a:ea typeface="나눔고딕" pitchFamily="50" charset="-127"/>
                 <a:cs typeface="Arial" panose="020B0604020202020204" pitchFamily="34" charset="0"/>
               </a:rPr>
-              <a:t>출처 번호가 붙은 근거 안에서만</a:t>
-            </a:r>
-            <a:r>
-              <a:rPr lang="ko-KR" altLang="en-US" sz="2600" b="0" dirty="0">
+              <a:t>과, 출처 번호가 붙은 근거 안에서 답하는 </a:t>
+            </a:r>
+            <a:r>
+              <a:rPr lang="ko-KR" altLang="en-US" sz="2600" b="1" dirty="0">
                 <a:solidFill>
                   <a:schemeClr val="tx1">
                     <a:lumMod val="85000"/>
@@ -7122,7 +7122,49 @@
                 <a:ea typeface="나눔고딕" pitchFamily="50" charset="-127"/>
                 <a:cs typeface="Arial" panose="020B0604020202020204" pitchFamily="34" charset="0"/>
               </a:rPr>
-              <a:t> 답하는 질문 처리 과정을 시험 구현함</a:t>
+              <a:t>LLM</a:t>
+            </a:r>
+            <a:r>
+              <a:rPr lang="ko-KR" altLang="en-US" sz="2600" b="0" dirty="0">
+                <a:solidFill>
+                  <a:schemeClr val="tx1">
+                    <a:lumMod val="85000"/>
+                    <a:lumOff val="15000"/>
+                  </a:schemeClr>
+                </a:solidFill>
+                <a:latin typeface="나눔고딕" pitchFamily="50" charset="-127"/>
+                <a:ea typeface="나눔고딕" pitchFamily="50" charset="-127"/>
+                <a:cs typeface="Arial" panose="020B0604020202020204" pitchFamily="34" charset="0"/>
+              </a:rPr>
+              <a:t>을 연계한 </a:t>
+            </a:r>
+            <a:r>
+              <a:rPr lang="ko-KR" altLang="en-US" sz="2600" b="1" dirty="0">
+                <a:solidFill>
+                  <a:schemeClr val="tx1">
+                    <a:lumMod val="85000"/>
+                    <a:lumOff val="15000"/>
+                  </a:schemeClr>
+                </a:solidFill>
+                <a:latin typeface="나눔고딕" pitchFamily="50" charset="-127"/>
+                <a:ea typeface="나눔고딕" pitchFamily="50" charset="-127"/>
+                <a:cs typeface="Arial" panose="020B0604020202020204" pitchFamily="34" charset="0"/>
+              </a:rPr>
+              <a:t>질문 응답 프레임워크</a:t>
+            </a:r>
+            <a:r>
+              <a:rPr lang="ko-KR" altLang="en-US" sz="2600" b="0" dirty="0">
+                <a:solidFill>
+                  <a:schemeClr val="tx1">
+                    <a:lumMod val="85000"/>
+                    <a:lumOff val="15000"/>
+                  </a:schemeClr>
+                </a:solidFill>
+                <a:latin typeface="나눔고딕" pitchFamily="50" charset="-127"/>
+                <a:ea typeface="나눔고딕" pitchFamily="50" charset="-127"/>
+                <a:cs typeface="Arial" panose="020B0604020202020204" pitchFamily="34" charset="0"/>
+              </a:rPr>
+              <a:t>를 구축함</a:t>
             </a:r>
           </a:p>
           <a:p>
@@ -7149,7 +7191,63 @@
                 <a:ea typeface="나눔고딕" pitchFamily="50" charset="-127"/>
                 <a:cs typeface="Arial" panose="020B0604020202020204" pitchFamily="34" charset="0"/>
               </a:rPr>
-              <a:t>향후 다양한 표현의 질문 세트로 LLM의 질문 해석 정확도와 답변의 근거 일치 여부를 평가하고, 실시간 자료 연계와 유사 사례 척도의 민감도를 검토할 예정임</a:t>
+              <a:t>운영자가 현재 상태, 제한수위, 과거 승인·운영행위, 비슷한 과거 사례를 </a:t>
+            </a:r>
+            <a:r>
+              <a:rPr lang="ko-KR" altLang="en-US" sz="2600" b="1" dirty="0">
+                <a:solidFill>
+                  <a:schemeClr val="tx1">
+                    <a:lumMod val="85000"/>
+                    <a:lumOff val="15000"/>
+                  </a:schemeClr>
+                </a:solidFill>
+                <a:latin typeface="나눔고딕" pitchFamily="50" charset="-127"/>
+                <a:ea typeface="나눔고딕" pitchFamily="50" charset="-127"/>
+                <a:cs typeface="Arial" panose="020B0604020202020204" pitchFamily="34" charset="0"/>
+              </a:rPr>
+              <a:t>근거와 함께</a:t>
+            </a:r>
+            <a:r>
+              <a:rPr lang="ko-KR" altLang="en-US" sz="2600" b="0" dirty="0">
+                <a:solidFill>
+                  <a:schemeClr val="tx1">
+                    <a:lumMod val="85000"/>
+                    <a:lumOff val="15000"/>
+                  </a:schemeClr>
+                </a:solidFill>
+                <a:latin typeface="나눔고딕" pitchFamily="50" charset="-127"/>
+                <a:ea typeface="나눔고딕" pitchFamily="50" charset="-127"/>
+                <a:cs typeface="Arial" panose="020B0604020202020204" pitchFamily="34" charset="0"/>
+              </a:rPr>
+              <a:t> 확인할 수 있어 </a:t>
+            </a:r>
+            <a:r>
+              <a:rPr lang="ko-KR" altLang="en-US" sz="2600" b="1" dirty="0">
+                <a:solidFill>
+                  <a:schemeClr val="tx1">
+                    <a:lumMod val="85000"/>
+                    <a:lumOff val="15000"/>
+                  </a:schemeClr>
+                </a:solidFill>
+                <a:latin typeface="나눔고딕" pitchFamily="50" charset="-127"/>
+                <a:ea typeface="나눔고딕" pitchFamily="50" charset="-127"/>
+                <a:cs typeface="Arial" panose="020B0604020202020204" pitchFamily="34" charset="0"/>
+              </a:rPr>
+              <a:t>댐 운영 의사결정을 지원</a:t>
+            </a:r>
+            <a:r>
+              <a:rPr lang="ko-KR" altLang="en-US" sz="2600" b="0" dirty="0">
+                <a:solidFill>
+                  <a:schemeClr val="tx1">
+                    <a:lumMod val="85000"/>
+                    <a:lumOff val="15000"/>
+                  </a:schemeClr>
+                </a:solidFill>
+                <a:latin typeface="나눔고딕" pitchFamily="50" charset="-127"/>
+                <a:ea typeface="나눔고딕" pitchFamily="50" charset="-127"/>
+                <a:cs typeface="Arial" panose="020B0604020202020204" pitchFamily="34" charset="0"/>
+              </a:rPr>
+              <a:t>함</a:t>
             </a:r>
           </a:p>
         </p:txBody>
@@ -7162,7 +7260,7 @@
         </p:nvSpPr>
         <p:spPr>
           <a:xfrm>
-            <a:off x="15691431" y="35303786"/>
+            <a:off x="15691431" y="34836223"/>
             <a:ext cx="13943667" cy="1023024"/>
           </a:xfrm>
           <a:prstGeom prst="rect">
@@ -7221,7 +7319,7 @@
         </p:nvSpPr>
         <p:spPr>
           <a:xfrm>
-            <a:off x="15570184" y="36446810"/>
+            <a:off x="15570184" y="35979247"/>
             <a:ext cx="14113138" cy="1221350"/>
           </a:xfrm>
           <a:prstGeom prst="rect">
@@ -7272,7 +7370,7 @@
         </p:nvSpPr>
         <p:spPr>
           <a:xfrm>
-            <a:off x="15691431" y="37818160"/>
+            <a:off x="15691431" y="37350597"/>
             <a:ext cx="13943667" cy="1023024"/>
           </a:xfrm>
           <a:prstGeom prst="rect">
@@ -7331,7 +7429,7 @@
         </p:nvSpPr>
         <p:spPr>
           <a:xfrm>
-            <a:off x="15570184" y="38961184"/>
+            <a:off x="15570184" y="38493621"/>
             <a:ext cx="14113138" cy="2808138"/>
           </a:xfrm>
           <a:prstGeom prst="rect">

--- a/lab_meeting/학회포스터_초안.pptx
+++ b/lab_meeting/학회포스터_초안.pptx
@@ -1986,7 +1986,7 @@
                 <a:ea typeface="나눔고딕" pitchFamily="50" charset="-127"/>
                 <a:cs typeface="Arial" panose="020B0604020202020204" pitchFamily="34" charset="0"/>
               </a:rPr>
-              <a:t>승인 기록의 비고는 자유 문장, 제한수위는 규정 별표, 시간 자료는 50만 행 이상이라 </a:t>
+              <a:t>대규모 언어모델(LLM)은 자연어 질의응답에 유용하나, 단독 활용 시 답변의 </a:t>
             </a:r>
             <a:r>
               <a:rPr lang="ko-KR" altLang="en-US" sz="2600" b="1" dirty="0">
@@ -2000,7 +2000,7 @@
                 <a:ea typeface="나눔고딕" pitchFamily="50" charset="-127"/>
                 <a:cs typeface="Arial" panose="020B0604020202020204" pitchFamily="34" charset="0"/>
               </a:rPr>
-              <a:t>LLM에 그대로 넣을 수 없고</a:t>
+              <a:t>근거를 확인하기 어려워</a:t>
             </a:r>
             <a:r>
               <a:rPr lang="ko-KR" altLang="en-US" sz="2600" b="0" dirty="0">
@@ -2014,35 +2014,7 @@
                 <a:ea typeface="나눔고딕" pitchFamily="50" charset="-127"/>
                 <a:cs typeface="Arial" panose="020B0604020202020204" pitchFamily="34" charset="0"/>
               </a:rPr>
-              <a:t>, 답변마다 </a:t>
-            </a:r>
-            <a:r>
-              <a:rPr lang="ko-KR" altLang="en-US" sz="2600" b="1" dirty="0">
-                <a:solidFill>
-                  <a:schemeClr val="tx1">
-                    <a:lumMod val="85000"/>
-                    <a:lumOff val="15000"/>
-                  </a:schemeClr>
-                </a:solidFill>
-                <a:latin typeface="나눔고딕" pitchFamily="50" charset="-127"/>
-                <a:ea typeface="나눔고딕" pitchFamily="50" charset="-127"/>
-                <a:cs typeface="Arial" panose="020B0604020202020204" pitchFamily="34" charset="0"/>
-              </a:rPr>
-              <a:t>근거의 출처</a:t>
-            </a:r>
-            <a:r>
-              <a:rPr lang="ko-KR" altLang="en-US" sz="2600" b="0" dirty="0">
-                <a:solidFill>
-                  <a:schemeClr val="tx1">
-                    <a:lumMod val="85000"/>
-                    <a:lumOff val="15000"/>
-                  </a:schemeClr>
-                </a:solidFill>
-                <a:latin typeface="나눔고딕" pitchFamily="50" charset="-127"/>
-                <a:ea typeface="나눔고딕" pitchFamily="50" charset="-127"/>
-                <a:cs typeface="Arial" panose="020B0604020202020204" pitchFamily="34" charset="0"/>
-              </a:rPr>
-              <a:t>를 확인할 수 있어야 함</a:t>
+              <a:t> 구조화된 지식과의 연계가 필요함</a:t>
             </a:r>
           </a:p>
           <a:p>
@@ -2083,7 +2055,7 @@
                 <a:ea typeface="나눔고딕" pitchFamily="50" charset="-127"/>
                 <a:cs typeface="Arial" panose="020B0604020202020204" pitchFamily="34" charset="0"/>
               </a:rPr>
-              <a:t>Ontology 설계 → 지식그래프(KG) 구축 → 하이브리드 검색과 LLM 답변</a:t>
+              <a:t>온톨로지 기반 지식그래프(KG)</a:t>
             </a:r>
             <a:r>
               <a:rPr lang="ko-KR" altLang="en-US" sz="2600" b="0" dirty="0">
@@ -2097,7 +2069,7 @@
                 <a:ea typeface="나눔고딕" pitchFamily="50" charset="-127"/>
                 <a:cs typeface="Arial" panose="020B0604020202020204" pitchFamily="34" charset="0"/>
               </a:rPr>
-              <a:t>의 3단계로 이루어진 프레임워크를 구축하여, 운영자가 </a:t>
+              <a:t> 와 </a:t>
             </a:r>
             <a:r>
               <a:rPr lang="ko-KR" altLang="en-US" sz="2600" b="1" dirty="0">
@@ -2111,7 +2083,7 @@
                 <a:ea typeface="나눔고딕" pitchFamily="50" charset="-127"/>
                 <a:cs typeface="Arial" panose="020B0604020202020204" pitchFamily="34" charset="0"/>
               </a:rPr>
-              <a:t>근거와 함께 의사결정</a:t>
+              <a:t>하이브리드 검색</a:t>
             </a:r>
             <a:r>
               <a:rPr lang="ko-KR" altLang="en-US" sz="2600" b="0" dirty="0">
@@ -2125,7 +2097,63 @@
                 <a:ea typeface="나눔고딕" pitchFamily="50" charset="-127"/>
                 <a:cs typeface="Arial" panose="020B0604020202020204" pitchFamily="34" charset="0"/>
               </a:rPr>
-              <a:t>할 수 있도록 지원함</a:t>
+              <a:t>, </a:t>
+            </a:r>
+            <a:r>
+              <a:rPr lang="ko-KR" altLang="en-US" sz="2600" b="1" dirty="0">
+                <a:solidFill>
+                  <a:schemeClr val="tx1">
+                    <a:lumMod val="85000"/>
+                    <a:lumOff val="15000"/>
+                  </a:schemeClr>
+                </a:solidFill>
+                <a:latin typeface="나눔고딕" pitchFamily="50" charset="-127"/>
+                <a:ea typeface="나눔고딕" pitchFamily="50" charset="-127"/>
+                <a:cs typeface="Arial" panose="020B0604020202020204" pitchFamily="34" charset="0"/>
+              </a:rPr>
+              <a:t>LLM</a:t>
+            </a:r>
+            <a:r>
+              <a:rPr lang="ko-KR" altLang="en-US" sz="2600" b="0" dirty="0">
+                <a:solidFill>
+                  <a:schemeClr val="tx1">
+                    <a:lumMod val="85000"/>
+                    <a:lumOff val="15000"/>
+                  </a:schemeClr>
+                </a:solidFill>
+                <a:latin typeface="나눔고딕" pitchFamily="50" charset="-127"/>
+                <a:ea typeface="나눔고딕" pitchFamily="50" charset="-127"/>
+                <a:cs typeface="Arial" panose="020B0604020202020204" pitchFamily="34" charset="0"/>
+              </a:rPr>
+              <a:t>을 연계하여 운영자의 </a:t>
+            </a:r>
+            <a:r>
+              <a:rPr lang="ko-KR" altLang="en-US" sz="2600" b="1" dirty="0">
+                <a:solidFill>
+                  <a:schemeClr val="tx1">
+                    <a:lumMod val="85000"/>
+                    <a:lumOff val="15000"/>
+                  </a:schemeClr>
+                </a:solidFill>
+                <a:latin typeface="나눔고딕" pitchFamily="50" charset="-127"/>
+                <a:ea typeface="나눔고딕" pitchFamily="50" charset="-127"/>
+                <a:cs typeface="Arial" panose="020B0604020202020204" pitchFamily="34" charset="0"/>
+              </a:rPr>
+              <a:t>근거 기반 의사결정을 지원하는 프레임워크</a:t>
+            </a:r>
+            <a:r>
+              <a:rPr lang="ko-KR" altLang="en-US" sz="2600" b="0" dirty="0">
+                <a:solidFill>
+                  <a:schemeClr val="tx1">
+                    <a:lumMod val="85000"/>
+                    <a:lumOff val="15000"/>
+                  </a:schemeClr>
+                </a:solidFill>
+                <a:latin typeface="나눔고딕" pitchFamily="50" charset="-127"/>
+                <a:ea typeface="나눔고딕" pitchFamily="50" charset="-127"/>
+                <a:cs typeface="Arial" panose="020B0604020202020204" pitchFamily="34" charset="0"/>
+              </a:rPr>
+              <a:t>를 구축하고자 함</a:t>
             </a:r>
           </a:p>
         </p:txBody>

--- a/lab_meeting/학회포스터_초안.pptx
+++ b/lab_meeting/학회포스터_초안.pptx
@@ -1836,7 +1836,7 @@
         <p:spPr>
           <a:xfrm>
             <a:off x="597946" y="7493024"/>
-            <a:ext cx="14113138" cy="3100137"/>
+            <a:ext cx="14113138" cy="3567700"/>
           </a:xfrm>
           <a:prstGeom prst="rect">
             <a:avLst/>
@@ -1986,7 +1986,7 @@
                 <a:ea typeface="나눔고딕" pitchFamily="50" charset="-127"/>
                 <a:cs typeface="Arial" panose="020B0604020202020204" pitchFamily="34" charset="0"/>
               </a:rPr>
-              <a:t>대규모 언어모델(LLM)은 자연어 질의응답에 유용하나, 단독 활용 시 답변의 </a:t>
+              <a:t>대규모 언어모델(LLM) 단독 활용은 답변의 </a:t>
             </a:r>
             <a:r>
               <a:rPr lang="ko-KR" altLang="en-US" sz="2600" b="1" dirty="0">
@@ -2014,7 +2014,35 @@
                 <a:ea typeface="나눔고딕" pitchFamily="50" charset="-127"/>
                 <a:cs typeface="Arial" panose="020B0604020202020204" pitchFamily="34" charset="0"/>
               </a:rPr>
-              <a:t> 구조화된 지식과의 연계가 필요함</a:t>
+              <a:t>, 외부 자료를 검색해 답변에 활용하는 </a:t>
+            </a:r>
+            <a:r>
+              <a:rPr lang="ko-KR" altLang="en-US" sz="2600" b="1" dirty="0">
+                <a:solidFill>
+                  <a:schemeClr val="tx1">
+                    <a:lumMod val="85000"/>
+                    <a:lumOff val="15000"/>
+                  </a:schemeClr>
+                </a:solidFill>
+                <a:latin typeface="나눔고딕" pitchFamily="50" charset="-127"/>
+                <a:ea typeface="나눔고딕" pitchFamily="50" charset="-127"/>
+                <a:cs typeface="Arial" panose="020B0604020202020204" pitchFamily="34" charset="0"/>
+              </a:rPr>
+              <a:t>검색증강생성(Retrieval-Augmented Generation, RAG)</a:t>
+            </a:r>
+            <a:r>
+              <a:rPr lang="ko-KR" altLang="en-US" sz="2600" b="0" dirty="0">
+                <a:solidFill>
+                  <a:schemeClr val="tx1">
+                    <a:lumMod val="85000"/>
+                    <a:lumOff val="15000"/>
+                  </a:schemeClr>
+                </a:solidFill>
+                <a:latin typeface="나눔고딕" pitchFamily="50" charset="-127"/>
+                <a:ea typeface="나눔고딕" pitchFamily="50" charset="-127"/>
+                <a:cs typeface="Arial" panose="020B0604020202020204" pitchFamily="34" charset="0"/>
+              </a:rPr>
+              <a:t> 이 쓰이나, 자료 간 관계와 출처를 함께 다루려면 구조화된 지식이 필요함</a:t>
             </a:r>
           </a:p>
           <a:p>
@@ -2069,7 +2097,7 @@
                 <a:ea typeface="나눔고딕" pitchFamily="50" charset="-127"/>
                 <a:cs typeface="Arial" panose="020B0604020202020204" pitchFamily="34" charset="0"/>
               </a:rPr>
-              <a:t> 와 </a:t>
+              <a:t> 를 </a:t>
             </a:r>
             <a:r>
               <a:rPr lang="ko-KR" altLang="en-US" sz="2600" b="1" dirty="0">
@@ -2083,7 +2111,7 @@
                 <a:ea typeface="나눔고딕" pitchFamily="50" charset="-127"/>
                 <a:cs typeface="Arial" panose="020B0604020202020204" pitchFamily="34" charset="0"/>
               </a:rPr>
-              <a:t>하이브리드 검색</a:t>
+              <a:t>RAG</a:t>
             </a:r>
             <a:r>
               <a:rPr lang="ko-KR" altLang="en-US" sz="2600" b="0" dirty="0">
@@ -2097,7 +2125,7 @@
                 <a:ea typeface="나눔고딕" pitchFamily="50" charset="-127"/>
                 <a:cs typeface="Arial" panose="020B0604020202020204" pitchFamily="34" charset="0"/>
               </a:rPr>
-              <a:t>, </a:t>
+              <a:t> 기반 검색 및 LLM 답변 생성과 연계하여, 운영자의 </a:t>
             </a:r>
             <a:r>
               <a:rPr lang="ko-KR" altLang="en-US" sz="2600" b="1" dirty="0">
@@ -2111,7 +2139,7 @@
                 <a:ea typeface="나눔고딕" pitchFamily="50" charset="-127"/>
                 <a:cs typeface="Arial" panose="020B0604020202020204" pitchFamily="34" charset="0"/>
               </a:rPr>
-              <a:t>LLM</a:t>
+              <a:t>근거 기반 의사결정을 지원하는 프레임워크</a:t>
             </a:r>
             <a:r>
               <a:rPr lang="ko-KR" altLang="en-US" sz="2600" b="0" dirty="0">
@@ -2125,35 +2153,7 @@
                 <a:ea typeface="나눔고딕" pitchFamily="50" charset="-127"/>
                 <a:cs typeface="Arial" panose="020B0604020202020204" pitchFamily="34" charset="0"/>
               </a:rPr>
-              <a:t>을 연계하여 운영자의 </a:t>
-            </a:r>
-            <a:r>
-              <a:rPr lang="ko-KR" altLang="en-US" sz="2600" b="1" dirty="0">
-                <a:solidFill>
-                  <a:schemeClr val="tx1">
-                    <a:lumMod val="85000"/>
-                    <a:lumOff val="15000"/>
-                  </a:schemeClr>
-                </a:solidFill>
-                <a:latin typeface="나눔고딕" pitchFamily="50" charset="-127"/>
-                <a:ea typeface="나눔고딕" pitchFamily="50" charset="-127"/>
-                <a:cs typeface="Arial" panose="020B0604020202020204" pitchFamily="34" charset="0"/>
-              </a:rPr>
-              <a:t>근거 기반 의사결정을 지원하는 프레임워크</a:t>
-            </a:r>
-            <a:r>
-              <a:rPr lang="ko-KR" altLang="en-US" sz="2600" b="0" dirty="0">
-                <a:solidFill>
-                  <a:schemeClr val="tx1">
-                    <a:lumMod val="85000"/>
-                    <a:lumOff val="15000"/>
-                  </a:schemeClr>
-                </a:solidFill>
-                <a:latin typeface="나눔고딕" pitchFamily="50" charset="-127"/>
-                <a:ea typeface="나눔고딕" pitchFamily="50" charset="-127"/>
-                <a:cs typeface="Arial" panose="020B0604020202020204" pitchFamily="34" charset="0"/>
-              </a:rPr>
-              <a:t>를 구축하고자 함</a:t>
+              <a:t>를 구축함</a:t>
             </a:r>
           </a:p>
         </p:txBody>
@@ -2166,7 +2166,7 @@
         </p:nvSpPr>
         <p:spPr>
           <a:xfrm>
-            <a:off x="674157" y="10973161"/>
+            <a:off x="674157" y="11440724"/>
             <a:ext cx="13943667" cy="1023024"/>
           </a:xfrm>
           <a:prstGeom prst="rect">
@@ -2233,7 +2233,7 @@
         </p:blipFill>
         <p:spPr>
           <a:xfrm>
-            <a:off x="2154515" y="12116185"/>
+            <a:off x="2154515" y="12583748"/>
             <a:ext cx="11000000" cy="11000000"/>
           </a:xfrm>
           <a:prstGeom prst="rect">
@@ -2254,7 +2254,7 @@
         </p:nvSpPr>
         <p:spPr>
           <a:xfrm>
-            <a:off x="597946" y="23176185"/>
+            <a:off x="597946" y="23643748"/>
             <a:ext cx="14113138" cy="800000"/>
           </a:xfrm>
           <a:prstGeom prst="rect">
@@ -2305,7 +2305,7 @@
         </p:nvSpPr>
         <p:spPr>
           <a:xfrm>
-            <a:off x="597946" y="23976185"/>
+            <a:off x="597946" y="24443748"/>
             <a:ext cx="14113138" cy="4502826"/>
           </a:xfrm>
           <a:prstGeom prst="rect">
@@ -2538,7 +2538,7 @@
         </p:nvSpPr>
         <p:spPr>
           <a:xfrm>
-            <a:off x="830804" y="28539011"/>
+            <a:off x="830804" y="29006574"/>
             <a:ext cx="13649422" cy="645985"/>
           </a:xfrm>
           <a:prstGeom prst="rect">
@@ -2611,7 +2611,7 @@
           <p:nvPr/>
         </p:nvGraphicFramePr>
         <p:xfrm>
-          <a:off x="697946" y="29274996"/>
+          <a:off x="697946" y="29742559"/>
           <a:ext cx="13600000" cy="3994000"/>
         </p:xfrm>
         <a:graphic>
@@ -3890,7 +3890,7 @@
         </p:nvSpPr>
         <p:spPr>
           <a:xfrm>
-            <a:off x="674157" y="33648996"/>
+            <a:off x="674157" y="34116559"/>
             <a:ext cx="13943667" cy="1023024"/>
           </a:xfrm>
           <a:prstGeom prst="rect">
@@ -3949,7 +3949,7 @@
         </p:nvSpPr>
         <p:spPr>
           <a:xfrm>
-            <a:off x="830804" y="34792020"/>
+            <a:off x="830804" y="35259583"/>
             <a:ext cx="13649422" cy="645985"/>
           </a:xfrm>
           <a:prstGeom prst="rect">
@@ -4022,7 +4022,7 @@
           <p:nvPr/>
         </p:nvGraphicFramePr>
         <p:xfrm>
-          <a:off x="697946" y="35528005"/>
+          <a:off x="697946" y="35995568"/>
           <a:ext cx="13600000" cy="2346250"/>
         </p:xfrm>
         <a:graphic>
@@ -4669,7 +4669,7 @@
         </p:nvSpPr>
         <p:spPr>
           <a:xfrm>
-            <a:off x="597946" y="37994255"/>
+            <a:off x="597946" y="38461818"/>
             <a:ext cx="14113138" cy="2088810"/>
           </a:xfrm>
           <a:prstGeom prst="rect">

--- a/lab_meeting/학회포스터_초안.pptx
+++ b/lab_meeting/학회포스터_초안.pptx
@@ -1836,7 +1836,7 @@
         <p:spPr>
           <a:xfrm>
             <a:off x="597946" y="7493024"/>
-            <a:ext cx="14113138" cy="3567700"/>
+            <a:ext cx="14113138" cy="3315935"/>
           </a:xfrm>
           <a:prstGeom prst="rect">
             <a:avLst/>
@@ -1864,7 +1864,7 @@
               </a:buBlip>
             </a:pPr>
             <a:r>
-              <a:rPr lang="ko-KR" altLang="en-US" sz="2600" b="0" dirty="0">
+              <a:rPr lang="ko-KR" altLang="en-US" sz="2400" b="0" dirty="0">
                 <a:solidFill>
                   <a:schemeClr val="tx1">
                     <a:lumMod val="85000"/>
@@ -1878,7 +1878,7 @@
               <a:t>댐 운영 판단에는 </a:t>
             </a:r>
             <a:r>
-              <a:rPr lang="ko-KR" altLang="en-US" sz="2600" b="1" dirty="0">
+              <a:rPr lang="ko-KR" altLang="en-US" sz="2400" b="1" dirty="0">
                 <a:solidFill>
                   <a:schemeClr val="tx1">
                     <a:lumMod val="85000"/>
@@ -1892,7 +1892,7 @@
               <a:t>방류 승인 기록</a:t>
             </a:r>
             <a:r>
-              <a:rPr lang="ko-KR" altLang="en-US" sz="2600" b="0" dirty="0">
+              <a:rPr lang="ko-KR" altLang="en-US" sz="2400" b="0" dirty="0">
                 <a:solidFill>
                   <a:schemeClr val="tx1">
                     <a:lumMod val="85000"/>
@@ -1906,7 +1906,7 @@
               <a:t>, </a:t>
             </a:r>
             <a:r>
-              <a:rPr lang="ko-KR" altLang="en-US" sz="2600" b="1" dirty="0">
+              <a:rPr lang="ko-KR" altLang="en-US" sz="2400" b="1" dirty="0">
                 <a:solidFill>
                   <a:schemeClr val="tx1">
                     <a:lumMod val="85000"/>
@@ -1920,7 +1920,7 @@
               <a:t>수문기상 시간 자료</a:t>
             </a:r>
             <a:r>
-              <a:rPr lang="ko-KR" altLang="en-US" sz="2600" b="0" dirty="0">
+              <a:rPr lang="ko-KR" altLang="en-US" sz="2400" b="0" dirty="0">
                 <a:solidFill>
                   <a:schemeClr val="tx1">
                     <a:lumMod val="85000"/>
@@ -1934,7 +1934,7 @@
               <a:t>, </a:t>
             </a:r>
             <a:r>
-              <a:rPr lang="ko-KR" altLang="en-US" sz="2600" b="1" dirty="0">
+              <a:rPr lang="ko-KR" altLang="en-US" sz="2400" b="1" dirty="0">
                 <a:solidFill>
                   <a:schemeClr val="tx1">
                     <a:lumMod val="85000"/>
@@ -1948,7 +1948,7 @@
               <a:t>규정의 홍수기 제한수위</a:t>
             </a:r>
             <a:r>
-              <a:rPr lang="ko-KR" altLang="en-US" sz="2600" b="0" dirty="0">
+              <a:rPr lang="ko-KR" altLang="en-US" sz="2400" b="0" dirty="0">
                 <a:solidFill>
                   <a:schemeClr val="tx1">
                     <a:lumMod val="85000"/>
@@ -1975,7 +1975,7 @@
               </a:buBlip>
             </a:pPr>
             <a:r>
-              <a:rPr lang="ko-KR" altLang="en-US" sz="2600" b="0" dirty="0">
+              <a:rPr lang="ko-KR" altLang="en-US" sz="2400" b="0" dirty="0">
                 <a:solidFill>
                   <a:schemeClr val="tx1">
                     <a:lumMod val="85000"/>
@@ -1989,7 +1989,7 @@
               <a:t>대규모 언어모델(LLM) 단독 활용은 답변의 </a:t>
             </a:r>
             <a:r>
-              <a:rPr lang="ko-KR" altLang="en-US" sz="2600" b="1" dirty="0">
+              <a:rPr lang="ko-KR" altLang="en-US" sz="2400" b="1" dirty="0">
                 <a:solidFill>
                   <a:schemeClr val="tx1">
                     <a:lumMod val="85000"/>
@@ -2003,7 +2003,7 @@
               <a:t>근거를 확인하기 어려워</a:t>
             </a:r>
             <a:r>
-              <a:rPr lang="ko-KR" altLang="en-US" sz="2600" b="0" dirty="0">
+              <a:rPr lang="ko-KR" altLang="en-US" sz="2400" b="0" dirty="0">
                 <a:solidFill>
                   <a:schemeClr val="tx1">
                     <a:lumMod val="85000"/>
@@ -2017,7 +2017,7 @@
               <a:t>, 외부 자료를 검색해 답변에 활용하는 </a:t>
             </a:r>
             <a:r>
-              <a:rPr lang="ko-KR" altLang="en-US" sz="2600" b="1" dirty="0">
+              <a:rPr lang="ko-KR" altLang="en-US" sz="2400" b="1" dirty="0">
                 <a:solidFill>
                   <a:schemeClr val="tx1">
                     <a:lumMod val="85000"/>
@@ -2031,7 +2031,7 @@
               <a:t>검색증강생성(Retrieval-Augmented Generation, RAG)</a:t>
             </a:r>
             <a:r>
-              <a:rPr lang="ko-KR" altLang="en-US" sz="2600" b="0" dirty="0">
+              <a:rPr lang="ko-KR" altLang="en-US" sz="2400" b="0" dirty="0">
                 <a:solidFill>
                   <a:schemeClr val="tx1">
                     <a:lumMod val="85000"/>
@@ -2058,7 +2058,7 @@
               </a:buBlip>
             </a:pPr>
             <a:r>
-              <a:rPr lang="ko-KR" altLang="en-US" sz="2600" b="0" dirty="0">
+              <a:rPr lang="ko-KR" altLang="en-US" sz="2400" b="0" dirty="0">
                 <a:solidFill>
                   <a:schemeClr val="tx1">
                     <a:lumMod val="85000"/>
@@ -2072,7 +2072,7 @@
               <a:t>본 연구는 </a:t>
             </a:r>
             <a:r>
-              <a:rPr lang="ko-KR" altLang="en-US" sz="2600" b="1" dirty="0">
+              <a:rPr lang="ko-KR" altLang="en-US" sz="2400" b="1" dirty="0">
                 <a:solidFill>
                   <a:schemeClr val="tx1">
                     <a:lumMod val="85000"/>
@@ -2086,7 +2086,7 @@
               <a:t>온톨로지 기반 지식그래프(KG)</a:t>
             </a:r>
             <a:r>
-              <a:rPr lang="ko-KR" altLang="en-US" sz="2600" b="0" dirty="0">
+              <a:rPr lang="ko-KR" altLang="en-US" sz="2400" b="0" dirty="0">
                 <a:solidFill>
                   <a:schemeClr val="tx1">
                     <a:lumMod val="85000"/>
@@ -2100,7 +2100,7 @@
               <a:t> 를 </a:t>
             </a:r>
             <a:r>
-              <a:rPr lang="ko-KR" altLang="en-US" sz="2600" b="1" dirty="0">
+              <a:rPr lang="ko-KR" altLang="en-US" sz="2400" b="1" dirty="0">
                 <a:solidFill>
                   <a:schemeClr val="tx1">
                     <a:lumMod val="85000"/>
@@ -2114,7 +2114,7 @@
               <a:t>RAG</a:t>
             </a:r>
             <a:r>
-              <a:rPr lang="ko-KR" altLang="en-US" sz="2600" b="0" dirty="0">
+              <a:rPr lang="ko-KR" altLang="en-US" sz="2400" b="0" dirty="0">
                 <a:solidFill>
                   <a:schemeClr val="tx1">
                     <a:lumMod val="85000"/>
@@ -2128,7 +2128,7 @@
               <a:t> 기반 검색 및 LLM 답변 생성과 연계하여, 운영자의 </a:t>
             </a:r>
             <a:r>
-              <a:rPr lang="ko-KR" altLang="en-US" sz="2600" b="1" dirty="0">
+              <a:rPr lang="ko-KR" altLang="en-US" sz="2400" b="1" dirty="0">
                 <a:solidFill>
                   <a:schemeClr val="tx1">
                     <a:lumMod val="85000"/>
@@ -2142,7 +2142,7 @@
               <a:t>근거 기반 의사결정을 지원하는 프레임워크</a:t>
             </a:r>
             <a:r>
-              <a:rPr lang="ko-KR" altLang="en-US" sz="2600" b="0" dirty="0">
+              <a:rPr lang="ko-KR" altLang="en-US" sz="2400" b="0" dirty="0">
                 <a:solidFill>
                   <a:schemeClr val="tx1">
                     <a:lumMod val="85000"/>
@@ -2166,7 +2166,7 @@
         </p:nvSpPr>
         <p:spPr>
           <a:xfrm>
-            <a:off x="674157" y="11440724"/>
+            <a:off x="674157" y="11188959"/>
             <a:ext cx="13943667" cy="1023024"/>
           </a:xfrm>
           <a:prstGeom prst="rect">
@@ -2217,328 +2217,15 @@
           </a:p>
         </p:txBody>
       </p:sp>
-      <p:pic>
-        <p:nvPicPr>
-          <p:cNvPr id="1009" name="그림 1. 연구의 구성: Ontology 설계 → KG 구축 → 질문 처리(하이브리드 검색 + LLM)" descr="그림 1. 연구의 구성: Ontology 설계 → KG 구축 → 질문 처리(하이브리드 검색 + LLM)"/>
-          <p:cNvPicPr>
-            <a:picLocks noChangeAspect="1"/>
-          </p:cNvPicPr>
-          <p:nvPr/>
-        </p:nvPicPr>
-        <p:blipFill>
-          <a:blip r:embed="rId11"/>
-          <a:stretch>
-            <a:fillRect/>
-          </a:stretch>
-        </p:blipFill>
-        <p:spPr>
-          <a:xfrm>
-            <a:off x="2154515" y="12583748"/>
-            <a:ext cx="11000000" cy="11000000"/>
-          </a:xfrm>
-          <a:prstGeom prst="rect">
-            <a:avLst/>
-          </a:prstGeom>
-          <a:ln w="12700">
-            <a:solidFill>
-              <a:srgbClr val="BFC5CC"/>
-            </a:solidFill>
-          </a:ln>
-        </p:spPr>
-      </p:pic>
       <p:sp>
         <p:nvSpPr>
-          <p:cNvPr id="1010" name="본문"/>
-          <p:cNvSpPr txBox="1"/>
-          <p:nvPr/>
-        </p:nvSpPr>
-        <p:spPr>
-          <a:xfrm>
-            <a:off x="597946" y="23643748"/>
-            <a:ext cx="14113138" cy="800000"/>
-          </a:xfrm>
-          <a:prstGeom prst="rect">
-            <a:avLst/>
-          </a:prstGeom>
-          <a:noFill/>
-          <a:ln>
-            <a:noFill/>
-          </a:ln>
-        </p:spPr>
-        <p:txBody>
-          <a:bodyPr wrap="square" lIns="66158" tIns="33079" rIns="66158" bIns="33079" anchor="t">
-            <a:noAutofit/>
-          </a:bodyPr>
-          <a:lstStyle/>
-          <a:p>
-            <a:pPr marL="0" indent="0" algn="ctr">
-              <a:lnSpc>
-                <a:spcPct val="118000"/>
-              </a:lnSpc>
-              <a:spcAft>
-                <a:spcPts val="600"/>
-              </a:spcAft>
-              <a:buNone/>
-            </a:pPr>
-            <a:r>
-              <a:rPr lang="ko-KR" altLang="en-US" sz="2400" b="0" dirty="0">
-                <a:solidFill>
-                  <a:schemeClr val="tx1">
-                    <a:lumMod val="85000"/>
-                    <a:lumOff val="15000"/>
-                  </a:schemeClr>
-                </a:solidFill>
-                <a:latin typeface="나눔고딕" pitchFamily="50" charset="-127"/>
-                <a:ea typeface="나눔고딕" pitchFamily="50" charset="-127"/>
-                <a:cs typeface="Arial" panose="020B0604020202020204" pitchFamily="34" charset="0"/>
-              </a:rPr>
-              <a:t>그림 1. 연구의 구성: Ontology 설계 → KG 구축 → 질문 처리(하이브리드 검색 + LLM)</a:t>
-            </a:r>
-          </a:p>
-        </p:txBody>
-      </p:sp>
-      <p:sp>
-        <p:nvSpPr>
-          <p:cNvPr id="1011" name="본문"/>
-          <p:cNvSpPr txBox="1"/>
-          <p:nvPr/>
-        </p:nvSpPr>
-        <p:spPr>
-          <a:xfrm>
-            <a:off x="597946" y="24443748"/>
-            <a:ext cx="14113138" cy="4502826"/>
-          </a:xfrm>
-          <a:prstGeom prst="rect">
-            <a:avLst/>
-          </a:prstGeom>
-          <a:noFill/>
-          <a:ln>
-            <a:noFill/>
-          </a:ln>
-        </p:spPr>
-        <p:txBody>
-          <a:bodyPr wrap="square" lIns="66158" tIns="33079" rIns="66158" bIns="33079" anchor="t">
-            <a:noAutofit/>
-          </a:bodyPr>
-          <a:lstStyle/>
-          <a:p>
-            <a:pPr marL="334726" indent="-334726">
-              <a:lnSpc>
-                <a:spcPct val="118000"/>
-              </a:lnSpc>
-              <a:spcAft>
-                <a:spcPts val="600"/>
-              </a:spcAft>
-              <a:buBlip>
-                <a:blip r:embed="rId4"/>
-              </a:buBlip>
-            </a:pPr>
-            <a:r>
-              <a:rPr lang="ko-KR" altLang="en-US" sz="2600" b="1" dirty="0">
-                <a:solidFill>
-                  <a:schemeClr val="tx1">
-                    <a:lumMod val="85000"/>
-                    <a:lumOff val="15000"/>
-                  </a:schemeClr>
-                </a:solidFill>
-                <a:latin typeface="나눔고딕" pitchFamily="50" charset="-127"/>
-                <a:ea typeface="나눔고딕" pitchFamily="50" charset="-127"/>
-                <a:cs typeface="Arial" panose="020B0604020202020204" pitchFamily="34" charset="0"/>
-              </a:rPr>
-              <a:t>STEP 1 Ontology 설계</a:t>
-            </a:r>
-            <a:r>
-              <a:rPr lang="ko-KR" altLang="en-US" sz="2600" b="0" dirty="0">
-                <a:solidFill>
-                  <a:schemeClr val="tx1">
-                    <a:lumMod val="85000"/>
-                    <a:lumOff val="15000"/>
-                  </a:schemeClr>
-                </a:solidFill>
-                <a:latin typeface="나눔고딕" pitchFamily="50" charset="-127"/>
-                <a:ea typeface="나눔고딕" pitchFamily="50" charset="-127"/>
-                <a:cs typeface="Arial" panose="020B0604020202020204" pitchFamily="34" charset="0"/>
-              </a:rPr>
-              <a:t>: 운영자에게 필요한 질문(Competency Question, CQ) 7개를 먼저 정하고, 이에 답하도록 </a:t>
-            </a:r>
-            <a:r>
-              <a:rPr lang="ko-KR" altLang="en-US" sz="2600" b="1" dirty="0">
-                <a:solidFill>
-                  <a:schemeClr val="tx1">
-                    <a:lumMod val="85000"/>
-                    <a:lumOff val="15000"/>
-                  </a:schemeClr>
-                </a:solidFill>
-                <a:latin typeface="나눔고딕" pitchFamily="50" charset="-127"/>
-                <a:ea typeface="나눔고딕" pitchFamily="50" charset="-127"/>
-                <a:cs typeface="Arial" panose="020B0604020202020204" pitchFamily="34" charset="0"/>
-              </a:rPr>
-              <a:t>개체 6종류</a:t>
-            </a:r>
-            <a:r>
-              <a:rPr lang="ko-KR" altLang="en-US" sz="2600" b="0" dirty="0">
-                <a:solidFill>
-                  <a:schemeClr val="tx1">
-                    <a:lumMod val="85000"/>
-                    <a:lumOff val="15000"/>
-                  </a:schemeClr>
-                </a:solidFill>
-                <a:latin typeface="나눔고딕" pitchFamily="50" charset="-127"/>
-                <a:ea typeface="나눔고딕" pitchFamily="50" charset="-127"/>
-                <a:cs typeface="Arial" panose="020B0604020202020204" pitchFamily="34" charset="0"/>
-              </a:rPr>
-              <a:t>(댐, 수문기상 상태, 방류 승인, 운영행위, 운영기준, 근거자료)와 </a:t>
-            </a:r>
-            <a:r>
-              <a:rPr lang="ko-KR" altLang="en-US" sz="2600" b="1" dirty="0">
-                <a:solidFill>
-                  <a:schemeClr val="tx1">
-                    <a:lumMod val="85000"/>
-                    <a:lumOff val="15000"/>
-                  </a:schemeClr>
-                </a:solidFill>
-                <a:latin typeface="나눔고딕" pitchFamily="50" charset="-127"/>
-                <a:ea typeface="나눔고딕" pitchFamily="50" charset="-127"/>
-                <a:cs typeface="Arial" panose="020B0604020202020204" pitchFamily="34" charset="0"/>
-              </a:rPr>
-              <a:t>관계 9종류</a:t>
-            </a:r>
-            <a:r>
-              <a:rPr lang="ko-KR" altLang="en-US" sz="2600" b="0" dirty="0">
-                <a:solidFill>
-                  <a:schemeClr val="tx1">
-                    <a:lumMod val="85000"/>
-                    <a:lumOff val="15000"/>
-                  </a:schemeClr>
-                </a:solidFill>
-                <a:latin typeface="나눔고딕" pitchFamily="50" charset="-127"/>
-                <a:ea typeface="나눔고딕" pitchFamily="50" charset="-127"/>
-                <a:cs typeface="Arial" panose="020B0604020202020204" pitchFamily="34" charset="0"/>
-              </a:rPr>
-              <a:t>를 설계함</a:t>
-            </a:r>
-          </a:p>
-          <a:p>
-            <a:pPr marL="334726" indent="-334726">
-              <a:lnSpc>
-                <a:spcPct val="118000"/>
-              </a:lnSpc>
-              <a:spcAft>
-                <a:spcPts val="600"/>
-              </a:spcAft>
-              <a:buBlip>
-                <a:blip r:embed="rId4"/>
-              </a:buBlip>
-            </a:pPr>
-            <a:r>
-              <a:rPr lang="ko-KR" altLang="en-US" sz="2600" b="1" dirty="0">
-                <a:solidFill>
-                  <a:schemeClr val="tx1">
-                    <a:lumMod val="85000"/>
-                    <a:lumOff val="15000"/>
-                  </a:schemeClr>
-                </a:solidFill>
-                <a:latin typeface="나눔고딕" pitchFamily="50" charset="-127"/>
-                <a:ea typeface="나눔고딕" pitchFamily="50" charset="-127"/>
-                <a:cs typeface="Arial" panose="020B0604020202020204" pitchFamily="34" charset="0"/>
-              </a:rPr>
-              <a:t>STEP 2 KG 구축</a:t>
-            </a:r>
-            <a:r>
-              <a:rPr lang="ko-KR" altLang="en-US" sz="2600" b="0" dirty="0">
-                <a:solidFill>
-                  <a:schemeClr val="tx1">
-                    <a:lumMod val="85000"/>
-                    <a:lumOff val="15000"/>
-                  </a:schemeClr>
-                </a:solidFill>
-                <a:latin typeface="나눔고딕" pitchFamily="50" charset="-127"/>
-                <a:ea typeface="나눔고딕" pitchFamily="50" charset="-127"/>
-                <a:cs typeface="Arial" panose="020B0604020202020204" pitchFamily="34" charset="0"/>
-              </a:rPr>
-              <a:t>: 자료를 표 경로(열 이름으로 매핑)와 글 경로(규칙으로 추출)로 나누어 7단계로 구축함. 수치 전체와 규정 원문은 KG 밖 저장소에 두고, KG에는 관계와 근거의 위치(번호)만 저장함</a:t>
-            </a:r>
-          </a:p>
-          <a:p>
-            <a:pPr marL="334726" indent="-334726">
-              <a:lnSpc>
-                <a:spcPct val="118000"/>
-              </a:lnSpc>
-              <a:spcAft>
-                <a:spcPts val="600"/>
-              </a:spcAft>
-              <a:buBlip>
-                <a:blip r:embed="rId4"/>
-              </a:buBlip>
-            </a:pPr>
-            <a:r>
-              <a:rPr lang="ko-KR" altLang="en-US" sz="2600" b="1" dirty="0">
-                <a:solidFill>
-                  <a:schemeClr val="tx1">
-                    <a:lumMod val="85000"/>
-                    <a:lumOff val="15000"/>
-                  </a:schemeClr>
-                </a:solidFill>
-                <a:latin typeface="나눔고딕" pitchFamily="50" charset="-127"/>
-                <a:ea typeface="나눔고딕" pitchFamily="50" charset="-127"/>
-                <a:cs typeface="Arial" panose="020B0604020202020204" pitchFamily="34" charset="0"/>
-              </a:rPr>
-              <a:t>STEP 3 질문 처리</a:t>
-            </a:r>
-            <a:r>
-              <a:rPr lang="ko-KR" altLang="en-US" sz="2600" b="0" dirty="0">
-                <a:solidFill>
-                  <a:schemeClr val="tx1">
-                    <a:lumMod val="85000"/>
-                    <a:lumOff val="15000"/>
-                  </a:schemeClr>
-                </a:solidFill>
-                <a:latin typeface="나눔고딕" pitchFamily="50" charset="-127"/>
-                <a:ea typeface="나눔고딕" pitchFamily="50" charset="-127"/>
-                <a:cs typeface="Arial" panose="020B0604020202020204" pitchFamily="34" charset="0"/>
-              </a:rPr>
-              <a:t>: LLM이 질문을 유형과 값(댐, 시점)으로 변환 → Cypher로 KG 탐색 → 번호로 측정자료·문서 저장소 조회 → 계산은 코드가 수행 → 모은 </a:t>
-            </a:r>
-            <a:r>
-              <a:rPr lang="ko-KR" altLang="en-US" sz="2600" b="1" dirty="0">
-                <a:solidFill>
-                  <a:schemeClr val="tx1">
-                    <a:lumMod val="85000"/>
-                    <a:lumOff val="15000"/>
-                  </a:schemeClr>
-                </a:solidFill>
-                <a:latin typeface="나눔고딕" pitchFamily="50" charset="-127"/>
-                <a:ea typeface="나눔고딕" pitchFamily="50" charset="-127"/>
-                <a:cs typeface="Arial" panose="020B0604020202020204" pitchFamily="34" charset="0"/>
-              </a:rPr>
-              <a:t>근거 안에서만</a:t>
-            </a:r>
-            <a:r>
-              <a:rPr lang="ko-KR" altLang="en-US" sz="2600" b="0" dirty="0">
-                <a:solidFill>
-                  <a:schemeClr val="tx1">
-                    <a:lumMod val="85000"/>
-                    <a:lumOff val="15000"/>
-                  </a:schemeClr>
-                </a:solidFill>
-                <a:latin typeface="나눔고딕" pitchFamily="50" charset="-127"/>
-                <a:ea typeface="나눔고딕" pitchFamily="50" charset="-127"/>
-                <a:cs typeface="Arial" panose="020B0604020202020204" pitchFamily="34" charset="0"/>
-              </a:rPr>
-              <a:t> LLM이 답변하고 출처 번호를 붙임</a:t>
-            </a:r>
-          </a:p>
-        </p:txBody>
-      </p:sp>
-      <p:sp>
-        <p:nvSpPr>
-          <p:cNvPr id="1012" name="직사각형 415"/>
+          <p:cNvPr id="1009" name="직사각형 415"/>
           <p:cNvSpPr/>
           <p:nvPr/>
         </p:nvSpPr>
         <p:spPr>
           <a:xfrm>
-            <a:off x="830804" y="29006574"/>
+            <a:off x="830804" y="12331983"/>
             <a:ext cx="13649422" cy="645985"/>
           </a:xfrm>
           <a:prstGeom prst="rect">
@@ -2597,31 +2284,31 @@
                 <a:ea typeface="나눔고딕" pitchFamily="50" charset="-127"/>
                 <a:cs typeface="Arial" panose="020B0604020202020204" pitchFamily="34" charset="0"/>
               </a:rPr>
-              <a:t>Table 1. 질문 유형(CQ1~CQ6 + SIMILAR)</a:t>
+              <a:t>Table 1. 핵심 용어</a:t>
             </a:r>
           </a:p>
         </p:txBody>
       </p:sp>
       <p:graphicFrame>
         <p:nvGraphicFramePr>
-          <p:cNvPr id="1013" name="표"/>
+          <p:cNvPr id="1010" name="표"/>
           <p:cNvGraphicFramePr>
             <a:graphicFrameLocks noGrp="1"/>
           </p:cNvGraphicFramePr>
           <p:nvPr/>
         </p:nvGraphicFramePr>
         <p:xfrm>
-          <a:off x="697946" y="29742559"/>
-          <a:ext cx="13600000" cy="3994000"/>
+          <a:off x="697946" y="13067968"/>
+          <a:ext cx="13500000" cy="4741750"/>
         </p:xfrm>
         <a:graphic>
           <a:graphicData uri="http://schemas.openxmlformats.org/drawingml/2006/table">
             <a:tbl>
               <a:tblPr firstRow="1" bandRow="1"/>
               <a:tblGrid>
-                <a:gridCol w="1900000"/>
-                <a:gridCol w="4200000"/>
-                <a:gridCol w="7500000"/>
+                <a:gridCol w="2800000"/>
+                <a:gridCol w="6900000"/>
+                <a:gridCol w="3800000"/>
               </a:tblGrid>
               <a:tr h="499250">
                 <a:tc>
@@ -2643,7 +2330,7 @@
                           <a:ea typeface="나눔고딕" pitchFamily="50" charset="-127"/>
                           <a:cs typeface="Arial" panose="020B0604020202020204" pitchFamily="34" charset="0"/>
                         </a:rPr>
-                        <a:t>질문 유형</a:t>
+                        <a:t>용어</a:t>
                       </a:r>
                     </a:p>
                   </a:txBody>
@@ -2692,7 +2379,7 @@
                           <a:ea typeface="나눔고딕" pitchFamily="50" charset="-127"/>
                           <a:cs typeface="Arial" panose="020B0604020202020204" pitchFamily="34" charset="0"/>
                         </a:rPr>
-                        <a:t>뜻</a:t>
+                        <a:t>설명</a:t>
                       </a:r>
                     </a:p>
                   </a:txBody>
@@ -2741,7 +2428,7 @@
                           <a:ea typeface="나눔고딕" pitchFamily="50" charset="-127"/>
                           <a:cs typeface="Arial" panose="020B0604020202020204" pitchFamily="34" charset="0"/>
                         </a:rPr>
-                        <a:t>예시 질문</a:t>
+                        <a:t>본 연구에서</a:t>
                       </a:r>
                     </a:p>
                   </a:txBody>
@@ -2772,7 +2459,7 @@
                   </a:tcPr>
                 </a:tc>
               </a:tr>
-              <a:tr h="499250">
+              <a:tr h="848500">
                 <a:tc>
                   <a:txBody>
                     <a:bodyPr/>
@@ -2795,7 +2482,7 @@
                           <a:ea typeface="나눔고딕" pitchFamily="50" charset="-127"/>
                           <a:cs typeface="Arial" panose="020B0604020202020204" pitchFamily="34" charset="0"/>
                         </a:rPr>
-                        <a:t>CQ1</a:t>
+                        <a:t>온톨로지 (Ontology)</a:t>
                       </a:r>
                     </a:p>
                   </a:txBody>
@@ -2847,7 +2534,7 @@
                           <a:ea typeface="나눔고딕" pitchFamily="50" charset="-127"/>
                           <a:cs typeface="Arial" panose="020B0604020202020204" pitchFamily="34" charset="0"/>
                         </a:rPr>
-                        <a:t>현재 수문기상 상태</a:t>
+                        <a:t>대상(Class)과 대상 사이의 관계를 미리 정해 둔 개념 설계도</a:t>
                       </a:r>
                     </a:p>
                   </a:txBody>
@@ -2899,7 +2586,7 @@
                           <a:ea typeface="나눔고딕" pitchFamily="50" charset="-127"/>
                           <a:cs typeface="Arial" panose="020B0604020202020204" pitchFamily="34" charset="0"/>
                         </a:rPr>
-                        <a:t>소양강댐 지금 수위는?</a:t>
+                        <a:t>개체 6종류, 관계 9종류</a:t>
                       </a:r>
                     </a:p>
                   </a:txBody>
@@ -2930,7 +2617,7 @@
                   </a:tcPr>
                 </a:tc>
               </a:tr>
-              <a:tr h="499250">
+              <a:tr h="848500">
                 <a:tc>
                   <a:txBody>
                     <a:bodyPr/>
@@ -2953,7 +2640,7 @@
                           <a:ea typeface="나눔고딕" pitchFamily="50" charset="-127"/>
                           <a:cs typeface="Arial" panose="020B0604020202020204" pitchFamily="34" charset="0"/>
                         </a:rPr>
-                        <a:t>CQ2</a:t>
+                        <a:t>CQ (Competency Question)</a:t>
                       </a:r>
                     </a:p>
                   </a:txBody>
@@ -3005,7 +2692,7 @@
                           <a:ea typeface="나눔고딕" pitchFamily="50" charset="-127"/>
                           <a:cs typeface="Arial" panose="020B0604020202020204" pitchFamily="34" charset="0"/>
                         </a:rPr>
-                        <a:t>과거 수문기상 상태</a:t>
+                        <a:t>온톨로지가 답할 수 있어야 하는 질문. 질문에서 필요한 Class와 관계를 도출함</a:t>
                       </a:r>
                     </a:p>
                   </a:txBody>
@@ -3057,7 +2744,7 @@
                           <a:ea typeface="나눔고딕" pitchFamily="50" charset="-127"/>
                           <a:cs typeface="Arial" panose="020B0604020202020204" pitchFamily="34" charset="0"/>
                         </a:rPr>
-                        <a:t>충주댐 2012-08-24 16:00의 수위는?</a:t>
+                        <a:t>운영자 질문 7개</a:t>
                       </a:r>
                     </a:p>
                   </a:txBody>
@@ -3088,7 +2775,7 @@
                   </a:tcPr>
                 </a:tc>
               </a:tr>
-              <a:tr h="499250">
+              <a:tr h="848500">
                 <a:tc>
                   <a:txBody>
                     <a:bodyPr/>
@@ -3111,7 +2798,7 @@
                           <a:ea typeface="나눔고딕" pitchFamily="50" charset="-127"/>
                           <a:cs typeface="Arial" panose="020B0604020202020204" pitchFamily="34" charset="0"/>
                         </a:rPr>
-                        <a:t>CQ3</a:t>
+                        <a:t>지식그래프 (KG)</a:t>
                       </a:r>
                     </a:p>
                   </a:txBody>
@@ -3163,7 +2850,7 @@
                           <a:ea typeface="나눔고딕" pitchFamily="50" charset="-127"/>
                           <a:cs typeface="Arial" panose="020B0604020202020204" pitchFamily="34" charset="0"/>
                         </a:rPr>
-                        <a:t>과거 운영행위</a:t>
+                        <a:t>개체(점)와 관계(선)로 지식을 나타낸 그래프. 점과 선에 속성을 붙일 수 있음</a:t>
                       </a:r>
                     </a:p>
                   </a:txBody>
@@ -3215,7 +2902,7 @@
                           <a:ea typeface="나눔고딕" pitchFamily="50" charset="-127"/>
                           <a:cs typeface="Arial" panose="020B0604020202020204" pitchFamily="34" charset="0"/>
                         </a:rPr>
-                        <a:t>충주댐 2012-08-24에 수행된 운영행위는?</a:t>
+                        <a:t>개체 273, 관계 457</a:t>
                       </a:r>
                     </a:p>
                   </a:txBody>
@@ -3246,7 +2933,7 @@
                   </a:tcPr>
                 </a:tc>
               </a:tr>
-              <a:tr h="499250">
+              <a:tr h="848500">
                 <a:tc>
                   <a:txBody>
                     <a:bodyPr/>
@@ -3269,7 +2956,7 @@
                           <a:ea typeface="나눔고딕" pitchFamily="50" charset="-127"/>
                           <a:cs typeface="Arial" panose="020B0604020202020204" pitchFamily="34" charset="0"/>
                         </a:rPr>
-                        <a:t>CQ4</a:t>
+                        <a:t>Neo4j · Cypher</a:t>
                       </a:r>
                     </a:p>
                   </a:txBody>
@@ -3321,7 +3008,7 @@
                           <a:ea typeface="나눔고딕" pitchFamily="50" charset="-127"/>
                           <a:cs typeface="Arial" panose="020B0604020202020204" pitchFamily="34" charset="0"/>
                         </a:rPr>
-                        <a:t>과거 방류 승인</a:t>
+                        <a:t>Neo4j는 그래프를 저장하는 데이터베이스, Cypher는 점과 선의 연결 패턴으로 찾는 질의 언어</a:t>
                       </a:r>
                     </a:p>
                   </a:txBody>
@@ -3373,7 +3060,7 @@
                           <a:ea typeface="나눔고딕" pitchFamily="50" charset="-127"/>
                           <a:cs typeface="Arial" panose="020B0604020202020204" pitchFamily="34" charset="0"/>
                         </a:rPr>
-                        <a:t>충주댐 2012-08-24의 방류 승인 내용은?</a:t>
+                        <a:t>KG 저장과 조회</a:t>
                       </a:r>
                     </a:p>
                   </a:txBody>
@@ -3404,7 +3091,7 @@
                   </a:tcPr>
                 </a:tc>
               </a:tr>
-              <a:tr h="499250">
+              <a:tr h="848500">
                 <a:tc>
                   <a:txBody>
                     <a:bodyPr/>
@@ -3427,7 +3114,7 @@
                           <a:ea typeface="나눔고딕" pitchFamily="50" charset="-127"/>
                           <a:cs typeface="Arial" panose="020B0604020202020204" pitchFamily="34" charset="0"/>
                         </a:rPr>
-                        <a:t>CQ5</a:t>
+                        <a:t>RAG (검색증강생성)</a:t>
                       </a:r>
                     </a:p>
                   </a:txBody>
@@ -3479,7 +3166,7 @@
                           <a:ea typeface="나눔고딕" pitchFamily="50" charset="-127"/>
                           <a:cs typeface="Arial" panose="020B0604020202020204" pitchFamily="34" charset="0"/>
                         </a:rPr>
-                        <a:t>현재 운영기준</a:t>
+                        <a:t>질문과 관련된 근거를 먼저 검색해 LLM에 함께 주고, 그 근거로 답하게 하는 방식</a:t>
                       </a:r>
                     </a:p>
                   </a:txBody>
@@ -3531,323 +3218,7 @@
                           <a:ea typeface="나눔고딕" pitchFamily="50" charset="-127"/>
                           <a:cs typeface="Arial" panose="020B0604020202020204" pitchFamily="34" charset="0"/>
                         </a:rPr>
-                        <a:t>충주댐의 홍수기 제한수위는?</a:t>
-                      </a:r>
-                    </a:p>
-                  </a:txBody>
-                  <a:tcPr marL="91440" marR="91440" marT="60000" marB="60000" anchor="ctr">
-                    <a:lnL w="9525">
-                      <a:solidFill>
-                        <a:srgbClr val="9AA7B5"/>
-                      </a:solidFill>
-                    </a:lnL>
-                    <a:lnR w="9525">
-                      <a:solidFill>
-                        <a:srgbClr val="9AA7B5"/>
-                      </a:solidFill>
-                    </a:lnR>
-                    <a:lnT w="9525">
-                      <a:solidFill>
-                        <a:srgbClr val="9AA7B5"/>
-                      </a:solidFill>
-                    </a:lnT>
-                    <a:lnB w="9525">
-                      <a:solidFill>
-                        <a:srgbClr val="9AA7B5"/>
-                      </a:solidFill>
-                    </a:lnB>
-                    <a:solidFill>
-                      <a:srgbClr val="FFFFFF"/>
-                    </a:solidFill>
-                  </a:tcPr>
-                </a:tc>
-              </a:tr>
-              <a:tr h="499250">
-                <a:tc>
-                  <a:txBody>
-                    <a:bodyPr/>
-                    <a:lstStyle/>
-                    <a:p>
-                      <a:pPr algn="l">
-                        <a:lnSpc>
-                          <a:spcPct val="105000"/>
-                        </a:lnSpc>
-                      </a:pPr>
-                      <a:r>
-                        <a:rPr lang="ko-KR" altLang="en-US" sz="2200" b="1" dirty="0">
-                          <a:solidFill>
-                            <a:schemeClr val="tx1">
-                              <a:lumMod val="85000"/>
-                              <a:lumOff val="15000"/>
-                            </a:schemeClr>
-                          </a:solidFill>
-                          <a:latin typeface="나눔고딕" pitchFamily="50" charset="-127"/>
-                          <a:ea typeface="나눔고딕" pitchFamily="50" charset="-127"/>
-                          <a:cs typeface="Arial" panose="020B0604020202020204" pitchFamily="34" charset="0"/>
-                        </a:rPr>
-                        <a:t>CQ6</a:t>
-                      </a:r>
-                    </a:p>
-                  </a:txBody>
-                  <a:tcPr marL="91440" marR="91440" marT="60000" marB="60000" anchor="ctr">
-                    <a:lnL w="9525">
-                      <a:solidFill>
-                        <a:srgbClr val="9AA7B5"/>
-                      </a:solidFill>
-                    </a:lnL>
-                    <a:lnR w="9525">
-                      <a:solidFill>
-                        <a:srgbClr val="9AA7B5"/>
-                      </a:solidFill>
-                    </a:lnR>
-                    <a:lnT w="9525">
-                      <a:solidFill>
-                        <a:srgbClr val="9AA7B5"/>
-                      </a:solidFill>
-                    </a:lnT>
-                    <a:lnB w="9525">
-                      <a:solidFill>
-                        <a:srgbClr val="9AA7B5"/>
-                      </a:solidFill>
-                    </a:lnB>
-                    <a:solidFill>
-                      <a:srgbClr val="EEF3F8"/>
-                    </a:solidFill>
-                  </a:tcPr>
-                </a:tc>
-                <a:tc>
-                  <a:txBody>
-                    <a:bodyPr/>
-                    <a:lstStyle/>
-                    <a:p>
-                      <a:pPr algn="l">
-                        <a:lnSpc>
-                          <a:spcPct val="105000"/>
-                        </a:lnSpc>
-                      </a:pPr>
-                      <a:r>
-                        <a:rPr lang="ko-KR" altLang="en-US" sz="2200" b="0" dirty="0">
-                          <a:solidFill>
-                            <a:schemeClr val="tx1">
-                              <a:lumMod val="85000"/>
-                              <a:lumOff val="15000"/>
-                            </a:schemeClr>
-                          </a:solidFill>
-                          <a:latin typeface="나눔고딕" pitchFamily="50" charset="-127"/>
-                          <a:ea typeface="나눔고딕" pitchFamily="50" charset="-127"/>
-                          <a:cs typeface="Arial" panose="020B0604020202020204" pitchFamily="34" charset="0"/>
-                        </a:rPr>
-                        <a:t>공식 근거</a:t>
-                      </a:r>
-                    </a:p>
-                  </a:txBody>
-                  <a:tcPr marL="91440" marR="91440" marT="60000" marB="60000" anchor="ctr">
-                    <a:lnL w="9525">
-                      <a:solidFill>
-                        <a:srgbClr val="9AA7B5"/>
-                      </a:solidFill>
-                    </a:lnL>
-                    <a:lnR w="9525">
-                      <a:solidFill>
-                        <a:srgbClr val="9AA7B5"/>
-                      </a:solidFill>
-                    </a:lnR>
-                    <a:lnT w="9525">
-                      <a:solidFill>
-                        <a:srgbClr val="9AA7B5"/>
-                      </a:solidFill>
-                    </a:lnT>
-                    <a:lnB w="9525">
-                      <a:solidFill>
-                        <a:srgbClr val="9AA7B5"/>
-                      </a:solidFill>
-                    </a:lnB>
-                    <a:solidFill>
-                      <a:srgbClr val="EEF3F8"/>
-                    </a:solidFill>
-                  </a:tcPr>
-                </a:tc>
-                <a:tc>
-                  <a:txBody>
-                    <a:bodyPr/>
-                    <a:lstStyle/>
-                    <a:p>
-                      <a:pPr algn="l">
-                        <a:lnSpc>
-                          <a:spcPct val="105000"/>
-                        </a:lnSpc>
-                      </a:pPr>
-                      <a:r>
-                        <a:rPr lang="ko-KR" altLang="en-US" sz="2200" b="0" dirty="0">
-                          <a:solidFill>
-                            <a:schemeClr val="tx1">
-                              <a:lumMod val="85000"/>
-                              <a:lumOff val="15000"/>
-                            </a:schemeClr>
-                          </a:solidFill>
-                          <a:latin typeface="나눔고딕" pitchFamily="50" charset="-127"/>
-                          <a:ea typeface="나눔고딕" pitchFamily="50" charset="-127"/>
-                          <a:cs typeface="Arial" panose="020B0604020202020204" pitchFamily="34" charset="0"/>
-                        </a:rPr>
-                        <a:t>충주댐 승인 1368번의 공식 근거는?</a:t>
-                      </a:r>
-                    </a:p>
-                  </a:txBody>
-                  <a:tcPr marL="91440" marR="91440" marT="60000" marB="60000" anchor="ctr">
-                    <a:lnL w="9525">
-                      <a:solidFill>
-                        <a:srgbClr val="9AA7B5"/>
-                      </a:solidFill>
-                    </a:lnL>
-                    <a:lnR w="9525">
-                      <a:solidFill>
-                        <a:srgbClr val="9AA7B5"/>
-                      </a:solidFill>
-                    </a:lnR>
-                    <a:lnT w="9525">
-                      <a:solidFill>
-                        <a:srgbClr val="9AA7B5"/>
-                      </a:solidFill>
-                    </a:lnT>
-                    <a:lnB w="9525">
-                      <a:solidFill>
-                        <a:srgbClr val="9AA7B5"/>
-                      </a:solidFill>
-                    </a:lnB>
-                    <a:solidFill>
-                      <a:srgbClr val="EEF3F8"/>
-                    </a:solidFill>
-                  </a:tcPr>
-                </a:tc>
-              </a:tr>
-              <a:tr h="499250">
-                <a:tc>
-                  <a:txBody>
-                    <a:bodyPr/>
-                    <a:lstStyle/>
-                    <a:p>
-                      <a:pPr algn="l">
-                        <a:lnSpc>
-                          <a:spcPct val="105000"/>
-                        </a:lnSpc>
-                      </a:pPr>
-                      <a:r>
-                        <a:rPr lang="ko-KR" altLang="en-US" sz="2200" b="1" dirty="0">
-                          <a:solidFill>
-                            <a:schemeClr val="tx1">
-                              <a:lumMod val="85000"/>
-                              <a:lumOff val="15000"/>
-                            </a:schemeClr>
-                          </a:solidFill>
-                          <a:latin typeface="나눔고딕" pitchFamily="50" charset="-127"/>
-                          <a:ea typeface="나눔고딕" pitchFamily="50" charset="-127"/>
-                          <a:cs typeface="Arial" panose="020B0604020202020204" pitchFamily="34" charset="0"/>
-                        </a:rPr>
-                        <a:t>SIMILAR</a:t>
-                      </a:r>
-                    </a:p>
-                  </a:txBody>
-                  <a:tcPr marL="91440" marR="91440" marT="60000" marB="60000" anchor="ctr">
-                    <a:lnL w="9525">
-                      <a:solidFill>
-                        <a:srgbClr val="9AA7B5"/>
-                      </a:solidFill>
-                    </a:lnL>
-                    <a:lnR w="9525">
-                      <a:solidFill>
-                        <a:srgbClr val="9AA7B5"/>
-                      </a:solidFill>
-                    </a:lnR>
-                    <a:lnT w="9525">
-                      <a:solidFill>
-                        <a:srgbClr val="9AA7B5"/>
-                      </a:solidFill>
-                    </a:lnT>
-                    <a:lnB w="9525">
-                      <a:solidFill>
-                        <a:srgbClr val="9AA7B5"/>
-                      </a:solidFill>
-                    </a:lnB>
-                    <a:solidFill>
-                      <a:srgbClr val="FFFFFF"/>
-                    </a:solidFill>
-                  </a:tcPr>
-                </a:tc>
-                <a:tc>
-                  <a:txBody>
-                    <a:bodyPr/>
-                    <a:lstStyle/>
-                    <a:p>
-                      <a:pPr algn="l">
-                        <a:lnSpc>
-                          <a:spcPct val="105000"/>
-                        </a:lnSpc>
-                      </a:pPr>
-                      <a:r>
-                        <a:rPr lang="ko-KR" altLang="en-US" sz="2200" b="0" dirty="0">
-                          <a:solidFill>
-                            <a:schemeClr val="tx1">
-                              <a:lumMod val="85000"/>
-                              <a:lumOff val="15000"/>
-                            </a:schemeClr>
-                          </a:solidFill>
-                          <a:latin typeface="나눔고딕" pitchFamily="50" charset="-127"/>
-                          <a:ea typeface="나눔고딕" pitchFamily="50" charset="-127"/>
-                          <a:cs typeface="Arial" panose="020B0604020202020204" pitchFamily="34" charset="0"/>
-                        </a:rPr>
-                        <a:t>현재와 비슷한 과거 사례</a:t>
-                      </a:r>
-                    </a:p>
-                  </a:txBody>
-                  <a:tcPr marL="91440" marR="91440" marT="60000" marB="60000" anchor="ctr">
-                    <a:lnL w="9525">
-                      <a:solidFill>
-                        <a:srgbClr val="9AA7B5"/>
-                      </a:solidFill>
-                    </a:lnL>
-                    <a:lnR w="9525">
-                      <a:solidFill>
-                        <a:srgbClr val="9AA7B5"/>
-                      </a:solidFill>
-                    </a:lnR>
-                    <a:lnT w="9525">
-                      <a:solidFill>
-                        <a:srgbClr val="9AA7B5"/>
-                      </a:solidFill>
-                    </a:lnT>
-                    <a:lnB w="9525">
-                      <a:solidFill>
-                        <a:srgbClr val="9AA7B5"/>
-                      </a:solidFill>
-                    </a:lnB>
-                    <a:solidFill>
-                      <a:srgbClr val="FFFFFF"/>
-                    </a:solidFill>
-                  </a:tcPr>
-                </a:tc>
-                <a:tc>
-                  <a:txBody>
-                    <a:bodyPr/>
-                    <a:lstStyle/>
-                    <a:p>
-                      <a:pPr algn="l">
-                        <a:lnSpc>
-                          <a:spcPct val="105000"/>
-                        </a:lnSpc>
-                      </a:pPr>
-                      <a:r>
-                        <a:rPr lang="ko-KR" altLang="en-US" sz="2200" b="0" dirty="0">
-                          <a:solidFill>
-                            <a:schemeClr val="tx1">
-                              <a:lumMod val="85000"/>
-                              <a:lumOff val="15000"/>
-                            </a:schemeClr>
-                          </a:solidFill>
-                          <a:latin typeface="나눔고딕" pitchFamily="50" charset="-127"/>
-                          <a:ea typeface="나눔고딕" pitchFamily="50" charset="-127"/>
-                          <a:cs typeface="Arial" panose="020B0604020202020204" pitchFamily="34" charset="0"/>
-                        </a:rPr>
-                        <a:t>소양강댐 지금과 비슷했던 과거 사례는?</a:t>
+                        <a:t>KG·측정자료·문서에서 검색</a:t>
                       </a:r>
                     </a:p>
                   </a:txBody>
@@ -3884,13 +3255,497 @@
       </p:graphicFrame>
       <p:sp>
         <p:nvSpPr>
-          <p:cNvPr id="1014" name="직사각형 1"/>
+          <p:cNvPr id="1011" name="Cypher 예시"/>
+          <p:cNvSpPr txBox="1"/>
+          <p:nvPr/>
+        </p:nvSpPr>
+        <p:spPr>
+          <a:xfrm>
+            <a:off x="697946" y="17929718"/>
+            <a:ext cx="13913138" cy="1856033"/>
+          </a:xfrm>
+          <a:prstGeom prst="rect">
+            <a:avLst/>
+          </a:prstGeom>
+          <a:solidFill>
+            <a:srgbClr val="F2F2F2"/>
+          </a:solidFill>
+          <a:ln w="19050">
+            <a:solidFill>
+              <a:srgbClr val="888888"/>
+            </a:solidFill>
+          </a:ln>
+        </p:spPr>
+        <p:txBody>
+          <a:bodyPr wrap="square" lIns="150000" tIns="33079" rIns="150000" bIns="33079" anchor="t">
+            <a:noAutofit/>
+          </a:bodyPr>
+          <a:lstStyle/>
+          <a:p>
+            <a:pPr marL="0" indent="0">
+              <a:lnSpc>
+                <a:spcPct val="110000"/>
+              </a:lnSpc>
+              <a:buNone/>
+            </a:pPr>
+            <a:r>
+              <a:rPr lang="en-US" altLang="ko-KR" sz="1900" b="0" dirty="0">
+                <a:solidFill>
+                  <a:schemeClr val="tx1">
+                    <a:lumMod val="85000"/>
+                    <a:lumOff val="15000"/>
+                  </a:schemeClr>
+                </a:solidFill>
+                <a:latin typeface="Consolas"/>
+                <a:ea typeface="나눔고딕" pitchFamily="50" charset="-127"/>
+              </a:rPr>
+              <a:t>MATCH (a:Approval)-[:authorizes]-&gt;(o:Operation)</a:t>
+            </a:r>
+          </a:p>
+          <a:p>
+            <a:pPr marL="0" indent="0">
+              <a:lnSpc>
+                <a:spcPct val="110000"/>
+              </a:lnSpc>
+              <a:buNone/>
+            </a:pPr>
+            <a:r>
+              <a:rPr lang="en-US" altLang="ko-KR" sz="1900" b="0" dirty="0">
+                <a:solidFill>
+                  <a:schemeClr val="tx1">
+                    <a:lumMod val="85000"/>
+                    <a:lumOff val="15000"/>
+                  </a:schemeClr>
+                </a:solidFill>
+                <a:latin typeface="Consolas"/>
+                <a:ea typeface="나눔고딕" pitchFamily="50" charset="-127"/>
+              </a:rPr>
+              <a:t>      -[:performedOnDam]-&gt;(d:Dam {damName: '충주댐'})</a:t>
+            </a:r>
+          </a:p>
+          <a:p>
+            <a:pPr marL="0" indent="0">
+              <a:lnSpc>
+                <a:spcPct val="110000"/>
+              </a:lnSpc>
+              <a:buNone/>
+            </a:pPr>
+            <a:r>
+              <a:rPr lang="en-US" altLang="ko-KR" sz="1900" b="0" dirty="0">
+                <a:solidFill>
+                  <a:schemeClr val="tx1">
+                    <a:lumMod val="85000"/>
+                    <a:lumOff val="15000"/>
+                  </a:schemeClr>
+                </a:solidFill>
+                <a:latin typeface="Consolas"/>
+                <a:ea typeface="나눔고딕" pitchFamily="50" charset="-127"/>
+              </a:rPr>
+              <a:t>RETURN a, o</a:t>
+            </a:r>
+          </a:p>
+          <a:p>
+            <a:pPr marL="0" indent="0">
+              <a:lnSpc>
+                <a:spcPct val="110000"/>
+              </a:lnSpc>
+              <a:spcBef>
+                <a:spcPts val="600"/>
+              </a:spcBef>
+              <a:buNone/>
+            </a:pPr>
+            <a:r>
+              <a:rPr lang="ko-KR" altLang="en-US" sz="2000" b="0" dirty="0">
+                <a:solidFill>
+                  <a:srgbClr val="444444"/>
+                </a:solidFill>
+                <a:latin typeface="나눔고딕" pitchFamily="50" charset="-127"/>
+                <a:ea typeface="나눔고딕" pitchFamily="50" charset="-127"/>
+                <a:cs typeface="Arial" panose="020B0604020202020204" pitchFamily="34" charset="0"/>
+              </a:rPr>
+              <a:t>예) CQ3 “충주댐의 과거 운영행위는?”을 찾는 Cypher: 승인(Approval)이 허가한(authorizes) 운영행위(Operation) 중 충주댐(Dam)에서 수행된(performedOnDam) 것을 찾는다</a:t>
+            </a:r>
+          </a:p>
+        </p:txBody>
+      </p:sp>
+      <p:pic>
+        <p:nvPicPr>
+          <p:cNvPr id="1012" name="그림 1. 연구의 구성: Ontology 설계 → KG 구축 → 질문 응답(RAG)" descr="그림 1. 연구의 구성: Ontology 설계 → KG 구축 → 질문 응답(RAG)"/>
+          <p:cNvPicPr>
+            <a:picLocks noChangeAspect="1"/>
+          </p:cNvPicPr>
+          <p:nvPr/>
+        </p:nvPicPr>
+        <p:blipFill>
+          <a:blip r:embed="rId11"/>
+          <a:stretch>
+            <a:fillRect/>
+          </a:stretch>
+        </p:blipFill>
+        <p:spPr>
+          <a:xfrm>
+            <a:off x="1204515" y="20045751"/>
+            <a:ext cx="12900000" cy="9085285"/>
+          </a:xfrm>
+          <a:prstGeom prst="rect">
+            <a:avLst/>
+          </a:prstGeom>
+          <a:ln w="12700">
+            <a:solidFill>
+              <a:srgbClr val="BFC5CC"/>
+            </a:solidFill>
+          </a:ln>
+        </p:spPr>
+      </p:pic>
+      <p:sp>
+        <p:nvSpPr>
+          <p:cNvPr id="1013" name="본문"/>
+          <p:cNvSpPr txBox="1"/>
+          <p:nvPr/>
+        </p:nvSpPr>
+        <p:spPr>
+          <a:xfrm>
+            <a:off x="597946" y="29191036"/>
+            <a:ext cx="14113138" cy="800000"/>
+          </a:xfrm>
+          <a:prstGeom prst="rect">
+            <a:avLst/>
+          </a:prstGeom>
+          <a:noFill/>
+          <a:ln>
+            <a:noFill/>
+          </a:ln>
+        </p:spPr>
+        <p:txBody>
+          <a:bodyPr wrap="square" lIns="66158" tIns="33079" rIns="66158" bIns="33079" anchor="t">
+            <a:noAutofit/>
+          </a:bodyPr>
+          <a:lstStyle/>
+          <a:p>
+            <a:pPr marL="0" indent="0" algn="ctr">
+              <a:lnSpc>
+                <a:spcPct val="118000"/>
+              </a:lnSpc>
+              <a:spcAft>
+                <a:spcPts val="600"/>
+              </a:spcAft>
+              <a:buNone/>
+            </a:pPr>
+            <a:r>
+              <a:rPr lang="ko-KR" altLang="en-US" sz="2400" b="0" dirty="0">
+                <a:solidFill>
+                  <a:schemeClr val="tx1">
+                    <a:lumMod val="85000"/>
+                    <a:lumOff val="15000"/>
+                  </a:schemeClr>
+                </a:solidFill>
+                <a:latin typeface="나눔고딕" pitchFamily="50" charset="-127"/>
+                <a:ea typeface="나눔고딕" pitchFamily="50" charset="-127"/>
+                <a:cs typeface="Arial" panose="020B0604020202020204" pitchFamily="34" charset="0"/>
+              </a:rPr>
+              <a:t>그림 1. 연구의 구성: Ontology 설계 → KG 구축 → 질문 응답(RAG)</a:t>
+            </a:r>
+          </a:p>
+        </p:txBody>
+      </p:sp>
+      <p:sp>
+        <p:nvSpPr>
+          <p:cNvPr id="1014" name="본문"/>
+          <p:cNvSpPr txBox="1"/>
+          <p:nvPr/>
+        </p:nvSpPr>
+        <p:spPr>
+          <a:xfrm>
+            <a:off x="597946" y="29991036"/>
+            <a:ext cx="14113138" cy="4179129"/>
+          </a:xfrm>
+          <a:prstGeom prst="rect">
+            <a:avLst/>
+          </a:prstGeom>
+          <a:noFill/>
+          <a:ln>
+            <a:noFill/>
+          </a:ln>
+        </p:spPr>
+        <p:txBody>
+          <a:bodyPr wrap="square" lIns="66158" tIns="33079" rIns="66158" bIns="33079" anchor="t">
+            <a:noAutofit/>
+          </a:bodyPr>
+          <a:lstStyle/>
+          <a:p>
+            <a:pPr marL="334726" indent="-334726">
+              <a:lnSpc>
+                <a:spcPct val="118000"/>
+              </a:lnSpc>
+              <a:spcAft>
+                <a:spcPts val="600"/>
+              </a:spcAft>
+              <a:buBlip>
+                <a:blip r:embed="rId4"/>
+              </a:buBlip>
+            </a:pPr>
+            <a:r>
+              <a:rPr lang="ko-KR" altLang="en-US" sz="2400" b="1" dirty="0">
+                <a:solidFill>
+                  <a:schemeClr val="tx1">
+                    <a:lumMod val="85000"/>
+                    <a:lumOff val="15000"/>
+                  </a:schemeClr>
+                </a:solidFill>
+                <a:latin typeface="나눔고딕" pitchFamily="50" charset="-127"/>
+                <a:ea typeface="나눔고딕" pitchFamily="50" charset="-127"/>
+                <a:cs typeface="Arial" panose="020B0604020202020204" pitchFamily="34" charset="0"/>
+              </a:rPr>
+              <a:t>STEP 1 Ontology 설계</a:t>
+            </a:r>
+            <a:r>
+              <a:rPr lang="ko-KR" altLang="en-US" sz="2400" b="0" dirty="0">
+                <a:solidFill>
+                  <a:schemeClr val="tx1">
+                    <a:lumMod val="85000"/>
+                    <a:lumOff val="15000"/>
+                  </a:schemeClr>
+                </a:solidFill>
+                <a:latin typeface="나눔고딕" pitchFamily="50" charset="-127"/>
+                <a:ea typeface="나눔고딕" pitchFamily="50" charset="-127"/>
+                <a:cs typeface="Arial" panose="020B0604020202020204" pitchFamily="34" charset="0"/>
+              </a:rPr>
+              <a:t>: Noy &amp; McGuinness(2001)의 절차에 따라 </a:t>
+            </a:r>
+            <a:r>
+              <a:rPr lang="ko-KR" altLang="en-US" sz="2400" b="1" dirty="0">
+                <a:solidFill>
+                  <a:schemeClr val="tx1">
+                    <a:lumMod val="85000"/>
+                    <a:lumOff val="15000"/>
+                  </a:schemeClr>
+                </a:solidFill>
+                <a:latin typeface="나눔고딕" pitchFamily="50" charset="-127"/>
+                <a:ea typeface="나눔고딕" pitchFamily="50" charset="-127"/>
+                <a:cs typeface="Arial" panose="020B0604020202020204" pitchFamily="34" charset="0"/>
+              </a:rPr>
+              <a:t>CQ로 범위를 정하고</a:t>
+            </a:r>
+            <a:r>
+              <a:rPr lang="ko-KR" altLang="en-US" sz="2400" b="0" dirty="0">
+                <a:solidFill>
+                  <a:schemeClr val="tx1">
+                    <a:lumMod val="85000"/>
+                    <a:lumOff val="15000"/>
+                  </a:schemeClr>
+                </a:solidFill>
+                <a:latin typeface="나눔고딕" pitchFamily="50" charset="-127"/>
+                <a:ea typeface="나눔고딕" pitchFamily="50" charset="-127"/>
+                <a:cs typeface="Arial" panose="020B0604020202020204" pitchFamily="34" charset="0"/>
+              </a:rPr>
+              <a:t> 필요한 Class와 관계를 정의함. CQ는 현재 상태(CQ1), 과거 상태(CQ2), 과거 운영행위(CQ3), 과거 방류 승인(CQ4), 현재 운영기준(CQ5), 공식 근거(CQ6)와 비슷한 과거 사례(SIMILAR)임</a:t>
+            </a:r>
+          </a:p>
+          <a:p>
+            <a:pPr marL="334726" indent="-334726">
+              <a:lnSpc>
+                <a:spcPct val="118000"/>
+              </a:lnSpc>
+              <a:spcAft>
+                <a:spcPts val="600"/>
+              </a:spcAft>
+              <a:buBlip>
+                <a:blip r:embed="rId4"/>
+              </a:buBlip>
+            </a:pPr>
+            <a:r>
+              <a:rPr lang="ko-KR" altLang="en-US" sz="2400" b="1" dirty="0">
+                <a:solidFill>
+                  <a:schemeClr val="tx1">
+                    <a:lumMod val="85000"/>
+                    <a:lumOff val="15000"/>
+                  </a:schemeClr>
+                </a:solidFill>
+                <a:latin typeface="나눔고딕" pitchFamily="50" charset="-127"/>
+                <a:ea typeface="나눔고딕" pitchFamily="50" charset="-127"/>
+                <a:cs typeface="Arial" panose="020B0604020202020204" pitchFamily="34" charset="0"/>
+              </a:rPr>
+              <a:t>STEP 2 KG 구축</a:t>
+            </a:r>
+            <a:r>
+              <a:rPr lang="ko-KR" altLang="en-US" sz="2400" b="0" dirty="0">
+                <a:solidFill>
+                  <a:schemeClr val="tx1">
+                    <a:lumMod val="85000"/>
+                    <a:lumOff val="15000"/>
+                  </a:schemeClr>
+                </a:solidFill>
+                <a:latin typeface="나눔고딕" pitchFamily="50" charset="-127"/>
+                <a:ea typeface="나눔고딕" pitchFamily="50" charset="-127"/>
+                <a:cs typeface="Arial" panose="020B0604020202020204" pitchFamily="34" charset="0"/>
+              </a:rPr>
+              <a:t>: 열·행의 의미가 정해진 표는 </a:t>
+            </a:r>
+            <a:r>
+              <a:rPr lang="ko-KR" altLang="en-US" sz="2400" b="1" dirty="0">
+                <a:solidFill>
+                  <a:schemeClr val="tx1">
+                    <a:lumMod val="85000"/>
+                    <a:lumOff val="15000"/>
+                  </a:schemeClr>
+                </a:solidFill>
+                <a:latin typeface="나눔고딕" pitchFamily="50" charset="-127"/>
+                <a:ea typeface="나눔고딕" pitchFamily="50" charset="-127"/>
+                <a:cs typeface="Arial" panose="020B0604020202020204" pitchFamily="34" charset="0"/>
+              </a:rPr>
+              <a:t>열 이름을 속성에 그대로 대응</a:t>
+            </a:r>
+            <a:r>
+              <a:rPr lang="ko-KR" altLang="en-US" sz="2400" b="0" dirty="0">
+                <a:solidFill>
+                  <a:schemeClr val="tx1">
+                    <a:lumMod val="85000"/>
+                    <a:lumOff val="15000"/>
+                  </a:schemeClr>
+                </a:solidFill>
+                <a:latin typeface="나눔고딕" pitchFamily="50" charset="-127"/>
+                <a:ea typeface="나눔고딕" pitchFamily="50" charset="-127"/>
+                <a:cs typeface="Arial" panose="020B0604020202020204" pitchFamily="34" charset="0"/>
+              </a:rPr>
+              <a:t>(표 경로)하고, 문장·규정 별표는 </a:t>
+            </a:r>
+            <a:r>
+              <a:rPr lang="ko-KR" altLang="en-US" sz="2400" b="1" dirty="0">
+                <a:solidFill>
+                  <a:schemeClr val="tx1">
+                    <a:lumMod val="85000"/>
+                    <a:lumOff val="15000"/>
+                  </a:schemeClr>
+                </a:solidFill>
+                <a:latin typeface="나눔고딕" pitchFamily="50" charset="-127"/>
+                <a:ea typeface="나눔고딕" pitchFamily="50" charset="-127"/>
+                <a:cs typeface="Arial" panose="020B0604020202020204" pitchFamily="34" charset="0"/>
+              </a:rPr>
+              <a:t>키워드와 패턴 규칙</a:t>
+            </a:r>
+            <a:r>
+              <a:rPr lang="ko-KR" altLang="en-US" sz="2400" b="0" dirty="0">
+                <a:solidFill>
+                  <a:schemeClr val="tx1">
+                    <a:lumMod val="85000"/>
+                    <a:lumOff val="15000"/>
+                  </a:schemeClr>
+                </a:solidFill>
+                <a:latin typeface="나눔고딕" pitchFamily="50" charset="-127"/>
+                <a:ea typeface="나눔고딕" pitchFamily="50" charset="-127"/>
+                <a:cs typeface="Arial" panose="020B0604020202020204" pitchFamily="34" charset="0"/>
+              </a:rPr>
+              <a:t>으로 값을 추출(글 경로)함. 수치 전체와 원문은 KG 밖 저장소에 두고 KG에는 관계와 </a:t>
+            </a:r>
+            <a:r>
+              <a:rPr lang="ko-KR" altLang="en-US" sz="2400" b="1" dirty="0">
+                <a:solidFill>
+                  <a:schemeClr val="tx1">
+                    <a:lumMod val="85000"/>
+                    <a:lumOff val="15000"/>
+                  </a:schemeClr>
+                </a:solidFill>
+                <a:latin typeface="나눔고딕" pitchFamily="50" charset="-127"/>
+                <a:ea typeface="나눔고딕" pitchFamily="50" charset="-127"/>
+                <a:cs typeface="Arial" panose="020B0604020202020204" pitchFamily="34" charset="0"/>
+              </a:rPr>
+              <a:t>출처 번호</a:t>
+            </a:r>
+            <a:r>
+              <a:rPr lang="ko-KR" altLang="en-US" sz="2400" b="0" dirty="0">
+                <a:solidFill>
+                  <a:schemeClr val="tx1">
+                    <a:lumMod val="85000"/>
+                    <a:lumOff val="15000"/>
+                  </a:schemeClr>
+                </a:solidFill>
+                <a:latin typeface="나눔고딕" pitchFamily="50" charset="-127"/>
+                <a:ea typeface="나눔고딕" pitchFamily="50" charset="-127"/>
+                <a:cs typeface="Arial" panose="020B0604020202020204" pitchFamily="34" charset="0"/>
+              </a:rPr>
+              <a:t>만 저장함</a:t>
+            </a:r>
+          </a:p>
+          <a:p>
+            <a:pPr marL="334726" indent="-334726">
+              <a:lnSpc>
+                <a:spcPct val="118000"/>
+              </a:lnSpc>
+              <a:spcAft>
+                <a:spcPts val="600"/>
+              </a:spcAft>
+              <a:buBlip>
+                <a:blip r:embed="rId4"/>
+              </a:buBlip>
+            </a:pPr>
+            <a:r>
+              <a:rPr lang="ko-KR" altLang="en-US" sz="2400" b="1" dirty="0">
+                <a:solidFill>
+                  <a:schemeClr val="tx1">
+                    <a:lumMod val="85000"/>
+                    <a:lumOff val="15000"/>
+                  </a:schemeClr>
+                </a:solidFill>
+                <a:latin typeface="나눔고딕" pitchFamily="50" charset="-127"/>
+                <a:ea typeface="나눔고딕" pitchFamily="50" charset="-127"/>
+                <a:cs typeface="Arial" panose="020B0604020202020204" pitchFamily="34" charset="0"/>
+              </a:rPr>
+              <a:t>STEP 3 질문 응답(RAG)</a:t>
+            </a:r>
+            <a:r>
+              <a:rPr lang="ko-KR" altLang="en-US" sz="2400" b="0" dirty="0">
+                <a:solidFill>
+                  <a:schemeClr val="tx1">
+                    <a:lumMod val="85000"/>
+                    <a:lumOff val="15000"/>
+                  </a:schemeClr>
+                </a:solidFill>
+                <a:latin typeface="나눔고딕" pitchFamily="50" charset="-127"/>
+                <a:ea typeface="나눔고딕" pitchFamily="50" charset="-127"/>
+                <a:cs typeface="Arial" panose="020B0604020202020204" pitchFamily="34" charset="0"/>
+              </a:rPr>
+              <a:t>: ① LLM이 질문을 유형·댐·시점으로 변환 → ② 유형별 </a:t>
+            </a:r>
+            <a:r>
+              <a:rPr lang="ko-KR" altLang="en-US" sz="2400" b="1" dirty="0">
+                <a:solidFill>
+                  <a:schemeClr val="tx1">
+                    <a:lumMod val="85000"/>
+                    <a:lumOff val="15000"/>
+                  </a:schemeClr>
+                </a:solidFill>
+                <a:latin typeface="나눔고딕" pitchFamily="50" charset="-127"/>
+                <a:ea typeface="나눔고딕" pitchFamily="50" charset="-127"/>
+                <a:cs typeface="Arial" panose="020B0604020202020204" pitchFamily="34" charset="0"/>
+              </a:rPr>
+              <a:t>Cypher</a:t>
+            </a:r>
+            <a:r>
+              <a:rPr lang="ko-KR" altLang="en-US" sz="2400" b="0" dirty="0">
+                <a:solidFill>
+                  <a:schemeClr val="tx1">
+                    <a:lumMod val="85000"/>
+                    <a:lumOff val="15000"/>
+                  </a:schemeClr>
+                </a:solidFill>
+                <a:latin typeface="나눔고딕" pitchFamily="50" charset="-127"/>
+                <a:ea typeface="나눔고딕" pitchFamily="50" charset="-127"/>
+                <a:cs typeface="Arial" panose="020B0604020202020204" pitchFamily="34" charset="0"/>
+              </a:rPr>
+              <a:t> 양식에 값을 채워 KG 탐색 → ③ 출처 번호로 측정자료·문서 저장소 조회 → ④ 계산은 코드가 수행 → ⑤ 모은 근거 안에서 LLM이 답변하고 출처 번호를 붙임 (Lewis et al., 2020)</a:t>
+            </a:r>
+          </a:p>
+        </p:txBody>
+      </p:sp>
+      <p:sp>
+        <p:nvSpPr>
+          <p:cNvPr id="1015" name="직사각형 1"/>
           <p:cNvSpPr/>
           <p:nvPr/>
         </p:nvSpPr>
         <p:spPr>
           <a:xfrm>
-            <a:off x="674157" y="34116559"/>
+            <a:off x="674157" y="34430165"/>
             <a:ext cx="13943667" cy="1023024"/>
           </a:xfrm>
           <a:prstGeom prst="rect">
@@ -3943,13 +3798,13 @@
       </p:sp>
       <p:sp>
         <p:nvSpPr>
-          <p:cNvPr id="1015" name="직사각형 415"/>
+          <p:cNvPr id="1016" name="직사각형 415"/>
           <p:cNvSpPr/>
           <p:nvPr/>
         </p:nvSpPr>
         <p:spPr>
           <a:xfrm>
-            <a:off x="830804" y="35259583"/>
+            <a:off x="830804" y="35573189"/>
             <a:ext cx="13649422" cy="645985"/>
           </a:xfrm>
           <a:prstGeom prst="rect">
@@ -4015,14 +3870,14 @@
       </p:sp>
       <p:graphicFrame>
         <p:nvGraphicFramePr>
-          <p:cNvPr id="1016" name="표"/>
+          <p:cNvPr id="1017" name="표"/>
           <p:cNvGraphicFramePr>
             <a:graphicFrameLocks noGrp="1"/>
           </p:cNvGraphicFramePr>
           <p:nvPr/>
         </p:nvGraphicFramePr>
         <p:xfrm>
-          <a:off x="697946" y="35995568"/>
+          <a:off x="697946" y="36309174"/>
           <a:ext cx="13600000" cy="2346250"/>
         </p:xfrm>
         <a:graphic>
@@ -4663,14 +4518,14 @@
       </p:graphicFrame>
       <p:sp>
         <p:nvSpPr>
-          <p:cNvPr id="1017" name="본문"/>
+          <p:cNvPr id="1018" name="본문"/>
           <p:cNvSpPr txBox="1"/>
           <p:nvPr/>
         </p:nvSpPr>
         <p:spPr>
           <a:xfrm>
-            <a:off x="597946" y="38461818"/>
-            <a:ext cx="14113138" cy="2088810"/>
+            <a:off x="597946" y="38775424"/>
+            <a:ext cx="14113138" cy="1944945"/>
           </a:xfrm>
           <a:prstGeom prst="rect">
             <a:avLst/>
@@ -4698,7 +4553,7 @@
               </a:buBlip>
             </a:pPr>
             <a:r>
-              <a:rPr lang="ko-KR" altLang="en-US" sz="2600" b="0" dirty="0">
+              <a:rPr lang="ko-KR" altLang="en-US" sz="2400" b="0" dirty="0">
                 <a:solidFill>
                   <a:schemeClr val="tx1">
                     <a:lumMod val="85000"/>
@@ -4712,7 +4567,7 @@
               <a:t>승인 기록의 </a:t>
             </a:r>
             <a:r>
-              <a:rPr lang="ko-KR" altLang="en-US" sz="2600" b="1" dirty="0">
+              <a:rPr lang="ko-KR" altLang="en-US" sz="2400" b="1" dirty="0">
                 <a:solidFill>
                   <a:schemeClr val="tx1">
                     <a:lumMod val="85000"/>
@@ -4726,7 +4581,7 @@
               <a:t>비고 문장</a:t>
             </a:r>
             <a:r>
-              <a:rPr lang="ko-KR" altLang="en-US" sz="2600" b="0" dirty="0">
+              <a:rPr lang="ko-KR" altLang="en-US" sz="2400" b="0" dirty="0">
                 <a:solidFill>
                   <a:schemeClr val="tx1">
                     <a:lumMod val="85000"/>
@@ -4753,7 +4608,7 @@
               </a:buBlip>
             </a:pPr>
             <a:r>
-              <a:rPr lang="ko-KR" altLang="en-US" sz="2600" b="0" dirty="0">
+              <a:rPr lang="ko-KR" altLang="en-US" sz="2400" b="0" dirty="0">
                 <a:solidFill>
                   <a:schemeClr val="tx1">
                     <a:lumMod val="85000"/>
@@ -4767,7 +4622,7 @@
               <a:t>운영행위 시각은 </a:t>
             </a:r>
             <a:r>
-              <a:rPr lang="ko-KR" altLang="en-US" sz="2600" b="1" dirty="0">
+              <a:rPr lang="ko-KR" altLang="en-US" sz="2400" b="1" dirty="0">
                 <a:solidFill>
                   <a:schemeClr val="tx1">
                     <a:lumMod val="85000"/>
@@ -4781,7 +4636,7 @@
               <a:t>비고 명시 → 측정 방류량 변화 → 승인 시작 시각</a:t>
             </a:r>
             <a:r>
-              <a:rPr lang="ko-KR" altLang="en-US" sz="2600" b="0" dirty="0">
+              <a:rPr lang="ko-KR" altLang="en-US" sz="2400" b="0" dirty="0">
                 <a:solidFill>
                   <a:schemeClr val="tx1">
                     <a:lumMod val="85000"/>
@@ -4799,7 +4654,7 @@
       </p:sp>
       <p:sp>
         <p:nvSpPr>
-          <p:cNvPr id="1018" name="직사각형 1"/>
+          <p:cNvPr id="1019" name="직사각형 1"/>
           <p:cNvSpPr/>
           <p:nvPr/>
         </p:nvSpPr>
@@ -4858,7 +4713,7 @@
       </p:sp>
       <p:sp>
         <p:nvSpPr>
-          <p:cNvPr id="1019" name="직사각형 415"/>
+          <p:cNvPr id="1020" name="직사각형 415"/>
           <p:cNvSpPr/>
           <p:nvPr/>
         </p:nvSpPr>
@@ -4930,7 +4785,7 @@
       </p:sp>
       <p:graphicFrame>
         <p:nvGraphicFramePr>
-          <p:cNvPr id="1020" name="표"/>
+          <p:cNvPr id="1021" name="표"/>
           <p:cNvGraphicFramePr>
             <a:graphicFrameLocks noGrp="1"/>
           </p:cNvGraphicFramePr>
@@ -4938,14 +4793,14 @@
         </p:nvGraphicFramePr>
         <p:xfrm>
           <a:off x="15670184" y="8229009"/>
-          <a:ext cx="13600000" cy="2346250"/>
+          <a:ext cx="13500000" cy="2346250"/>
         </p:xfrm>
         <a:graphic>
           <a:graphicData uri="http://schemas.openxmlformats.org/drawingml/2006/table">
             <a:tbl>
               <a:tblPr firstRow="1" bandRow="1"/>
               <a:tblGrid>
-                <a:gridCol w="1600000"/>
+                <a:gridCol w="1500000"/>
                 <a:gridCol w="10400000"/>
                 <a:gridCol w="1600000"/>
               </a:tblGrid>
@@ -5578,7 +5433,7 @@
       </p:graphicFrame>
       <p:pic>
         <p:nvPicPr>
-          <p:cNvPr id="1021" name="그림 2. 지식그래프의 일부: 충주댐 승인 1368번" descr="그림 2. 지식그래프의 일부: 충주댐 승인 1368번"/>
+          <p:cNvPr id="1022" name="그림 2. 지식그래프의 일부: 충주댐 승인 1368번" descr="그림 2. 지식그래프의 일부: 충주댐 승인 1368번"/>
           <p:cNvPicPr>
             <a:picLocks noChangeAspect="1"/>
           </p:cNvPicPr>
@@ -5592,8 +5447,8 @@
         </p:blipFill>
         <p:spPr>
           <a:xfrm>
-            <a:off x="17376753" y="10695259"/>
-            <a:ext cx="10500000" cy="8190000"/>
+            <a:off x="17326753" y="10695259"/>
+            <a:ext cx="10600000" cy="7314000"/>
           </a:xfrm>
           <a:prstGeom prst="rect">
             <a:avLst/>
@@ -5607,13 +5462,13 @@
       </p:pic>
       <p:sp>
         <p:nvSpPr>
-          <p:cNvPr id="1022" name="본문"/>
+          <p:cNvPr id="1023" name="본문"/>
           <p:cNvSpPr txBox="1"/>
           <p:nvPr/>
         </p:nvSpPr>
         <p:spPr>
           <a:xfrm>
-            <a:off x="15570184" y="18945259"/>
+            <a:off x="15570184" y="18069259"/>
             <a:ext cx="14113138" cy="800000"/>
           </a:xfrm>
           <a:prstGeom prst="rect">
@@ -5658,14 +5513,14 @@
       </p:sp>
       <p:sp>
         <p:nvSpPr>
-          <p:cNvPr id="1023" name="본문"/>
+          <p:cNvPr id="1024" name="본문"/>
           <p:cNvSpPr txBox="1"/>
           <p:nvPr/>
         </p:nvSpPr>
         <p:spPr>
           <a:xfrm>
-            <a:off x="15570184" y="19745259"/>
-            <a:ext cx="14113138" cy="1077484"/>
+            <a:off x="15570184" y="18869259"/>
+            <a:ext cx="14113138" cy="1005551"/>
           </a:xfrm>
           <a:prstGeom prst="rect">
             <a:avLst/>
@@ -5693,7 +5548,7 @@
               </a:buBlip>
             </a:pPr>
             <a:r>
-              <a:rPr lang="ko-KR" altLang="en-US" sz="2600" b="0" dirty="0">
+              <a:rPr lang="ko-KR" altLang="en-US" sz="2400" b="0" dirty="0">
                 <a:solidFill>
                   <a:schemeClr val="tx1">
                     <a:lumMod val="85000"/>
@@ -5707,7 +5562,7 @@
               <a:t>구조 검증 </a:t>
             </a:r>
             <a:r>
-              <a:rPr lang="ko-KR" altLang="en-US" sz="2600" b="1" dirty="0">
+              <a:rPr lang="ko-KR" altLang="en-US" sz="2400" b="1" dirty="0">
                 <a:solidFill>
                   <a:schemeClr val="tx1">
                     <a:lumMod val="85000"/>
@@ -5721,7 +5576,7 @@
               <a:t>5개 항목</a:t>
             </a:r>
             <a:r>
-              <a:rPr lang="ko-KR" altLang="en-US" sz="2600" b="0" dirty="0">
+              <a:rPr lang="ko-KR" altLang="en-US" sz="2400" b="0" dirty="0">
                 <a:solidFill>
                   <a:schemeClr val="tx1">
                     <a:lumMod val="85000"/>
@@ -5735,7 +5590,7 @@
               <a:t>에서 어긋남은 0건이었고, 승인 80건 모두 </a:t>
             </a:r>
             <a:r>
-              <a:rPr lang="ko-KR" altLang="en-US" sz="2600" b="1" dirty="0">
+              <a:rPr lang="ko-KR" altLang="en-US" sz="2400" b="1" dirty="0">
                 <a:solidFill>
                   <a:schemeClr val="tx1">
                     <a:lumMod val="85000"/>
@@ -5749,7 +5604,7 @@
               <a:t>승인–운영행위–댐–상태–근거자료</a:t>
             </a:r>
             <a:r>
-              <a:rPr lang="ko-KR" altLang="en-US" sz="2600" b="0" dirty="0">
+              <a:rPr lang="ko-KR" altLang="en-US" sz="2400" b="0" dirty="0">
                 <a:solidFill>
                   <a:schemeClr val="tx1">
                     <a:lumMod val="85000"/>
@@ -5767,13 +5622,13 @@
       </p:sp>
       <p:sp>
         <p:nvSpPr>
-          <p:cNvPr id="1024" name="직사각형 1"/>
+          <p:cNvPr id="1025" name="직사각형 1"/>
           <p:cNvSpPr/>
           <p:nvPr/>
         </p:nvSpPr>
         <p:spPr>
           <a:xfrm>
-            <a:off x="15691431" y="21202743"/>
+            <a:off x="15691431" y="20254810"/>
             <a:ext cx="13943667" cy="1023024"/>
           </a:xfrm>
           <a:prstGeom prst="rect">
@@ -5826,13 +5681,13 @@
       </p:sp>
       <p:sp>
         <p:nvSpPr>
-          <p:cNvPr id="1025" name="직사각형 415"/>
+          <p:cNvPr id="1026" name="직사각형 415"/>
           <p:cNvSpPr/>
           <p:nvPr/>
         </p:nvSpPr>
         <p:spPr>
           <a:xfrm>
-            <a:off x="15803042" y="22345767"/>
+            <a:off x="15803042" y="21397834"/>
             <a:ext cx="13649422" cy="645985"/>
           </a:xfrm>
           <a:prstGeom prst="rect">
@@ -5898,14 +5753,14 @@
       </p:sp>
       <p:graphicFrame>
         <p:nvGraphicFramePr>
-          <p:cNvPr id="1026" name="표"/>
+          <p:cNvPr id="1027" name="표"/>
           <p:cNvGraphicFramePr>
             <a:graphicFrameLocks noGrp="1"/>
           </p:cNvGraphicFramePr>
           <p:nvPr/>
         </p:nvGraphicFramePr>
         <p:xfrm>
-          <a:off x="15670184" y="23081752"/>
+          <a:off x="15670184" y="22133819"/>
           <a:ext cx="13600000" cy="4542500"/>
         </p:xfrm>
         <a:graphic>
@@ -6728,14 +6583,14 @@
       </p:graphicFrame>
       <p:sp>
         <p:nvSpPr>
-          <p:cNvPr id="1027" name="본문"/>
+          <p:cNvPr id="1028" name="본문"/>
           <p:cNvSpPr txBox="1"/>
           <p:nvPr/>
         </p:nvSpPr>
         <p:spPr>
           <a:xfrm>
-            <a:off x="15570184" y="27744252"/>
-            <a:ext cx="14113138" cy="1621247"/>
+            <a:off x="15570184" y="26796319"/>
+            <a:ext cx="14113138" cy="1513348"/>
           </a:xfrm>
           <a:prstGeom prst="rect">
             <a:avLst/>
@@ -6763,7 +6618,7 @@
               </a:buBlip>
             </a:pPr>
             <a:r>
-              <a:rPr lang="ko-KR" altLang="en-US" sz="2600" b="0" dirty="0">
+              <a:rPr lang="ko-KR" altLang="en-US" sz="2400" b="0" dirty="0">
                 <a:solidFill>
                   <a:schemeClr val="tx1">
                     <a:lumMod val="85000"/>
@@ -6777,7 +6632,7 @@
               <a:t>질문 해석은 </a:t>
             </a:r>
             <a:r>
-              <a:rPr lang="ko-KR" altLang="en-US" sz="2600" b="1" dirty="0">
+              <a:rPr lang="ko-KR" altLang="en-US" sz="2400" b="1" dirty="0">
                 <a:solidFill>
                   <a:schemeClr val="tx1">
                     <a:lumMod val="85000"/>
@@ -6791,7 +6646,7 @@
               <a:t>Qwen3-8B</a:t>
             </a:r>
             <a:r>
-              <a:rPr lang="ko-KR" altLang="en-US" sz="2600" b="0" dirty="0">
+              <a:rPr lang="ko-KR" altLang="en-US" sz="2400" b="0" dirty="0">
                 <a:solidFill>
                   <a:schemeClr val="tx1">
                     <a:lumMod val="85000"/>
@@ -6818,7 +6673,7 @@
               </a:buBlip>
             </a:pPr>
             <a:r>
-              <a:rPr lang="ko-KR" altLang="en-US" sz="2600" b="0" dirty="0">
+              <a:rPr lang="ko-KR" altLang="en-US" sz="2400" b="0" dirty="0">
                 <a:solidFill>
                   <a:schemeClr val="tx1">
                     <a:lumMod val="85000"/>
@@ -6832,7 +6687,7 @@
               <a:t>숫자 계산과 비슷한 사례 선택은 </a:t>
             </a:r>
             <a:r>
-              <a:rPr lang="ko-KR" altLang="en-US" sz="2600" b="1" dirty="0">
+              <a:rPr lang="ko-KR" altLang="en-US" sz="2400" b="1" dirty="0">
                 <a:solidFill>
                   <a:schemeClr val="tx1">
                     <a:lumMod val="85000"/>
@@ -6846,7 +6701,7 @@
               <a:t>코드</a:t>
             </a:r>
             <a:r>
-              <a:rPr lang="ko-KR" altLang="en-US" sz="2600" b="0" dirty="0">
+              <a:rPr lang="ko-KR" altLang="en-US" sz="2400" b="0" dirty="0">
                 <a:solidFill>
                   <a:schemeClr val="tx1">
                     <a:lumMod val="85000"/>
@@ -6860,7 +6715,7 @@
               <a:t>가 하고, 답변은 </a:t>
             </a:r>
             <a:r>
-              <a:rPr lang="ko-KR" altLang="en-US" sz="2600" b="1" dirty="0">
+              <a:rPr lang="ko-KR" altLang="en-US" sz="2400" b="1" dirty="0">
                 <a:solidFill>
                   <a:schemeClr val="tx1">
                     <a:lumMod val="85000"/>
@@ -6874,7 +6729,7 @@
               <a:t>근거 모음</a:t>
             </a:r>
             <a:r>
-              <a:rPr lang="ko-KR" altLang="en-US" sz="2600" b="0" dirty="0">
+              <a:rPr lang="ko-KR" altLang="en-US" sz="2400" b="0" dirty="0">
                 <a:solidFill>
                   <a:schemeClr val="tx1">
                     <a:lumMod val="85000"/>
@@ -6888,7 +6743,7 @@
               <a:t>의 번호 붙은 자료를 바탕으로 </a:t>
             </a:r>
             <a:r>
-              <a:rPr lang="ko-KR" altLang="en-US" sz="2600" b="1" dirty="0">
+              <a:rPr lang="ko-KR" altLang="en-US" sz="2400" b="1" dirty="0">
                 <a:solidFill>
                   <a:schemeClr val="tx1">
                     <a:lumMod val="85000"/>
@@ -6902,7 +6757,7 @@
               <a:t>LLM</a:t>
             </a:r>
             <a:r>
-              <a:rPr lang="ko-KR" altLang="en-US" sz="2600" b="0" dirty="0">
+              <a:rPr lang="ko-KR" altLang="en-US" sz="2400" b="0" dirty="0">
                 <a:solidFill>
                   <a:schemeClr val="tx1">
                     <a:lumMod val="85000"/>
@@ -6920,13 +6775,13 @@
       </p:sp>
       <p:sp>
         <p:nvSpPr>
-          <p:cNvPr id="1028" name="직사각형 1"/>
+          <p:cNvPr id="1029" name="직사각형 1"/>
           <p:cNvSpPr/>
           <p:nvPr/>
         </p:nvSpPr>
         <p:spPr>
           <a:xfrm>
-            <a:off x="15691431" y="29745499"/>
+            <a:off x="15691431" y="28689667"/>
             <a:ext cx="13943667" cy="1023024"/>
           </a:xfrm>
           <a:prstGeom prst="rect">
@@ -6979,14 +6834,14 @@
       </p:sp>
       <p:sp>
         <p:nvSpPr>
-          <p:cNvPr id="1029" name="본문"/>
+          <p:cNvPr id="1030" name="본문"/>
           <p:cNvSpPr txBox="1"/>
           <p:nvPr/>
         </p:nvSpPr>
         <p:spPr>
           <a:xfrm>
-            <a:off x="15570184" y="30888523"/>
-            <a:ext cx="14113138" cy="3567700"/>
+            <a:off x="15570184" y="29832691"/>
+            <a:ext cx="14113138" cy="3315935"/>
           </a:xfrm>
           <a:prstGeom prst="rect">
             <a:avLst/>
@@ -7014,7 +6869,7 @@
               </a:buBlip>
             </a:pPr>
             <a:r>
-              <a:rPr lang="ko-KR" altLang="en-US" sz="2600" b="0" dirty="0">
+              <a:rPr lang="ko-KR" altLang="en-US" sz="2400" b="0" dirty="0">
                 <a:solidFill>
                   <a:schemeClr val="tx1">
                     <a:lumMod val="85000"/>
@@ -7028,7 +6883,7 @@
               <a:t>댐 운영 자료(방류 승인 기록, 수문기상 시간 자료, 규정 별표3)를 </a:t>
             </a:r>
             <a:r>
-              <a:rPr lang="ko-KR" altLang="en-US" sz="2600" b="1" dirty="0">
+              <a:rPr lang="ko-KR" altLang="en-US" sz="2400" b="1" dirty="0">
                 <a:solidFill>
                   <a:schemeClr val="tx1">
                     <a:lumMod val="85000"/>
@@ -7042,7 +6897,7 @@
               <a:t>Ontology(개체 6종류, 관계 9종류)</a:t>
             </a:r>
             <a:r>
-              <a:rPr lang="ko-KR" altLang="en-US" sz="2600" b="0" dirty="0">
+              <a:rPr lang="ko-KR" altLang="en-US" sz="2400" b="0" dirty="0">
                 <a:solidFill>
                   <a:schemeClr val="tx1">
                     <a:lumMod val="85000"/>
@@ -7056,7 +6911,7 @@
               <a:t> 에 맞춰 </a:t>
             </a:r>
             <a:r>
-              <a:rPr lang="ko-KR" altLang="en-US" sz="2600" b="1" dirty="0">
+              <a:rPr lang="ko-KR" altLang="en-US" sz="2400" b="1" dirty="0">
                 <a:solidFill>
                   <a:schemeClr val="tx1">
                     <a:lumMod val="85000"/>
@@ -7070,7 +6925,7 @@
               <a:t>KG(개체 273, 관계 457)</a:t>
             </a:r>
             <a:r>
-              <a:rPr lang="ko-KR" altLang="en-US" sz="2600" b="0" dirty="0">
+              <a:rPr lang="ko-KR" altLang="en-US" sz="2400" b="0" dirty="0">
                 <a:solidFill>
                   <a:schemeClr val="tx1">
                     <a:lumMod val="85000"/>
@@ -7097,49 +6952,49 @@
               </a:buBlip>
             </a:pPr>
             <a:r>
-              <a:rPr lang="ko-KR" altLang="en-US" sz="2600" b="0" dirty="0">
-                <a:solidFill>
-                  <a:schemeClr val="tx1">
-                    <a:lumMod val="85000"/>
-                    <a:lumOff val="15000"/>
-                  </a:schemeClr>
-                </a:solidFill>
-                <a:latin typeface="나눔고딕" pitchFamily="50" charset="-127"/>
-                <a:ea typeface="나눔고딕" pitchFamily="50" charset="-127"/>
-                <a:cs typeface="Arial" panose="020B0604020202020204" pitchFamily="34" charset="0"/>
-              </a:rPr>
-              <a:t>KG와 측정자료·문서 저장소를 함께 찾는 </a:t>
-            </a:r>
-            <a:r>
-              <a:rPr lang="ko-KR" altLang="en-US" sz="2600" b="1" dirty="0">
-                <a:solidFill>
-                  <a:schemeClr val="tx1">
-                    <a:lumMod val="85000"/>
-                    <a:lumOff val="15000"/>
-                  </a:schemeClr>
-                </a:solidFill>
-                <a:latin typeface="나눔고딕" pitchFamily="50" charset="-127"/>
-                <a:ea typeface="나눔고딕" pitchFamily="50" charset="-127"/>
-                <a:cs typeface="Arial" panose="020B0604020202020204" pitchFamily="34" charset="0"/>
-              </a:rPr>
-              <a:t>하이브리드 검색</a:t>
-            </a:r>
-            <a:r>
-              <a:rPr lang="ko-KR" altLang="en-US" sz="2600" b="0" dirty="0">
-                <a:solidFill>
-                  <a:schemeClr val="tx1">
-                    <a:lumMod val="85000"/>
-                    <a:lumOff val="15000"/>
-                  </a:schemeClr>
-                </a:solidFill>
-                <a:latin typeface="나눔고딕" pitchFamily="50" charset="-127"/>
-                <a:ea typeface="나눔고딕" pitchFamily="50" charset="-127"/>
-                <a:cs typeface="Arial" panose="020B0604020202020204" pitchFamily="34" charset="0"/>
-              </a:rPr>
-              <a:t>과, 출처 번호가 붙은 근거 안에서 답하는 </a:t>
-            </a:r>
-            <a:r>
-              <a:rPr lang="ko-KR" altLang="en-US" sz="2600" b="1" dirty="0">
+              <a:rPr lang="ko-KR" altLang="en-US" sz="2400" b="0" dirty="0">
+                <a:solidFill>
+                  <a:schemeClr val="tx1">
+                    <a:lumMod val="85000"/>
+                    <a:lumOff val="15000"/>
+                  </a:schemeClr>
+                </a:solidFill>
+                <a:latin typeface="나눔고딕" pitchFamily="50" charset="-127"/>
+                <a:ea typeface="나눔고딕" pitchFamily="50" charset="-127"/>
+                <a:cs typeface="Arial" panose="020B0604020202020204" pitchFamily="34" charset="0"/>
+              </a:rPr>
+              <a:t>KG와 측정자료·문서 저장소에서 근거를 찾는 </a:t>
+            </a:r>
+            <a:r>
+              <a:rPr lang="ko-KR" altLang="en-US" sz="2400" b="1" dirty="0">
+                <a:solidFill>
+                  <a:schemeClr val="tx1">
+                    <a:lumMod val="85000"/>
+                    <a:lumOff val="15000"/>
+                  </a:schemeClr>
+                </a:solidFill>
+                <a:latin typeface="나눔고딕" pitchFamily="50" charset="-127"/>
+                <a:ea typeface="나눔고딕" pitchFamily="50" charset="-127"/>
+                <a:cs typeface="Arial" panose="020B0604020202020204" pitchFamily="34" charset="0"/>
+              </a:rPr>
+              <a:t>RAG</a:t>
+            </a:r>
+            <a:r>
+              <a:rPr lang="ko-KR" altLang="en-US" sz="2400" b="0" dirty="0">
+                <a:solidFill>
+                  <a:schemeClr val="tx1">
+                    <a:lumMod val="85000"/>
+                    <a:lumOff val="15000"/>
+                  </a:schemeClr>
+                </a:solidFill>
+                <a:latin typeface="나눔고딕" pitchFamily="50" charset="-127"/>
+                <a:ea typeface="나눔고딕" pitchFamily="50" charset="-127"/>
+                <a:cs typeface="Arial" panose="020B0604020202020204" pitchFamily="34" charset="0"/>
+              </a:rPr>
+              <a:t>와, 출처 번호가 붙은 근거 안에서 답하는 </a:t>
+            </a:r>
+            <a:r>
+              <a:rPr lang="ko-KR" altLang="en-US" sz="2400" b="1" dirty="0">
                 <a:solidFill>
                   <a:schemeClr val="tx1">
                     <a:lumMod val="85000"/>
@@ -7153,7 +7008,7 @@
               <a:t>LLM</a:t>
             </a:r>
             <a:r>
-              <a:rPr lang="ko-KR" altLang="en-US" sz="2600" b="0" dirty="0">
+              <a:rPr lang="ko-KR" altLang="en-US" sz="2400" b="0" dirty="0">
                 <a:solidFill>
                   <a:schemeClr val="tx1">
                     <a:lumMod val="85000"/>
@@ -7167,7 +7022,7 @@
               <a:t>을 연계한 </a:t>
             </a:r>
             <a:r>
-              <a:rPr lang="ko-KR" altLang="en-US" sz="2600" b="1" dirty="0">
+              <a:rPr lang="ko-KR" altLang="en-US" sz="2400" b="1" dirty="0">
                 <a:solidFill>
                   <a:schemeClr val="tx1">
                     <a:lumMod val="85000"/>
@@ -7181,7 +7036,7 @@
               <a:t>질문 응답 프레임워크</a:t>
             </a:r>
             <a:r>
-              <a:rPr lang="ko-KR" altLang="en-US" sz="2600" b="0" dirty="0">
+              <a:rPr lang="ko-KR" altLang="en-US" sz="2400" b="0" dirty="0">
                 <a:solidFill>
                   <a:schemeClr val="tx1">
                     <a:lumMod val="85000"/>
@@ -7208,7 +7063,7 @@
               </a:buBlip>
             </a:pPr>
             <a:r>
-              <a:rPr lang="ko-KR" altLang="en-US" sz="2600" b="0" dirty="0">
+              <a:rPr lang="ko-KR" altLang="en-US" sz="2400" b="0" dirty="0">
                 <a:solidFill>
                   <a:schemeClr val="tx1">
                     <a:lumMod val="85000"/>
@@ -7222,7 +7077,7 @@
               <a:t>운영자가 현재 상태, 제한수위, 과거 승인·운영행위, 비슷한 과거 사례를 </a:t>
             </a:r>
             <a:r>
-              <a:rPr lang="ko-KR" altLang="en-US" sz="2600" b="1" dirty="0">
+              <a:rPr lang="ko-KR" altLang="en-US" sz="2400" b="1" dirty="0">
                 <a:solidFill>
                   <a:schemeClr val="tx1">
                     <a:lumMod val="85000"/>
@@ -7236,7 +7091,7 @@
               <a:t>근거와 함께</a:t>
             </a:r>
             <a:r>
-              <a:rPr lang="ko-KR" altLang="en-US" sz="2600" b="0" dirty="0">
+              <a:rPr lang="ko-KR" altLang="en-US" sz="2400" b="0" dirty="0">
                 <a:solidFill>
                   <a:schemeClr val="tx1">
                     <a:lumMod val="85000"/>
@@ -7250,7 +7105,7 @@
               <a:t> 확인할 수 있어 </a:t>
             </a:r>
             <a:r>
-              <a:rPr lang="ko-KR" altLang="en-US" sz="2600" b="1" dirty="0">
+              <a:rPr lang="ko-KR" altLang="en-US" sz="2400" b="1" dirty="0">
                 <a:solidFill>
                   <a:schemeClr val="tx1">
                     <a:lumMod val="85000"/>
@@ -7264,7 +7119,7 @@
               <a:t>댐 운영 의사결정을 지원</a:t>
             </a:r>
             <a:r>
-              <a:rPr lang="ko-KR" altLang="en-US" sz="2600" b="0" dirty="0">
+              <a:rPr lang="ko-KR" altLang="en-US" sz="2400" b="0" dirty="0">
                 <a:solidFill>
                   <a:schemeClr val="tx1">
                     <a:lumMod val="85000"/>
@@ -7282,13 +7137,13 @@
       </p:sp>
       <p:sp>
         <p:nvSpPr>
-          <p:cNvPr id="1030" name="직사각형 1"/>
+          <p:cNvPr id="1031" name="직사각형 1"/>
           <p:cNvSpPr/>
           <p:nvPr/>
         </p:nvSpPr>
         <p:spPr>
           <a:xfrm>
-            <a:off x="15691431" y="34836223"/>
+            <a:off x="15691431" y="33528626"/>
             <a:ext cx="13943667" cy="1023024"/>
           </a:xfrm>
           <a:prstGeom prst="rect">
@@ -7341,13 +7196,13 @@
       </p:sp>
       <p:sp>
         <p:nvSpPr>
-          <p:cNvPr id="1031" name="본문"/>
+          <p:cNvPr id="1032" name="본문"/>
           <p:cNvSpPr txBox="1"/>
           <p:nvPr/>
         </p:nvSpPr>
         <p:spPr>
           <a:xfrm>
-            <a:off x="15570184" y="35979247"/>
+            <a:off x="15570184" y="34671650"/>
             <a:ext cx="14113138" cy="1221350"/>
           </a:xfrm>
           <a:prstGeom prst="rect">
@@ -7392,13 +7247,13 @@
       </p:sp>
       <p:sp>
         <p:nvSpPr>
-          <p:cNvPr id="1032" name="직사각형 1"/>
+          <p:cNvPr id="1033" name="직사각형 1"/>
           <p:cNvSpPr/>
           <p:nvPr/>
         </p:nvSpPr>
         <p:spPr>
           <a:xfrm>
-            <a:off x="15691431" y="37350597"/>
+            <a:off x="15691431" y="36043000"/>
             <a:ext cx="13943667" cy="1023024"/>
           </a:xfrm>
           <a:prstGeom prst="rect">
@@ -7451,14 +7306,14 @@
       </p:sp>
       <p:sp>
         <p:nvSpPr>
-          <p:cNvPr id="1033" name="본문"/>
+          <p:cNvPr id="1034" name="본문"/>
           <p:cNvSpPr txBox="1"/>
           <p:nvPr/>
         </p:nvSpPr>
         <p:spPr>
           <a:xfrm>
-            <a:off x="15570184" y="38493621"/>
-            <a:ext cx="14113138" cy="2808138"/>
+            <a:off x="15570184" y="37186024"/>
+            <a:ext cx="14113138" cy="4179129"/>
           </a:xfrm>
           <a:prstGeom prst="rect">
             <a:avLst/>
@@ -7570,7 +7425,57 @@
                 <a:ea typeface="나눔고딕" pitchFamily="50" charset="-127"/>
                 <a:cs typeface="Arial" panose="020B0604020202020204" pitchFamily="34" charset="0"/>
               </a:rPr>
-              <a:t>4. Noy, N. F. and McGuinness, D. L. (2001). “Ontology development 101: A guide to creating your first ontology.” Stanford Knowledge Systems Laboratory Technical Report KSL-01-05.</a:t>
+              <a:t>4. Lewis, P. et al. (2020). “Retrieval-augmented generation for knowledge-intensive NLP tasks.” Advances in Neural Information Processing Systems, Vol. 33, pp. 9459-9474.</a:t>
+            </a:r>
+          </a:p>
+          <a:p>
+            <a:pPr marL="0" indent="0">
+              <a:lnSpc>
+                <a:spcPct val="118000"/>
+              </a:lnSpc>
+              <a:spcAft>
+                <a:spcPts val="300"/>
+              </a:spcAft>
+              <a:buNone/>
+            </a:pPr>
+            <a:r>
+              <a:rPr lang="ko-KR" altLang="en-US" sz="1800" b="0" dirty="0">
+                <a:solidFill>
+                  <a:schemeClr val="tx1">
+                    <a:lumMod val="85000"/>
+                    <a:lumOff val="15000"/>
+                  </a:schemeClr>
+                </a:solidFill>
+                <a:latin typeface="나눔고딕" pitchFamily="50" charset="-127"/>
+                <a:ea typeface="나눔고딕" pitchFamily="50" charset="-127"/>
+                <a:cs typeface="Arial" panose="020B0604020202020204" pitchFamily="34" charset="0"/>
+              </a:rPr>
+              <a:t>5. Angles, R. and Gutierrez, C. (2008). “Survey of graph database models.” ACM Computing Surveys, Vol. 40, No. 1, Article 1.</a:t>
+            </a:r>
+          </a:p>
+          <a:p>
+            <a:pPr marL="0" indent="0">
+              <a:lnSpc>
+                <a:spcPct val="118000"/>
+              </a:lnSpc>
+              <a:spcAft>
+                <a:spcPts val="300"/>
+              </a:spcAft>
+              <a:buNone/>
+            </a:pPr>
+            <a:r>
+              <a:rPr lang="ko-KR" altLang="en-US" sz="1800" b="0" dirty="0">
+                <a:solidFill>
+                  <a:schemeClr val="tx1">
+                    <a:lumMod val="85000"/>
+                    <a:lumOff val="15000"/>
+                  </a:schemeClr>
+                </a:solidFill>
+                <a:latin typeface="나눔고딕" pitchFamily="50" charset="-127"/>
+                <a:ea typeface="나눔고딕" pitchFamily="50" charset="-127"/>
+                <a:cs typeface="Arial" panose="020B0604020202020204" pitchFamily="34" charset="0"/>
+              </a:rPr>
+              <a:t>6. Noy, N. F. and McGuinness, D. L. (2001). “Ontology development 101: A guide to creating your first ontology.” Stanford Knowledge Systems Laboratory Technical Report KSL-01-05.</a:t>
             </a:r>
           </a:p>
         </p:txBody>

--- a/lab_meeting/학회포스터_초안.pptx
+++ b/lab_meeting/학회포스터_초안.pptx
@@ -3253,124 +3253,9 @@
           </a:graphicData>
         </a:graphic>
       </p:graphicFrame>
-      <p:sp>
-        <p:nvSpPr>
-          <p:cNvPr id="1011" name="Cypher 예시"/>
-          <p:cNvSpPr txBox="1"/>
-          <p:nvPr/>
-        </p:nvSpPr>
-        <p:spPr>
-          <a:xfrm>
-            <a:off x="697946" y="17929718"/>
-            <a:ext cx="13913138" cy="1856033"/>
-          </a:xfrm>
-          <a:prstGeom prst="rect">
-            <a:avLst/>
-          </a:prstGeom>
-          <a:solidFill>
-            <a:srgbClr val="F2F2F2"/>
-          </a:solidFill>
-          <a:ln w="19050">
-            <a:solidFill>
-              <a:srgbClr val="888888"/>
-            </a:solidFill>
-          </a:ln>
-        </p:spPr>
-        <p:txBody>
-          <a:bodyPr wrap="square" lIns="150000" tIns="33079" rIns="150000" bIns="33079" anchor="t">
-            <a:noAutofit/>
-          </a:bodyPr>
-          <a:lstStyle/>
-          <a:p>
-            <a:pPr marL="0" indent="0">
-              <a:lnSpc>
-                <a:spcPct val="110000"/>
-              </a:lnSpc>
-              <a:buNone/>
-            </a:pPr>
-            <a:r>
-              <a:rPr lang="en-US" altLang="ko-KR" sz="1900" b="0" dirty="0">
-                <a:solidFill>
-                  <a:schemeClr val="tx1">
-                    <a:lumMod val="85000"/>
-                    <a:lumOff val="15000"/>
-                  </a:schemeClr>
-                </a:solidFill>
-                <a:latin typeface="Consolas"/>
-                <a:ea typeface="나눔고딕" pitchFamily="50" charset="-127"/>
-              </a:rPr>
-              <a:t>MATCH (a:Approval)-[:authorizes]-&gt;(o:Operation)</a:t>
-            </a:r>
-          </a:p>
-          <a:p>
-            <a:pPr marL="0" indent="0">
-              <a:lnSpc>
-                <a:spcPct val="110000"/>
-              </a:lnSpc>
-              <a:buNone/>
-            </a:pPr>
-            <a:r>
-              <a:rPr lang="en-US" altLang="ko-KR" sz="1900" b="0" dirty="0">
-                <a:solidFill>
-                  <a:schemeClr val="tx1">
-                    <a:lumMod val="85000"/>
-                    <a:lumOff val="15000"/>
-                  </a:schemeClr>
-                </a:solidFill>
-                <a:latin typeface="Consolas"/>
-                <a:ea typeface="나눔고딕" pitchFamily="50" charset="-127"/>
-              </a:rPr>
-              <a:t>      -[:performedOnDam]-&gt;(d:Dam {damName: '충주댐'})</a:t>
-            </a:r>
-          </a:p>
-          <a:p>
-            <a:pPr marL="0" indent="0">
-              <a:lnSpc>
-                <a:spcPct val="110000"/>
-              </a:lnSpc>
-              <a:buNone/>
-            </a:pPr>
-            <a:r>
-              <a:rPr lang="en-US" altLang="ko-KR" sz="1900" b="0" dirty="0">
-                <a:solidFill>
-                  <a:schemeClr val="tx1">
-                    <a:lumMod val="85000"/>
-                    <a:lumOff val="15000"/>
-                  </a:schemeClr>
-                </a:solidFill>
-                <a:latin typeface="Consolas"/>
-                <a:ea typeface="나눔고딕" pitchFamily="50" charset="-127"/>
-              </a:rPr>
-              <a:t>RETURN a, o</a:t>
-            </a:r>
-          </a:p>
-          <a:p>
-            <a:pPr marL="0" indent="0">
-              <a:lnSpc>
-                <a:spcPct val="110000"/>
-              </a:lnSpc>
-              <a:spcBef>
-                <a:spcPts val="600"/>
-              </a:spcBef>
-              <a:buNone/>
-            </a:pPr>
-            <a:r>
-              <a:rPr lang="ko-KR" altLang="en-US" sz="2000" b="0" dirty="0">
-                <a:solidFill>
-                  <a:srgbClr val="444444"/>
-                </a:solidFill>
-                <a:latin typeface="나눔고딕" pitchFamily="50" charset="-127"/>
-                <a:ea typeface="나눔고딕" pitchFamily="50" charset="-127"/>
-                <a:cs typeface="Arial" panose="020B0604020202020204" pitchFamily="34" charset="0"/>
-              </a:rPr>
-              <a:t>예) CQ3 “충주댐의 과거 운영행위는?”을 찾는 Cypher: 승인(Approval)이 허가한(authorizes) 운영행위(Operation) 중 충주댐(Dam)에서 수행된(performedOnDam) 것을 찾는다</a:t>
-            </a:r>
-          </a:p>
-        </p:txBody>
-      </p:sp>
       <p:pic>
         <p:nvPicPr>
-          <p:cNvPr id="1012" name="그림 1. 연구의 구성: Ontology 설계 → KG 구축 → 질문 응답(RAG)" descr="그림 1. 연구의 구성: Ontology 설계 → KG 구축 → 질문 응답(RAG)"/>
+          <p:cNvPr id="1011" name="그림 1. 연구의 구성: Ontology 설계 → KG 구축 → 질문 응답(RAG)" descr="그림 1. 연구의 구성: Ontology 설계 → KG 구축 → 질문 응답(RAG)"/>
           <p:cNvPicPr>
             <a:picLocks noChangeAspect="1"/>
           </p:cNvPicPr>
@@ -3384,7 +3269,7 @@
         </p:blipFill>
         <p:spPr>
           <a:xfrm>
-            <a:off x="1204515" y="20045751"/>
+            <a:off x="1204515" y="18189718"/>
             <a:ext cx="12900000" cy="9085285"/>
           </a:xfrm>
           <a:prstGeom prst="rect">
@@ -3399,13 +3284,13 @@
       </p:pic>
       <p:sp>
         <p:nvSpPr>
-          <p:cNvPr id="1013" name="본문"/>
+          <p:cNvPr id="1012" name="본문"/>
           <p:cNvSpPr txBox="1"/>
           <p:nvPr/>
         </p:nvSpPr>
         <p:spPr>
           <a:xfrm>
-            <a:off x="597946" y="29191036"/>
+            <a:off x="597946" y="27335003"/>
             <a:ext cx="14113138" cy="800000"/>
           </a:xfrm>
           <a:prstGeom prst="rect">
@@ -3450,13 +3335,13 @@
       </p:sp>
       <p:sp>
         <p:nvSpPr>
-          <p:cNvPr id="1014" name="본문"/>
+          <p:cNvPr id="1013" name="본문"/>
           <p:cNvSpPr txBox="1"/>
           <p:nvPr/>
         </p:nvSpPr>
         <p:spPr>
           <a:xfrm>
-            <a:off x="597946" y="29991036"/>
+            <a:off x="597946" y="28135003"/>
             <a:ext cx="14113138" cy="4179129"/>
           </a:xfrm>
           <a:prstGeom prst="rect">
@@ -3739,13 +3624,13 @@
       </p:sp>
       <p:sp>
         <p:nvSpPr>
-          <p:cNvPr id="1015" name="직사각형 1"/>
+          <p:cNvPr id="1014" name="직사각형 1"/>
           <p:cNvSpPr/>
           <p:nvPr/>
         </p:nvSpPr>
         <p:spPr>
           <a:xfrm>
-            <a:off x="674157" y="34430165"/>
+            <a:off x="674157" y="32574132"/>
             <a:ext cx="13943667" cy="1023024"/>
           </a:xfrm>
           <a:prstGeom prst="rect">
@@ -3798,13 +3683,13 @@
       </p:sp>
       <p:sp>
         <p:nvSpPr>
-          <p:cNvPr id="1016" name="직사각형 415"/>
+          <p:cNvPr id="1015" name="직사각형 415"/>
           <p:cNvSpPr/>
           <p:nvPr/>
         </p:nvSpPr>
         <p:spPr>
           <a:xfrm>
-            <a:off x="830804" y="35573189"/>
+            <a:off x="830804" y="33717156"/>
             <a:ext cx="13649422" cy="645985"/>
           </a:xfrm>
           <a:prstGeom prst="rect">
@@ -3870,14 +3755,14 @@
       </p:sp>
       <p:graphicFrame>
         <p:nvGraphicFramePr>
-          <p:cNvPr id="1017" name="표"/>
+          <p:cNvPr id="1016" name="표"/>
           <p:cNvGraphicFramePr>
             <a:graphicFrameLocks noGrp="1"/>
           </p:cNvGraphicFramePr>
           <p:nvPr/>
         </p:nvGraphicFramePr>
         <p:xfrm>
-          <a:off x="697946" y="36309174"/>
+          <a:off x="697946" y="34453141"/>
           <a:ext cx="13600000" cy="2346250"/>
         </p:xfrm>
         <a:graphic>
@@ -4518,13 +4403,13 @@
       </p:graphicFrame>
       <p:sp>
         <p:nvSpPr>
-          <p:cNvPr id="1018" name="본문"/>
+          <p:cNvPr id="1017" name="본문"/>
           <p:cNvSpPr txBox="1"/>
           <p:nvPr/>
         </p:nvSpPr>
         <p:spPr>
           <a:xfrm>
-            <a:off x="597946" y="38775424"/>
+            <a:off x="597946" y="36919391"/>
             <a:ext cx="14113138" cy="1944945"/>
           </a:xfrm>
           <a:prstGeom prst="rect">
@@ -4654,7 +4539,7 @@
       </p:sp>
       <p:sp>
         <p:nvSpPr>
-          <p:cNvPr id="1019" name="직사각형 1"/>
+          <p:cNvPr id="1018" name="직사각형 1"/>
           <p:cNvSpPr/>
           <p:nvPr/>
         </p:nvSpPr>
@@ -4713,7 +4598,7 @@
       </p:sp>
       <p:sp>
         <p:nvSpPr>
-          <p:cNvPr id="1020" name="직사각형 415"/>
+          <p:cNvPr id="1019" name="직사각형 415"/>
           <p:cNvSpPr/>
           <p:nvPr/>
         </p:nvSpPr>
@@ -4785,7 +4670,7 @@
       </p:sp>
       <p:graphicFrame>
         <p:nvGraphicFramePr>
-          <p:cNvPr id="1021" name="표"/>
+          <p:cNvPr id="1020" name="표"/>
           <p:cNvGraphicFramePr>
             <a:graphicFrameLocks noGrp="1"/>
           </p:cNvGraphicFramePr>
@@ -5433,7 +5318,7 @@
       </p:graphicFrame>
       <p:pic>
         <p:nvPicPr>
-          <p:cNvPr id="1022" name="그림 2. 지식그래프의 일부: 충주댐 승인 1368번" descr="그림 2. 지식그래프의 일부: 충주댐 승인 1368번"/>
+          <p:cNvPr id="1021" name="그림 2. 지식그래프의 일부: 충주댐 승인 1368번" descr="그림 2. 지식그래프의 일부: 충주댐 승인 1368번"/>
           <p:cNvPicPr>
             <a:picLocks noChangeAspect="1"/>
           </p:cNvPicPr>
@@ -5462,7 +5347,7 @@
       </p:pic>
       <p:sp>
         <p:nvSpPr>
-          <p:cNvPr id="1023" name="본문"/>
+          <p:cNvPr id="1022" name="본문"/>
           <p:cNvSpPr txBox="1"/>
           <p:nvPr/>
         </p:nvSpPr>
@@ -5513,7 +5398,7 @@
       </p:sp>
       <p:sp>
         <p:nvSpPr>
-          <p:cNvPr id="1024" name="본문"/>
+          <p:cNvPr id="1023" name="본문"/>
           <p:cNvSpPr txBox="1"/>
           <p:nvPr/>
         </p:nvSpPr>
@@ -5622,7 +5507,7 @@
       </p:sp>
       <p:sp>
         <p:nvSpPr>
-          <p:cNvPr id="1025" name="직사각형 1"/>
+          <p:cNvPr id="1024" name="직사각형 1"/>
           <p:cNvSpPr/>
           <p:nvPr/>
         </p:nvSpPr>
@@ -5681,7 +5566,7 @@
       </p:sp>
       <p:sp>
         <p:nvSpPr>
-          <p:cNvPr id="1026" name="직사각형 415"/>
+          <p:cNvPr id="1025" name="직사각형 415"/>
           <p:cNvSpPr/>
           <p:nvPr/>
         </p:nvSpPr>
@@ -5753,7 +5638,7 @@
       </p:sp>
       <p:graphicFrame>
         <p:nvGraphicFramePr>
-          <p:cNvPr id="1027" name="표"/>
+          <p:cNvPr id="1026" name="표"/>
           <p:cNvGraphicFramePr>
             <a:graphicFrameLocks noGrp="1"/>
           </p:cNvGraphicFramePr>
@@ -6583,7 +6468,7 @@
       </p:graphicFrame>
       <p:sp>
         <p:nvSpPr>
-          <p:cNvPr id="1028" name="본문"/>
+          <p:cNvPr id="1027" name="본문"/>
           <p:cNvSpPr txBox="1"/>
           <p:nvPr/>
         </p:nvSpPr>
@@ -6775,7 +6660,7 @@
       </p:sp>
       <p:sp>
         <p:nvSpPr>
-          <p:cNvPr id="1029" name="직사각형 1"/>
+          <p:cNvPr id="1028" name="직사각형 1"/>
           <p:cNvSpPr/>
           <p:nvPr/>
         </p:nvSpPr>
@@ -6834,7 +6719,7 @@
       </p:sp>
       <p:sp>
         <p:nvSpPr>
-          <p:cNvPr id="1030" name="본문"/>
+          <p:cNvPr id="1029" name="본문"/>
           <p:cNvSpPr txBox="1"/>
           <p:nvPr/>
         </p:nvSpPr>
@@ -7137,7 +7022,7 @@
       </p:sp>
       <p:sp>
         <p:nvSpPr>
-          <p:cNvPr id="1031" name="직사각형 1"/>
+          <p:cNvPr id="1030" name="직사각형 1"/>
           <p:cNvSpPr/>
           <p:nvPr/>
         </p:nvSpPr>
@@ -7196,7 +7081,7 @@
       </p:sp>
       <p:sp>
         <p:nvSpPr>
-          <p:cNvPr id="1032" name="본문"/>
+          <p:cNvPr id="1031" name="본문"/>
           <p:cNvSpPr txBox="1"/>
           <p:nvPr/>
         </p:nvSpPr>
@@ -7247,7 +7132,7 @@
       </p:sp>
       <p:sp>
         <p:nvSpPr>
-          <p:cNvPr id="1033" name="직사각형 1"/>
+          <p:cNvPr id="1032" name="직사각형 1"/>
           <p:cNvSpPr/>
           <p:nvPr/>
         </p:nvSpPr>
@@ -7306,7 +7191,7 @@
       </p:sp>
       <p:sp>
         <p:nvSpPr>
-          <p:cNvPr id="1034" name="본문"/>
+          <p:cNvPr id="1033" name="본문"/>
           <p:cNvSpPr txBox="1"/>
           <p:nvPr/>
         </p:nvSpPr>

--- a/lab_meeting/학회포스터_초안.pptx
+++ b/lab_meeting/학회포스터_초안.pptx
@@ -2212,7 +2212,7 @@
                 <a:ea typeface="나눔고딕 ExtraBold" panose="020D0904000000000000" pitchFamily="50" charset="-127"/>
                 <a:cs typeface="Arial Unicode MS" panose="020B0604020202020204" pitchFamily="50" charset="-127"/>
               </a:rPr>
-              <a:t>연구방법</a:t>
+              <a:t>핵심 용어</a:t>
             </a:r>
           </a:p>
         </p:txBody>
@@ -2299,16 +2299,15 @@
         </p:nvGraphicFramePr>
         <p:xfrm>
           <a:off x="697946" y="13067968"/>
-          <a:ext cx="13500000" cy="4741750"/>
+          <a:ext cx="13500000" cy="7936500"/>
         </p:xfrm>
         <a:graphic>
           <a:graphicData uri="http://schemas.openxmlformats.org/drawingml/2006/table">
             <a:tbl>
               <a:tblPr firstRow="1" bandRow="1"/>
               <a:tblGrid>
-                <a:gridCol w="2800000"/>
-                <a:gridCol w="6900000"/>
-                <a:gridCol w="3800000"/>
+                <a:gridCol w="2900000"/>
+                <a:gridCol w="10600000"/>
               </a:tblGrid>
               <a:tr h="499250">
                 <a:tc>
@@ -2380,55 +2379,6 @@
                           <a:cs typeface="Arial" panose="020B0604020202020204" pitchFamily="34" charset="0"/>
                         </a:rPr>
                         <a:t>설명</a:t>
-                      </a:r>
-                    </a:p>
-                  </a:txBody>
-                  <a:tcPr marL="91440" marR="91440" marT="60000" marB="60000" anchor="ctr">
-                    <a:lnL w="9525">
-                      <a:solidFill>
-                        <a:srgbClr val="9AA7B5"/>
-                      </a:solidFill>
-                    </a:lnL>
-                    <a:lnR w="9525">
-                      <a:solidFill>
-                        <a:srgbClr val="9AA7B5"/>
-                      </a:solidFill>
-                    </a:lnR>
-                    <a:lnT w="9525">
-                      <a:solidFill>
-                        <a:srgbClr val="9AA7B5"/>
-                      </a:solidFill>
-                    </a:lnT>
-                    <a:lnB w="9525">
-                      <a:solidFill>
-                        <a:srgbClr val="9AA7B5"/>
-                      </a:solidFill>
-                    </a:lnB>
-                    <a:solidFill>
-                      <a:srgbClr val="1F4E79"/>
-                    </a:solidFill>
-                  </a:tcPr>
-                </a:tc>
-                <a:tc>
-                  <a:txBody>
-                    <a:bodyPr/>
-                    <a:lstStyle/>
-                    <a:p>
-                      <a:pPr algn="ctr">
-                        <a:lnSpc>
-                          <a:spcPct val="105000"/>
-                        </a:lnSpc>
-                      </a:pPr>
-                      <a:r>
-                        <a:rPr lang="ko-KR" altLang="en-US" sz="2200" b="1" dirty="0">
-                          <a:solidFill>
-                            <a:schemeClr val="bg1"/>
-                          </a:solidFill>
-                          <a:latin typeface="나눔고딕" pitchFamily="50" charset="-127"/>
-                          <a:ea typeface="나눔고딕" pitchFamily="50" charset="-127"/>
-                          <a:cs typeface="Arial" panose="020B0604020202020204" pitchFamily="34" charset="0"/>
-                        </a:rPr>
-                        <a:t>본 연구에서</a:t>
                       </a:r>
                     </a:p>
                   </a:txBody>
@@ -2534,7 +2484,167 @@
                           <a:ea typeface="나눔고딕" pitchFamily="50" charset="-127"/>
                           <a:cs typeface="Arial" panose="020B0604020202020204" pitchFamily="34" charset="0"/>
                         </a:rPr>
-                        <a:t>대상(Class)과 대상 사이의 관계를 미리 정해 둔 개념 설계도</a:t>
+                        <a:t>댐 운영 분야의 대상 종류와 관계·속성을 정리한 의미 구조. 실제 운영 자료는 포함하지 않음</a:t>
+                      </a:r>
+                    </a:p>
+                  </a:txBody>
+                  <a:tcPr marL="91440" marR="91440" marT="60000" marB="60000" anchor="ctr">
+                    <a:lnL w="9525">
+                      <a:solidFill>
+                        <a:srgbClr val="9AA7B5"/>
+                      </a:solidFill>
+                    </a:lnL>
+                    <a:lnR w="9525">
+                      <a:solidFill>
+                        <a:srgbClr val="9AA7B5"/>
+                      </a:solidFill>
+                    </a:lnR>
+                    <a:lnT w="9525">
+                      <a:solidFill>
+                        <a:srgbClr val="9AA7B5"/>
+                      </a:solidFill>
+                    </a:lnT>
+                    <a:lnB w="9525">
+                      <a:solidFill>
+                        <a:srgbClr val="9AA7B5"/>
+                      </a:solidFill>
+                    </a:lnB>
+                    <a:solidFill>
+                      <a:srgbClr val="FFFFFF"/>
+                    </a:solidFill>
+                  </a:tcPr>
+                </a:tc>
+              </a:tr>
+              <a:tr h="499250">
+                <a:tc>
+                  <a:txBody>
+                    <a:bodyPr/>
+                    <a:lstStyle/>
+                    <a:p>
+                      <a:pPr algn="l">
+                        <a:lnSpc>
+                          <a:spcPct val="105000"/>
+                        </a:lnSpc>
+                      </a:pPr>
+                      <a:r>
+                        <a:rPr lang="ko-KR" altLang="en-US" sz="2200" b="1" dirty="0">
+                          <a:solidFill>
+                            <a:schemeClr val="tx1">
+                              <a:lumMod val="85000"/>
+                              <a:lumOff val="15000"/>
+                            </a:schemeClr>
+                          </a:solidFill>
+                          <a:latin typeface="나눔고딕" pitchFamily="50" charset="-127"/>
+                          <a:ea typeface="나눔고딕" pitchFamily="50" charset="-127"/>
+                          <a:cs typeface="Arial" panose="020B0604020202020204" pitchFamily="34" charset="0"/>
+                        </a:rPr>
+                        <a:t>Class / Entity</a:t>
+                      </a:r>
+                    </a:p>
+                  </a:txBody>
+                  <a:tcPr marL="91440" marR="91440" marT="60000" marB="60000" anchor="ctr">
+                    <a:lnL w="9525">
+                      <a:solidFill>
+                        <a:srgbClr val="9AA7B5"/>
+                      </a:solidFill>
+                    </a:lnL>
+                    <a:lnR w="9525">
+                      <a:solidFill>
+                        <a:srgbClr val="9AA7B5"/>
+                      </a:solidFill>
+                    </a:lnR>
+                    <a:lnT w="9525">
+                      <a:solidFill>
+                        <a:srgbClr val="9AA7B5"/>
+                      </a:solidFill>
+                    </a:lnT>
+                    <a:lnB w="9525">
+                      <a:solidFill>
+                        <a:srgbClr val="9AA7B5"/>
+                      </a:solidFill>
+                    </a:lnB>
+                    <a:solidFill>
+                      <a:srgbClr val="EEF3F8"/>
+                    </a:solidFill>
+                  </a:tcPr>
+                </a:tc>
+                <a:tc>
+                  <a:txBody>
+                    <a:bodyPr/>
+                    <a:lstStyle/>
+                    <a:p>
+                      <a:pPr algn="l">
+                        <a:lnSpc>
+                          <a:spcPct val="105000"/>
+                        </a:lnSpc>
+                      </a:pPr>
+                      <a:r>
+                        <a:rPr lang="ko-KR" altLang="en-US" sz="2200" b="0" dirty="0">
+                          <a:solidFill>
+                            <a:schemeClr val="tx1">
+                              <a:lumMod val="85000"/>
+                              <a:lumOff val="15000"/>
+                            </a:schemeClr>
+                          </a:solidFill>
+                          <a:latin typeface="나눔고딕" pitchFamily="50" charset="-127"/>
+                          <a:ea typeface="나눔고딕" pitchFamily="50" charset="-127"/>
+                          <a:cs typeface="Arial" panose="020B0604020202020204" pitchFamily="34" charset="0"/>
+                        </a:rPr>
+                        <a:t>Class는 대상의 종류(예: 댐, 방류 승인), Entity는 그 실제 개체(예: 충주댐)</a:t>
+                      </a:r>
+                    </a:p>
+                  </a:txBody>
+                  <a:tcPr marL="91440" marR="91440" marT="60000" marB="60000" anchor="ctr">
+                    <a:lnL w="9525">
+                      <a:solidFill>
+                        <a:srgbClr val="9AA7B5"/>
+                      </a:solidFill>
+                    </a:lnL>
+                    <a:lnR w="9525">
+                      <a:solidFill>
+                        <a:srgbClr val="9AA7B5"/>
+                      </a:solidFill>
+                    </a:lnR>
+                    <a:lnT w="9525">
+                      <a:solidFill>
+                        <a:srgbClr val="9AA7B5"/>
+                      </a:solidFill>
+                    </a:lnT>
+                    <a:lnB w="9525">
+                      <a:solidFill>
+                        <a:srgbClr val="9AA7B5"/>
+                      </a:solidFill>
+                    </a:lnB>
+                    <a:solidFill>
+                      <a:srgbClr val="EEF3F8"/>
+                    </a:solidFill>
+                  </a:tcPr>
+                </a:tc>
+              </a:tr>
+              <a:tr h="848500">
+                <a:tc>
+                  <a:txBody>
+                    <a:bodyPr/>
+                    <a:lstStyle/>
+                    <a:p>
+                      <a:pPr algn="l">
+                        <a:lnSpc>
+                          <a:spcPct val="105000"/>
+                        </a:lnSpc>
+                      </a:pPr>
+                      <a:r>
+                        <a:rPr lang="ko-KR" altLang="en-US" sz="2200" b="1" dirty="0">
+                          <a:solidFill>
+                            <a:schemeClr val="tx1">
+                              <a:lumMod val="85000"/>
+                              <a:lumOff val="15000"/>
+                            </a:schemeClr>
+                          </a:solidFill>
+                          <a:latin typeface="나눔고딕" pitchFamily="50" charset="-127"/>
+                          <a:ea typeface="나눔고딕" pitchFamily="50" charset="-127"/>
+                          <a:cs typeface="Arial" panose="020B0604020202020204" pitchFamily="34" charset="0"/>
+                        </a:rPr>
+                        <a:t>관계 / 속성</a:t>
                       </a:r>
                     </a:p>
                   </a:txBody>
@@ -2586,7 +2696,7 @@
                           <a:ea typeface="나눔고딕" pitchFamily="50" charset="-127"/>
                           <a:cs typeface="Arial" panose="020B0604020202020204" pitchFamily="34" charset="0"/>
                         </a:rPr>
-                        <a:t>개체 6종류, 관계 9종류</a:t>
+                        <a:t>관계는 개체 사이의 연결(예: 승인이 운영행위를 허가함), 속성은 개체가 가진 값(예: 승인일)</a:t>
                       </a:r>
                     </a:p>
                   </a:txBody>
@@ -2692,59 +2802,7 @@
                           <a:ea typeface="나눔고딕" pitchFamily="50" charset="-127"/>
                           <a:cs typeface="Arial" panose="020B0604020202020204" pitchFamily="34" charset="0"/>
                         </a:rPr>
-                        <a:t>온톨로지가 답할 수 있어야 하는 질문. 질문에서 필요한 Class와 관계를 도출함</a:t>
-                      </a:r>
-                    </a:p>
-                  </a:txBody>
-                  <a:tcPr marL="91440" marR="91440" marT="60000" marB="60000" anchor="ctr">
-                    <a:lnL w="9525">
-                      <a:solidFill>
-                        <a:srgbClr val="9AA7B5"/>
-                      </a:solidFill>
-                    </a:lnL>
-                    <a:lnR w="9525">
-                      <a:solidFill>
-                        <a:srgbClr val="9AA7B5"/>
-                      </a:solidFill>
-                    </a:lnR>
-                    <a:lnT w="9525">
-                      <a:solidFill>
-                        <a:srgbClr val="9AA7B5"/>
-                      </a:solidFill>
-                    </a:lnT>
-                    <a:lnB w="9525">
-                      <a:solidFill>
-                        <a:srgbClr val="9AA7B5"/>
-                      </a:solidFill>
-                    </a:lnB>
-                    <a:solidFill>
-                      <a:srgbClr val="EEF3F8"/>
-                    </a:solidFill>
-                  </a:tcPr>
-                </a:tc>
-                <a:tc>
-                  <a:txBody>
-                    <a:bodyPr/>
-                    <a:lstStyle/>
-                    <a:p>
-                      <a:pPr algn="l">
-                        <a:lnSpc>
-                          <a:spcPct val="105000"/>
-                        </a:lnSpc>
-                      </a:pPr>
-                      <a:r>
-                        <a:rPr lang="ko-KR" altLang="en-US" sz="2200" b="0" dirty="0">
-                          <a:solidFill>
-                            <a:schemeClr val="tx1">
-                              <a:lumMod val="85000"/>
-                              <a:lumOff val="15000"/>
-                            </a:schemeClr>
-                          </a:solidFill>
-                          <a:latin typeface="나눔고딕" pitchFamily="50" charset="-127"/>
-                          <a:ea typeface="나눔고딕" pitchFamily="50" charset="-127"/>
-                          <a:cs typeface="Arial" panose="020B0604020202020204" pitchFamily="34" charset="0"/>
-                        </a:rPr>
-                        <a:t>운영자 질문 7개</a:t>
+                        <a:t>온톨로지가 답할 수 있어야 하는 질문. 연구 범위와 필요한 Class·관계를 정하는 기준</a:t>
                       </a:r>
                     </a:p>
                   </a:txBody>
@@ -2850,59 +2908,7 @@
                           <a:ea typeface="나눔고딕" pitchFamily="50" charset="-127"/>
                           <a:cs typeface="Arial" panose="020B0604020202020204" pitchFamily="34" charset="0"/>
                         </a:rPr>
-                        <a:t>개체(점)와 관계(선)로 지식을 나타낸 그래프. 점과 선에 속성을 붙일 수 있음</a:t>
-                      </a:r>
-                    </a:p>
-                  </a:txBody>
-                  <a:tcPr marL="91440" marR="91440" marT="60000" marB="60000" anchor="ctr">
-                    <a:lnL w="9525">
-                      <a:solidFill>
-                        <a:srgbClr val="9AA7B5"/>
-                      </a:solidFill>
-                    </a:lnL>
-                    <a:lnR w="9525">
-                      <a:solidFill>
-                        <a:srgbClr val="9AA7B5"/>
-                      </a:solidFill>
-                    </a:lnR>
-                    <a:lnT w="9525">
-                      <a:solidFill>
-                        <a:srgbClr val="9AA7B5"/>
-                      </a:solidFill>
-                    </a:lnT>
-                    <a:lnB w="9525">
-                      <a:solidFill>
-                        <a:srgbClr val="9AA7B5"/>
-                      </a:solidFill>
-                    </a:lnB>
-                    <a:solidFill>
-                      <a:srgbClr val="FFFFFF"/>
-                    </a:solidFill>
-                  </a:tcPr>
-                </a:tc>
-                <a:tc>
-                  <a:txBody>
-                    <a:bodyPr/>
-                    <a:lstStyle/>
-                    <a:p>
-                      <a:pPr algn="l">
-                        <a:lnSpc>
-                          <a:spcPct val="105000"/>
-                        </a:lnSpc>
-                      </a:pPr>
-                      <a:r>
-                        <a:rPr lang="ko-KR" altLang="en-US" sz="2200" b="0" dirty="0">
-                          <a:solidFill>
-                            <a:schemeClr val="tx1">
-                              <a:lumMod val="85000"/>
-                              <a:lumOff val="15000"/>
-                            </a:schemeClr>
-                          </a:solidFill>
-                          <a:latin typeface="나눔고딕" pitchFamily="50" charset="-127"/>
-                          <a:ea typeface="나눔고딕" pitchFamily="50" charset="-127"/>
-                          <a:cs typeface="Arial" panose="020B0604020202020204" pitchFamily="34" charset="0"/>
-                        </a:rPr>
-                        <a:t>개체 273, 관계 457</a:t>
+                        <a:t>온톨로지에 실제 개체·관계·값을 채워 만든 그래프. Neo4j(그래프 데이터베이스)에 저장하고 Cypher(점과 선의 연결 패턴으로 찾는 질의 언어)로 조회함</a:t>
                       </a:r>
                     </a:p>
                   </a:txBody>
@@ -2956,7 +2962,7 @@
                           <a:ea typeface="나눔고딕" pitchFamily="50" charset="-127"/>
                           <a:cs typeface="Arial" panose="020B0604020202020204" pitchFamily="34" charset="0"/>
                         </a:rPr>
-                        <a:t>Neo4j · Cypher</a:t>
+                        <a:t>표 경로 / 글 경로</a:t>
                       </a:r>
                     </a:p>
                   </a:txBody>
@@ -3008,59 +3014,7 @@
                           <a:ea typeface="나눔고딕" pitchFamily="50" charset="-127"/>
                           <a:cs typeface="Arial" panose="020B0604020202020204" pitchFamily="34" charset="0"/>
                         </a:rPr>
-                        <a:t>Neo4j는 그래프를 저장하는 데이터베이스, Cypher는 점과 선의 연결 패턴으로 찾는 질의 언어</a:t>
-                      </a:r>
-                    </a:p>
-                  </a:txBody>
-                  <a:tcPr marL="91440" marR="91440" marT="60000" marB="60000" anchor="ctr">
-                    <a:lnL w="9525">
-                      <a:solidFill>
-                        <a:srgbClr val="9AA7B5"/>
-                      </a:solidFill>
-                    </a:lnL>
-                    <a:lnR w="9525">
-                      <a:solidFill>
-                        <a:srgbClr val="9AA7B5"/>
-                      </a:solidFill>
-                    </a:lnR>
-                    <a:lnT w="9525">
-                      <a:solidFill>
-                        <a:srgbClr val="9AA7B5"/>
-                      </a:solidFill>
-                    </a:lnT>
-                    <a:lnB w="9525">
-                      <a:solidFill>
-                        <a:srgbClr val="9AA7B5"/>
-                      </a:solidFill>
-                    </a:lnB>
-                    <a:solidFill>
-                      <a:srgbClr val="EEF3F8"/>
-                    </a:solidFill>
-                  </a:tcPr>
-                </a:tc>
-                <a:tc>
-                  <a:txBody>
-                    <a:bodyPr/>
-                    <a:lstStyle/>
-                    <a:p>
-                      <a:pPr algn="l">
-                        <a:lnSpc>
-                          <a:spcPct val="105000"/>
-                        </a:lnSpc>
-                      </a:pPr>
-                      <a:r>
-                        <a:rPr lang="ko-KR" altLang="en-US" sz="2200" b="0" dirty="0">
-                          <a:solidFill>
-                            <a:schemeClr val="tx1">
-                              <a:lumMod val="85000"/>
-                              <a:lumOff val="15000"/>
-                            </a:schemeClr>
-                          </a:solidFill>
-                          <a:latin typeface="나눔고딕" pitchFamily="50" charset="-127"/>
-                          <a:ea typeface="나눔고딕" pitchFamily="50" charset="-127"/>
-                          <a:cs typeface="Arial" panose="020B0604020202020204" pitchFamily="34" charset="0"/>
-                        </a:rPr>
-                        <a:t>KG 저장과 조회</a:t>
+                        <a:t>열 이름이 의미를 정하는 표는 값을 그대로 옮기고(표 경로), 문장·규정 별표는 규칙으로 값을 추출함(글 경로)</a:t>
                       </a:r>
                     </a:p>
                   </a:txBody>
@@ -3166,7 +3120,167 @@
                           <a:ea typeface="나눔고딕" pitchFamily="50" charset="-127"/>
                           <a:cs typeface="Arial" panose="020B0604020202020204" pitchFamily="34" charset="0"/>
                         </a:rPr>
-                        <a:t>질문과 관련된 근거를 먼저 검색해 LLM에 함께 주고, 그 근거로 답하게 하는 방식</a:t>
+                        <a:t>질문과 관련된 근거를 검색해 LLM(대규모 언어모델)에 함께 주고, 그 근거로 답하게 하는 방식</a:t>
+                      </a:r>
+                    </a:p>
+                  </a:txBody>
+                  <a:tcPr marL="91440" marR="91440" marT="60000" marB="60000" anchor="ctr">
+                    <a:lnL w="9525">
+                      <a:solidFill>
+                        <a:srgbClr val="9AA7B5"/>
+                      </a:solidFill>
+                    </a:lnL>
+                    <a:lnR w="9525">
+                      <a:solidFill>
+                        <a:srgbClr val="9AA7B5"/>
+                      </a:solidFill>
+                    </a:lnR>
+                    <a:lnT w="9525">
+                      <a:solidFill>
+                        <a:srgbClr val="9AA7B5"/>
+                      </a:solidFill>
+                    </a:lnT>
+                    <a:lnB w="9525">
+                      <a:solidFill>
+                        <a:srgbClr val="9AA7B5"/>
+                      </a:solidFill>
+                    </a:lnB>
+                    <a:solidFill>
+                      <a:srgbClr val="FFFFFF"/>
+                    </a:solidFill>
+                  </a:tcPr>
+                </a:tc>
+              </a:tr>
+              <a:tr h="499250">
+                <a:tc>
+                  <a:txBody>
+                    <a:bodyPr/>
+                    <a:lstStyle/>
+                    <a:p>
+                      <a:pPr algn="l">
+                        <a:lnSpc>
+                          <a:spcPct val="105000"/>
+                        </a:lnSpc>
+                      </a:pPr>
+                      <a:r>
+                        <a:rPr lang="ko-KR" altLang="en-US" sz="2200" b="1" dirty="0">
+                          <a:solidFill>
+                            <a:schemeClr val="tx1">
+                              <a:lumMod val="85000"/>
+                              <a:lumOff val="15000"/>
+                            </a:schemeClr>
+                          </a:solidFill>
+                          <a:latin typeface="나눔고딕" pitchFamily="50" charset="-127"/>
+                          <a:ea typeface="나눔고딕" pitchFamily="50" charset="-127"/>
+                          <a:cs typeface="Arial" panose="020B0604020202020204" pitchFamily="34" charset="0"/>
+                        </a:rPr>
+                        <a:t>의도 (Intent)</a:t>
+                      </a:r>
+                    </a:p>
+                  </a:txBody>
+                  <a:tcPr marL="91440" marR="91440" marT="60000" marB="60000" anchor="ctr">
+                    <a:lnL w="9525">
+                      <a:solidFill>
+                        <a:srgbClr val="9AA7B5"/>
+                      </a:solidFill>
+                    </a:lnL>
+                    <a:lnR w="9525">
+                      <a:solidFill>
+                        <a:srgbClr val="9AA7B5"/>
+                      </a:solidFill>
+                    </a:lnR>
+                    <a:lnT w="9525">
+                      <a:solidFill>
+                        <a:srgbClr val="9AA7B5"/>
+                      </a:solidFill>
+                    </a:lnT>
+                    <a:lnB w="9525">
+                      <a:solidFill>
+                        <a:srgbClr val="9AA7B5"/>
+                      </a:solidFill>
+                    </a:lnB>
+                    <a:solidFill>
+                      <a:srgbClr val="EEF3F8"/>
+                    </a:solidFill>
+                  </a:tcPr>
+                </a:tc>
+                <a:tc>
+                  <a:txBody>
+                    <a:bodyPr/>
+                    <a:lstStyle/>
+                    <a:p>
+                      <a:pPr algn="l">
+                        <a:lnSpc>
+                          <a:spcPct val="105000"/>
+                        </a:lnSpc>
+                      </a:pPr>
+                      <a:r>
+                        <a:rPr lang="ko-KR" altLang="en-US" sz="2200" b="0" dirty="0">
+                          <a:solidFill>
+                            <a:schemeClr val="tx1">
+                              <a:lumMod val="85000"/>
+                              <a:lumOff val="15000"/>
+                            </a:schemeClr>
+                          </a:solidFill>
+                          <a:latin typeface="나눔고딕" pitchFamily="50" charset="-127"/>
+                          <a:ea typeface="나눔고딕" pitchFamily="50" charset="-127"/>
+                          <a:cs typeface="Arial" panose="020B0604020202020204" pitchFamily="34" charset="0"/>
+                        </a:rPr>
+                        <a:t>사용자 질문이 CQ 중 어느 질문에 해당하는지의 분류. 의도에 따라 찾을 근거가 정해짐</a:t>
+                      </a:r>
+                    </a:p>
+                  </a:txBody>
+                  <a:tcPr marL="91440" marR="91440" marT="60000" marB="60000" anchor="ctr">
+                    <a:lnL w="9525">
+                      <a:solidFill>
+                        <a:srgbClr val="9AA7B5"/>
+                      </a:solidFill>
+                    </a:lnL>
+                    <a:lnR w="9525">
+                      <a:solidFill>
+                        <a:srgbClr val="9AA7B5"/>
+                      </a:solidFill>
+                    </a:lnR>
+                    <a:lnT w="9525">
+                      <a:solidFill>
+                        <a:srgbClr val="9AA7B5"/>
+                      </a:solidFill>
+                    </a:lnT>
+                    <a:lnB w="9525">
+                      <a:solidFill>
+                        <a:srgbClr val="9AA7B5"/>
+                      </a:solidFill>
+                    </a:lnB>
+                    <a:solidFill>
+                      <a:srgbClr val="EEF3F8"/>
+                    </a:solidFill>
+                  </a:tcPr>
+                </a:tc>
+              </a:tr>
+              <a:tr h="499250">
+                <a:tc>
+                  <a:txBody>
+                    <a:bodyPr/>
+                    <a:lstStyle/>
+                    <a:p>
+                      <a:pPr algn="l">
+                        <a:lnSpc>
+                          <a:spcPct val="105000"/>
+                        </a:lnSpc>
+                      </a:pPr>
+                      <a:r>
+                        <a:rPr lang="ko-KR" altLang="en-US" sz="2200" b="1" dirty="0">
+                          <a:solidFill>
+                            <a:schemeClr val="tx1">
+                              <a:lumMod val="85000"/>
+                              <a:lumOff val="15000"/>
+                            </a:schemeClr>
+                          </a:solidFill>
+                          <a:latin typeface="나눔고딕" pitchFamily="50" charset="-127"/>
+                          <a:ea typeface="나눔고딕" pitchFamily="50" charset="-127"/>
+                          <a:cs typeface="Arial" panose="020B0604020202020204" pitchFamily="34" charset="0"/>
+                        </a:rPr>
+                        <a:t>근거 모음</a:t>
                       </a:r>
                     </a:p>
                   </a:txBody>
@@ -3218,839 +3332,7 @@
                           <a:ea typeface="나눔고딕" pitchFamily="50" charset="-127"/>
                           <a:cs typeface="Arial" panose="020B0604020202020204" pitchFamily="34" charset="0"/>
                         </a:rPr>
-                        <a:t>KG·측정자료·문서에서 검색</a:t>
-                      </a:r>
-                    </a:p>
-                  </a:txBody>
-                  <a:tcPr marL="91440" marR="91440" marT="60000" marB="60000" anchor="ctr">
-                    <a:lnL w="9525">
-                      <a:solidFill>
-                        <a:srgbClr val="9AA7B5"/>
-                      </a:solidFill>
-                    </a:lnL>
-                    <a:lnR w="9525">
-                      <a:solidFill>
-                        <a:srgbClr val="9AA7B5"/>
-                      </a:solidFill>
-                    </a:lnR>
-                    <a:lnT w="9525">
-                      <a:solidFill>
-                        <a:srgbClr val="9AA7B5"/>
-                      </a:solidFill>
-                    </a:lnT>
-                    <a:lnB w="9525">
-                      <a:solidFill>
-                        <a:srgbClr val="9AA7B5"/>
-                      </a:solidFill>
-                    </a:lnB>
-                    <a:solidFill>
-                      <a:srgbClr val="FFFFFF"/>
-                    </a:solidFill>
-                  </a:tcPr>
-                </a:tc>
-              </a:tr>
-            </a:tbl>
-          </a:graphicData>
-        </a:graphic>
-      </p:graphicFrame>
-      <p:pic>
-        <p:nvPicPr>
-          <p:cNvPr id="1011" name="그림 1. 연구의 구성: Ontology 설계 → KG 구축 → 질문 응답(RAG)" descr="그림 1. 연구의 구성: Ontology 설계 → KG 구축 → 질문 응답(RAG)"/>
-          <p:cNvPicPr>
-            <a:picLocks noChangeAspect="1"/>
-          </p:cNvPicPr>
-          <p:nvPr/>
-        </p:nvPicPr>
-        <p:blipFill>
-          <a:blip r:embed="rId11"/>
-          <a:stretch>
-            <a:fillRect/>
-          </a:stretch>
-        </p:blipFill>
-        <p:spPr>
-          <a:xfrm>
-            <a:off x="1204515" y="18189718"/>
-            <a:ext cx="12900000" cy="9085285"/>
-          </a:xfrm>
-          <a:prstGeom prst="rect">
-            <a:avLst/>
-          </a:prstGeom>
-          <a:ln w="12700">
-            <a:solidFill>
-              <a:srgbClr val="BFC5CC"/>
-            </a:solidFill>
-          </a:ln>
-        </p:spPr>
-      </p:pic>
-      <p:sp>
-        <p:nvSpPr>
-          <p:cNvPr id="1012" name="본문"/>
-          <p:cNvSpPr txBox="1"/>
-          <p:nvPr/>
-        </p:nvSpPr>
-        <p:spPr>
-          <a:xfrm>
-            <a:off x="597946" y="27335003"/>
-            <a:ext cx="14113138" cy="800000"/>
-          </a:xfrm>
-          <a:prstGeom prst="rect">
-            <a:avLst/>
-          </a:prstGeom>
-          <a:noFill/>
-          <a:ln>
-            <a:noFill/>
-          </a:ln>
-        </p:spPr>
-        <p:txBody>
-          <a:bodyPr wrap="square" lIns="66158" tIns="33079" rIns="66158" bIns="33079" anchor="t">
-            <a:noAutofit/>
-          </a:bodyPr>
-          <a:lstStyle/>
-          <a:p>
-            <a:pPr marL="0" indent="0" algn="ctr">
-              <a:lnSpc>
-                <a:spcPct val="118000"/>
-              </a:lnSpc>
-              <a:spcAft>
-                <a:spcPts val="600"/>
-              </a:spcAft>
-              <a:buNone/>
-            </a:pPr>
-            <a:r>
-              <a:rPr lang="ko-KR" altLang="en-US" sz="2400" b="0" dirty="0">
-                <a:solidFill>
-                  <a:schemeClr val="tx1">
-                    <a:lumMod val="85000"/>
-                    <a:lumOff val="15000"/>
-                  </a:schemeClr>
-                </a:solidFill>
-                <a:latin typeface="나눔고딕" pitchFamily="50" charset="-127"/>
-                <a:ea typeface="나눔고딕" pitchFamily="50" charset="-127"/>
-                <a:cs typeface="Arial" panose="020B0604020202020204" pitchFamily="34" charset="0"/>
-              </a:rPr>
-              <a:t>그림 1. 연구의 구성: Ontology 설계 → KG 구축 → 질문 응답(RAG)</a:t>
-            </a:r>
-          </a:p>
-        </p:txBody>
-      </p:sp>
-      <p:sp>
-        <p:nvSpPr>
-          <p:cNvPr id="1013" name="본문"/>
-          <p:cNvSpPr txBox="1"/>
-          <p:nvPr/>
-        </p:nvSpPr>
-        <p:spPr>
-          <a:xfrm>
-            <a:off x="597946" y="28135003"/>
-            <a:ext cx="14113138" cy="4179129"/>
-          </a:xfrm>
-          <a:prstGeom prst="rect">
-            <a:avLst/>
-          </a:prstGeom>
-          <a:noFill/>
-          <a:ln>
-            <a:noFill/>
-          </a:ln>
-        </p:spPr>
-        <p:txBody>
-          <a:bodyPr wrap="square" lIns="66158" tIns="33079" rIns="66158" bIns="33079" anchor="t">
-            <a:noAutofit/>
-          </a:bodyPr>
-          <a:lstStyle/>
-          <a:p>
-            <a:pPr marL="334726" indent="-334726">
-              <a:lnSpc>
-                <a:spcPct val="118000"/>
-              </a:lnSpc>
-              <a:spcAft>
-                <a:spcPts val="600"/>
-              </a:spcAft>
-              <a:buBlip>
-                <a:blip r:embed="rId4"/>
-              </a:buBlip>
-            </a:pPr>
-            <a:r>
-              <a:rPr lang="ko-KR" altLang="en-US" sz="2400" b="1" dirty="0">
-                <a:solidFill>
-                  <a:schemeClr val="tx1">
-                    <a:lumMod val="85000"/>
-                    <a:lumOff val="15000"/>
-                  </a:schemeClr>
-                </a:solidFill>
-                <a:latin typeface="나눔고딕" pitchFamily="50" charset="-127"/>
-                <a:ea typeface="나눔고딕" pitchFamily="50" charset="-127"/>
-                <a:cs typeface="Arial" panose="020B0604020202020204" pitchFamily="34" charset="0"/>
-              </a:rPr>
-              <a:t>STEP 1 Ontology 설계</a:t>
-            </a:r>
-            <a:r>
-              <a:rPr lang="ko-KR" altLang="en-US" sz="2400" b="0" dirty="0">
-                <a:solidFill>
-                  <a:schemeClr val="tx1">
-                    <a:lumMod val="85000"/>
-                    <a:lumOff val="15000"/>
-                  </a:schemeClr>
-                </a:solidFill>
-                <a:latin typeface="나눔고딕" pitchFamily="50" charset="-127"/>
-                <a:ea typeface="나눔고딕" pitchFamily="50" charset="-127"/>
-                <a:cs typeface="Arial" panose="020B0604020202020204" pitchFamily="34" charset="0"/>
-              </a:rPr>
-              <a:t>: Noy &amp; McGuinness(2001)의 절차에 따라 </a:t>
-            </a:r>
-            <a:r>
-              <a:rPr lang="ko-KR" altLang="en-US" sz="2400" b="1" dirty="0">
-                <a:solidFill>
-                  <a:schemeClr val="tx1">
-                    <a:lumMod val="85000"/>
-                    <a:lumOff val="15000"/>
-                  </a:schemeClr>
-                </a:solidFill>
-                <a:latin typeface="나눔고딕" pitchFamily="50" charset="-127"/>
-                <a:ea typeface="나눔고딕" pitchFamily="50" charset="-127"/>
-                <a:cs typeface="Arial" panose="020B0604020202020204" pitchFamily="34" charset="0"/>
-              </a:rPr>
-              <a:t>CQ로 범위를 정하고</a:t>
-            </a:r>
-            <a:r>
-              <a:rPr lang="ko-KR" altLang="en-US" sz="2400" b="0" dirty="0">
-                <a:solidFill>
-                  <a:schemeClr val="tx1">
-                    <a:lumMod val="85000"/>
-                    <a:lumOff val="15000"/>
-                  </a:schemeClr>
-                </a:solidFill>
-                <a:latin typeface="나눔고딕" pitchFamily="50" charset="-127"/>
-                <a:ea typeface="나눔고딕" pitchFamily="50" charset="-127"/>
-                <a:cs typeface="Arial" panose="020B0604020202020204" pitchFamily="34" charset="0"/>
-              </a:rPr>
-              <a:t> 필요한 Class와 관계를 정의함. CQ는 현재 상태(CQ1), 과거 상태(CQ2), 과거 운영행위(CQ3), 과거 방류 승인(CQ4), 현재 운영기준(CQ5), 공식 근거(CQ6)와 비슷한 과거 사례(SIMILAR)임</a:t>
-            </a:r>
-          </a:p>
-          <a:p>
-            <a:pPr marL="334726" indent="-334726">
-              <a:lnSpc>
-                <a:spcPct val="118000"/>
-              </a:lnSpc>
-              <a:spcAft>
-                <a:spcPts val="600"/>
-              </a:spcAft>
-              <a:buBlip>
-                <a:blip r:embed="rId4"/>
-              </a:buBlip>
-            </a:pPr>
-            <a:r>
-              <a:rPr lang="ko-KR" altLang="en-US" sz="2400" b="1" dirty="0">
-                <a:solidFill>
-                  <a:schemeClr val="tx1">
-                    <a:lumMod val="85000"/>
-                    <a:lumOff val="15000"/>
-                  </a:schemeClr>
-                </a:solidFill>
-                <a:latin typeface="나눔고딕" pitchFamily="50" charset="-127"/>
-                <a:ea typeface="나눔고딕" pitchFamily="50" charset="-127"/>
-                <a:cs typeface="Arial" panose="020B0604020202020204" pitchFamily="34" charset="0"/>
-              </a:rPr>
-              <a:t>STEP 2 KG 구축</a:t>
-            </a:r>
-            <a:r>
-              <a:rPr lang="ko-KR" altLang="en-US" sz="2400" b="0" dirty="0">
-                <a:solidFill>
-                  <a:schemeClr val="tx1">
-                    <a:lumMod val="85000"/>
-                    <a:lumOff val="15000"/>
-                  </a:schemeClr>
-                </a:solidFill>
-                <a:latin typeface="나눔고딕" pitchFamily="50" charset="-127"/>
-                <a:ea typeface="나눔고딕" pitchFamily="50" charset="-127"/>
-                <a:cs typeface="Arial" panose="020B0604020202020204" pitchFamily="34" charset="0"/>
-              </a:rPr>
-              <a:t>: 열·행의 의미가 정해진 표는 </a:t>
-            </a:r>
-            <a:r>
-              <a:rPr lang="ko-KR" altLang="en-US" sz="2400" b="1" dirty="0">
-                <a:solidFill>
-                  <a:schemeClr val="tx1">
-                    <a:lumMod val="85000"/>
-                    <a:lumOff val="15000"/>
-                  </a:schemeClr>
-                </a:solidFill>
-                <a:latin typeface="나눔고딕" pitchFamily="50" charset="-127"/>
-                <a:ea typeface="나눔고딕" pitchFamily="50" charset="-127"/>
-                <a:cs typeface="Arial" panose="020B0604020202020204" pitchFamily="34" charset="0"/>
-              </a:rPr>
-              <a:t>열 이름을 속성에 그대로 대응</a:t>
-            </a:r>
-            <a:r>
-              <a:rPr lang="ko-KR" altLang="en-US" sz="2400" b="0" dirty="0">
-                <a:solidFill>
-                  <a:schemeClr val="tx1">
-                    <a:lumMod val="85000"/>
-                    <a:lumOff val="15000"/>
-                  </a:schemeClr>
-                </a:solidFill>
-                <a:latin typeface="나눔고딕" pitchFamily="50" charset="-127"/>
-                <a:ea typeface="나눔고딕" pitchFamily="50" charset="-127"/>
-                <a:cs typeface="Arial" panose="020B0604020202020204" pitchFamily="34" charset="0"/>
-              </a:rPr>
-              <a:t>(표 경로)하고, 문장·규정 별표는 </a:t>
-            </a:r>
-            <a:r>
-              <a:rPr lang="ko-KR" altLang="en-US" sz="2400" b="1" dirty="0">
-                <a:solidFill>
-                  <a:schemeClr val="tx1">
-                    <a:lumMod val="85000"/>
-                    <a:lumOff val="15000"/>
-                  </a:schemeClr>
-                </a:solidFill>
-                <a:latin typeface="나눔고딕" pitchFamily="50" charset="-127"/>
-                <a:ea typeface="나눔고딕" pitchFamily="50" charset="-127"/>
-                <a:cs typeface="Arial" panose="020B0604020202020204" pitchFamily="34" charset="0"/>
-              </a:rPr>
-              <a:t>키워드와 패턴 규칙</a:t>
-            </a:r>
-            <a:r>
-              <a:rPr lang="ko-KR" altLang="en-US" sz="2400" b="0" dirty="0">
-                <a:solidFill>
-                  <a:schemeClr val="tx1">
-                    <a:lumMod val="85000"/>
-                    <a:lumOff val="15000"/>
-                  </a:schemeClr>
-                </a:solidFill>
-                <a:latin typeface="나눔고딕" pitchFamily="50" charset="-127"/>
-                <a:ea typeface="나눔고딕" pitchFamily="50" charset="-127"/>
-                <a:cs typeface="Arial" panose="020B0604020202020204" pitchFamily="34" charset="0"/>
-              </a:rPr>
-              <a:t>으로 값을 추출(글 경로)함. 수치 전체와 원문은 KG 밖 저장소에 두고 KG에는 관계와 </a:t>
-            </a:r>
-            <a:r>
-              <a:rPr lang="ko-KR" altLang="en-US" sz="2400" b="1" dirty="0">
-                <a:solidFill>
-                  <a:schemeClr val="tx1">
-                    <a:lumMod val="85000"/>
-                    <a:lumOff val="15000"/>
-                  </a:schemeClr>
-                </a:solidFill>
-                <a:latin typeface="나눔고딕" pitchFamily="50" charset="-127"/>
-                <a:ea typeface="나눔고딕" pitchFamily="50" charset="-127"/>
-                <a:cs typeface="Arial" panose="020B0604020202020204" pitchFamily="34" charset="0"/>
-              </a:rPr>
-              <a:t>출처 번호</a:t>
-            </a:r>
-            <a:r>
-              <a:rPr lang="ko-KR" altLang="en-US" sz="2400" b="0" dirty="0">
-                <a:solidFill>
-                  <a:schemeClr val="tx1">
-                    <a:lumMod val="85000"/>
-                    <a:lumOff val="15000"/>
-                  </a:schemeClr>
-                </a:solidFill>
-                <a:latin typeface="나눔고딕" pitchFamily="50" charset="-127"/>
-                <a:ea typeface="나눔고딕" pitchFamily="50" charset="-127"/>
-                <a:cs typeface="Arial" panose="020B0604020202020204" pitchFamily="34" charset="0"/>
-              </a:rPr>
-              <a:t>만 저장함</a:t>
-            </a:r>
-          </a:p>
-          <a:p>
-            <a:pPr marL="334726" indent="-334726">
-              <a:lnSpc>
-                <a:spcPct val="118000"/>
-              </a:lnSpc>
-              <a:spcAft>
-                <a:spcPts val="600"/>
-              </a:spcAft>
-              <a:buBlip>
-                <a:blip r:embed="rId4"/>
-              </a:buBlip>
-            </a:pPr>
-            <a:r>
-              <a:rPr lang="ko-KR" altLang="en-US" sz="2400" b="1" dirty="0">
-                <a:solidFill>
-                  <a:schemeClr val="tx1">
-                    <a:lumMod val="85000"/>
-                    <a:lumOff val="15000"/>
-                  </a:schemeClr>
-                </a:solidFill>
-                <a:latin typeface="나눔고딕" pitchFamily="50" charset="-127"/>
-                <a:ea typeface="나눔고딕" pitchFamily="50" charset="-127"/>
-                <a:cs typeface="Arial" panose="020B0604020202020204" pitchFamily="34" charset="0"/>
-              </a:rPr>
-              <a:t>STEP 3 질문 응답(RAG)</a:t>
-            </a:r>
-            <a:r>
-              <a:rPr lang="ko-KR" altLang="en-US" sz="2400" b="0" dirty="0">
-                <a:solidFill>
-                  <a:schemeClr val="tx1">
-                    <a:lumMod val="85000"/>
-                    <a:lumOff val="15000"/>
-                  </a:schemeClr>
-                </a:solidFill>
-                <a:latin typeface="나눔고딕" pitchFamily="50" charset="-127"/>
-                <a:ea typeface="나눔고딕" pitchFamily="50" charset="-127"/>
-                <a:cs typeface="Arial" panose="020B0604020202020204" pitchFamily="34" charset="0"/>
-              </a:rPr>
-              <a:t>: ① LLM이 질문을 유형·댐·시점으로 변환 → ② 유형별 </a:t>
-            </a:r>
-            <a:r>
-              <a:rPr lang="ko-KR" altLang="en-US" sz="2400" b="1" dirty="0">
-                <a:solidFill>
-                  <a:schemeClr val="tx1">
-                    <a:lumMod val="85000"/>
-                    <a:lumOff val="15000"/>
-                  </a:schemeClr>
-                </a:solidFill>
-                <a:latin typeface="나눔고딕" pitchFamily="50" charset="-127"/>
-                <a:ea typeface="나눔고딕" pitchFamily="50" charset="-127"/>
-                <a:cs typeface="Arial" panose="020B0604020202020204" pitchFamily="34" charset="0"/>
-              </a:rPr>
-              <a:t>Cypher</a:t>
-            </a:r>
-            <a:r>
-              <a:rPr lang="ko-KR" altLang="en-US" sz="2400" b="0" dirty="0">
-                <a:solidFill>
-                  <a:schemeClr val="tx1">
-                    <a:lumMod val="85000"/>
-                    <a:lumOff val="15000"/>
-                  </a:schemeClr>
-                </a:solidFill>
-                <a:latin typeface="나눔고딕" pitchFamily="50" charset="-127"/>
-                <a:ea typeface="나눔고딕" pitchFamily="50" charset="-127"/>
-                <a:cs typeface="Arial" panose="020B0604020202020204" pitchFamily="34" charset="0"/>
-              </a:rPr>
-              <a:t> 양식에 값을 채워 KG 탐색 → ③ 출처 번호로 측정자료·문서 저장소 조회 → ④ 계산은 코드가 수행 → ⑤ 모은 근거 안에서 LLM이 답변하고 출처 번호를 붙임 (Lewis et al., 2020)</a:t>
-            </a:r>
-          </a:p>
-        </p:txBody>
-      </p:sp>
-      <p:sp>
-        <p:nvSpPr>
-          <p:cNvPr id="1014" name="직사각형 1"/>
-          <p:cNvSpPr/>
-          <p:nvPr/>
-        </p:nvSpPr>
-        <p:spPr>
-          <a:xfrm>
-            <a:off x="674157" y="32574132"/>
-            <a:ext cx="13943667" cy="1023024"/>
-          </a:xfrm>
-          <a:prstGeom prst="rect">
-            <a:avLst/>
-          </a:prstGeom>
-          <a:solidFill>
-            <a:schemeClr val="accent1">
-              <a:lumMod val="75000"/>
-            </a:schemeClr>
-          </a:solidFill>
-          <a:ln w="9525">
-            <a:noFill/>
-            <a:miter lim="800000"/>
-            <a:headEnd/>
-            <a:tailEnd/>
-          </a:ln>
-        </p:spPr>
-        <p:txBody>
-          <a:bodyPr wrap="square" lIns="222728" tIns="111366" rIns="222728" bIns="111366" anchor="ctr"/>
-          <a:lstStyle/>
-          <a:p>
-            <a:pPr defTabSz="2048653"/>
-            <a:r>
-              <a:rPr lang="ko-KR" altLang="en-US" sz="4800" b="1" dirty="0">
-                <a:ln>
-                  <a:solidFill>
-                    <a:schemeClr val="accent1">
-                      <a:alpha val="0"/>
-                    </a:schemeClr>
-                  </a:solidFill>
-                </a:ln>
-                <a:solidFill>
-                  <a:schemeClr val="bg1"/>
-                </a:solidFill>
-                <a:effectLst>
-                  <a:outerShdw blurRad="38100" dist="38100" dir="2700000" algn="tl">
-                    <a:srgbClr val="000000">
-                      <a:alpha val="43137"/>
-                    </a:srgbClr>
-                  </a:outerShdw>
-                </a:effectLst>
-                <a:latin typeface="나눔고딕 ExtraBold" panose="020D0904000000000000" pitchFamily="50" charset="-127"/>
-                <a:ea typeface="나눔고딕 ExtraBold" panose="020D0904000000000000" pitchFamily="50" charset="-127"/>
-                <a:cs typeface="Arial Unicode MS" panose="020B0604020202020204" pitchFamily="50" charset="-127"/>
-              </a:rPr>
-              <a:t>대상 자료 및 KG 구축 규칙</a:t>
-            </a:r>
-          </a:p>
-        </p:txBody>
-      </p:sp>
-      <p:sp>
-        <p:nvSpPr>
-          <p:cNvPr id="1015" name="직사각형 415"/>
-          <p:cNvSpPr/>
-          <p:nvPr/>
-        </p:nvSpPr>
-        <p:spPr>
-          <a:xfrm>
-            <a:off x="830804" y="33717156"/>
-            <a:ext cx="13649422" cy="645985"/>
-          </a:xfrm>
-          <a:prstGeom prst="rect">
-            <a:avLst/>
-          </a:prstGeom>
-          <a:solidFill>
-            <a:schemeClr val="bg1">
-              <a:lumMod val="85000"/>
-            </a:schemeClr>
-          </a:solidFill>
-          <a:ln>
-            <a:noFill/>
-          </a:ln>
-        </p:spPr>
-        <p:style>
-          <a:lnRef idx="2">
-            <a:schemeClr val="accent1">
-              <a:shade val="50000"/>
-            </a:schemeClr>
-          </a:lnRef>
-          <a:fillRef idx="1">
-            <a:schemeClr val="accent1"/>
-          </a:fillRef>
-          <a:effectRef idx="0">
-            <a:schemeClr val="accent1"/>
-          </a:effectRef>
-          <a:fontRef idx="minor">
-            <a:schemeClr val="lt1"/>
-          </a:fontRef>
-        </p:style>
-        <p:txBody>
-          <a:bodyPr lIns="88242" tIns="44120" rIns="88242" bIns="44120" spcCol="0" rtlCol="0" anchor="ctr"/>
-          <a:lstStyle/>
-          <a:p>
-            <a:pPr marL="0" lvl="1">
-              <a:lnSpc>
-                <a:spcPct val="107000"/>
-              </a:lnSpc>
-            </a:pPr>
-            <a:r>
-              <a:rPr lang="ko-KR" altLang="en-US" sz="2800" b="1" spc="-21" dirty="0">
-                <a:ln>
-                  <a:solidFill>
-                    <a:schemeClr val="accent1">
-                      <a:alpha val="0"/>
-                    </a:schemeClr>
-                  </a:solidFill>
-                </a:ln>
-                <a:solidFill>
-                  <a:schemeClr val="tx1">
-                    <a:lumMod val="85000"/>
-                    <a:lumOff val="15000"/>
-                  </a:schemeClr>
-                </a:solidFill>
-                <a:latin typeface="나눔고딕" pitchFamily="50" charset="-127"/>
-                <a:ea typeface="나눔고딕" pitchFamily="50" charset="-127"/>
-                <a:cs typeface="Arial" panose="020B0604020202020204" pitchFamily="34" charset="0"/>
-              </a:rPr>
-              <a:t>Table 2. 사용한 자료와 KG 반영 방식</a:t>
-            </a:r>
-          </a:p>
-        </p:txBody>
-      </p:sp>
-      <p:graphicFrame>
-        <p:nvGraphicFramePr>
-          <p:cNvPr id="1016" name="표"/>
-          <p:cNvGraphicFramePr>
-            <a:graphicFrameLocks noGrp="1"/>
-          </p:cNvGraphicFramePr>
-          <p:nvPr/>
-        </p:nvGraphicFramePr>
-        <p:xfrm>
-          <a:off x="697946" y="34453141"/>
-          <a:ext cx="13600000" cy="2346250"/>
-        </p:xfrm>
-        <a:graphic>
-          <a:graphicData uri="http://schemas.openxmlformats.org/drawingml/2006/table">
-            <a:tbl>
-              <a:tblPr firstRow="1" bandRow="1"/>
-              <a:tblGrid>
-                <a:gridCol w="3000000"/>
-                <a:gridCol w="4200000"/>
-                <a:gridCol w="6400000"/>
-              </a:tblGrid>
-              <a:tr h="499250">
-                <a:tc>
-                  <a:txBody>
-                    <a:bodyPr/>
-                    <a:lstStyle/>
-                    <a:p>
-                      <a:pPr algn="ctr">
-                        <a:lnSpc>
-                          <a:spcPct val="105000"/>
-                        </a:lnSpc>
-                      </a:pPr>
-                      <a:r>
-                        <a:rPr lang="ko-KR" altLang="en-US" sz="2200" b="1" dirty="0">
-                          <a:solidFill>
-                            <a:schemeClr val="bg1"/>
-                          </a:solidFill>
-                          <a:latin typeface="나눔고딕" pitchFamily="50" charset="-127"/>
-                          <a:ea typeface="나눔고딕" pitchFamily="50" charset="-127"/>
-                          <a:cs typeface="Arial" panose="020B0604020202020204" pitchFamily="34" charset="0"/>
-                        </a:rPr>
-                        <a:t>자료</a:t>
-                      </a:r>
-                    </a:p>
-                  </a:txBody>
-                  <a:tcPr marL="91440" marR="91440" marT="60000" marB="60000" anchor="ctr">
-                    <a:lnL w="9525">
-                      <a:solidFill>
-                        <a:srgbClr val="9AA7B5"/>
-                      </a:solidFill>
-                    </a:lnL>
-                    <a:lnR w="9525">
-                      <a:solidFill>
-                        <a:srgbClr val="9AA7B5"/>
-                      </a:solidFill>
-                    </a:lnR>
-                    <a:lnT w="9525">
-                      <a:solidFill>
-                        <a:srgbClr val="9AA7B5"/>
-                      </a:solidFill>
-                    </a:lnT>
-                    <a:lnB w="9525">
-                      <a:solidFill>
-                        <a:srgbClr val="9AA7B5"/>
-                      </a:solidFill>
-                    </a:lnB>
-                    <a:solidFill>
-                      <a:srgbClr val="1F4E79"/>
-                    </a:solidFill>
-                  </a:tcPr>
-                </a:tc>
-                <a:tc>
-                  <a:txBody>
-                    <a:bodyPr/>
-                    <a:lstStyle/>
-                    <a:p>
-                      <a:pPr algn="ctr">
-                        <a:lnSpc>
-                          <a:spcPct val="105000"/>
-                        </a:lnSpc>
-                      </a:pPr>
-                      <a:r>
-                        <a:rPr lang="ko-KR" altLang="en-US" sz="2200" b="1" dirty="0">
-                          <a:solidFill>
-                            <a:schemeClr val="bg1"/>
-                          </a:solidFill>
-                          <a:latin typeface="나눔고딕" pitchFamily="50" charset="-127"/>
-                          <a:ea typeface="나눔고딕" pitchFamily="50" charset="-127"/>
-                          <a:cs typeface="Arial" panose="020B0604020202020204" pitchFamily="34" charset="0"/>
-                        </a:rPr>
-                        <a:t>규모</a:t>
-                      </a:r>
-                    </a:p>
-                  </a:txBody>
-                  <a:tcPr marL="91440" marR="91440" marT="60000" marB="60000" anchor="ctr">
-                    <a:lnL w="9525">
-                      <a:solidFill>
-                        <a:srgbClr val="9AA7B5"/>
-                      </a:solidFill>
-                    </a:lnL>
-                    <a:lnR w="9525">
-                      <a:solidFill>
-                        <a:srgbClr val="9AA7B5"/>
-                      </a:solidFill>
-                    </a:lnR>
-                    <a:lnT w="9525">
-                      <a:solidFill>
-                        <a:srgbClr val="9AA7B5"/>
-                      </a:solidFill>
-                    </a:lnT>
-                    <a:lnB w="9525">
-                      <a:solidFill>
-                        <a:srgbClr val="9AA7B5"/>
-                      </a:solidFill>
-                    </a:lnB>
-                    <a:solidFill>
-                      <a:srgbClr val="1F4E79"/>
-                    </a:solidFill>
-                  </a:tcPr>
-                </a:tc>
-                <a:tc>
-                  <a:txBody>
-                    <a:bodyPr/>
-                    <a:lstStyle/>
-                    <a:p>
-                      <a:pPr algn="ctr">
-                        <a:lnSpc>
-                          <a:spcPct val="105000"/>
-                        </a:lnSpc>
-                      </a:pPr>
-                      <a:r>
-                        <a:rPr lang="ko-KR" altLang="en-US" sz="2200" b="1" dirty="0">
-                          <a:solidFill>
-                            <a:schemeClr val="bg1"/>
-                          </a:solidFill>
-                          <a:latin typeface="나눔고딕" pitchFamily="50" charset="-127"/>
-                          <a:ea typeface="나눔고딕" pitchFamily="50" charset="-127"/>
-                          <a:cs typeface="Arial" panose="020B0604020202020204" pitchFamily="34" charset="0"/>
-                        </a:rPr>
-                        <a:t>KG 반영 방식</a:t>
-                      </a:r>
-                    </a:p>
-                  </a:txBody>
-                  <a:tcPr marL="91440" marR="91440" marT="60000" marB="60000" anchor="ctr">
-                    <a:lnL w="9525">
-                      <a:solidFill>
-                        <a:srgbClr val="9AA7B5"/>
-                      </a:solidFill>
-                    </a:lnL>
-                    <a:lnR w="9525">
-                      <a:solidFill>
-                        <a:srgbClr val="9AA7B5"/>
-                      </a:solidFill>
-                    </a:lnR>
-                    <a:lnT w="9525">
-                      <a:solidFill>
-                        <a:srgbClr val="9AA7B5"/>
-                      </a:solidFill>
-                    </a:lnT>
-                    <a:lnB w="9525">
-                      <a:solidFill>
-                        <a:srgbClr val="9AA7B5"/>
-                      </a:solidFill>
-                    </a:lnB>
-                    <a:solidFill>
-                      <a:srgbClr val="1F4E79"/>
-                    </a:solidFill>
-                  </a:tcPr>
-                </a:tc>
-              </a:tr>
-              <a:tr h="499250">
-                <a:tc>
-                  <a:txBody>
-                    <a:bodyPr/>
-                    <a:lstStyle/>
-                    <a:p>
-                      <a:pPr algn="l">
-                        <a:lnSpc>
-                          <a:spcPct val="105000"/>
-                        </a:lnSpc>
-                      </a:pPr>
-                      <a:r>
-                        <a:rPr lang="ko-KR" altLang="en-US" sz="2200" b="1" dirty="0">
-                          <a:solidFill>
-                            <a:schemeClr val="tx1">
-                              <a:lumMod val="85000"/>
-                              <a:lumOff val="15000"/>
-                            </a:schemeClr>
-                          </a:solidFill>
-                          <a:latin typeface="나눔고딕" pitchFamily="50" charset="-127"/>
-                          <a:ea typeface="나눔고딕" pitchFamily="50" charset="-127"/>
-                          <a:cs typeface="Arial" panose="020B0604020202020204" pitchFamily="34" charset="0"/>
-                        </a:rPr>
-                        <a:t>방류 승인 기록</a:t>
-                      </a:r>
-                    </a:p>
-                  </a:txBody>
-                  <a:tcPr marL="91440" marR="91440" marT="60000" marB="60000" anchor="ctr">
-                    <a:lnL w="9525">
-                      <a:solidFill>
-                        <a:srgbClr val="9AA7B5"/>
-                      </a:solidFill>
-                    </a:lnL>
-                    <a:lnR w="9525">
-                      <a:solidFill>
-                        <a:srgbClr val="9AA7B5"/>
-                      </a:solidFill>
-                    </a:lnR>
-                    <a:lnT w="9525">
-                      <a:solidFill>
-                        <a:srgbClr val="9AA7B5"/>
-                      </a:solidFill>
-                    </a:lnT>
-                    <a:lnB w="9525">
-                      <a:solidFill>
-                        <a:srgbClr val="9AA7B5"/>
-                      </a:solidFill>
-                    </a:lnB>
-                    <a:solidFill>
-                      <a:srgbClr val="FFFFFF"/>
-                    </a:solidFill>
-                  </a:tcPr>
-                </a:tc>
-                <a:tc>
-                  <a:txBody>
-                    <a:bodyPr/>
-                    <a:lstStyle/>
-                    <a:p>
-                      <a:pPr algn="l">
-                        <a:lnSpc>
-                          <a:spcPct val="105000"/>
-                        </a:lnSpc>
-                      </a:pPr>
-                      <a:r>
-                        <a:rPr lang="ko-KR" altLang="en-US" sz="2200" b="0" dirty="0">
-                          <a:solidFill>
-                            <a:schemeClr val="tx1">
-                              <a:lumMod val="85000"/>
-                              <a:lumOff val="15000"/>
-                            </a:schemeClr>
-                          </a:solidFill>
-                          <a:latin typeface="나눔고딕" pitchFamily="50" charset="-127"/>
-                          <a:ea typeface="나눔고딕" pitchFamily="50" charset="-127"/>
-                          <a:cs typeface="Arial" panose="020B0604020202020204" pitchFamily="34" charset="0"/>
-                        </a:rPr>
-                        <a:t>4개 댐 승인 80건</a:t>
-                      </a:r>
-                    </a:p>
-                  </a:txBody>
-                  <a:tcPr marL="91440" marR="91440" marT="60000" marB="60000" anchor="ctr">
-                    <a:lnL w="9525">
-                      <a:solidFill>
-                        <a:srgbClr val="9AA7B5"/>
-                      </a:solidFill>
-                    </a:lnL>
-                    <a:lnR w="9525">
-                      <a:solidFill>
-                        <a:srgbClr val="9AA7B5"/>
-                      </a:solidFill>
-                    </a:lnR>
-                    <a:lnT w="9525">
-                      <a:solidFill>
-                        <a:srgbClr val="9AA7B5"/>
-                      </a:solidFill>
-                    </a:lnT>
-                    <a:lnB w="9525">
-                      <a:solidFill>
-                        <a:srgbClr val="9AA7B5"/>
-                      </a:solidFill>
-                    </a:lnB>
-                    <a:solidFill>
-                      <a:srgbClr val="FFFFFF"/>
-                    </a:solidFill>
-                  </a:tcPr>
-                </a:tc>
-                <a:tc>
-                  <a:txBody>
-                    <a:bodyPr/>
-                    <a:lstStyle/>
-                    <a:p>
-                      <a:pPr algn="l">
-                        <a:lnSpc>
-                          <a:spcPct val="105000"/>
-                        </a:lnSpc>
-                      </a:pPr>
-                      <a:r>
-                        <a:rPr lang="ko-KR" altLang="en-US" sz="2200" b="0" dirty="0">
-                          <a:solidFill>
-                            <a:schemeClr val="tx1">
-                              <a:lumMod val="85000"/>
-                              <a:lumOff val="15000"/>
-                            </a:schemeClr>
-                          </a:solidFill>
-                          <a:latin typeface="나눔고딕" pitchFamily="50" charset="-127"/>
-                          <a:ea typeface="나눔고딕" pitchFamily="50" charset="-127"/>
-                          <a:cs typeface="Arial" panose="020B0604020202020204" pitchFamily="34" charset="0"/>
-                        </a:rPr>
-                        <a:t>Approval 80, 비고 분류로 Operation 68</a:t>
+                        <a:t>검색한 근거와 계산값에 출처 번호를 붙여 LLM이 읽을 수 있게 정리한 입력</a:t>
                       </a:r>
                     </a:p>
                   </a:txBody>
@@ -4104,7 +3386,7 @@
                           <a:ea typeface="나눔고딕" pitchFamily="50" charset="-127"/>
                           <a:cs typeface="Arial" panose="020B0604020202020204" pitchFamily="34" charset="0"/>
                         </a:rPr>
-                        <a:t>수문기상 시간 자료</a:t>
+                        <a:t>유클리드 거리</a:t>
                       </a:r>
                     </a:p>
                   </a:txBody>
@@ -4156,7 +3438,7 @@
                           <a:ea typeface="나눔고딕" pitchFamily="50" charset="-127"/>
                           <a:cs typeface="Arial" panose="020B0604020202020204" pitchFamily="34" charset="0"/>
                         </a:rPr>
-                        <a:t>508,246행 (수위·유입량 등 6변수)</a:t>
+                        <a:t>두 지점의 직선거리. 현재와 과거 사례의 수위·유입량이 얼마나 다른지 나타내며 작을수록 비슷함</a:t>
                       </a:r>
                     </a:p>
                   </a:txBody>
@@ -4183,216 +3465,6 @@
                     </a:lnB>
                     <a:solidFill>
                       <a:srgbClr val="EEF3F8"/>
-                    </a:solidFill>
-                  </a:tcPr>
-                </a:tc>
-                <a:tc>
-                  <a:txBody>
-                    <a:bodyPr/>
-                    <a:lstStyle/>
-                    <a:p>
-                      <a:pPr algn="l">
-                        <a:lnSpc>
-                          <a:spcPct val="105000"/>
-                        </a:lnSpc>
-                      </a:pPr>
-                      <a:r>
-                        <a:rPr lang="ko-KR" altLang="en-US" sz="2200" b="0" dirty="0">
-                          <a:solidFill>
-                            <a:schemeClr val="tx1">
-                              <a:lumMod val="85000"/>
-                              <a:lumOff val="15000"/>
-                            </a:schemeClr>
-                          </a:solidFill>
-                          <a:latin typeface="나눔고딕" pitchFamily="50" charset="-127"/>
-                          <a:ea typeface="나눔고딕" pitchFamily="50" charset="-127"/>
-                          <a:cs typeface="Arial" panose="020B0604020202020204" pitchFamily="34" charset="0"/>
-                        </a:rPr>
-                        <a:t>측정자료 저장소에 보관, KG에는 상태 항목 24개</a:t>
-                      </a:r>
-                    </a:p>
-                  </a:txBody>
-                  <a:tcPr marL="91440" marR="91440" marT="60000" marB="60000" anchor="ctr">
-                    <a:lnL w="9525">
-                      <a:solidFill>
-                        <a:srgbClr val="9AA7B5"/>
-                      </a:solidFill>
-                    </a:lnL>
-                    <a:lnR w="9525">
-                      <a:solidFill>
-                        <a:srgbClr val="9AA7B5"/>
-                      </a:solidFill>
-                    </a:lnR>
-                    <a:lnT w="9525">
-                      <a:solidFill>
-                        <a:srgbClr val="9AA7B5"/>
-                      </a:solidFill>
-                    </a:lnT>
-                    <a:lnB w="9525">
-                      <a:solidFill>
-                        <a:srgbClr val="9AA7B5"/>
-                      </a:solidFill>
-                    </a:lnB>
-                    <a:solidFill>
-                      <a:srgbClr val="EEF3F8"/>
-                    </a:solidFill>
-                  </a:tcPr>
-                </a:tc>
-              </a:tr>
-              <a:tr h="499250">
-                <a:tc>
-                  <a:txBody>
-                    <a:bodyPr/>
-                    <a:lstStyle/>
-                    <a:p>
-                      <a:pPr algn="l">
-                        <a:lnSpc>
-                          <a:spcPct val="105000"/>
-                        </a:lnSpc>
-                      </a:pPr>
-                      <a:r>
-                        <a:rPr lang="ko-KR" altLang="en-US" sz="2200" b="1" dirty="0">
-                          <a:solidFill>
-                            <a:schemeClr val="tx1">
-                              <a:lumMod val="85000"/>
-                              <a:lumOff val="15000"/>
-                            </a:schemeClr>
-                          </a:solidFill>
-                          <a:latin typeface="나눔고딕" pitchFamily="50" charset="-127"/>
-                          <a:ea typeface="나눔고딕" pitchFamily="50" charset="-127"/>
-                          <a:cs typeface="Arial" panose="020B0604020202020204" pitchFamily="34" charset="0"/>
-                        </a:rPr>
-                        <a:t>규정 별표3 (제한수위)</a:t>
-                      </a:r>
-                    </a:p>
-                  </a:txBody>
-                  <a:tcPr marL="91440" marR="91440" marT="60000" marB="60000" anchor="ctr">
-                    <a:lnL w="9525">
-                      <a:solidFill>
-                        <a:srgbClr val="9AA7B5"/>
-                      </a:solidFill>
-                    </a:lnL>
-                    <a:lnR w="9525">
-                      <a:solidFill>
-                        <a:srgbClr val="9AA7B5"/>
-                      </a:solidFill>
-                    </a:lnR>
-                    <a:lnT w="9525">
-                      <a:solidFill>
-                        <a:srgbClr val="9AA7B5"/>
-                      </a:solidFill>
-                    </a:lnT>
-                    <a:lnB w="9525">
-                      <a:solidFill>
-                        <a:srgbClr val="9AA7B5"/>
-                      </a:solidFill>
-                    </a:lnB>
-                    <a:solidFill>
-                      <a:srgbClr val="FFFFFF"/>
-                    </a:solidFill>
-                  </a:tcPr>
-                </a:tc>
-                <a:tc>
-                  <a:txBody>
-                    <a:bodyPr/>
-                    <a:lstStyle/>
-                    <a:p>
-                      <a:pPr algn="l">
-                        <a:lnSpc>
-                          <a:spcPct val="105000"/>
-                        </a:lnSpc>
-                      </a:pPr>
-                      <a:r>
-                        <a:rPr lang="ko-KR" altLang="en-US" sz="2200" b="0" dirty="0">
-                          <a:solidFill>
-                            <a:schemeClr val="tx1">
-                              <a:lumMod val="85000"/>
-                              <a:lumOff val="15000"/>
-                            </a:schemeClr>
-                          </a:solidFill>
-                          <a:latin typeface="나눔고딕" pitchFamily="50" charset="-127"/>
-                          <a:ea typeface="나눔고딕" pitchFamily="50" charset="-127"/>
-                          <a:cs typeface="Arial" panose="020B0604020202020204" pitchFamily="34" charset="0"/>
-                        </a:rPr>
-                        <a:t>10조각 (현행 1 + 연혁 9)</a:t>
-                      </a:r>
-                    </a:p>
-                  </a:txBody>
-                  <a:tcPr marL="91440" marR="91440" marT="60000" marB="60000" anchor="ctr">
-                    <a:lnL w="9525">
-                      <a:solidFill>
-                        <a:srgbClr val="9AA7B5"/>
-                      </a:solidFill>
-                    </a:lnL>
-                    <a:lnR w="9525">
-                      <a:solidFill>
-                        <a:srgbClr val="9AA7B5"/>
-                      </a:solidFill>
-                    </a:lnR>
-                    <a:lnT w="9525">
-                      <a:solidFill>
-                        <a:srgbClr val="9AA7B5"/>
-                      </a:solidFill>
-                    </a:lnT>
-                    <a:lnB w="9525">
-                      <a:solidFill>
-                        <a:srgbClr val="9AA7B5"/>
-                      </a:solidFill>
-                    </a:lnB>
-                    <a:solidFill>
-                      <a:srgbClr val="FFFFFF"/>
-                    </a:solidFill>
-                  </a:tcPr>
-                </a:tc>
-                <a:tc>
-                  <a:txBody>
-                    <a:bodyPr/>
-                    <a:lstStyle/>
-                    <a:p>
-                      <a:pPr algn="l">
-                        <a:lnSpc>
-                          <a:spcPct val="105000"/>
-                        </a:lnSpc>
-                      </a:pPr>
-                      <a:r>
-                        <a:rPr lang="ko-KR" altLang="en-US" sz="2200" b="0" dirty="0">
-                          <a:solidFill>
-                            <a:schemeClr val="tx1">
-                              <a:lumMod val="85000"/>
-                              <a:lumOff val="15000"/>
-                            </a:schemeClr>
-                          </a:solidFill>
-                          <a:latin typeface="나눔고딕" pitchFamily="50" charset="-127"/>
-                          <a:ea typeface="나눔고딕" pitchFamily="50" charset="-127"/>
-                          <a:cs typeface="Arial" panose="020B0604020202020204" pitchFamily="34" charset="0"/>
-                        </a:rPr>
-                        <a:t>Criterion 3, 원문은 문서 저장소</a:t>
-                      </a:r>
-                    </a:p>
-                  </a:txBody>
-                  <a:tcPr marL="91440" marR="91440" marT="60000" marB="60000" anchor="ctr">
-                    <a:lnL w="9525">
-                      <a:solidFill>
-                        <a:srgbClr val="9AA7B5"/>
-                      </a:solidFill>
-                    </a:lnL>
-                    <a:lnR w="9525">
-                      <a:solidFill>
-                        <a:srgbClr val="9AA7B5"/>
-                      </a:solidFill>
-                    </a:lnR>
-                    <a:lnT w="9525">
-                      <a:solidFill>
-                        <a:srgbClr val="9AA7B5"/>
-                      </a:solidFill>
-                    </a:lnT>
-                    <a:lnB w="9525">
-                      <a:solidFill>
-                        <a:srgbClr val="9AA7B5"/>
-                      </a:solidFill>
-                    </a:lnB>
-                    <a:solidFill>
-                      <a:srgbClr val="FFFFFF"/>
                     </a:solidFill>
                   </a:tcPr>
                 </a:tc>
@@ -4403,14 +3475,73 @@
       </p:graphicFrame>
       <p:sp>
         <p:nvSpPr>
-          <p:cNvPr id="1017" name="본문"/>
+          <p:cNvPr id="1011" name="직사각형 1"/>
+          <p:cNvSpPr/>
+          <p:nvPr/>
+        </p:nvSpPr>
+        <p:spPr>
+          <a:xfrm>
+            <a:off x="674157" y="21384468"/>
+            <a:ext cx="13943667" cy="1023024"/>
+          </a:xfrm>
+          <a:prstGeom prst="rect">
+            <a:avLst/>
+          </a:prstGeom>
+          <a:solidFill>
+            <a:schemeClr val="accent1">
+              <a:lumMod val="75000"/>
+            </a:schemeClr>
+          </a:solidFill>
+          <a:ln w="9525">
+            <a:noFill/>
+            <a:miter lim="800000"/>
+            <a:headEnd/>
+            <a:tailEnd/>
+          </a:ln>
+        </p:spPr>
+        <p:txBody>
+          <a:bodyPr wrap="square" lIns="222728" tIns="111366" rIns="222728" bIns="111366" anchor="ctr"/>
+          <a:lstStyle/>
+          <a:p>
+            <a:pPr defTabSz="2048653"/>
+            <a:r>
+              <a:rPr lang="ko-KR" altLang="en-US" sz="4800" b="1" dirty="0">
+                <a:ln>
+                  <a:solidFill>
+                    <a:schemeClr val="accent1">
+                      <a:alpha val="0"/>
+                    </a:schemeClr>
+                  </a:solidFill>
+                </a:ln>
+                <a:solidFill>
+                  <a:schemeClr val="bg1"/>
+                </a:solidFill>
+                <a:effectLst>
+                  <a:outerShdw blurRad="38100" dist="38100" dir="2700000" algn="tl">
+                    <a:srgbClr val="000000">
+                      <a:alpha val="43137"/>
+                    </a:srgbClr>
+                  </a:outerShdw>
+                </a:effectLst>
+                <a:latin typeface="나눔고딕 ExtraBold" panose="020D0904000000000000" pitchFamily="50" charset="-127"/>
+                <a:ea typeface="나눔고딕 ExtraBold" panose="020D0904000000000000" pitchFamily="50" charset="-127"/>
+                <a:cs typeface="Arial Unicode MS" panose="020B0604020202020204" pitchFamily="50" charset="-127"/>
+              </a:rPr>
+              <a:t>사용 데이터 및 방법론</a:t>
+            </a:r>
+          </a:p>
+        </p:txBody>
+      </p:sp>
+      <p:sp>
+        <p:nvSpPr>
+          <p:cNvPr id="1012" name="본문"/>
           <p:cNvSpPr txBox="1"/>
           <p:nvPr/>
         </p:nvSpPr>
         <p:spPr>
           <a:xfrm>
-            <a:off x="597946" y="36919391"/>
-            <a:ext cx="14113138" cy="1944945"/>
+            <a:off x="597946" y="22527492"/>
+            <a:ext cx="14113138" cy="2021145"/>
           </a:xfrm>
           <a:prstGeom prst="rect">
             <a:avLst/>
@@ -4438,6 +3569,20 @@
               </a:buBlip>
             </a:pPr>
             <a:r>
+              <a:rPr lang="ko-KR" altLang="en-US" sz="2400" b="1" dirty="0">
+                <a:solidFill>
+                  <a:schemeClr val="tx1">
+                    <a:lumMod val="85000"/>
+                    <a:lumOff val="15000"/>
+                  </a:schemeClr>
+                </a:solidFill>
+                <a:latin typeface="나눔고딕" pitchFamily="50" charset="-127"/>
+                <a:ea typeface="나눔고딕" pitchFamily="50" charset="-127"/>
+                <a:cs typeface="Arial" panose="020B0604020202020204" pitchFamily="34" charset="0"/>
+              </a:rPr>
+              <a:t>방류 승인 기록</a:t>
+            </a:r>
+            <a:r>
               <a:rPr lang="ko-KR" altLang="en-US" sz="2400" b="0" dirty="0">
                 <a:solidFill>
                   <a:schemeClr val="tx1">
@@ -4449,35 +3594,7 @@
                 <a:ea typeface="나눔고딕" pitchFamily="50" charset="-127"/>
                 <a:cs typeface="Arial" panose="020B0604020202020204" pitchFamily="34" charset="0"/>
               </a:rPr>
-              <a:t>승인 기록의 </a:t>
-            </a:r>
-            <a:r>
-              <a:rPr lang="ko-KR" altLang="en-US" sz="2400" b="1" dirty="0">
-                <a:solidFill>
-                  <a:schemeClr val="tx1">
-                    <a:lumMod val="85000"/>
-                    <a:lumOff val="15000"/>
-                  </a:schemeClr>
-                </a:solidFill>
-                <a:latin typeface="나눔고딕" pitchFamily="50" charset="-127"/>
-                <a:ea typeface="나눔고딕" pitchFamily="50" charset="-127"/>
-                <a:cs typeface="Arial" panose="020B0604020202020204" pitchFamily="34" charset="0"/>
-              </a:rPr>
-              <a:t>비고 문장</a:t>
-            </a:r>
-            <a:r>
-              <a:rPr lang="ko-KR" altLang="en-US" sz="2400" b="0" dirty="0">
-                <a:solidFill>
-                  <a:schemeClr val="tx1">
-                    <a:lumMod val="85000"/>
-                    <a:lumOff val="15000"/>
-                  </a:schemeClr>
-                </a:solidFill>
-                <a:latin typeface="나눔고딕" pitchFamily="50" charset="-127"/>
-                <a:ea typeface="나눔고딕" pitchFamily="50" charset="-127"/>
-                <a:cs typeface="Arial" panose="020B0604020202020204" pitchFamily="34" charset="0"/>
-              </a:rPr>
-              <a:t>은 키워드 규칙으로 분류하여 운영행위를 만들고, 변경·연장·정정 문구는 새 운영행위로 만들지 않음</a:t>
+              <a:t>: 한강홍수통제소 공공데이터, 충주·소양강·횡성·광동 4개 댐의 승인 80건 (2010-09 ~ 2021-07)</a:t>
             </a:r>
           </a:p>
           <a:p>
@@ -4493,6 +3610,20 @@
               </a:buBlip>
             </a:pPr>
             <a:r>
+              <a:rPr lang="ko-KR" altLang="en-US" sz="2400" b="1" dirty="0">
+                <a:solidFill>
+                  <a:schemeClr val="tx1">
+                    <a:lumMod val="85000"/>
+                    <a:lumOff val="15000"/>
+                  </a:schemeClr>
+                </a:solidFill>
+                <a:latin typeface="나눔고딕" pitchFamily="50" charset="-127"/>
+                <a:ea typeface="나눔고딕" pitchFamily="50" charset="-127"/>
+                <a:cs typeface="Arial" panose="020B0604020202020204" pitchFamily="34" charset="0"/>
+              </a:rPr>
+              <a:t>수문기상 시간 자료</a:t>
+            </a:r>
+            <a:r>
               <a:rPr lang="ko-KR" altLang="en-US" sz="2400" b="0" dirty="0">
                 <a:solidFill>
                   <a:schemeClr val="tx1">
@@ -4504,8 +3635,21 @@
                 <a:ea typeface="나눔고딕" pitchFamily="50" charset="-127"/>
                 <a:cs typeface="Arial" panose="020B0604020202020204" pitchFamily="34" charset="0"/>
               </a:rPr>
-              <a:t>운영행위 시각은 </a:t>
-            </a:r>
+              <a:t>: K-water 시간자료 508,246행 (수위, 저수량, 강우량, 유입량, 총방류량, 저수율)</a:t>
+            </a:r>
+          </a:p>
+          <a:p>
+            <a:pPr marL="334726" indent="-334726">
+              <a:lnSpc>
+                <a:spcPct val="118000"/>
+              </a:lnSpc>
+              <a:spcAft>
+                <a:spcPts val="600"/>
+              </a:spcAft>
+              <a:buBlip>
+                <a:blip r:embed="rId4"/>
+              </a:buBlip>
+            </a:pPr>
             <a:r>
               <a:rPr lang="ko-KR" altLang="en-US" sz="2400" b="1" dirty="0">
                 <a:solidFill>
@@ -4518,7 +3662,7 @@
                 <a:ea typeface="나눔고딕" pitchFamily="50" charset="-127"/>
                 <a:cs typeface="Arial" panose="020B0604020202020204" pitchFamily="34" charset="0"/>
               </a:rPr>
-              <a:t>비고 명시 → 측정 방류량 변화 → 승인 시작 시각</a:t>
+              <a:t>규정 별표3</a:t>
             </a:r>
             <a:r>
               <a:rPr lang="ko-KR" altLang="en-US" sz="2400" b="0" dirty="0">
@@ -4532,14 +3676,523 @@
                 <a:ea typeface="나눔고딕" pitchFamily="50" charset="-127"/>
                 <a:cs typeface="Arial" panose="020B0604020202020204" pitchFamily="34" charset="0"/>
               </a:rPr>
-              <a:t> 순서로 정함 (68건: 측정 54, 승인 시작 11, 비고 명시 3)</a:t>
+              <a:t>: 연계운영규정의 홍수기 제한수위 (현행 1건, 연혁 9건)</a:t>
+            </a:r>
+          </a:p>
+        </p:txBody>
+      </p:sp>
+      <p:pic>
+        <p:nvPicPr>
+          <p:cNvPr id="1013" name="그림 1. 연구의 구성: Ontology 설계 → KG 구축 → 질문 응답(RAG)" descr="그림 1. 연구의 구성: Ontology 설계 → KG 구축 → 질문 응답(RAG)"/>
+          <p:cNvPicPr>
+            <a:picLocks noChangeAspect="1"/>
+          </p:cNvPicPr>
+          <p:nvPr/>
+        </p:nvPicPr>
+        <p:blipFill>
+          <a:blip r:embed="rId11"/>
+          <a:stretch>
+            <a:fillRect/>
+          </a:stretch>
+        </p:blipFill>
+        <p:spPr>
+          <a:xfrm>
+            <a:off x="1204515" y="24608637"/>
+            <a:ext cx="12900000" cy="9085285"/>
+          </a:xfrm>
+          <a:prstGeom prst="rect">
+            <a:avLst/>
+          </a:prstGeom>
+          <a:ln w="12700">
+            <a:solidFill>
+              <a:srgbClr val="BFC5CC"/>
+            </a:solidFill>
+          </a:ln>
+        </p:spPr>
+      </p:pic>
+      <p:sp>
+        <p:nvSpPr>
+          <p:cNvPr id="1014" name="본문"/>
+          <p:cNvSpPr txBox="1"/>
+          <p:nvPr/>
+        </p:nvSpPr>
+        <p:spPr>
+          <a:xfrm>
+            <a:off x="597946" y="33753922"/>
+            <a:ext cx="14113138" cy="800000"/>
+          </a:xfrm>
+          <a:prstGeom prst="rect">
+            <a:avLst/>
+          </a:prstGeom>
+          <a:noFill/>
+          <a:ln>
+            <a:noFill/>
+          </a:ln>
+        </p:spPr>
+        <p:txBody>
+          <a:bodyPr wrap="square" lIns="66158" tIns="33079" rIns="66158" bIns="33079" anchor="t">
+            <a:noAutofit/>
+          </a:bodyPr>
+          <a:lstStyle/>
+          <a:p>
+            <a:pPr marL="0" indent="0" algn="ctr">
+              <a:lnSpc>
+                <a:spcPct val="118000"/>
+              </a:lnSpc>
+              <a:spcAft>
+                <a:spcPts val="600"/>
+              </a:spcAft>
+              <a:buNone/>
+            </a:pPr>
+            <a:r>
+              <a:rPr lang="ko-KR" altLang="en-US" sz="2400" b="0" dirty="0">
+                <a:solidFill>
+                  <a:schemeClr val="tx1">
+                    <a:lumMod val="85000"/>
+                    <a:lumOff val="15000"/>
+                  </a:schemeClr>
+                </a:solidFill>
+                <a:latin typeface="나눔고딕" pitchFamily="50" charset="-127"/>
+                <a:ea typeface="나눔고딕" pitchFamily="50" charset="-127"/>
+                <a:cs typeface="Arial" panose="020B0604020202020204" pitchFamily="34" charset="0"/>
+              </a:rPr>
+              <a:t>그림 1. 연구의 구성: Ontology 설계 → KG 구축 → 질문 응답(RAG)</a:t>
             </a:r>
           </a:p>
         </p:txBody>
       </p:sp>
       <p:sp>
         <p:nvSpPr>
-          <p:cNvPr id="1018" name="직사각형 1"/>
+          <p:cNvPr id="1015" name="본문"/>
+          <p:cNvSpPr txBox="1"/>
+          <p:nvPr/>
+        </p:nvSpPr>
+        <p:spPr>
+          <a:xfrm>
+            <a:off x="597946" y="34553922"/>
+            <a:ext cx="14113138" cy="4610726"/>
+          </a:xfrm>
+          <a:prstGeom prst="rect">
+            <a:avLst/>
+          </a:prstGeom>
+          <a:noFill/>
+          <a:ln>
+            <a:noFill/>
+          </a:ln>
+        </p:spPr>
+        <p:txBody>
+          <a:bodyPr wrap="square" lIns="66158" tIns="33079" rIns="66158" bIns="33079" anchor="t">
+            <a:noAutofit/>
+          </a:bodyPr>
+          <a:lstStyle/>
+          <a:p>
+            <a:pPr marL="334726" indent="-334726">
+              <a:lnSpc>
+                <a:spcPct val="118000"/>
+              </a:lnSpc>
+              <a:spcAft>
+                <a:spcPts val="600"/>
+              </a:spcAft>
+              <a:buBlip>
+                <a:blip r:embed="rId4"/>
+              </a:buBlip>
+            </a:pPr>
+            <a:r>
+              <a:rPr lang="ko-KR" altLang="en-US" sz="2400" b="1" dirty="0">
+                <a:solidFill>
+                  <a:schemeClr val="tx1">
+                    <a:lumMod val="85000"/>
+                    <a:lumOff val="15000"/>
+                  </a:schemeClr>
+                </a:solidFill>
+                <a:latin typeface="나눔고딕" pitchFamily="50" charset="-127"/>
+                <a:ea typeface="나눔고딕" pitchFamily="50" charset="-127"/>
+                <a:cs typeface="Arial" panose="020B0604020202020204" pitchFamily="34" charset="0"/>
+              </a:rPr>
+              <a:t>STEP 1 Ontology 설계</a:t>
+            </a:r>
+            <a:r>
+              <a:rPr lang="ko-KR" altLang="en-US" sz="2400" b="0" dirty="0">
+                <a:solidFill>
+                  <a:schemeClr val="tx1">
+                    <a:lumMod val="85000"/>
+                    <a:lumOff val="15000"/>
+                  </a:schemeClr>
+                </a:solidFill>
+                <a:latin typeface="나눔고딕" pitchFamily="50" charset="-127"/>
+                <a:ea typeface="나눔고딕" pitchFamily="50" charset="-127"/>
+                <a:cs typeface="Arial" panose="020B0604020202020204" pitchFamily="34" charset="0"/>
+              </a:rPr>
+              <a:t>: 운영자에게 필요한 질문을 </a:t>
+            </a:r>
+            <a:r>
+              <a:rPr lang="ko-KR" altLang="en-US" sz="2400" b="1" dirty="0">
+                <a:solidFill>
+                  <a:schemeClr val="tx1">
+                    <a:lumMod val="85000"/>
+                    <a:lumOff val="15000"/>
+                  </a:schemeClr>
+                </a:solidFill>
+                <a:latin typeface="나눔고딕" pitchFamily="50" charset="-127"/>
+                <a:ea typeface="나눔고딕" pitchFamily="50" charset="-127"/>
+                <a:cs typeface="Arial" panose="020B0604020202020204" pitchFamily="34" charset="0"/>
+              </a:rPr>
+              <a:t>전체 질문 1개와 세부 질문 6개(CQ1~CQ6)</a:t>
+            </a:r>
+            <a:r>
+              <a:rPr lang="ko-KR" altLang="en-US" sz="2400" b="0" dirty="0">
+                <a:solidFill>
+                  <a:schemeClr val="tx1">
+                    <a:lumMod val="85000"/>
+                    <a:lumOff val="15000"/>
+                  </a:schemeClr>
+                </a:solidFill>
+                <a:latin typeface="나눔고딕" pitchFamily="50" charset="-127"/>
+                <a:ea typeface="나눔고딕" pitchFamily="50" charset="-127"/>
+                <a:cs typeface="Arial" panose="020B0604020202020204" pitchFamily="34" charset="0"/>
+              </a:rPr>
+              <a:t> 로 먼저 정하고, 이에 답하는 데 필요한 </a:t>
+            </a:r>
+            <a:r>
+              <a:rPr lang="ko-KR" altLang="en-US" sz="2400" b="1" dirty="0">
+                <a:solidFill>
+                  <a:schemeClr val="tx1">
+                    <a:lumMod val="85000"/>
+                    <a:lumOff val="15000"/>
+                  </a:schemeClr>
+                </a:solidFill>
+                <a:latin typeface="나눔고딕" pitchFamily="50" charset="-127"/>
+                <a:ea typeface="나눔고딕" pitchFamily="50" charset="-127"/>
+                <a:cs typeface="Arial" panose="020B0604020202020204" pitchFamily="34" charset="0"/>
+              </a:rPr>
+              <a:t>Class 6개와 관계 9개</a:t>
+            </a:r>
+            <a:r>
+              <a:rPr lang="ko-KR" altLang="en-US" sz="2400" b="0" dirty="0">
+                <a:solidFill>
+                  <a:schemeClr val="tx1">
+                    <a:lumMod val="85000"/>
+                    <a:lumOff val="15000"/>
+                  </a:schemeClr>
+                </a:solidFill>
+                <a:latin typeface="나눔고딕" pitchFamily="50" charset="-127"/>
+                <a:ea typeface="나눔고딕" pitchFamily="50" charset="-127"/>
+                <a:cs typeface="Arial" panose="020B0604020202020204" pitchFamily="34" charset="0"/>
+              </a:rPr>
+              <a:t>를 정의함. 세부 질문은 현재 상태, 과거 상태, 과거 운영행위, 과거 방류 승인, 현재 운영기준, 공식 근거이며, 전체 질문은 이들을 이어 </a:t>
+            </a:r>
+            <a:r>
+              <a:rPr lang="ko-KR" altLang="en-US" sz="2400" b="1" dirty="0">
+                <a:solidFill>
+                  <a:schemeClr val="tx1">
+                    <a:lumMod val="85000"/>
+                    <a:lumOff val="15000"/>
+                  </a:schemeClr>
+                </a:solidFill>
+                <a:latin typeface="나눔고딕" pitchFamily="50" charset="-127"/>
+                <a:ea typeface="나눔고딕" pitchFamily="50" charset="-127"/>
+                <a:cs typeface="Arial" panose="020B0604020202020204" pitchFamily="34" charset="0"/>
+              </a:rPr>
+              <a:t>현재 상태와 기준을 확인하고 비슷한 과거 사례의 운영행위·승인·근거를 추적</a:t>
+            </a:r>
+            <a:r>
+              <a:rPr lang="ko-KR" altLang="en-US" sz="2400" b="0" dirty="0">
+                <a:solidFill>
+                  <a:schemeClr val="tx1">
+                    <a:lumMod val="85000"/>
+                    <a:lumOff val="15000"/>
+                  </a:schemeClr>
+                </a:solidFill>
+                <a:latin typeface="나눔고딕" pitchFamily="50" charset="-127"/>
+                <a:ea typeface="나눔고딕" pitchFamily="50" charset="-127"/>
+                <a:cs typeface="Arial" panose="020B0604020202020204" pitchFamily="34" charset="0"/>
+              </a:rPr>
+              <a:t>함</a:t>
+            </a:r>
+          </a:p>
+          <a:p>
+            <a:pPr marL="334726" indent="-334726">
+              <a:lnSpc>
+                <a:spcPct val="118000"/>
+              </a:lnSpc>
+              <a:spcAft>
+                <a:spcPts val="600"/>
+              </a:spcAft>
+              <a:buBlip>
+                <a:blip r:embed="rId4"/>
+              </a:buBlip>
+            </a:pPr>
+            <a:r>
+              <a:rPr lang="ko-KR" altLang="en-US" sz="2400" b="1" dirty="0">
+                <a:solidFill>
+                  <a:schemeClr val="tx1">
+                    <a:lumMod val="85000"/>
+                    <a:lumOff val="15000"/>
+                  </a:schemeClr>
+                </a:solidFill>
+                <a:latin typeface="나눔고딕" pitchFamily="50" charset="-127"/>
+                <a:ea typeface="나눔고딕" pitchFamily="50" charset="-127"/>
+                <a:cs typeface="Arial" panose="020B0604020202020204" pitchFamily="34" charset="0"/>
+              </a:rPr>
+              <a:t>STEP 2 KG 구축</a:t>
+            </a:r>
+            <a:r>
+              <a:rPr lang="ko-KR" altLang="en-US" sz="2400" b="0" dirty="0">
+                <a:solidFill>
+                  <a:schemeClr val="tx1">
+                    <a:lumMod val="85000"/>
+                    <a:lumOff val="15000"/>
+                  </a:schemeClr>
+                </a:solidFill>
+                <a:latin typeface="나눔고딕" pitchFamily="50" charset="-127"/>
+                <a:ea typeface="나눔고딕" pitchFamily="50" charset="-127"/>
+                <a:cs typeface="Arial" panose="020B0604020202020204" pitchFamily="34" charset="0"/>
+              </a:rPr>
+              <a:t>: 원자료를 </a:t>
+            </a:r>
+            <a:r>
+              <a:rPr lang="ko-KR" altLang="en-US" sz="2400" b="1" dirty="0">
+                <a:solidFill>
+                  <a:schemeClr val="tx1">
+                    <a:lumMod val="85000"/>
+                    <a:lumOff val="15000"/>
+                  </a:schemeClr>
+                </a:solidFill>
+                <a:latin typeface="나눔고딕" pitchFamily="50" charset="-127"/>
+                <a:ea typeface="나눔고딕" pitchFamily="50" charset="-127"/>
+                <a:cs typeface="Arial" panose="020B0604020202020204" pitchFamily="34" charset="0"/>
+              </a:rPr>
+              <a:t>표 경로</a:t>
+            </a:r>
+            <a:r>
+              <a:rPr lang="ko-KR" altLang="en-US" sz="2400" b="0" dirty="0">
+                <a:solidFill>
+                  <a:schemeClr val="tx1">
+                    <a:lumMod val="85000"/>
+                    <a:lumOff val="15000"/>
+                  </a:schemeClr>
+                </a:solidFill>
+                <a:latin typeface="나눔고딕" pitchFamily="50" charset="-127"/>
+                <a:ea typeface="나눔고딕" pitchFamily="50" charset="-127"/>
+                <a:cs typeface="Arial" panose="020B0604020202020204" pitchFamily="34" charset="0"/>
+              </a:rPr>
+              <a:t>와 </a:t>
+            </a:r>
+            <a:r>
+              <a:rPr lang="ko-KR" altLang="en-US" sz="2400" b="1" dirty="0">
+                <a:solidFill>
+                  <a:schemeClr val="tx1">
+                    <a:lumMod val="85000"/>
+                    <a:lumOff val="15000"/>
+                  </a:schemeClr>
+                </a:solidFill>
+                <a:latin typeface="나눔고딕" pitchFamily="50" charset="-127"/>
+                <a:ea typeface="나눔고딕" pitchFamily="50" charset="-127"/>
+                <a:cs typeface="Arial" panose="020B0604020202020204" pitchFamily="34" charset="0"/>
+              </a:rPr>
+              <a:t>글 경로</a:t>
+            </a:r>
+            <a:r>
+              <a:rPr lang="ko-KR" altLang="en-US" sz="2400" b="0" dirty="0">
+                <a:solidFill>
+                  <a:schemeClr val="tx1">
+                    <a:lumMod val="85000"/>
+                    <a:lumOff val="15000"/>
+                  </a:schemeClr>
+                </a:solidFill>
+                <a:latin typeface="나눔고딕" pitchFamily="50" charset="-127"/>
+                <a:ea typeface="나눔고딕" pitchFamily="50" charset="-127"/>
+                <a:cs typeface="Arial" panose="020B0604020202020204" pitchFamily="34" charset="0"/>
+              </a:rPr>
+              <a:t>로 나누어 Class·관계·속성에 대응시켜 KG(개체 273, 관계 457)로 구축함. 수치 전체와 원문은 외부 저장소에 두고, KG에는 관계와 </a:t>
+            </a:r>
+            <a:r>
+              <a:rPr lang="ko-KR" altLang="en-US" sz="2400" b="1" dirty="0">
+                <a:solidFill>
+                  <a:schemeClr val="tx1">
+                    <a:lumMod val="85000"/>
+                    <a:lumOff val="15000"/>
+                  </a:schemeClr>
+                </a:solidFill>
+                <a:latin typeface="나눔고딕" pitchFamily="50" charset="-127"/>
+                <a:ea typeface="나눔고딕" pitchFamily="50" charset="-127"/>
+                <a:cs typeface="Arial" panose="020B0604020202020204" pitchFamily="34" charset="0"/>
+              </a:rPr>
+              <a:t>출처 번호</a:t>
+            </a:r>
+            <a:r>
+              <a:rPr lang="ko-KR" altLang="en-US" sz="2400" b="0" dirty="0">
+                <a:solidFill>
+                  <a:schemeClr val="tx1">
+                    <a:lumMod val="85000"/>
+                    <a:lumOff val="15000"/>
+                  </a:schemeClr>
+                </a:solidFill>
+                <a:latin typeface="나눔고딕" pitchFamily="50" charset="-127"/>
+                <a:ea typeface="나눔고딕" pitchFamily="50" charset="-127"/>
+                <a:cs typeface="Arial" panose="020B0604020202020204" pitchFamily="34" charset="0"/>
+              </a:rPr>
+              <a:t>만 저장함</a:t>
+            </a:r>
+          </a:p>
+          <a:p>
+            <a:pPr marL="334726" indent="-334726">
+              <a:lnSpc>
+                <a:spcPct val="118000"/>
+              </a:lnSpc>
+              <a:spcAft>
+                <a:spcPts val="600"/>
+              </a:spcAft>
+              <a:buBlip>
+                <a:blip r:embed="rId4"/>
+              </a:buBlip>
+            </a:pPr>
+            <a:r>
+              <a:rPr lang="ko-KR" altLang="en-US" sz="2400" b="1" dirty="0">
+                <a:solidFill>
+                  <a:schemeClr val="tx1">
+                    <a:lumMod val="85000"/>
+                    <a:lumOff val="15000"/>
+                  </a:schemeClr>
+                </a:solidFill>
+                <a:latin typeface="나눔고딕" pitchFamily="50" charset="-127"/>
+                <a:ea typeface="나눔고딕" pitchFamily="50" charset="-127"/>
+                <a:cs typeface="Arial" panose="020B0604020202020204" pitchFamily="34" charset="0"/>
+              </a:rPr>
+              <a:t>STEP 3 질문 응답(RAG)</a:t>
+            </a:r>
+            <a:r>
+              <a:rPr lang="ko-KR" altLang="en-US" sz="2400" b="0" dirty="0">
+                <a:solidFill>
+                  <a:schemeClr val="tx1">
+                    <a:lumMod val="85000"/>
+                    <a:lumOff val="15000"/>
+                  </a:schemeClr>
+                </a:solidFill>
+                <a:latin typeface="나눔고딕" pitchFamily="50" charset="-127"/>
+                <a:ea typeface="나눔고딕" pitchFamily="50" charset="-127"/>
+                <a:cs typeface="Arial" panose="020B0604020202020204" pitchFamily="34" charset="0"/>
+              </a:rPr>
+              <a:t>: ① LLM이 질문의 </a:t>
+            </a:r>
+            <a:r>
+              <a:rPr lang="ko-KR" altLang="en-US" sz="2400" b="1" dirty="0">
+                <a:solidFill>
+                  <a:schemeClr val="tx1">
+                    <a:lumMod val="85000"/>
+                    <a:lumOff val="15000"/>
+                  </a:schemeClr>
+                </a:solidFill>
+                <a:latin typeface="나눔고딕" pitchFamily="50" charset="-127"/>
+                <a:ea typeface="나눔고딕" pitchFamily="50" charset="-127"/>
+                <a:cs typeface="Arial" panose="020B0604020202020204" pitchFamily="34" charset="0"/>
+              </a:rPr>
+              <a:t>의도</a:t>
+            </a:r>
+            <a:r>
+              <a:rPr lang="ko-KR" altLang="en-US" sz="2400" b="0" dirty="0">
+                <a:solidFill>
+                  <a:schemeClr val="tx1">
+                    <a:lumMod val="85000"/>
+                    <a:lumOff val="15000"/>
+                  </a:schemeClr>
+                </a:solidFill>
+                <a:latin typeface="나눔고딕" pitchFamily="50" charset="-127"/>
+                <a:ea typeface="나눔고딕" pitchFamily="50" charset="-127"/>
+                <a:cs typeface="Arial" panose="020B0604020202020204" pitchFamily="34" charset="0"/>
+              </a:rPr>
+              <a:t>와 댐·시점을 정리 → ② 의도별 </a:t>
+            </a:r>
+            <a:r>
+              <a:rPr lang="ko-KR" altLang="en-US" sz="2400" b="1" dirty="0">
+                <a:solidFill>
+                  <a:schemeClr val="tx1">
+                    <a:lumMod val="85000"/>
+                    <a:lumOff val="15000"/>
+                  </a:schemeClr>
+                </a:solidFill>
+                <a:latin typeface="나눔고딕" pitchFamily="50" charset="-127"/>
+                <a:ea typeface="나눔고딕" pitchFamily="50" charset="-127"/>
+                <a:cs typeface="Arial" panose="020B0604020202020204" pitchFamily="34" charset="0"/>
+              </a:rPr>
+              <a:t>Cypher</a:t>
+            </a:r>
+            <a:r>
+              <a:rPr lang="ko-KR" altLang="en-US" sz="2400" b="0" dirty="0">
+                <a:solidFill>
+                  <a:schemeClr val="tx1">
+                    <a:lumMod val="85000"/>
+                    <a:lumOff val="15000"/>
+                  </a:schemeClr>
+                </a:solidFill>
+                <a:latin typeface="나눔고딕" pitchFamily="50" charset="-127"/>
+                <a:ea typeface="나눔고딕" pitchFamily="50" charset="-127"/>
+                <a:cs typeface="Arial" panose="020B0604020202020204" pitchFamily="34" charset="0"/>
+              </a:rPr>
+              <a:t>로 KG를 탐색해 관련 승인·운영행위·기준과 출처 번호를 찾음 → ③ 그 번호로 측정자료·문서 저장소에서 값과 원문을 읽음 → ④ 전체 질문은 수위·유입량의 </a:t>
+            </a:r>
+            <a:r>
+              <a:rPr lang="ko-KR" altLang="en-US" sz="2400" b="1" dirty="0">
+                <a:solidFill>
+                  <a:schemeClr val="tx1">
+                    <a:lumMod val="85000"/>
+                    <a:lumOff val="15000"/>
+                  </a:schemeClr>
+                </a:solidFill>
+                <a:latin typeface="나눔고딕" pitchFamily="50" charset="-127"/>
+                <a:ea typeface="나눔고딕" pitchFamily="50" charset="-127"/>
+                <a:cs typeface="Arial" panose="020B0604020202020204" pitchFamily="34" charset="0"/>
+              </a:rPr>
+              <a:t>유클리드 거리</a:t>
+            </a:r>
+            <a:r>
+              <a:rPr lang="ko-KR" altLang="en-US" sz="2400" b="0" dirty="0">
+                <a:solidFill>
+                  <a:schemeClr val="tx1">
+                    <a:lumMod val="85000"/>
+                    <a:lumOff val="15000"/>
+                  </a:schemeClr>
+                </a:solidFill>
+                <a:latin typeface="나눔고딕" pitchFamily="50" charset="-127"/>
+                <a:ea typeface="나눔고딕" pitchFamily="50" charset="-127"/>
+                <a:cs typeface="Arial" panose="020B0604020202020204" pitchFamily="34" charset="0"/>
+              </a:rPr>
+              <a:t>로 비슷한 과거 사례를 고르고, 수치 계산은 코드가 수행 → ⑤ </a:t>
+            </a:r>
+            <a:r>
+              <a:rPr lang="ko-KR" altLang="en-US" sz="2400" b="1" dirty="0">
+                <a:solidFill>
+                  <a:schemeClr val="tx1">
+                    <a:lumMod val="85000"/>
+                    <a:lumOff val="15000"/>
+                  </a:schemeClr>
+                </a:solidFill>
+                <a:latin typeface="나눔고딕" pitchFamily="50" charset="-127"/>
+                <a:ea typeface="나눔고딕" pitchFamily="50" charset="-127"/>
+                <a:cs typeface="Arial" panose="020B0604020202020204" pitchFamily="34" charset="0"/>
+              </a:rPr>
+              <a:t>근거 모음</a:t>
+            </a:r>
+            <a:r>
+              <a:rPr lang="ko-KR" altLang="en-US" sz="2400" b="0" dirty="0">
+                <a:solidFill>
+                  <a:schemeClr val="tx1">
+                    <a:lumMod val="85000"/>
+                    <a:lumOff val="15000"/>
+                  </a:schemeClr>
+                </a:solidFill>
+                <a:latin typeface="나눔고딕" pitchFamily="50" charset="-127"/>
+                <a:ea typeface="나눔고딕" pitchFamily="50" charset="-127"/>
+                <a:cs typeface="Arial" panose="020B0604020202020204" pitchFamily="34" charset="0"/>
+              </a:rPr>
+              <a:t> 안에서 LLM이 답변하고 출처 번호를 붙임</a:t>
+            </a:r>
+          </a:p>
+        </p:txBody>
+      </p:sp>
+      <p:sp>
+        <p:nvSpPr>
+          <p:cNvPr id="1016" name="직사각형 1"/>
           <p:cNvSpPr/>
           <p:nvPr/>
         </p:nvSpPr>
@@ -4598,7 +4251,7 @@
       </p:sp>
       <p:sp>
         <p:nvSpPr>
-          <p:cNvPr id="1019" name="직사각형 415"/>
+          <p:cNvPr id="1017" name="직사각형 415"/>
           <p:cNvSpPr/>
           <p:nvPr/>
         </p:nvSpPr>
@@ -4663,14 +4316,14 @@
                 <a:ea typeface="나눔고딕" pitchFamily="50" charset="-127"/>
                 <a:cs typeface="Arial" panose="020B0604020202020204" pitchFamily="34" charset="0"/>
               </a:rPr>
-              <a:t>Table 3. 구축한 지식그래프의 규모</a:t>
+              <a:t>Table 2. 구축한 지식그래프의 규모</a:t>
             </a:r>
           </a:p>
         </p:txBody>
       </p:sp>
       <p:graphicFrame>
         <p:nvGraphicFramePr>
-          <p:cNvPr id="1020" name="표"/>
+          <p:cNvPr id="1018" name="표"/>
           <p:cNvGraphicFramePr>
             <a:graphicFrameLocks noGrp="1"/>
           </p:cNvGraphicFramePr>
@@ -5318,7 +4971,7 @@
       </p:graphicFrame>
       <p:pic>
         <p:nvPicPr>
-          <p:cNvPr id="1021" name="그림 2. 지식그래프의 일부: 충주댐 승인 1368번" descr="그림 2. 지식그래프의 일부: 충주댐 승인 1368번"/>
+          <p:cNvPr id="1019" name="그림 2. 지식그래프의 일부: 충주댐 승인 1368번" descr="그림 2. 지식그래프의 일부: 충주댐 승인 1368번"/>
           <p:cNvPicPr>
             <a:picLocks noChangeAspect="1"/>
           </p:cNvPicPr>
@@ -5347,7 +5000,7 @@
       </p:pic>
       <p:sp>
         <p:nvSpPr>
-          <p:cNvPr id="1022" name="본문"/>
+          <p:cNvPr id="1020" name="본문"/>
           <p:cNvSpPr txBox="1"/>
           <p:nvPr/>
         </p:nvSpPr>
@@ -5398,7 +5051,7 @@
       </p:sp>
       <p:sp>
         <p:nvSpPr>
-          <p:cNvPr id="1023" name="본문"/>
+          <p:cNvPr id="1021" name="본문"/>
           <p:cNvSpPr txBox="1"/>
           <p:nvPr/>
         </p:nvSpPr>
@@ -5507,7 +5160,7 @@
       </p:sp>
       <p:sp>
         <p:nvSpPr>
-          <p:cNvPr id="1024" name="직사각형 1"/>
+          <p:cNvPr id="1022" name="직사각형 1"/>
           <p:cNvSpPr/>
           <p:nvPr/>
         </p:nvSpPr>
@@ -5559,14 +5212,14 @@
                 <a:ea typeface="나눔고딕 ExtraBold" panose="020D0904000000000000" pitchFamily="50" charset="-127"/>
                 <a:cs typeface="Arial Unicode MS" panose="020B0604020202020204" pitchFamily="50" charset="-127"/>
               </a:rPr>
-              <a:t>질문 처리 과정과 예시</a:t>
+              <a:t>질문 응답 예시</a:t>
             </a:r>
           </a:p>
         </p:txBody>
       </p:sp>
       <p:sp>
         <p:nvSpPr>
-          <p:cNvPr id="1025" name="직사각형 415"/>
+          <p:cNvPr id="1023" name="직사각형 415"/>
           <p:cNvSpPr/>
           <p:nvPr/>
         </p:nvSpPr>
@@ -5631,14 +5284,14 @@
                 <a:ea typeface="나눔고딕" pitchFamily="50" charset="-127"/>
                 <a:cs typeface="Arial" panose="020B0604020202020204" pitchFamily="34" charset="0"/>
               </a:rPr>
-              <a:t>Table 4. SIMILAR 질문의 처리 과정</a:t>
+              <a:t>Table 3. 전체 질문에 대한 응답 과정</a:t>
             </a:r>
           </a:p>
         </p:txBody>
       </p:sp>
       <p:graphicFrame>
         <p:nvGraphicFramePr>
-          <p:cNvPr id="1026" name="표"/>
+          <p:cNvPr id="1024" name="표"/>
           <p:cNvGraphicFramePr>
             <a:graphicFrameLocks noGrp="1"/>
           </p:cNvGraphicFramePr>
@@ -5646,15 +5299,15 @@
         </p:nvGraphicFramePr>
         <p:xfrm>
           <a:off x="15670184" y="22133819"/>
-          <a:ext cx="13600000" cy="4542500"/>
+          <a:ext cx="13500000" cy="4242500"/>
         </p:xfrm>
         <a:graphic>
           <a:graphicData uri="http://schemas.openxmlformats.org/drawingml/2006/table">
             <a:tbl>
               <a:tblPr firstRow="1" bandRow="1"/>
               <a:tblGrid>
-                <a:gridCol w="3200000"/>
-                <a:gridCol w="10400000"/>
+                <a:gridCol w="2600000"/>
+                <a:gridCol w="10900000"/>
               </a:tblGrid>
               <a:tr h="499250">
                 <a:tc>
@@ -5725,7 +5378,7 @@
                           <a:ea typeface="나눔고딕" pitchFamily="50" charset="-127"/>
                           <a:cs typeface="Arial" panose="020B0604020202020204" pitchFamily="34" charset="0"/>
                         </a:rPr>
-                        <a:t>실제 내용 (소양강댐, SIMILAR 질문)</a:t>
+                        <a:t>내용</a:t>
                       </a:r>
                     </a:p>
                   </a:txBody>
@@ -5756,7 +5409,7 @@
                   </a:tcPr>
                 </a:tc>
               </a:tr>
-              <a:tr h="499250">
+              <a:tr h="848500">
                 <a:tc>
                   <a:txBody>
                     <a:bodyPr/>
@@ -5779,7 +5432,7 @@
                           <a:ea typeface="나눔고딕" pitchFamily="50" charset="-127"/>
                           <a:cs typeface="Arial" panose="020B0604020202020204" pitchFamily="34" charset="0"/>
                         </a:rPr>
-                        <a:t>① 질문 해석 (LLM)</a:t>
+                        <a:t>질문</a:t>
                       </a:r>
                     </a:p>
                   </a:txBody>
@@ -5831,7 +5484,261 @@
                           <a:ea typeface="나눔고딕" pitchFamily="50" charset="-127"/>
                           <a:cs typeface="Arial" panose="020B0604020202020204" pitchFamily="34" charset="0"/>
                         </a:rPr>
-                        <a:t>{"intent": "SIMILAR", "slots": {"dam": "소양강댐", "k": 1}}</a:t>
+                        <a:t>“소양강댐의 현재 수위를 제한수위와 비교하고, 비슷했던 과거 사례의 운영행위와 승인, 근거를 알려줘”</a:t>
+                      </a:r>
+                    </a:p>
+                  </a:txBody>
+                  <a:tcPr marL="91440" marR="91440" marT="60000" marB="60000" anchor="ctr">
+                    <a:lnL w="9525">
+                      <a:solidFill>
+                        <a:srgbClr val="9AA7B5"/>
+                      </a:solidFill>
+                    </a:lnL>
+                    <a:lnR w="9525">
+                      <a:solidFill>
+                        <a:srgbClr val="9AA7B5"/>
+                      </a:solidFill>
+                    </a:lnR>
+                    <a:lnT w="9525">
+                      <a:solidFill>
+                        <a:srgbClr val="9AA7B5"/>
+                      </a:solidFill>
+                    </a:lnT>
+                    <a:lnB w="9525">
+                      <a:solidFill>
+                        <a:srgbClr val="9AA7B5"/>
+                      </a:solidFill>
+                    </a:lnB>
+                    <a:solidFill>
+                      <a:srgbClr val="FFFFFF"/>
+                    </a:solidFill>
+                  </a:tcPr>
+                </a:tc>
+              </a:tr>
+              <a:tr h="499250">
+                <a:tc>
+                  <a:txBody>
+                    <a:bodyPr/>
+                    <a:lstStyle/>
+                    <a:p>
+                      <a:pPr algn="l">
+                        <a:lnSpc>
+                          <a:spcPct val="105000"/>
+                        </a:lnSpc>
+                      </a:pPr>
+                      <a:r>
+                        <a:rPr lang="ko-KR" altLang="en-US" sz="2200" b="1" dirty="0">
+                          <a:solidFill>
+                            <a:schemeClr val="tx1">
+                              <a:lumMod val="85000"/>
+                              <a:lumOff val="15000"/>
+                            </a:schemeClr>
+                          </a:solidFill>
+                          <a:latin typeface="나눔고딕" pitchFamily="50" charset="-127"/>
+                          <a:ea typeface="나눔고딕" pitchFamily="50" charset="-127"/>
+                          <a:cs typeface="Arial" panose="020B0604020202020204" pitchFamily="34" charset="0"/>
+                        </a:rPr>
+                        <a:t>의도·값</a:t>
+                      </a:r>
+                    </a:p>
+                  </a:txBody>
+                  <a:tcPr marL="91440" marR="91440" marT="60000" marB="60000" anchor="ctr">
+                    <a:lnL w="9525">
+                      <a:solidFill>
+                        <a:srgbClr val="9AA7B5"/>
+                      </a:solidFill>
+                    </a:lnL>
+                    <a:lnR w="9525">
+                      <a:solidFill>
+                        <a:srgbClr val="9AA7B5"/>
+                      </a:solidFill>
+                    </a:lnR>
+                    <a:lnT w="9525">
+                      <a:solidFill>
+                        <a:srgbClr val="9AA7B5"/>
+                      </a:solidFill>
+                    </a:lnT>
+                    <a:lnB w="9525">
+                      <a:solidFill>
+                        <a:srgbClr val="9AA7B5"/>
+                      </a:solidFill>
+                    </a:lnB>
+                    <a:solidFill>
+                      <a:srgbClr val="EEF3F8"/>
+                    </a:solidFill>
+                  </a:tcPr>
+                </a:tc>
+                <a:tc>
+                  <a:txBody>
+                    <a:bodyPr/>
+                    <a:lstStyle/>
+                    <a:p>
+                      <a:pPr algn="l">
+                        <a:lnSpc>
+                          <a:spcPct val="105000"/>
+                        </a:lnSpc>
+                      </a:pPr>
+                      <a:r>
+                        <a:rPr lang="ko-KR" altLang="en-US" sz="2200" b="0" dirty="0">
+                          <a:solidFill>
+                            <a:schemeClr val="tx1">
+                              <a:lumMod val="85000"/>
+                              <a:lumOff val="15000"/>
+                            </a:schemeClr>
+                          </a:solidFill>
+                          <a:latin typeface="나눔고딕" pitchFamily="50" charset="-127"/>
+                          <a:ea typeface="나눔고딕" pitchFamily="50" charset="-127"/>
+                          <a:cs typeface="Arial" panose="020B0604020202020204" pitchFamily="34" charset="0"/>
+                        </a:rPr>
+                        <a:t>전체 질문 (CQ1~CQ6를 이어서 조회), 댐 = 소양강댐</a:t>
+                      </a:r>
+                    </a:p>
+                  </a:txBody>
+                  <a:tcPr marL="91440" marR="91440" marT="60000" marB="60000" anchor="ctr">
+                    <a:lnL w="9525">
+                      <a:solidFill>
+                        <a:srgbClr val="9AA7B5"/>
+                      </a:solidFill>
+                    </a:lnL>
+                    <a:lnR w="9525">
+                      <a:solidFill>
+                        <a:srgbClr val="9AA7B5"/>
+                      </a:solidFill>
+                    </a:lnR>
+                    <a:lnT w="9525">
+                      <a:solidFill>
+                        <a:srgbClr val="9AA7B5"/>
+                      </a:solidFill>
+                    </a:lnT>
+                    <a:lnB w="9525">
+                      <a:solidFill>
+                        <a:srgbClr val="9AA7B5"/>
+                      </a:solidFill>
+                    </a:lnB>
+                    <a:solidFill>
+                      <a:srgbClr val="EEF3F8"/>
+                    </a:solidFill>
+                  </a:tcPr>
+                </a:tc>
+              </a:tr>
+              <a:tr h="1547000">
+                <a:tc>
+                  <a:txBody>
+                    <a:bodyPr/>
+                    <a:lstStyle/>
+                    <a:p>
+                      <a:pPr algn="l">
+                        <a:lnSpc>
+                          <a:spcPct val="105000"/>
+                        </a:lnSpc>
+                      </a:pPr>
+                      <a:r>
+                        <a:rPr lang="ko-KR" altLang="en-US" sz="2200" b="1" dirty="0">
+                          <a:solidFill>
+                            <a:schemeClr val="tx1">
+                              <a:lumMod val="85000"/>
+                              <a:lumOff val="15000"/>
+                            </a:schemeClr>
+                          </a:solidFill>
+                          <a:latin typeface="나눔고딕" pitchFamily="50" charset="-127"/>
+                          <a:ea typeface="나눔고딕" pitchFamily="50" charset="-127"/>
+                          <a:cs typeface="Arial" panose="020B0604020202020204" pitchFamily="34" charset="0"/>
+                        </a:rPr>
+                        <a:t>근거 모음</a:t>
+                      </a:r>
+                    </a:p>
+                  </a:txBody>
+                  <a:tcPr marL="91440" marR="91440" marT="60000" marB="60000" anchor="ctr">
+                    <a:lnL w="9525">
+                      <a:solidFill>
+                        <a:srgbClr val="9AA7B5"/>
+                      </a:solidFill>
+                    </a:lnL>
+                    <a:lnR w="9525">
+                      <a:solidFill>
+                        <a:srgbClr val="9AA7B5"/>
+                      </a:solidFill>
+                    </a:lnR>
+                    <a:lnT w="9525">
+                      <a:solidFill>
+                        <a:srgbClr val="9AA7B5"/>
+                      </a:solidFill>
+                    </a:lnT>
+                    <a:lnB w="9525">
+                      <a:solidFill>
+                        <a:srgbClr val="9AA7B5"/>
+                      </a:solidFill>
+                    </a:lnB>
+                    <a:solidFill>
+                      <a:srgbClr val="FFFFFF"/>
+                    </a:solidFill>
+                  </a:tcPr>
+                </a:tc>
+                <a:tc>
+                  <a:txBody>
+                    <a:bodyPr/>
+                    <a:lstStyle/>
+                    <a:p>
+                      <a:pPr algn="l">
+                        <a:lnSpc>
+                          <a:spcPct val="105000"/>
+                        </a:lnSpc>
+                      </a:pPr>
+                      <a:r>
+                        <a:rPr lang="ko-KR" altLang="en-US" sz="2200" b="0" dirty="0">
+                          <a:solidFill>
+                            <a:schemeClr val="tx1">
+                              <a:lumMod val="85000"/>
+                              <a:lumOff val="15000"/>
+                            </a:schemeClr>
+                          </a:solidFill>
+                          <a:latin typeface="나눔고딕" pitchFamily="50" charset="-127"/>
+                          <a:ea typeface="나눔고딕" pitchFamily="50" charset="-127"/>
+                          <a:cs typeface="Arial" panose="020B0604020202020204" pitchFamily="34" charset="0"/>
+                        </a:rPr>
+                        <a:t>현재 수위 185.2644 EL.m, 제한수위 190.3 EL.m [CRI:CR-01]</a:t>
+                      </a:r>
+                    </a:p>
+                    <a:p>
+                      <a:pPr algn="l">
+                        <a:lnSpc>
+                          <a:spcPct val="105000"/>
+                        </a:lnSpc>
+                      </a:pPr>
+                      <a:r>
+                        <a:rPr lang="ko-KR" altLang="en-US" sz="2200" b="0" dirty="0">
+                          <a:solidFill>
+                            <a:schemeClr val="tx1">
+                              <a:lumMod val="85000"/>
+                              <a:lumOff val="15000"/>
+                            </a:schemeClr>
+                          </a:solidFill>
+                          <a:latin typeface="나눔고딕" pitchFamily="50" charset="-127"/>
+                          <a:ea typeface="나눔고딕" pitchFamily="50" charset="-127"/>
+                          <a:cs typeface="Arial" panose="020B0604020202020204" pitchFamily="34" charset="0"/>
+                        </a:rPr>
+                        <a:t>비슷한 과거 사례 2017-08-25 15:00 (수위·유입량 거리 0.223)</a:t>
+                      </a:r>
+                    </a:p>
+                    <a:p>
+                      <a:pPr algn="l">
+                        <a:lnSpc>
+                          <a:spcPct val="105000"/>
+                        </a:lnSpc>
+                      </a:pPr>
+                      <a:r>
+                        <a:rPr lang="ko-KR" altLang="en-US" sz="2200" b="0" dirty="0">
+                          <a:solidFill>
+                            <a:schemeClr val="tx1">
+                              <a:lumMod val="85000"/>
+                              <a:lumOff val="15000"/>
+                            </a:schemeClr>
+                          </a:solidFill>
+                          <a:latin typeface="나눔고딕" pitchFamily="50" charset="-127"/>
+                          <a:ea typeface="나눔고딕" pitchFamily="50" charset="-127"/>
+                          <a:cs typeface="Arial" panose="020B0604020202020204" pitchFamily="34" charset="0"/>
+                        </a:rPr>
+                        <a:t>운영행위 탄력적 방류 [OPR:2754:2], 승인 [APR:2754] 승인 방류량 1500 ㎥/s, 사례 전후 최대 총방류량 1011.2 CMS (승인량의 67.4%)</a:t>
                       </a:r>
                     </a:p>
                   </a:txBody>
@@ -5885,7 +5792,7 @@
                           <a:ea typeface="나눔고딕" pitchFamily="50" charset="-127"/>
                           <a:cs typeface="Arial" panose="020B0604020202020204" pitchFamily="34" charset="0"/>
                         </a:rPr>
-                        <a:t>② 현재 상태·기준</a:t>
+                        <a:t>답변 (LLM)</a:t>
                       </a:r>
                     </a:p>
                   </a:txBody>
@@ -5937,501 +5844,7 @@
                           <a:ea typeface="나눔고딕" pitchFamily="50" charset="-127"/>
                           <a:cs typeface="Arial" panose="020B0604020202020204" pitchFamily="34" charset="0"/>
                         </a:rPr>
-                        <a:t>수위 185.2644 EL.m, 제한수위 190.3 EL.m → 제한수위보다 </a:t>
-                      </a:r>
-                      <a:r>
-                        <a:rPr lang="ko-KR" altLang="en-US" sz="2200" b="1" dirty="0">
-                          <a:solidFill>
-                            <a:schemeClr val="tx1">
-                              <a:lumMod val="85000"/>
-                              <a:lumOff val="15000"/>
-                            </a:schemeClr>
-                          </a:solidFill>
-                          <a:latin typeface="나눔고딕" pitchFamily="50" charset="-127"/>
-                          <a:ea typeface="나눔고딕" pitchFamily="50" charset="-127"/>
-                          <a:cs typeface="Arial" panose="020B0604020202020204" pitchFamily="34" charset="0"/>
-                        </a:rPr>
-                        <a:t>5.04 m 낮음</a:t>
-                      </a:r>
-                      <a:r>
-                        <a:rPr lang="ko-KR" altLang="en-US" sz="2200" b="0" dirty="0">
-                          <a:solidFill>
-                            <a:schemeClr val="tx1">
-                              <a:lumMod val="85000"/>
-                              <a:lumOff val="15000"/>
-                            </a:schemeClr>
-                          </a:solidFill>
-                          <a:latin typeface="나눔고딕" pitchFamily="50" charset="-127"/>
-                          <a:ea typeface="나눔고딕" pitchFamily="50" charset="-127"/>
-                          <a:cs typeface="Arial" panose="020B0604020202020204" pitchFamily="34" charset="0"/>
-                        </a:rPr>
-                        <a:t> (코드가 계산)</a:t>
-                      </a:r>
-                    </a:p>
-                  </a:txBody>
-                  <a:tcPr marL="91440" marR="91440" marT="60000" marB="60000" anchor="ctr">
-                    <a:lnL w="9525">
-                      <a:solidFill>
-                        <a:srgbClr val="9AA7B5"/>
-                      </a:solidFill>
-                    </a:lnL>
-                    <a:lnR w="9525">
-                      <a:solidFill>
-                        <a:srgbClr val="9AA7B5"/>
-                      </a:solidFill>
-                    </a:lnR>
-                    <a:lnT w="9525">
-                      <a:solidFill>
-                        <a:srgbClr val="9AA7B5"/>
-                      </a:solidFill>
-                    </a:lnT>
-                    <a:lnB w="9525">
-                      <a:solidFill>
-                        <a:srgbClr val="9AA7B5"/>
-                      </a:solidFill>
-                    </a:lnB>
-                    <a:solidFill>
-                      <a:srgbClr val="EEF3F8"/>
-                    </a:solidFill>
-                  </a:tcPr>
-                </a:tc>
-              </a:tr>
-              <a:tr h="848500">
-                <a:tc>
-                  <a:txBody>
-                    <a:bodyPr/>
-                    <a:lstStyle/>
-                    <a:p>
-                      <a:pPr algn="l">
-                        <a:lnSpc>
-                          <a:spcPct val="105000"/>
-                        </a:lnSpc>
-                      </a:pPr>
-                      <a:r>
-                        <a:rPr lang="ko-KR" altLang="en-US" sz="2200" b="1" dirty="0">
-                          <a:solidFill>
-                            <a:schemeClr val="tx1">
-                              <a:lumMod val="85000"/>
-                              <a:lumOff val="15000"/>
-                            </a:schemeClr>
-                          </a:solidFill>
-                          <a:latin typeface="나눔고딕" pitchFamily="50" charset="-127"/>
-                          <a:ea typeface="나눔고딕" pitchFamily="50" charset="-127"/>
-                          <a:cs typeface="Arial" panose="020B0604020202020204" pitchFamily="34" charset="0"/>
-                        </a:rPr>
-                        <a:t>③ 비슷한 과거 사례</a:t>
-                      </a:r>
-                    </a:p>
-                  </a:txBody>
-                  <a:tcPr marL="91440" marR="91440" marT="60000" marB="60000" anchor="ctr">
-                    <a:lnL w="9525">
-                      <a:solidFill>
-                        <a:srgbClr val="9AA7B5"/>
-                      </a:solidFill>
-                    </a:lnL>
-                    <a:lnR w="9525">
-                      <a:solidFill>
-                        <a:srgbClr val="9AA7B5"/>
-                      </a:solidFill>
-                    </a:lnR>
-                    <a:lnT w="9525">
-                      <a:solidFill>
-                        <a:srgbClr val="9AA7B5"/>
-                      </a:solidFill>
-                    </a:lnT>
-                    <a:lnB w="9525">
-                      <a:solidFill>
-                        <a:srgbClr val="9AA7B5"/>
-                      </a:solidFill>
-                    </a:lnB>
-                    <a:solidFill>
-                      <a:srgbClr val="FFFFFF"/>
-                    </a:solidFill>
-                  </a:tcPr>
-                </a:tc>
-                <a:tc>
-                  <a:txBody>
-                    <a:bodyPr/>
-                    <a:lstStyle/>
-                    <a:p>
-                      <a:pPr algn="l">
-                        <a:lnSpc>
-                          <a:spcPct val="105000"/>
-                        </a:lnSpc>
-                      </a:pPr>
-                      <a:r>
-                        <a:rPr lang="ko-KR" altLang="en-US" sz="2200" b="0" dirty="0">
-                          <a:solidFill>
-                            <a:schemeClr val="tx1">
-                              <a:lumMod val="85000"/>
-                              <a:lumOff val="15000"/>
-                            </a:schemeClr>
-                          </a:solidFill>
-                          <a:latin typeface="나눔고딕" pitchFamily="50" charset="-127"/>
-                          <a:ea typeface="나눔고딕" pitchFamily="50" charset="-127"/>
-                          <a:cs typeface="Arial" panose="020B0604020202020204" pitchFamily="34" charset="0"/>
-                        </a:rPr>
-                        <a:t>수위·유입량을 0~1로 정규화한 거리가 가장 작은 시점: </a:t>
-                      </a:r>
-                      <a:r>
-                        <a:rPr lang="ko-KR" altLang="en-US" sz="2200" b="1" dirty="0">
-                          <a:solidFill>
-                            <a:schemeClr val="tx1">
-                              <a:lumMod val="85000"/>
-                              <a:lumOff val="15000"/>
-                            </a:schemeClr>
-                          </a:solidFill>
-                          <a:latin typeface="나눔고딕" pitchFamily="50" charset="-127"/>
-                          <a:ea typeface="나눔고딕" pitchFamily="50" charset="-127"/>
-                          <a:cs typeface="Arial" panose="020B0604020202020204" pitchFamily="34" charset="0"/>
-                        </a:rPr>
-                        <a:t>2017-08-25 15:00 (거리 0.223)</a:t>
-                      </a:r>
-                    </a:p>
-                  </a:txBody>
-                  <a:tcPr marL="91440" marR="91440" marT="60000" marB="60000" anchor="ctr">
-                    <a:lnL w="9525">
-                      <a:solidFill>
-                        <a:srgbClr val="9AA7B5"/>
-                      </a:solidFill>
-                    </a:lnL>
-                    <a:lnR w="9525">
-                      <a:solidFill>
-                        <a:srgbClr val="9AA7B5"/>
-                      </a:solidFill>
-                    </a:lnR>
-                    <a:lnT w="9525">
-                      <a:solidFill>
-                        <a:srgbClr val="9AA7B5"/>
-                      </a:solidFill>
-                    </a:lnT>
-                    <a:lnB w="9525">
-                      <a:solidFill>
-                        <a:srgbClr val="9AA7B5"/>
-                      </a:solidFill>
-                    </a:lnB>
-                    <a:solidFill>
-                      <a:srgbClr val="FFFFFF"/>
-                    </a:solidFill>
-                  </a:tcPr>
-                </a:tc>
-              </a:tr>
-              <a:tr h="499250">
-                <a:tc>
-                  <a:txBody>
-                    <a:bodyPr/>
-                    <a:lstStyle/>
-                    <a:p>
-                      <a:pPr algn="l">
-                        <a:lnSpc>
-                          <a:spcPct val="105000"/>
-                        </a:lnSpc>
-                      </a:pPr>
-                      <a:r>
-                        <a:rPr lang="ko-KR" altLang="en-US" sz="2200" b="1" dirty="0">
-                          <a:solidFill>
-                            <a:schemeClr val="tx1">
-                              <a:lumMod val="85000"/>
-                              <a:lumOff val="15000"/>
-                            </a:schemeClr>
-                          </a:solidFill>
-                          <a:latin typeface="나눔고딕" pitchFamily="50" charset="-127"/>
-                          <a:ea typeface="나눔고딕" pitchFamily="50" charset="-127"/>
-                          <a:cs typeface="Arial" panose="020B0604020202020204" pitchFamily="34" charset="0"/>
-                        </a:rPr>
-                        <a:t>④ 운영행위·승인</a:t>
-                      </a:r>
-                    </a:p>
-                  </a:txBody>
-                  <a:tcPr marL="91440" marR="91440" marT="60000" marB="60000" anchor="ctr">
-                    <a:lnL w="9525">
-                      <a:solidFill>
-                        <a:srgbClr val="9AA7B5"/>
-                      </a:solidFill>
-                    </a:lnL>
-                    <a:lnR w="9525">
-                      <a:solidFill>
-                        <a:srgbClr val="9AA7B5"/>
-                      </a:solidFill>
-                    </a:lnR>
-                    <a:lnT w="9525">
-                      <a:solidFill>
-                        <a:srgbClr val="9AA7B5"/>
-                      </a:solidFill>
-                    </a:lnT>
-                    <a:lnB w="9525">
-                      <a:solidFill>
-                        <a:srgbClr val="9AA7B5"/>
-                      </a:solidFill>
-                    </a:lnB>
-                    <a:solidFill>
-                      <a:srgbClr val="EEF3F8"/>
-                    </a:solidFill>
-                  </a:tcPr>
-                </a:tc>
-                <a:tc>
-                  <a:txBody>
-                    <a:bodyPr/>
-                    <a:lstStyle/>
-                    <a:p>
-                      <a:pPr algn="l">
-                        <a:lnSpc>
-                          <a:spcPct val="105000"/>
-                        </a:lnSpc>
-                      </a:pPr>
-                      <a:r>
-                        <a:rPr lang="ko-KR" altLang="en-US" sz="2200" b="0" dirty="0">
-                          <a:solidFill>
-                            <a:schemeClr val="tx1">
-                              <a:lumMod val="85000"/>
-                              <a:lumOff val="15000"/>
-                            </a:schemeClr>
-                          </a:solidFill>
-                          <a:latin typeface="나눔고딕" pitchFamily="50" charset="-127"/>
-                          <a:ea typeface="나눔고딕" pitchFamily="50" charset="-127"/>
-                          <a:cs typeface="Arial" panose="020B0604020202020204" pitchFamily="34" charset="0"/>
-                        </a:rPr>
-                        <a:t>탄력적 방류 [OPR:2754:2], 승인 [APR:2754], 승인 방류량 1500 ㎥/s</a:t>
-                      </a:r>
-                    </a:p>
-                  </a:txBody>
-                  <a:tcPr marL="91440" marR="91440" marT="60000" marB="60000" anchor="ctr">
-                    <a:lnL w="9525">
-                      <a:solidFill>
-                        <a:srgbClr val="9AA7B5"/>
-                      </a:solidFill>
-                    </a:lnL>
-                    <a:lnR w="9525">
-                      <a:solidFill>
-                        <a:srgbClr val="9AA7B5"/>
-                      </a:solidFill>
-                    </a:lnR>
-                    <a:lnT w="9525">
-                      <a:solidFill>
-                        <a:srgbClr val="9AA7B5"/>
-                      </a:solidFill>
-                    </a:lnT>
-                    <a:lnB w="9525">
-                      <a:solidFill>
-                        <a:srgbClr val="9AA7B5"/>
-                      </a:solidFill>
-                    </a:lnB>
-                    <a:solidFill>
-                      <a:srgbClr val="EEF3F8"/>
-                    </a:solidFill>
-                  </a:tcPr>
-                </a:tc>
-              </a:tr>
-              <a:tr h="499250">
-                <a:tc>
-                  <a:txBody>
-                    <a:bodyPr/>
-                    <a:lstStyle/>
-                    <a:p>
-                      <a:pPr algn="l">
-                        <a:lnSpc>
-                          <a:spcPct val="105000"/>
-                        </a:lnSpc>
-                      </a:pPr>
-                      <a:r>
-                        <a:rPr lang="ko-KR" altLang="en-US" sz="2200" b="1" dirty="0">
-                          <a:solidFill>
-                            <a:schemeClr val="tx1">
-                              <a:lumMod val="85000"/>
-                              <a:lumOff val="15000"/>
-                            </a:schemeClr>
-                          </a:solidFill>
-                          <a:latin typeface="나눔고딕" pitchFamily="50" charset="-127"/>
-                          <a:ea typeface="나눔고딕" pitchFamily="50" charset="-127"/>
-                          <a:cs typeface="Arial" panose="020B0604020202020204" pitchFamily="34" charset="0"/>
-                        </a:rPr>
-                        <a:t>⑤ 승인량 대비 방류량</a:t>
-                      </a:r>
-                    </a:p>
-                  </a:txBody>
-                  <a:tcPr marL="91440" marR="91440" marT="60000" marB="60000" anchor="ctr">
-                    <a:lnL w="9525">
-                      <a:solidFill>
-                        <a:srgbClr val="9AA7B5"/>
-                      </a:solidFill>
-                    </a:lnL>
-                    <a:lnR w="9525">
-                      <a:solidFill>
-                        <a:srgbClr val="9AA7B5"/>
-                      </a:solidFill>
-                    </a:lnR>
-                    <a:lnT w="9525">
-                      <a:solidFill>
-                        <a:srgbClr val="9AA7B5"/>
-                      </a:solidFill>
-                    </a:lnT>
-                    <a:lnB w="9525">
-                      <a:solidFill>
-                        <a:srgbClr val="9AA7B5"/>
-                      </a:solidFill>
-                    </a:lnB>
-                    <a:solidFill>
-                      <a:srgbClr val="FFFFFF"/>
-                    </a:solidFill>
-                  </a:tcPr>
-                </a:tc>
-                <a:tc>
-                  <a:txBody>
-                    <a:bodyPr/>
-                    <a:lstStyle/>
-                    <a:p>
-                      <a:pPr algn="l">
-                        <a:lnSpc>
-                          <a:spcPct val="105000"/>
-                        </a:lnSpc>
-                      </a:pPr>
-                      <a:r>
-                        <a:rPr lang="ko-KR" altLang="en-US" sz="2200" b="0" dirty="0">
-                          <a:solidFill>
-                            <a:schemeClr val="tx1">
-                              <a:lumMod val="85000"/>
-                              <a:lumOff val="15000"/>
-                            </a:schemeClr>
-                          </a:solidFill>
-                          <a:latin typeface="나눔고딕" pitchFamily="50" charset="-127"/>
-                          <a:ea typeface="나눔고딕" pitchFamily="50" charset="-127"/>
-                          <a:cs typeface="Arial" panose="020B0604020202020204" pitchFamily="34" charset="0"/>
-                        </a:rPr>
-                        <a:t>사례 전후 최대 총방류량 1011.2 CMS = </a:t>
-                      </a:r>
-                      <a:r>
-                        <a:rPr lang="ko-KR" altLang="en-US" sz="2200" b="1" dirty="0">
-                          <a:solidFill>
-                            <a:schemeClr val="tx1">
-                              <a:lumMod val="85000"/>
-                              <a:lumOff val="15000"/>
-                            </a:schemeClr>
-                          </a:solidFill>
-                          <a:latin typeface="나눔고딕" pitchFamily="50" charset="-127"/>
-                          <a:ea typeface="나눔고딕" pitchFamily="50" charset="-127"/>
-                          <a:cs typeface="Arial" panose="020B0604020202020204" pitchFamily="34" charset="0"/>
-                        </a:rPr>
-                        <a:t>승인량의 67.4%</a:t>
-                      </a:r>
-                      <a:r>
-                        <a:rPr lang="ko-KR" altLang="en-US" sz="2200" b="0" dirty="0">
-                          <a:solidFill>
-                            <a:schemeClr val="tx1">
-                              <a:lumMod val="85000"/>
-                              <a:lumOff val="15000"/>
-                            </a:schemeClr>
-                          </a:solidFill>
-                          <a:latin typeface="나눔고딕" pitchFamily="50" charset="-127"/>
-                          <a:ea typeface="나눔고딕" pitchFamily="50" charset="-127"/>
-                          <a:cs typeface="Arial" panose="020B0604020202020204" pitchFamily="34" charset="0"/>
-                        </a:rPr>
-                        <a:t> (코드가 계산)</a:t>
-                      </a:r>
-                    </a:p>
-                  </a:txBody>
-                  <a:tcPr marL="91440" marR="91440" marT="60000" marB="60000" anchor="ctr">
-                    <a:lnL w="9525">
-                      <a:solidFill>
-                        <a:srgbClr val="9AA7B5"/>
-                      </a:solidFill>
-                    </a:lnL>
-                    <a:lnR w="9525">
-                      <a:solidFill>
-                        <a:srgbClr val="9AA7B5"/>
-                      </a:solidFill>
-                    </a:lnR>
-                    <a:lnT w="9525">
-                      <a:solidFill>
-                        <a:srgbClr val="9AA7B5"/>
-                      </a:solidFill>
-                    </a:lnT>
-                    <a:lnB w="9525">
-                      <a:solidFill>
-                        <a:srgbClr val="9AA7B5"/>
-                      </a:solidFill>
-                    </a:lnB>
-                    <a:solidFill>
-                      <a:srgbClr val="FFFFFF"/>
-                    </a:solidFill>
-                  </a:tcPr>
-                </a:tc>
-              </a:tr>
-              <a:tr h="848500">
-                <a:tc>
-                  <a:txBody>
-                    <a:bodyPr/>
-                    <a:lstStyle/>
-                    <a:p>
-                      <a:pPr algn="l">
-                        <a:lnSpc>
-                          <a:spcPct val="105000"/>
-                        </a:lnSpc>
-                      </a:pPr>
-                      <a:r>
-                        <a:rPr lang="ko-KR" altLang="en-US" sz="2200" b="1" dirty="0">
-                          <a:solidFill>
-                            <a:schemeClr val="tx1">
-                              <a:lumMod val="85000"/>
-                              <a:lumOff val="15000"/>
-                            </a:schemeClr>
-                          </a:solidFill>
-                          <a:latin typeface="나눔고딕" pitchFamily="50" charset="-127"/>
-                          <a:ea typeface="나눔고딕" pitchFamily="50" charset="-127"/>
-                          <a:cs typeface="Arial" panose="020B0604020202020204" pitchFamily="34" charset="0"/>
-                        </a:rPr>
-                        <a:t>⑥ LLM 답변</a:t>
-                      </a:r>
-                    </a:p>
-                  </a:txBody>
-                  <a:tcPr marL="91440" marR="91440" marT="60000" marB="60000" anchor="ctr">
-                    <a:lnL w="9525">
-                      <a:solidFill>
-                        <a:srgbClr val="9AA7B5"/>
-                      </a:solidFill>
-                    </a:lnL>
-                    <a:lnR w="9525">
-                      <a:solidFill>
-                        <a:srgbClr val="9AA7B5"/>
-                      </a:solidFill>
-                    </a:lnR>
-                    <a:lnT w="9525">
-                      <a:solidFill>
-                        <a:srgbClr val="9AA7B5"/>
-                      </a:solidFill>
-                    </a:lnT>
-                    <a:lnB w="9525">
-                      <a:solidFill>
-                        <a:srgbClr val="9AA7B5"/>
-                      </a:solidFill>
-                    </a:lnB>
-                    <a:solidFill>
-                      <a:srgbClr val="EEF3F8"/>
-                    </a:solidFill>
-                  </a:tcPr>
-                </a:tc>
-                <a:tc>
-                  <a:txBody>
-                    <a:bodyPr/>
-                    <a:lstStyle/>
-                    <a:p>
-                      <a:pPr algn="l">
-                        <a:lnSpc>
-                          <a:spcPct val="105000"/>
-                        </a:lnSpc>
-                      </a:pPr>
-                      <a:r>
-                        <a:rPr lang="ko-KR" altLang="en-US" sz="2200" b="0" dirty="0">
-                          <a:solidFill>
-                            <a:schemeClr val="tx1">
-                              <a:lumMod val="85000"/>
-                              <a:lumOff val="15000"/>
-                            </a:schemeClr>
-                          </a:solidFill>
-                          <a:latin typeface="나눔고딕" pitchFamily="50" charset="-127"/>
-                          <a:ea typeface="나눔고딕" pitchFamily="50" charset="-127"/>
-                          <a:cs typeface="Arial" panose="020B0604020202020204" pitchFamily="34" charset="0"/>
-                        </a:rPr>
-                        <a:t>“소양강댐 현재 수위는 185.2644 EL.m로, 제한수위 190.3 EL.m 대비 −5.04 m입니다 [CRI:CR-01] …” (출처 번호 포함)</a:t>
+                        <a:t>“소양강댐 현재 수위는 185.2644 EL.m로, 제한수위 190.3 EL.m 대비 −5.04 m입니다 [CRI:CR-01]. 유사한 과거 사례는 2017-08-25 15:00 …” (출처 번호 포함)</a:t>
                       </a:r>
                     </a:p>
                   </a:txBody>
@@ -6468,14 +5881,14 @@
       </p:graphicFrame>
       <p:sp>
         <p:nvSpPr>
-          <p:cNvPr id="1027" name="본문"/>
+          <p:cNvPr id="1025" name="본문"/>
           <p:cNvSpPr txBox="1"/>
           <p:nvPr/>
         </p:nvSpPr>
         <p:spPr>
           <a:xfrm>
-            <a:off x="15570184" y="26796319"/>
-            <a:ext cx="14113138" cy="1513348"/>
+            <a:off x="15570184" y="26496319"/>
+            <a:ext cx="14113138" cy="1005551"/>
           </a:xfrm>
           <a:prstGeom prst="rect">
             <a:avLst/>
@@ -6514,7 +5927,7 @@
                 <a:ea typeface="나눔고딕" pitchFamily="50" charset="-127"/>
                 <a:cs typeface="Arial" panose="020B0604020202020204" pitchFamily="34" charset="0"/>
               </a:rPr>
-              <a:t>질문 해석은 </a:t>
+              <a:t>LLM은 질문 해석과 답변 작성을 맡고, </a:t>
             </a:r>
             <a:r>
               <a:rPr lang="ko-KR" altLang="en-US" sz="2400" b="1" dirty="0">
@@ -6528,7 +5941,7 @@
                 <a:ea typeface="나눔고딕" pitchFamily="50" charset="-127"/>
                 <a:cs typeface="Arial" panose="020B0604020202020204" pitchFamily="34" charset="0"/>
               </a:rPr>
-              <a:t>Qwen3-8B</a:t>
+              <a:t>수치 계산과 비슷한 사례 선택은 코드</a:t>
             </a:r>
             <a:r>
               <a:rPr lang="ko-KR" altLang="en-US" sz="2400" b="0" dirty="0">
@@ -6542,131 +5955,20 @@
                 <a:ea typeface="나눔고딕" pitchFamily="50" charset="-127"/>
                 <a:cs typeface="Arial" panose="020B0604020202020204" pitchFamily="34" charset="0"/>
               </a:rPr>
-              <a:t>(vLLM)가 JSON으로 출력하고, 코드가 질문 유형·댐·날짜 값을 검증함</a:t>
-            </a:r>
-          </a:p>
-          <a:p>
-            <a:pPr marL="334726" indent="-334726">
-              <a:lnSpc>
-                <a:spcPct val="118000"/>
-              </a:lnSpc>
-              <a:spcAft>
-                <a:spcPts val="600"/>
-              </a:spcAft>
-              <a:buBlip>
-                <a:blip r:embed="rId4"/>
-              </a:buBlip>
-            </a:pPr>
-            <a:r>
-              <a:rPr lang="ko-KR" altLang="en-US" sz="2400" b="0" dirty="0">
-                <a:solidFill>
-                  <a:schemeClr val="tx1">
-                    <a:lumMod val="85000"/>
-                    <a:lumOff val="15000"/>
-                  </a:schemeClr>
-                </a:solidFill>
-                <a:latin typeface="나눔고딕" pitchFamily="50" charset="-127"/>
-                <a:ea typeface="나눔고딕" pitchFamily="50" charset="-127"/>
-                <a:cs typeface="Arial" panose="020B0604020202020204" pitchFamily="34" charset="0"/>
-              </a:rPr>
-              <a:t>숫자 계산과 비슷한 사례 선택은 </a:t>
-            </a:r>
-            <a:r>
-              <a:rPr lang="ko-KR" altLang="en-US" sz="2400" b="1" dirty="0">
-                <a:solidFill>
-                  <a:schemeClr val="tx1">
-                    <a:lumMod val="85000"/>
-                    <a:lumOff val="15000"/>
-                  </a:schemeClr>
-                </a:solidFill>
-                <a:latin typeface="나눔고딕" pitchFamily="50" charset="-127"/>
-                <a:ea typeface="나눔고딕" pitchFamily="50" charset="-127"/>
-                <a:cs typeface="Arial" panose="020B0604020202020204" pitchFamily="34" charset="0"/>
-              </a:rPr>
-              <a:t>코드</a:t>
-            </a:r>
-            <a:r>
-              <a:rPr lang="ko-KR" altLang="en-US" sz="2400" b="0" dirty="0">
-                <a:solidFill>
-                  <a:schemeClr val="tx1">
-                    <a:lumMod val="85000"/>
-                    <a:lumOff val="15000"/>
-                  </a:schemeClr>
-                </a:solidFill>
-                <a:latin typeface="나눔고딕" pitchFamily="50" charset="-127"/>
-                <a:ea typeface="나눔고딕" pitchFamily="50" charset="-127"/>
-                <a:cs typeface="Arial" panose="020B0604020202020204" pitchFamily="34" charset="0"/>
-              </a:rPr>
-              <a:t>가 하고, 답변은 </a:t>
-            </a:r>
-            <a:r>
-              <a:rPr lang="ko-KR" altLang="en-US" sz="2400" b="1" dirty="0">
-                <a:solidFill>
-                  <a:schemeClr val="tx1">
-                    <a:lumMod val="85000"/>
-                    <a:lumOff val="15000"/>
-                  </a:schemeClr>
-                </a:solidFill>
-                <a:latin typeface="나눔고딕" pitchFamily="50" charset="-127"/>
-                <a:ea typeface="나눔고딕" pitchFamily="50" charset="-127"/>
-                <a:cs typeface="Arial" panose="020B0604020202020204" pitchFamily="34" charset="0"/>
-              </a:rPr>
-              <a:t>근거 모음</a:t>
-            </a:r>
-            <a:r>
-              <a:rPr lang="ko-KR" altLang="en-US" sz="2400" b="0" dirty="0">
-                <a:solidFill>
-                  <a:schemeClr val="tx1">
-                    <a:lumMod val="85000"/>
-                    <a:lumOff val="15000"/>
-                  </a:schemeClr>
-                </a:solidFill>
-                <a:latin typeface="나눔고딕" pitchFamily="50" charset="-127"/>
-                <a:ea typeface="나눔고딕" pitchFamily="50" charset="-127"/>
-                <a:cs typeface="Arial" panose="020B0604020202020204" pitchFamily="34" charset="0"/>
-              </a:rPr>
-              <a:t>의 번호 붙은 자료를 바탕으로 </a:t>
-            </a:r>
-            <a:r>
-              <a:rPr lang="ko-KR" altLang="en-US" sz="2400" b="1" dirty="0">
-                <a:solidFill>
-                  <a:schemeClr val="tx1">
-                    <a:lumMod val="85000"/>
-                    <a:lumOff val="15000"/>
-                  </a:schemeClr>
-                </a:solidFill>
-                <a:latin typeface="나눔고딕" pitchFamily="50" charset="-127"/>
-                <a:ea typeface="나눔고딕" pitchFamily="50" charset="-127"/>
-                <a:cs typeface="Arial" panose="020B0604020202020204" pitchFamily="34" charset="0"/>
-              </a:rPr>
-              <a:t>LLM</a:t>
-            </a:r>
-            <a:r>
-              <a:rPr lang="ko-KR" altLang="en-US" sz="2400" b="0" dirty="0">
-                <a:solidFill>
-                  <a:schemeClr val="tx1">
-                    <a:lumMod val="85000"/>
-                    <a:lumOff val="15000"/>
-                  </a:schemeClr>
-                </a:solidFill>
-                <a:latin typeface="나눔고딕" pitchFamily="50" charset="-127"/>
-                <a:ea typeface="나눔고딕" pitchFamily="50" charset="-127"/>
-                <a:cs typeface="Arial" panose="020B0604020202020204" pitchFamily="34" charset="0"/>
-              </a:rPr>
-              <a:t>이 작성하여 운영자가 출처를 확인할 수 있음</a:t>
+              <a:t>가 수행하여 답변의 숫자를 근거에서 확인할 수 있음</a:t>
             </a:r>
           </a:p>
         </p:txBody>
       </p:sp>
       <p:sp>
         <p:nvSpPr>
-          <p:cNvPr id="1028" name="직사각형 1"/>
+          <p:cNvPr id="1026" name="직사각형 1"/>
           <p:cNvSpPr/>
           <p:nvPr/>
         </p:nvSpPr>
         <p:spPr>
           <a:xfrm>
-            <a:off x="15691431" y="28689667"/>
+            <a:off x="15691431" y="27881870"/>
             <a:ext cx="13943667" cy="1023024"/>
           </a:xfrm>
           <a:prstGeom prst="rect">
@@ -6719,13 +6021,13 @@
       </p:sp>
       <p:sp>
         <p:nvSpPr>
-          <p:cNvPr id="1029" name="본문"/>
+          <p:cNvPr id="1027" name="본문"/>
           <p:cNvSpPr txBox="1"/>
           <p:nvPr/>
         </p:nvSpPr>
         <p:spPr>
           <a:xfrm>
-            <a:off x="15570184" y="29832691"/>
+            <a:off x="15570184" y="29024894"/>
             <a:ext cx="14113138" cy="3315935"/>
           </a:xfrm>
           <a:prstGeom prst="rect">
@@ -6848,7 +6150,7 @@
                 <a:ea typeface="나눔고딕" pitchFamily="50" charset="-127"/>
                 <a:cs typeface="Arial" panose="020B0604020202020204" pitchFamily="34" charset="0"/>
               </a:rPr>
-              <a:t>KG와 측정자료·문서 저장소에서 근거를 찾는 </a:t>
+              <a:t>전체 질문과 세부 질문 6개(CQ)에 대해 KG와 측정자료·문서 저장소에서 근거를 찾는 </a:t>
             </a:r>
             <a:r>
               <a:rPr lang="ko-KR" altLang="en-US" sz="2400" b="1" dirty="0">
@@ -7022,13 +6324,13 @@
       </p:sp>
       <p:sp>
         <p:nvSpPr>
-          <p:cNvPr id="1030" name="직사각형 1"/>
+          <p:cNvPr id="1028" name="직사각형 1"/>
           <p:cNvSpPr/>
           <p:nvPr/>
         </p:nvSpPr>
         <p:spPr>
           <a:xfrm>
-            <a:off x="15691431" y="33528626"/>
+            <a:off x="15691431" y="32720829"/>
             <a:ext cx="13943667" cy="1023024"/>
           </a:xfrm>
           <a:prstGeom prst="rect">
@@ -7081,13 +6383,13 @@
       </p:sp>
       <p:sp>
         <p:nvSpPr>
-          <p:cNvPr id="1031" name="본문"/>
+          <p:cNvPr id="1029" name="본문"/>
           <p:cNvSpPr txBox="1"/>
           <p:nvPr/>
         </p:nvSpPr>
         <p:spPr>
           <a:xfrm>
-            <a:off x="15570184" y="34671650"/>
+            <a:off x="15570184" y="33863853"/>
             <a:ext cx="14113138" cy="1221350"/>
           </a:xfrm>
           <a:prstGeom prst="rect">
@@ -7132,13 +6434,13 @@
       </p:sp>
       <p:sp>
         <p:nvSpPr>
-          <p:cNvPr id="1032" name="직사각형 1"/>
+          <p:cNvPr id="1030" name="직사각형 1"/>
           <p:cNvSpPr/>
           <p:nvPr/>
         </p:nvSpPr>
         <p:spPr>
           <a:xfrm>
-            <a:off x="15691431" y="36043000"/>
+            <a:off x="15691431" y="35235203"/>
             <a:ext cx="13943667" cy="1023024"/>
           </a:xfrm>
           <a:prstGeom prst="rect">
@@ -7191,13 +6493,13 @@
       </p:sp>
       <p:sp>
         <p:nvSpPr>
-          <p:cNvPr id="1033" name="본문"/>
+          <p:cNvPr id="1031" name="본문"/>
           <p:cNvSpPr txBox="1"/>
           <p:nvPr/>
         </p:nvSpPr>
         <p:spPr>
           <a:xfrm>
-            <a:off x="15570184" y="37186024"/>
+            <a:off x="15570184" y="36378227"/>
             <a:ext cx="14113138" cy="4179129"/>
           </a:xfrm>
           <a:prstGeom prst="rect">

--- a/lab_meeting/학회포스터_초안.pptx
+++ b/lab_meeting/학회포스터_초안.pptx
@@ -2299,7 +2299,7 @@
         </p:nvGraphicFramePr>
         <p:xfrm>
           <a:off x="697946" y="13067968"/>
-          <a:ext cx="13500000" cy="7936500"/>
+          <a:ext cx="13500000" cy="8635000"/>
         </p:xfrm>
         <a:graphic>
           <a:graphicData uri="http://schemas.openxmlformats.org/drawingml/2006/table">
@@ -2962,7 +2962,7 @@
                           <a:ea typeface="나눔고딕" pitchFamily="50" charset="-127"/>
                           <a:cs typeface="Arial" panose="020B0604020202020204" pitchFamily="34" charset="0"/>
                         </a:rPr>
-                        <a:t>표 경로 / 글 경로</a:t>
+                        <a:t>구조화 자료 / 문서 자료</a:t>
                       </a:r>
                     </a:p>
                   </a:txBody>
@@ -3014,7 +3014,7 @@
                           <a:ea typeface="나눔고딕" pitchFamily="50" charset="-127"/>
                           <a:cs typeface="Arial" panose="020B0604020202020204" pitchFamily="34" charset="0"/>
                         </a:rPr>
-                        <a:t>열 이름이 의미를 정하는 표는 값을 그대로 옮기고(표 경로), 문장·규정 별표는 규칙으로 값을 추출함(글 경로)</a:t>
+                        <a:t>열의 의미가 정해진 표(구조화 자료)는 규칙에 따라 개체·속성으로 옮기고, 글 속에 값이 있는 자료(승인 비고, 규정 별표)는 규칙(정규식)으로 값을 추출함</a:t>
                       </a:r>
                     </a:p>
                   </a:txBody>
@@ -3041,6 +3041,112 @@
                     </a:lnB>
                     <a:solidFill>
                       <a:srgbClr val="EEF3F8"/>
+                    </a:solidFill>
+                  </a:tcPr>
+                </a:tc>
+              </a:tr>
+              <a:tr h="848500">
+                <a:tc>
+                  <a:txBody>
+                    <a:bodyPr/>
+                    <a:lstStyle/>
+                    <a:p>
+                      <a:pPr algn="l">
+                        <a:lnSpc>
+                          <a:spcPct val="105000"/>
+                        </a:lnSpc>
+                      </a:pPr>
+                      <a:r>
+                        <a:rPr lang="ko-KR" altLang="en-US" sz="2200" b="1" dirty="0">
+                          <a:solidFill>
+                            <a:schemeClr val="tx1">
+                              <a:lumMod val="85000"/>
+                              <a:lumOff val="15000"/>
+                            </a:schemeClr>
+                          </a:solidFill>
+                          <a:latin typeface="나눔고딕" pitchFamily="50" charset="-127"/>
+                          <a:ea typeface="나눔고딕" pitchFamily="50" charset="-127"/>
+                          <a:cs typeface="Arial" panose="020B0604020202020204" pitchFamily="34" charset="0"/>
+                        </a:rPr>
+                        <a:t>외부 저장소</a:t>
+                      </a:r>
+                    </a:p>
+                  </a:txBody>
+                  <a:tcPr marL="91440" marR="91440" marT="60000" marB="60000" anchor="ctr">
+                    <a:lnL w="9525">
+                      <a:solidFill>
+                        <a:srgbClr val="9AA7B5"/>
+                      </a:solidFill>
+                    </a:lnL>
+                    <a:lnR w="9525">
+                      <a:solidFill>
+                        <a:srgbClr val="9AA7B5"/>
+                      </a:solidFill>
+                    </a:lnR>
+                    <a:lnT w="9525">
+                      <a:solidFill>
+                        <a:srgbClr val="9AA7B5"/>
+                      </a:solidFill>
+                    </a:lnT>
+                    <a:lnB w="9525">
+                      <a:solidFill>
+                        <a:srgbClr val="9AA7B5"/>
+                      </a:solidFill>
+                    </a:lnB>
+                    <a:solidFill>
+                      <a:srgbClr val="FFFFFF"/>
+                    </a:solidFill>
+                  </a:tcPr>
+                </a:tc>
+                <a:tc>
+                  <a:txBody>
+                    <a:bodyPr/>
+                    <a:lstStyle/>
+                    <a:p>
+                      <a:pPr algn="l">
+                        <a:lnSpc>
+                          <a:spcPct val="105000"/>
+                        </a:lnSpc>
+                      </a:pPr>
+                      <a:r>
+                        <a:rPr lang="ko-KR" altLang="en-US" sz="2200" b="0" dirty="0">
+                          <a:solidFill>
+                            <a:schemeClr val="tx1">
+                              <a:lumMod val="85000"/>
+                              <a:lumOff val="15000"/>
+                            </a:schemeClr>
+                          </a:solidFill>
+                          <a:latin typeface="나눔고딕" pitchFamily="50" charset="-127"/>
+                          <a:ea typeface="나눔고딕" pitchFamily="50" charset="-127"/>
+                          <a:cs typeface="Arial" panose="020B0604020202020204" pitchFamily="34" charset="0"/>
+                        </a:rPr>
+                        <a:t>KG에 넣지 않은 측정값 전체(측정자료 저장소)와 규정 원문(문서 저장소). KG에는 이를 찾아가는 키만 둠</a:t>
+                      </a:r>
+                    </a:p>
+                  </a:txBody>
+                  <a:tcPr marL="91440" marR="91440" marT="60000" marB="60000" anchor="ctr">
+                    <a:lnL w="9525">
+                      <a:solidFill>
+                        <a:srgbClr val="9AA7B5"/>
+                      </a:solidFill>
+                    </a:lnL>
+                    <a:lnR w="9525">
+                      <a:solidFill>
+                        <a:srgbClr val="9AA7B5"/>
+                      </a:solidFill>
+                    </a:lnR>
+                    <a:lnT w="9525">
+                      <a:solidFill>
+                        <a:srgbClr val="9AA7B5"/>
+                      </a:solidFill>
+                    </a:lnT>
+                    <a:lnB w="9525">
+                      <a:solidFill>
+                        <a:srgbClr val="9AA7B5"/>
+                      </a:solidFill>
+                    </a:lnB>
+                    <a:solidFill>
+                      <a:srgbClr val="FFFFFF"/>
                     </a:solidFill>
                   </a:tcPr>
                 </a:tc>
@@ -3094,7 +3200,7 @@
                       </a:solidFill>
                     </a:lnB>
                     <a:solidFill>
-                      <a:srgbClr val="FFFFFF"/>
+                      <a:srgbClr val="EEF3F8"/>
                     </a:solidFill>
                   </a:tcPr>
                 </a:tc>
@@ -3146,12 +3252,12 @@
                       </a:solidFill>
                     </a:lnB>
                     <a:solidFill>
-                      <a:srgbClr val="FFFFFF"/>
+                      <a:srgbClr val="EEF3F8"/>
                     </a:solidFill>
                   </a:tcPr>
                 </a:tc>
               </a:tr>
-              <a:tr h="499250">
+              <a:tr h="848500">
                 <a:tc>
                   <a:txBody>
                     <a:bodyPr/>
@@ -3200,112 +3306,6 @@
                       </a:solidFill>
                     </a:lnB>
                     <a:solidFill>
-                      <a:srgbClr val="EEF3F8"/>
-                    </a:solidFill>
-                  </a:tcPr>
-                </a:tc>
-                <a:tc>
-                  <a:txBody>
-                    <a:bodyPr/>
-                    <a:lstStyle/>
-                    <a:p>
-                      <a:pPr algn="l">
-                        <a:lnSpc>
-                          <a:spcPct val="105000"/>
-                        </a:lnSpc>
-                      </a:pPr>
-                      <a:r>
-                        <a:rPr lang="ko-KR" altLang="en-US" sz="2200" b="0" dirty="0">
-                          <a:solidFill>
-                            <a:schemeClr val="tx1">
-                              <a:lumMod val="85000"/>
-                              <a:lumOff val="15000"/>
-                            </a:schemeClr>
-                          </a:solidFill>
-                          <a:latin typeface="나눔고딕" pitchFamily="50" charset="-127"/>
-                          <a:ea typeface="나눔고딕" pitchFamily="50" charset="-127"/>
-                          <a:cs typeface="Arial" panose="020B0604020202020204" pitchFamily="34" charset="0"/>
-                        </a:rPr>
-                        <a:t>사용자 질문이 CQ 중 어느 질문에 해당하는지의 분류. 의도에 따라 찾을 근거가 정해짐</a:t>
-                      </a:r>
-                    </a:p>
-                  </a:txBody>
-                  <a:tcPr marL="91440" marR="91440" marT="60000" marB="60000" anchor="ctr">
-                    <a:lnL w="9525">
-                      <a:solidFill>
-                        <a:srgbClr val="9AA7B5"/>
-                      </a:solidFill>
-                    </a:lnL>
-                    <a:lnR w="9525">
-                      <a:solidFill>
-                        <a:srgbClr val="9AA7B5"/>
-                      </a:solidFill>
-                    </a:lnR>
-                    <a:lnT w="9525">
-                      <a:solidFill>
-                        <a:srgbClr val="9AA7B5"/>
-                      </a:solidFill>
-                    </a:lnT>
-                    <a:lnB w="9525">
-                      <a:solidFill>
-                        <a:srgbClr val="9AA7B5"/>
-                      </a:solidFill>
-                    </a:lnB>
-                    <a:solidFill>
-                      <a:srgbClr val="EEF3F8"/>
-                    </a:solidFill>
-                  </a:tcPr>
-                </a:tc>
-              </a:tr>
-              <a:tr h="499250">
-                <a:tc>
-                  <a:txBody>
-                    <a:bodyPr/>
-                    <a:lstStyle/>
-                    <a:p>
-                      <a:pPr algn="l">
-                        <a:lnSpc>
-                          <a:spcPct val="105000"/>
-                        </a:lnSpc>
-                      </a:pPr>
-                      <a:r>
-                        <a:rPr lang="ko-KR" altLang="en-US" sz="2200" b="1" dirty="0">
-                          <a:solidFill>
-                            <a:schemeClr val="tx1">
-                              <a:lumMod val="85000"/>
-                              <a:lumOff val="15000"/>
-                            </a:schemeClr>
-                          </a:solidFill>
-                          <a:latin typeface="나눔고딕" pitchFamily="50" charset="-127"/>
-                          <a:ea typeface="나눔고딕" pitchFamily="50" charset="-127"/>
-                          <a:cs typeface="Arial" panose="020B0604020202020204" pitchFamily="34" charset="0"/>
-                        </a:rPr>
-                        <a:t>근거 모음</a:t>
-                      </a:r>
-                    </a:p>
-                  </a:txBody>
-                  <a:tcPr marL="91440" marR="91440" marT="60000" marB="60000" anchor="ctr">
-                    <a:lnL w="9525">
-                      <a:solidFill>
-                        <a:srgbClr val="9AA7B5"/>
-                      </a:solidFill>
-                    </a:lnL>
-                    <a:lnR w="9525">
-                      <a:solidFill>
-                        <a:srgbClr val="9AA7B5"/>
-                      </a:solidFill>
-                    </a:lnR>
-                    <a:lnT w="9525">
-                      <a:solidFill>
-                        <a:srgbClr val="9AA7B5"/>
-                      </a:solidFill>
-                    </a:lnT>
-                    <a:lnB w="9525">
-                      <a:solidFill>
-                        <a:srgbClr val="9AA7B5"/>
-                      </a:solidFill>
-                    </a:lnB>
-                    <a:solidFill>
                       <a:srgbClr val="FFFFFF"/>
                     </a:solidFill>
                   </a:tcPr>
@@ -3332,7 +3332,7 @@
                           <a:ea typeface="나눔고딕" pitchFamily="50" charset="-127"/>
                           <a:cs typeface="Arial" panose="020B0604020202020204" pitchFamily="34" charset="0"/>
                         </a:rPr>
-                        <a:t>검색한 근거와 계산값에 출처 번호를 붙여 LLM이 읽을 수 있게 정리한 입력</a:t>
+                        <a:t>사용자 질문이 CQ1~CQ6 중 무엇을 묻는지의 분류(복수 가능). 의도에 따라 찾을 근거가 정해짐</a:t>
                       </a:r>
                     </a:p>
                   </a:txBody>
@@ -3386,7 +3386,7 @@
                           <a:ea typeface="나눔고딕" pitchFamily="50" charset="-127"/>
                           <a:cs typeface="Arial" panose="020B0604020202020204" pitchFamily="34" charset="0"/>
                         </a:rPr>
-                        <a:t>유클리드 거리</a:t>
+                        <a:t>근거 묶음</a:t>
                       </a:r>
                     </a:p>
                   </a:txBody>
@@ -3438,7 +3438,7 @@
                           <a:ea typeface="나눔고딕" pitchFamily="50" charset="-127"/>
                           <a:cs typeface="Arial" panose="020B0604020202020204" pitchFamily="34" charset="0"/>
                         </a:rPr>
-                        <a:t>두 지점의 직선거리. 현재와 과거 사례의 수위·유입량이 얼마나 다른지 나타내며 작을수록 비슷함</a:t>
+                        <a:t>검색한 근거에 출처 번호를 붙여 LLM이 읽을 수 있게 정리한 입력. 값은 저장소의 원값이며 비교·해석은 LLM이 수행함</a:t>
                       </a:r>
                     </a:p>
                   </a:txBody>
@@ -3481,7 +3481,7 @@
         </p:nvSpPr>
         <p:spPr>
           <a:xfrm>
-            <a:off x="674157" y="21384468"/>
+            <a:off x="674157" y="22082968"/>
             <a:ext cx="13943667" cy="1023024"/>
           </a:xfrm>
           <a:prstGeom prst="rect">
@@ -3540,7 +3540,7 @@
         </p:nvSpPr>
         <p:spPr>
           <a:xfrm>
-            <a:off x="597946" y="22527492"/>
+            <a:off x="597946" y="23225992"/>
             <a:ext cx="14113138" cy="2021145"/>
           </a:xfrm>
           <a:prstGeom prst="rect">
@@ -3676,7 +3676,7 @@
                 <a:ea typeface="나눔고딕" pitchFamily="50" charset="-127"/>
                 <a:cs typeface="Arial" panose="020B0604020202020204" pitchFamily="34" charset="0"/>
               </a:rPr>
-              <a:t>: 연계운영규정의 홍수기 제한수위 (현행 1건, 연혁 9건)</a:t>
+              <a:t>: 연계운영규정의 홍수기 제한수위 (현행)</a:t>
             </a:r>
           </a:p>
         </p:txBody>
@@ -3697,7 +3697,7 @@
         </p:blipFill>
         <p:spPr>
           <a:xfrm>
-            <a:off x="1204515" y="24608637"/>
+            <a:off x="1204515" y="25307137"/>
             <a:ext cx="12900000" cy="9085285"/>
           </a:xfrm>
           <a:prstGeom prst="rect">
@@ -3718,7 +3718,7 @@
         </p:nvSpPr>
         <p:spPr>
           <a:xfrm>
-            <a:off x="597946" y="33753922"/>
+            <a:off x="597946" y="34452422"/>
             <a:ext cx="14113138" cy="800000"/>
           </a:xfrm>
           <a:prstGeom prst="rect">
@@ -3769,7 +3769,7 @@
         </p:nvSpPr>
         <p:spPr>
           <a:xfrm>
-            <a:off x="597946" y="34553922"/>
+            <a:off x="597946" y="35252422"/>
             <a:ext cx="14113138" cy="4610726"/>
           </a:xfrm>
           <a:prstGeom prst="rect">
@@ -3893,7 +3893,7 @@
                 <a:ea typeface="나눔고딕" pitchFamily="50" charset="-127"/>
                 <a:cs typeface="Arial" panose="020B0604020202020204" pitchFamily="34" charset="0"/>
               </a:rPr>
-              <a:t>현재 상태와 기준을 확인하고 비슷한 과거 사례의 운영행위·승인·근거를 추적</a:t>
+              <a:t>현재 상태와 기준을 확인하고 과거 사례의 상태·운영행위·승인·근거를 추적</a:t>
             </a:r>
             <a:r>
               <a:rPr lang="ko-KR" altLang="en-US" sz="2400" b="0" dirty="0">
@@ -3962,7 +3962,7 @@
                 <a:ea typeface="나눔고딕" pitchFamily="50" charset="-127"/>
                 <a:cs typeface="Arial" panose="020B0604020202020204" pitchFamily="34" charset="0"/>
               </a:rPr>
-              <a:t>표 경로</a:t>
+              <a:t>전처리 → 구조화 자료 매핑 → 문서 자료 추출 → 관계 연결 → 검증 → 저장</a:t>
             </a:r>
             <a:r>
               <a:rPr lang="ko-KR" altLang="en-US" sz="2400" b="0" dirty="0">
@@ -3976,7 +3976,7 @@
                 <a:ea typeface="나눔고딕" pitchFamily="50" charset="-127"/>
                 <a:cs typeface="Arial" panose="020B0604020202020204" pitchFamily="34" charset="0"/>
               </a:rPr>
-              <a:t>와 </a:t>
+              <a:t>의 6단계로 처리하여 KG(개체 264, 관계 418)를 구축함. 관계는 자료의 코드·이름이 일치하는 개체 쌍에만 연결하고, 측정값 전체와 원문은 외부 저장소에 두어 KG에는 </a:t>
             </a:r>
             <a:r>
               <a:rPr lang="ko-KR" altLang="en-US" sz="2400" b="1" dirty="0">
@@ -3990,35 +3990,7 @@
                 <a:ea typeface="나눔고딕" pitchFamily="50" charset="-127"/>
                 <a:cs typeface="Arial" panose="020B0604020202020204" pitchFamily="34" charset="0"/>
               </a:rPr>
-              <a:t>글 경로</a:t>
-            </a:r>
-            <a:r>
-              <a:rPr lang="ko-KR" altLang="en-US" sz="2400" b="0" dirty="0">
-                <a:solidFill>
-                  <a:schemeClr val="tx1">
-                    <a:lumMod val="85000"/>
-                    <a:lumOff val="15000"/>
-                  </a:schemeClr>
-                </a:solidFill>
-                <a:latin typeface="나눔고딕" pitchFamily="50" charset="-127"/>
-                <a:ea typeface="나눔고딕" pitchFamily="50" charset="-127"/>
-                <a:cs typeface="Arial" panose="020B0604020202020204" pitchFamily="34" charset="0"/>
-              </a:rPr>
-              <a:t>로 나누어 Class·관계·속성에 대응시켜 KG(개체 273, 관계 457)로 구축함. 수치 전체와 원문은 외부 저장소에 두고, KG에는 관계와 </a:t>
-            </a:r>
-            <a:r>
-              <a:rPr lang="ko-KR" altLang="en-US" sz="2400" b="1" dirty="0">
-                <a:solidFill>
-                  <a:schemeClr val="tx1">
-                    <a:lumMod val="85000"/>
-                    <a:lumOff val="15000"/>
-                  </a:schemeClr>
-                </a:solidFill>
-                <a:latin typeface="나눔고딕" pitchFamily="50" charset="-127"/>
-                <a:ea typeface="나눔고딕" pitchFamily="50" charset="-127"/>
-                <a:cs typeface="Arial" panose="020B0604020202020204" pitchFamily="34" charset="0"/>
-              </a:rPr>
-              <a:t>출처 번호</a:t>
+              <a:t>찾아가는 키</a:t>
             </a:r>
             <a:r>
               <a:rPr lang="ko-KR" altLang="en-US" sz="2400" b="0" dirty="0">
@@ -4087,7 +4059,7 @@
                 <a:ea typeface="나눔고딕" pitchFamily="50" charset="-127"/>
                 <a:cs typeface="Arial" panose="020B0604020202020204" pitchFamily="34" charset="0"/>
               </a:rPr>
-              <a:t>의도</a:t>
+              <a:t>의도(CQ, 복수 가능)</a:t>
             </a:r>
             <a:r>
               <a:rPr lang="ko-KR" altLang="en-US" sz="2400" b="0" dirty="0">
@@ -4101,7 +4073,7 @@
                 <a:ea typeface="나눔고딕" pitchFamily="50" charset="-127"/>
                 <a:cs typeface="Arial" panose="020B0604020202020204" pitchFamily="34" charset="0"/>
               </a:rPr>
-              <a:t>와 댐·시점을 정리 → ② 의도별 </a:t>
+              <a:t> 와 댐·시점을 추출 → ② 코드가 입력을 확인하고 의도별 </a:t>
             </a:r>
             <a:r>
               <a:rPr lang="ko-KR" altLang="en-US" sz="2400" b="1" dirty="0">
@@ -4129,7 +4101,7 @@
                 <a:ea typeface="나눔고딕" pitchFamily="50" charset="-127"/>
                 <a:cs typeface="Arial" panose="020B0604020202020204" pitchFamily="34" charset="0"/>
               </a:rPr>
-              <a:t>로 KG를 탐색해 관련 승인·운영행위·기준과 출처 번호를 찾음 → ③ 그 번호로 측정자료·문서 저장소에서 값과 원문을 읽음 → ④ 전체 질문은 수위·유입량의 </a:t>
+              <a:t>로 KG를 조회 → ③ 키로 측정자료·문서 저장소에서 값과 원문을 읽음 → ④ 출처 번호를 붙인 </a:t>
             </a:r>
             <a:r>
               <a:rPr lang="ko-KR" altLang="en-US" sz="2400" b="1" dirty="0">
@@ -4143,7 +4115,7 @@
                 <a:ea typeface="나눔고딕" pitchFamily="50" charset="-127"/>
                 <a:cs typeface="Arial" panose="020B0604020202020204" pitchFamily="34" charset="0"/>
               </a:rPr>
-              <a:t>유클리드 거리</a:t>
+              <a:t>근거 묶음</a:t>
             </a:r>
             <a:r>
               <a:rPr lang="ko-KR" altLang="en-US" sz="2400" b="0" dirty="0">
@@ -4157,7 +4129,7 @@
                 <a:ea typeface="나눔고딕" pitchFamily="50" charset="-127"/>
                 <a:cs typeface="Arial" panose="020B0604020202020204" pitchFamily="34" charset="0"/>
               </a:rPr>
-              <a:t>로 비슷한 과거 사례를 고르고, 수치 계산은 코드가 수행 → ⑤ </a:t>
+              <a:t> 구성 → ⑤ LLM이 근거 묶음으로 </a:t>
             </a:r>
             <a:r>
               <a:rPr lang="ko-KR" altLang="en-US" sz="2400" b="1" dirty="0">
@@ -4171,7 +4143,7 @@
                 <a:ea typeface="나눔고딕" pitchFamily="50" charset="-127"/>
                 <a:cs typeface="Arial" panose="020B0604020202020204" pitchFamily="34" charset="0"/>
               </a:rPr>
-              <a:t>근거 모음</a:t>
+              <a:t>근거와 판단을 나누어</a:t>
             </a:r>
             <a:r>
               <a:rPr lang="ko-KR" altLang="en-US" sz="2400" b="0" dirty="0">
@@ -4185,7 +4157,7 @@
                 <a:ea typeface="나눔고딕" pitchFamily="50" charset="-127"/>
                 <a:cs typeface="Arial" panose="020B0604020202020204" pitchFamily="34" charset="0"/>
               </a:rPr>
-              <a:t> 안에서 LLM이 답변하고 출처 번호를 붙임</a:t>
+              <a:t> 답변</a:t>
             </a:r>
           </a:p>
         </p:txBody>
@@ -4566,7 +4538,7 @@
                           <a:ea typeface="나눔고딕" pitchFamily="50" charset="-127"/>
                           <a:cs typeface="Arial" panose="020B0604020202020204" pitchFamily="34" charset="0"/>
                         </a:rPr>
-                        <a:t>Dam 4, HMS 24, Approval 80, Operation 68, Criterion 3, EvidenceSource 94</a:t>
+                        <a:t>Dam 4, HMS 24, Approval 80, Operation 68, Criterion 3, EvidenceSource 85</a:t>
                       </a:r>
                     </a:p>
                   </a:txBody>
@@ -4618,7 +4590,7 @@
                           <a:ea typeface="나눔고딕" pitchFamily="50" charset="-127"/>
                           <a:cs typeface="Arial" panose="020B0604020202020204" pitchFamily="34" charset="0"/>
                         </a:rPr>
-                        <a:t>273</a:t>
+                        <a:t>264</a:t>
                       </a:r>
                     </a:p>
                   </a:txBody>
@@ -4724,7 +4696,7 @@
                           <a:ea typeface="나눔고딕" pitchFamily="50" charset="-127"/>
                           <a:cs typeface="Arial" panose="020B0604020202020204" pitchFamily="34" charset="0"/>
                         </a:rPr>
-                        <a:t>허가한다, 대상 댐, 수행된 댐, 상태 보유, 적용되는 댐, 근거 등 9종류</a:t>
+                        <a:t>승인–댐, 허가, 수행된 댐, 상태 보유, 적용되는 댐, 근거 등 9종류</a:t>
                       </a:r>
                     </a:p>
                   </a:txBody>
@@ -4776,7 +4748,7 @@
                           <a:ea typeface="나눔고딕" pitchFamily="50" charset="-127"/>
                           <a:cs typeface="Arial" panose="020B0604020202020204" pitchFamily="34" charset="0"/>
                         </a:rPr>
-                        <a:t>457</a:t>
+                        <a:t>418</a:t>
                       </a:r>
                     </a:p>
                   </a:txBody>
@@ -4882,7 +4854,7 @@
                           <a:ea typeface="나눔고딕" pitchFamily="50" charset="-127"/>
                           <a:cs typeface="Arial" panose="020B0604020202020204" pitchFamily="34" charset="0"/>
                         </a:rPr>
-                        <a:t>승인일, 방류 시작 시각, 승인 방류량, 제한수위 등</a:t>
+                        <a:t>승인일, 승인 내용, 운영행위 종류·시각, 제한수위 등</a:t>
                       </a:r>
                     </a:p>
                   </a:txBody>
@@ -4934,7 +4906,7 @@
                           <a:ea typeface="나눔고딕" pitchFamily="50" charset="-127"/>
                           <a:cs typeface="Arial" panose="020B0604020202020204" pitchFamily="34" charset="0"/>
                         </a:rPr>
-                        <a:t>653행</a:t>
+                        <a:t>616행</a:t>
                       </a:r>
                     </a:p>
                   </a:txBody>
@@ -4971,7 +4943,7 @@
       </p:graphicFrame>
       <p:pic>
         <p:nvPicPr>
-          <p:cNvPr id="1019" name="그림 2. 지식그래프의 일부: 충주댐 승인 1368번" descr="그림 2. 지식그래프의 일부: 충주댐 승인 1368번"/>
+          <p:cNvPr id="1019" name="그림 2. 지식그래프의 일부: 충주댐 승인 1368번 (Class 6, 관계 9)" descr="그림 2. 지식그래프의 일부: 충주댐 승인 1368번 (Class 6, 관계 9)"/>
           <p:cNvPicPr>
             <a:picLocks noChangeAspect="1"/>
           </p:cNvPicPr>
@@ -4985,8 +4957,8 @@
         </p:blipFill>
         <p:spPr>
           <a:xfrm>
-            <a:off x="17326753" y="10695259"/>
-            <a:ext cx="10600000" cy="7314000"/>
+            <a:off x="17626753" y="10695259"/>
+            <a:ext cx="10000000" cy="6634615"/>
           </a:xfrm>
           <a:prstGeom prst="rect">
             <a:avLst/>
@@ -5006,7 +4978,7 @@
         </p:nvSpPr>
         <p:spPr>
           <a:xfrm>
-            <a:off x="15570184" y="18069259"/>
+            <a:off x="15570184" y="17389874"/>
             <a:ext cx="14113138" cy="800000"/>
           </a:xfrm>
           <a:prstGeom prst="rect">
@@ -5044,7 +5016,7 @@
                 <a:ea typeface="나눔고딕" pitchFamily="50" charset="-127"/>
                 <a:cs typeface="Arial" panose="020B0604020202020204" pitchFamily="34" charset="0"/>
               </a:rPr>
-              <a:t>그림 2. 지식그래프의 일부: 충주댐 승인 1368번</a:t>
+              <a:t>그림 2. 지식그래프의 일부: 충주댐 승인 1368번 (Class 6, 관계 9)</a:t>
             </a:r>
           </a:p>
         </p:txBody>
@@ -5057,7 +5029,7 @@
         </p:nvSpPr>
         <p:spPr>
           <a:xfrm>
-            <a:off x="15570184" y="18869259"/>
+            <a:off x="15570184" y="18189874"/>
             <a:ext cx="14113138" cy="1005551"/>
           </a:xfrm>
           <a:prstGeom prst="rect">
@@ -5097,7 +5069,7 @@
                 <a:ea typeface="나눔고딕" pitchFamily="50" charset="-127"/>
                 <a:cs typeface="Arial" panose="020B0604020202020204" pitchFamily="34" charset="0"/>
               </a:rPr>
-              <a:t>구조 검증 </a:t>
+              <a:t>구조 검사 </a:t>
             </a:r>
             <a:r>
               <a:rPr lang="ko-KR" altLang="en-US" sz="2400" b="1" dirty="0">
@@ -5125,7 +5097,7 @@
                 <a:ea typeface="나눔고딕" pitchFamily="50" charset="-127"/>
                 <a:cs typeface="Arial" panose="020B0604020202020204" pitchFamily="34" charset="0"/>
               </a:rPr>
-              <a:t>에서 어긋남은 0건이었고, 승인 80건 모두 </a:t>
+              <a:t>에서 어긋남은 0건이었고, 검증 중 </a:t>
             </a:r>
             <a:r>
               <a:rPr lang="ko-KR" altLang="en-US" sz="2400" b="1" dirty="0">
@@ -5139,7 +5111,7 @@
                 <a:ea typeface="나눔고딕" pitchFamily="50" charset="-127"/>
                 <a:cs typeface="Arial" panose="020B0604020202020204" pitchFamily="34" charset="0"/>
               </a:rPr>
-              <a:t>승인–운영행위–댐–상태–근거자료</a:t>
+              <a:t>승인과 댐을 잇는 관계</a:t>
             </a:r>
             <a:r>
               <a:rPr lang="ko-KR" altLang="en-US" sz="2400" b="0" dirty="0">
@@ -5153,7 +5125,7 @@
                 <a:ea typeface="나눔고딕" pitchFamily="50" charset="-127"/>
                 <a:cs typeface="Arial" panose="020B0604020202020204" pitchFamily="34" charset="0"/>
               </a:rPr>
-              <a:t>로 이어져 질문 경로를 따라 근거를 찾을 수 있음</a:t>
+              <a:t>가 없음을 발견해 Ontology에 추가함으로써 승인 80건 모두 댐에서 찾을 수 있고 근거자료와 연결됨</a:t>
             </a:r>
           </a:p>
         </p:txBody>
@@ -5166,7 +5138,7 @@
         </p:nvSpPr>
         <p:spPr>
           <a:xfrm>
-            <a:off x="15691431" y="20254810"/>
+            <a:off x="15691431" y="19575425"/>
             <a:ext cx="13943667" cy="1023024"/>
           </a:xfrm>
           <a:prstGeom prst="rect">
@@ -5225,7 +5197,7 @@
         </p:nvSpPr>
         <p:spPr>
           <a:xfrm>
-            <a:off x="15803042" y="21397834"/>
+            <a:off x="15803042" y="20718449"/>
             <a:ext cx="13649422" cy="645985"/>
           </a:xfrm>
           <a:prstGeom prst="rect">
@@ -5284,7 +5256,7 @@
                 <a:ea typeface="나눔고딕" pitchFamily="50" charset="-127"/>
                 <a:cs typeface="Arial" panose="020B0604020202020204" pitchFamily="34" charset="0"/>
               </a:rPr>
-              <a:t>Table 3. 전체 질문에 대한 응답 과정</a:t>
+              <a:t>Table 3. 전체 질문에 대한 근거 검색과 답변 구성</a:t>
             </a:r>
           </a:p>
         </p:txBody>
@@ -5298,8 +5270,8 @@
           <p:nvPr/>
         </p:nvGraphicFramePr>
         <p:xfrm>
-          <a:off x="15670184" y="22133819"/>
-          <a:ext cx="13500000" cy="4242500"/>
+          <a:off x="15670184" y="21454434"/>
+          <a:ext cx="13500000" cy="4591750"/>
         </p:xfrm>
         <a:graphic>
           <a:graphicData uri="http://schemas.openxmlformats.org/drawingml/2006/table">
@@ -5484,7 +5456,7 @@
                           <a:ea typeface="나눔고딕" pitchFamily="50" charset="-127"/>
                           <a:cs typeface="Arial" panose="020B0604020202020204" pitchFamily="34" charset="0"/>
                         </a:rPr>
-                        <a:t>“소양강댐의 현재 수위를 제한수위와 비교하고, 비슷했던 과거 사례의 운영행위와 승인, 근거를 알려줘”</a:t>
+                        <a:t>“충주댐 현재 수문, 기상 데이터를 가져오고 제한수위와 비교한 후에, 이와 비슷한 수문상태일 때의 승인 및 운영 행위가 있었으면 알려줘”</a:t>
                       </a:r>
                     </a:p>
                   </a:txBody>
@@ -5590,7 +5562,7 @@
                           <a:ea typeface="나눔고딕" pitchFamily="50" charset="-127"/>
                           <a:cs typeface="Arial" panose="020B0604020202020204" pitchFamily="34" charset="0"/>
                         </a:rPr>
-                        <a:t>전체 질문 (CQ1~CQ6를 이어서 조회), 댐 = 소양강댐</a:t>
+                        <a:t>CQ1~CQ6 (복수), 댐 = 충주댐, 시점 = 전체</a:t>
                       </a:r>
                     </a:p>
                   </a:txBody>
@@ -5621,7 +5593,7 @@
                   </a:tcPr>
                 </a:tc>
               </a:tr>
-              <a:tr h="1547000">
+              <a:tr h="1896250">
                 <a:tc>
                   <a:txBody>
                     <a:bodyPr/>
@@ -5644,7 +5616,7 @@
                           <a:ea typeface="나눔고딕" pitchFamily="50" charset="-127"/>
                           <a:cs typeface="Arial" panose="020B0604020202020204" pitchFamily="34" charset="0"/>
                         </a:rPr>
-                        <a:t>근거 모음</a:t>
+                        <a:t>근거 묶음</a:t>
                       </a:r>
                     </a:p>
                   </a:txBody>
@@ -5696,7 +5668,7 @@
                           <a:ea typeface="나눔고딕" pitchFamily="50" charset="-127"/>
                           <a:cs typeface="Arial" panose="020B0604020202020204" pitchFamily="34" charset="0"/>
                         </a:rPr>
-                        <a:t>현재 수위 185.2644 EL.m, 제한수위 190.3 EL.m [CRI:CR-01]</a:t>
+                        <a:t>현재 상태 2026-09-28 23:00, 수위 131.6689 EL.m [MEA:1003110:2026092823]</a:t>
                       </a:r>
                     </a:p>
                     <a:p>
@@ -5717,7 +5689,7 @@
                           <a:ea typeface="나눔고딕" pitchFamily="50" charset="-127"/>
                           <a:cs typeface="Arial" panose="020B0604020202020204" pitchFamily="34" charset="0"/>
                         </a:rPr>
-                        <a:t>비슷한 과거 사례 2017-08-25 15:00 (수위·유입량 거리 0.223)</a:t>
+                        <a:t>제한수위 138.0 EL.m [CRI:CR-02]</a:t>
                       </a:r>
                     </a:p>
                     <a:p>
@@ -5738,7 +5710,28 @@
                           <a:ea typeface="나눔고딕" pitchFamily="50" charset="-127"/>
                           <a:cs typeface="Arial" panose="020B0604020202020204" pitchFamily="34" charset="0"/>
                         </a:rPr>
-                        <a:t>운영행위 탄력적 방류 [OPR:2754:2], 승인 [APR:2754] 승인 방류량 1500 ㎥/s, 사례 전후 최대 총방류량 1011.2 CMS (승인량의 67.4%)</a:t>
+                        <a:t>운영행위 14개와 허가한 승인, 각 운영 시각의 수문기상 상태</a:t>
+                      </a:r>
+                    </a:p>
+                    <a:p>
+                      <a:pPr algn="l">
+                        <a:lnSpc>
+                          <a:spcPct val="105000"/>
+                        </a:lnSpc>
+                      </a:pPr>
+                      <a:r>
+                        <a:rPr lang="ko-KR" altLang="en-US" sz="2200" b="0" dirty="0">
+                          <a:solidFill>
+                            <a:schemeClr val="tx1">
+                              <a:lumMod val="85000"/>
+                              <a:lumOff val="15000"/>
+                            </a:schemeClr>
+                          </a:solidFill>
+                          <a:latin typeface="나눔고딕" pitchFamily="50" charset="-127"/>
+                          <a:ea typeface="나눔고딕" pitchFamily="50" charset="-127"/>
+                          <a:cs typeface="Arial" panose="020B0604020202020204" pitchFamily="34" charset="0"/>
+                        </a:rPr>
+                        <a:t>예) 2012-08-24 15:00 탄력적 방류 [OPR:1368:1] ← 승인 [APR:1368]</a:t>
                       </a:r>
                     </a:p>
                   </a:txBody>
@@ -5844,7 +5837,7 @@
                           <a:ea typeface="나눔고딕" pitchFamily="50" charset="-127"/>
                           <a:cs typeface="Arial" panose="020B0604020202020204" pitchFamily="34" charset="0"/>
                         </a:rPr>
-                        <a:t>“소양강댐 현재 수위는 185.2644 EL.m로, 제한수위 190.3 EL.m 대비 −5.04 m입니다 [CRI:CR-01]. 유사한 과거 사례는 2017-08-25 15:00 …” (출처 번호 포함)</a:t>
+                        <a:t>근거(출처 번호 포함)와 판단(LLM)으로 나누어 작성하고, 판단에는 근거로 삼은 출처 번호를 함께 적음</a:t>
                       </a:r>
                     </a:p>
                   </a:txBody>
@@ -5887,7 +5880,7 @@
         </p:nvSpPr>
         <p:spPr>
           <a:xfrm>
-            <a:off x="15570184" y="26496319"/>
+            <a:off x="15570184" y="26166184"/>
             <a:ext cx="14113138" cy="1005551"/>
           </a:xfrm>
           <a:prstGeom prst="rect">
@@ -5927,7 +5920,7 @@
                 <a:ea typeface="나눔고딕" pitchFamily="50" charset="-127"/>
                 <a:cs typeface="Arial" panose="020B0604020202020204" pitchFamily="34" charset="0"/>
               </a:rPr>
-              <a:t>LLM은 질문 해석과 답변 작성을 맡고, </a:t>
+              <a:t>자료 연결과 근거 검색은 코드로 자동화하고 </a:t>
             </a:r>
             <a:r>
               <a:rPr lang="ko-KR" altLang="en-US" sz="2400" b="1" dirty="0">
@@ -5941,7 +5934,7 @@
                 <a:ea typeface="나눔고딕" pitchFamily="50" charset="-127"/>
                 <a:cs typeface="Arial" panose="020B0604020202020204" pitchFamily="34" charset="0"/>
               </a:rPr>
-              <a:t>수치 계산과 비슷한 사례 선택은 코드</a:t>
+              <a:t>LLM은 질문 해석과 답변 작성</a:t>
             </a:r>
             <a:r>
               <a:rPr lang="ko-KR" altLang="en-US" sz="2400" b="0" dirty="0">
@@ -5955,7 +5948,7 @@
                 <a:ea typeface="나눔고딕" pitchFamily="50" charset="-127"/>
                 <a:cs typeface="Arial" panose="020B0604020202020204" pitchFamily="34" charset="0"/>
               </a:rPr>
-              <a:t>가 수행하여 답변의 숫자를 근거에서 확인할 수 있음</a:t>
+              <a:t>을 맡아, 답변의 사실은 출처 번호로 원 자료까지 추적할 수 있고 LLM의 판단은 근거와 구분되어 표시됨</a:t>
             </a:r>
           </a:p>
         </p:txBody>
@@ -5968,7 +5961,7 @@
         </p:nvSpPr>
         <p:spPr>
           <a:xfrm>
-            <a:off x="15691431" y="27881870"/>
+            <a:off x="15691431" y="27551735"/>
             <a:ext cx="13943667" cy="1023024"/>
           </a:xfrm>
           <a:prstGeom prst="rect">
@@ -6027,7 +6020,7 @@
         </p:nvSpPr>
         <p:spPr>
           <a:xfrm>
-            <a:off x="15570184" y="29024894"/>
+            <a:off x="15570184" y="28694759"/>
             <a:ext cx="14113138" cy="3315935"/>
           </a:xfrm>
           <a:prstGeom prst="rect">
@@ -6081,7 +6074,7 @@
                 <a:ea typeface="나눔고딕" pitchFamily="50" charset="-127"/>
                 <a:cs typeface="Arial" panose="020B0604020202020204" pitchFamily="34" charset="0"/>
               </a:rPr>
-              <a:t>Ontology(개체 6종류, 관계 9종류)</a:t>
+              <a:t>Ontology(Class 6, 관계 9)</a:t>
             </a:r>
             <a:r>
               <a:rPr lang="ko-KR" altLang="en-US" sz="2400" b="0" dirty="0">
@@ -6095,7 +6088,7 @@
                 <a:ea typeface="나눔고딕" pitchFamily="50" charset="-127"/>
                 <a:cs typeface="Arial" panose="020B0604020202020204" pitchFamily="34" charset="0"/>
               </a:rPr>
-              <a:t> 에 맞춰 </a:t>
+              <a:t> 에 맞춰 6단계로 </a:t>
             </a:r>
             <a:r>
               <a:rPr lang="ko-KR" altLang="en-US" sz="2400" b="1" dirty="0">
@@ -6109,7 +6102,7 @@
                 <a:ea typeface="나눔고딕" pitchFamily="50" charset="-127"/>
                 <a:cs typeface="Arial" panose="020B0604020202020204" pitchFamily="34" charset="0"/>
               </a:rPr>
-              <a:t>KG(개체 273, 관계 457)</a:t>
+              <a:t>KG(개체 264, 관계 418)</a:t>
             </a:r>
             <a:r>
               <a:rPr lang="ko-KR" altLang="en-US" sz="2400" b="0" dirty="0">
@@ -6150,7 +6143,7 @@
                 <a:ea typeface="나눔고딕" pitchFamily="50" charset="-127"/>
                 <a:cs typeface="Arial" panose="020B0604020202020204" pitchFamily="34" charset="0"/>
               </a:rPr>
-              <a:t>전체 질문과 세부 질문 6개(CQ)에 대해 KG와 측정자료·문서 저장소에서 근거를 찾는 </a:t>
+              <a:t>전체 질문과 세부 질문 6개(CQ)에 대해 KG와 측정자료·문서 저장소에서 근거를 찾아 </a:t>
             </a:r>
             <a:r>
               <a:rPr lang="ko-KR" altLang="en-US" sz="2400" b="1" dirty="0">
@@ -6164,7 +6157,7 @@
                 <a:ea typeface="나눔고딕" pitchFamily="50" charset="-127"/>
                 <a:cs typeface="Arial" panose="020B0604020202020204" pitchFamily="34" charset="0"/>
               </a:rPr>
-              <a:t>RAG</a:t>
+              <a:t>출처 번호가 붙은 근거 묶음</a:t>
             </a:r>
             <a:r>
               <a:rPr lang="ko-KR" altLang="en-US" sz="2400" b="0" dirty="0">
@@ -6178,7 +6171,7 @@
                 <a:ea typeface="나눔고딕" pitchFamily="50" charset="-127"/>
                 <a:cs typeface="Arial" panose="020B0604020202020204" pitchFamily="34" charset="0"/>
               </a:rPr>
-              <a:t>와, 출처 번호가 붙은 근거 안에서 답하는 </a:t>
+              <a:t>으로 정리하고, </a:t>
             </a:r>
             <a:r>
               <a:rPr lang="ko-KR" altLang="en-US" sz="2400" b="1" dirty="0">
@@ -6206,7 +6199,7 @@
                 <a:ea typeface="나눔고딕" pitchFamily="50" charset="-127"/>
                 <a:cs typeface="Arial" panose="020B0604020202020204" pitchFamily="34" charset="0"/>
               </a:rPr>
-              <a:t>을 연계한 </a:t>
+              <a:t>이 근거와 판단을 나누어 답하는 </a:t>
             </a:r>
             <a:r>
               <a:rPr lang="ko-KR" altLang="en-US" sz="2400" b="1" dirty="0">
@@ -6261,7 +6254,7 @@
                 <a:ea typeface="나눔고딕" pitchFamily="50" charset="-127"/>
                 <a:cs typeface="Arial" panose="020B0604020202020204" pitchFamily="34" charset="0"/>
               </a:rPr>
-              <a:t>운영자가 현재 상태, 제한수위, 과거 승인·운영행위, 비슷한 과거 사례를 </a:t>
+              <a:t>운영자가 현재 상태, 제한수위, 과거 승인·운영행위를 </a:t>
             </a:r>
             <a:r>
               <a:rPr lang="ko-KR" altLang="en-US" sz="2400" b="1" dirty="0">
@@ -6330,7 +6323,7 @@
         </p:nvSpPr>
         <p:spPr>
           <a:xfrm>
-            <a:off x="15691431" y="32720829"/>
+            <a:off x="15691431" y="32390694"/>
             <a:ext cx="13943667" cy="1023024"/>
           </a:xfrm>
           <a:prstGeom prst="rect">
@@ -6389,7 +6382,7 @@
         </p:nvSpPr>
         <p:spPr>
           <a:xfrm>
-            <a:off x="15570184" y="33863853"/>
+            <a:off x="15570184" y="33533718"/>
             <a:ext cx="14113138" cy="1221350"/>
           </a:xfrm>
           <a:prstGeom prst="rect">
@@ -6440,7 +6433,7 @@
         </p:nvSpPr>
         <p:spPr>
           <a:xfrm>
-            <a:off x="15691431" y="35235203"/>
+            <a:off x="15691431" y="34905068"/>
             <a:ext cx="13943667" cy="1023024"/>
           </a:xfrm>
           <a:prstGeom prst="rect">
@@ -6499,8 +6492,8 @@
         </p:nvSpPr>
         <p:spPr>
           <a:xfrm>
-            <a:off x="15570184" y="36378227"/>
-            <a:ext cx="14113138" cy="4179129"/>
+            <a:off x="15570184" y="36048092"/>
+            <a:ext cx="14113138" cy="5550119"/>
           </a:xfrm>
           <a:prstGeom prst="rect">
             <a:avLst/>
@@ -6537,7 +6530,7 @@
                 <a:ea typeface="나눔고딕" pitchFamily="50" charset="-127"/>
                 <a:cs typeface="Arial" panose="020B0604020202020204" pitchFamily="34" charset="0"/>
               </a:rPr>
-              <a:t>1. Purohit, S., Chin, G., Mackey, P. S. and Cottam, J. A. (2024). “GraphAide: Advanced graph-assisted query and reasoning system.” Proc. IEEE Int. Conf. on Big Data (BigData), pp. 3485-3493.</a:t>
+              <a:t>1. Noy, N. F. and McGuinness, D. L. (2001). “Ontology development 101: A guide to creating your first ontology.” Stanford Knowledge Systems Laboratory Technical Report KSL-01-05.</a:t>
             </a:r>
           </a:p>
           <a:p>
@@ -6562,7 +6555,7 @@
                 <a:ea typeface="나눔고딕" pitchFamily="50" charset="-127"/>
                 <a:cs typeface="Arial" panose="020B0604020202020204" pitchFamily="34" charset="0"/>
               </a:rPr>
-              <a:t>2. Papadakis, E., McCluskey, T. L., Louadah, H. and Tucker, G. (2023). “Ontology-guided knowledge graph construction to support scheduling in a train maintenance depot.” CEUR Workshop Proceedings, Vol. 3493.</a:t>
+              <a:t>2. Huang, J., Hou, W., Zhang, S., Du, Z. and Yin, J. (2026). “Dam defects ontology and knowledge graph construction from multi-source hazard data using large language models.” Advanced Engineering Informatics, Vol. 76, 104987.</a:t>
             </a:r>
           </a:p>
           <a:p>
@@ -6587,7 +6580,7 @@
                 <a:ea typeface="나눔고딕" pitchFamily="50" charset="-127"/>
                 <a:cs typeface="Arial" panose="020B0604020202020204" pitchFamily="34" charset="0"/>
               </a:rPr>
-              <a:t>3. Li, S., Erickson, C., Zajac, M., Guo, X., Duan, Q. and Gong, J. (2025). “A semi-automated framework for flood ontology construction with an application in risk communication.” Water, Vol. 17, No. 19, 2801.</a:t>
+              <a:t>3. Zhou, Y., Bao, T., Shu, X., Li, Y. and Li, Y. (2023). “BIM and ontology-based knowledge management for dam safety monitoring.” Automation in Construction, Vol. 145, 104649.</a:t>
             </a:r>
           </a:p>
           <a:p>
@@ -6612,7 +6605,7 @@
                 <a:ea typeface="나눔고딕" pitchFamily="50" charset="-127"/>
                 <a:cs typeface="Arial" panose="020B0604020202020204" pitchFamily="34" charset="0"/>
               </a:rPr>
-              <a:t>4. Lewis, P. et al. (2020). “Retrieval-augmented generation for knowledge-intensive NLP tasks.” Advances in Neural Information Processing Systems, Vol. 33, pp. 9459-9474.</a:t>
+              <a:t>4. Li, S., Erickson, C., Zajac, M., Guo, X., Duan, Q. and Gong, J. (2025). “A semi-automated framework for flood ontology construction with an application in risk communication.” Water, Vol. 17, No. 19, 2801.</a:t>
             </a:r>
           </a:p>
           <a:p>
@@ -6637,7 +6630,7 @@
                 <a:ea typeface="나눔고딕" pitchFamily="50" charset="-127"/>
                 <a:cs typeface="Arial" panose="020B0604020202020204" pitchFamily="34" charset="0"/>
               </a:rPr>
-              <a:t>5. Angles, R. and Gutierrez, C. (2008). “Survey of graph database models.” ACM Computing Surveys, Vol. 40, No. 1, Article 1.</a:t>
+              <a:t>5. Zhang, D., Ma, G., Qu, T., Wang, X., Zhou, W. and Wang, X. (2025). “A knowledge graph-enhanced large language model for question answering of hydraulic structure safety management.” Advanced Engineering Informatics, Vol. 66, 103468.</a:t>
             </a:r>
           </a:p>
           <a:p>
@@ -6662,7 +6655,57 @@
                 <a:ea typeface="나눔고딕" pitchFamily="50" charset="-127"/>
                 <a:cs typeface="Arial" panose="020B0604020202020204" pitchFamily="34" charset="0"/>
               </a:rPr>
-              <a:t>6. Noy, N. F. and McGuinness, D. L. (2001). “Ontology development 101: A guide to creating your first ontology.” Stanford Knowledge Systems Laboratory Technical Report KSL-01-05.</a:t>
+              <a:t>6. Purohit, S., Chin, G., Mackey, P. S. and Cottam, J. A. (2024). “GraphAide: Advanced graph-assisted query and reasoning system.” Proc. IEEE Int. Conf. on Big Data (BigData), pp. 3485-3493.</a:t>
+            </a:r>
+          </a:p>
+          <a:p>
+            <a:pPr marL="0" indent="0">
+              <a:lnSpc>
+                <a:spcPct val="118000"/>
+              </a:lnSpc>
+              <a:spcAft>
+                <a:spcPts val="300"/>
+              </a:spcAft>
+              <a:buNone/>
+            </a:pPr>
+            <a:r>
+              <a:rPr lang="ko-KR" altLang="en-US" sz="1800" b="0" dirty="0">
+                <a:solidFill>
+                  <a:schemeClr val="tx1">
+                    <a:lumMod val="85000"/>
+                    <a:lumOff val="15000"/>
+                  </a:schemeClr>
+                </a:solidFill>
+                <a:latin typeface="나눔고딕" pitchFamily="50" charset="-127"/>
+                <a:ea typeface="나눔고딕" pitchFamily="50" charset="-127"/>
+                <a:cs typeface="Arial" panose="020B0604020202020204" pitchFamily="34" charset="0"/>
+              </a:rPr>
+              <a:t>7. Lewis, P. et al. (2020). “Retrieval-augmented generation for knowledge-intensive NLP tasks.” Advances in Neural Information Processing Systems, Vol. 33, pp. 9459-9474.</a:t>
+            </a:r>
+          </a:p>
+          <a:p>
+            <a:pPr marL="0" indent="0">
+              <a:lnSpc>
+                <a:spcPct val="118000"/>
+              </a:lnSpc>
+              <a:spcAft>
+                <a:spcPts val="300"/>
+              </a:spcAft>
+              <a:buNone/>
+            </a:pPr>
+            <a:r>
+              <a:rPr lang="ko-KR" altLang="en-US" sz="1800" b="0" dirty="0">
+                <a:solidFill>
+                  <a:schemeClr val="tx1">
+                    <a:lumMod val="85000"/>
+                    <a:lumOff val="15000"/>
+                  </a:schemeClr>
+                </a:solidFill>
+                <a:latin typeface="나눔고딕" pitchFamily="50" charset="-127"/>
+                <a:ea typeface="나눔고딕" pitchFamily="50" charset="-127"/>
+                <a:cs typeface="Arial" panose="020B0604020202020204" pitchFamily="34" charset="0"/>
+              </a:rPr>
+              <a:t>8. Angles, R. and Gutierrez, C. (2008). “Survey of graph database models.” ACM Computing Surveys, Vol. 40, No. 1, Article 1.</a:t>
             </a:r>
           </a:p>
         </p:txBody>

--- a/lab_meeting/학회포스터_초안.pptx
+++ b/lab_meeting/학회포스터_초안.pptx
@@ -2028,7 +2028,7 @@
                 <a:ea typeface="나눔고딕" pitchFamily="50" charset="-127"/>
                 <a:cs typeface="Arial" panose="020B0604020202020204" pitchFamily="34" charset="0"/>
               </a:rPr>
-              <a:t>검색증강생성(Retrieval-Augmented Generation, RAG)</a:t>
+              <a:t>검색증강생성(RAG)</a:t>
             </a:r>
             <a:r>
               <a:rPr lang="ko-KR" altLang="en-US" sz="2400" b="0" dirty="0">
@@ -2166,7 +2166,7 @@
         </p:nvSpPr>
         <p:spPr>
           <a:xfrm>
-            <a:off x="674157" y="11188959"/>
+            <a:off x="674157" y="11008959"/>
             <a:ext cx="13943667" cy="1023024"/>
           </a:xfrm>
           <a:prstGeom prst="rect">
@@ -2225,7 +2225,7 @@
         </p:nvSpPr>
         <p:spPr>
           <a:xfrm>
-            <a:off x="830804" y="12331983"/>
+            <a:off x="830804" y="12151983"/>
             <a:ext cx="13649422" cy="645985"/>
           </a:xfrm>
           <a:prstGeom prst="rect">
@@ -2298,8 +2298,8 @@
           <p:nvPr/>
         </p:nvGraphicFramePr>
         <p:xfrm>
-          <a:off x="697946" y="13067968"/>
-          <a:ext cx="13500000" cy="8635000"/>
+          <a:off x="697946" y="12887968"/>
+          <a:ext cx="13500000" cy="6176000"/>
         </p:xfrm>
         <a:graphic>
           <a:graphicData uri="http://schemas.openxmlformats.org/drawingml/2006/table">
@@ -2309,7 +2309,7 @@
                 <a:gridCol w="2900000"/>
                 <a:gridCol w="10600000"/>
               </a:tblGrid>
-              <a:tr h="499250">
+              <a:tr h="451625">
                 <a:tc>
                   <a:txBody>
                     <a:bodyPr/>
@@ -2321,7 +2321,7 @@
                         </a:lnSpc>
                       </a:pPr>
                       <a:r>
-                        <a:rPr lang="ko-KR" altLang="en-US" sz="2200" b="1" dirty="0">
+                        <a:rPr lang="ko-KR" altLang="en-US" sz="1900" b="1" dirty="0">
                           <a:solidFill>
                             <a:schemeClr val="bg1"/>
                           </a:solidFill>
@@ -2370,7 +2370,7 @@
                         </a:lnSpc>
                       </a:pPr>
                       <a:r>
-                        <a:rPr lang="ko-KR" altLang="en-US" sz="2200" b="1" dirty="0">
+                        <a:rPr lang="ko-KR" altLang="en-US" sz="1900" b="1" dirty="0">
                           <a:solidFill>
                             <a:schemeClr val="bg1"/>
                           </a:solidFill>
@@ -2409,7 +2409,7 @@
                   </a:tcPr>
                 </a:tc>
               </a:tr>
-              <a:tr h="848500">
+              <a:tr h="753250">
                 <a:tc>
                   <a:txBody>
                     <a:bodyPr/>
@@ -2421,7 +2421,7 @@
                         </a:lnSpc>
                       </a:pPr>
                       <a:r>
-                        <a:rPr lang="ko-KR" altLang="en-US" sz="2200" b="1" dirty="0">
+                        <a:rPr lang="ko-KR" altLang="en-US" sz="1900" b="1" dirty="0">
                           <a:solidFill>
                             <a:schemeClr val="tx1">
                               <a:lumMod val="85000"/>
@@ -2432,7 +2432,7 @@
                           <a:ea typeface="나눔고딕" pitchFamily="50" charset="-127"/>
                           <a:cs typeface="Arial" panose="020B0604020202020204" pitchFamily="34" charset="0"/>
                         </a:rPr>
-                        <a:t>온톨로지 (Ontology)</a:t>
+                        <a:t>온톨로지 / Class / Entity</a:t>
                       </a:r>
                     </a:p>
                   </a:txBody>
@@ -2473,7 +2473,7 @@
                         </a:lnSpc>
                       </a:pPr>
                       <a:r>
-                        <a:rPr lang="ko-KR" altLang="en-US" sz="2200" b="0" dirty="0">
+                        <a:rPr lang="ko-KR" altLang="en-US" sz="1900" b="0" dirty="0">
                           <a:solidFill>
                             <a:schemeClr val="tx1">
                               <a:lumMod val="85000"/>
@@ -2484,7 +2484,7 @@
                           <a:ea typeface="나눔고딕" pitchFamily="50" charset="-127"/>
                           <a:cs typeface="Arial" panose="020B0604020202020204" pitchFamily="34" charset="0"/>
                         </a:rPr>
-                        <a:t>댐 운영 분야의 대상 종류와 관계·속성을 정리한 의미 구조. 실제 운영 자료는 포함하지 않음</a:t>
+                        <a:t>댐 운영 분야의 대상 종류(Class, 예: 댐)와 관계·속성을 정리한 의미 구조. Entity는 Class에 속한 실제 개체(예: 충주댐)</a:t>
                       </a:r>
                     </a:p>
                   </a:txBody>
@@ -2515,7 +2515,7 @@
                   </a:tcPr>
                 </a:tc>
               </a:tr>
-              <a:tr h="499250">
+              <a:tr h="753250">
                 <a:tc>
                   <a:txBody>
                     <a:bodyPr/>
@@ -2527,7 +2527,7 @@
                         </a:lnSpc>
                       </a:pPr>
                       <a:r>
-                        <a:rPr lang="ko-KR" altLang="en-US" sz="2200" b="1" dirty="0">
+                        <a:rPr lang="ko-KR" altLang="en-US" sz="1900" b="1" dirty="0">
                           <a:solidFill>
                             <a:schemeClr val="tx1">
                               <a:lumMod val="85000"/>
@@ -2538,7 +2538,7 @@
                           <a:ea typeface="나눔고딕" pitchFamily="50" charset="-127"/>
                           <a:cs typeface="Arial" panose="020B0604020202020204" pitchFamily="34" charset="0"/>
                         </a:rPr>
-                        <a:t>Class / Entity</a:t>
+                        <a:t>관계 / Data Property</a:t>
                       </a:r>
                     </a:p>
                   </a:txBody>
@@ -2579,7 +2579,7 @@
                         </a:lnSpc>
                       </a:pPr>
                       <a:r>
-                        <a:rPr lang="ko-KR" altLang="en-US" sz="2200" b="0" dirty="0">
+                        <a:rPr lang="ko-KR" altLang="en-US" sz="1900" b="0" dirty="0">
                           <a:solidFill>
                             <a:schemeClr val="tx1">
                               <a:lumMod val="85000"/>
@@ -2590,7 +2590,7 @@
                           <a:ea typeface="나눔고딕" pitchFamily="50" charset="-127"/>
                           <a:cs typeface="Arial" panose="020B0604020202020204" pitchFamily="34" charset="0"/>
                         </a:rPr>
-                        <a:t>Class는 대상의 종류(예: 댐, 방류 승인), Entity는 그 실제 개체(예: 충주댐)</a:t>
+                        <a:t>관계는 개체 사이의 연결(예: 승인이 운영행위를 허가함), Data Property는 개체가 가진 값(예: 승인일)</a:t>
                       </a:r>
                     </a:p>
                   </a:txBody>
@@ -2621,7 +2621,7 @@
                   </a:tcPr>
                 </a:tc>
               </a:tr>
-              <a:tr h="848500">
+              <a:tr h="753250">
                 <a:tc>
                   <a:txBody>
                     <a:bodyPr/>
@@ -2633,7 +2633,7 @@
                         </a:lnSpc>
                       </a:pPr>
                       <a:r>
-                        <a:rPr lang="ko-KR" altLang="en-US" sz="2200" b="1" dirty="0">
+                        <a:rPr lang="ko-KR" altLang="en-US" sz="1900" b="1" dirty="0">
                           <a:solidFill>
                             <a:schemeClr val="tx1">
                               <a:lumMod val="85000"/>
@@ -2644,7 +2644,7 @@
                           <a:ea typeface="나눔고딕" pitchFamily="50" charset="-127"/>
                           <a:cs typeface="Arial" panose="020B0604020202020204" pitchFamily="34" charset="0"/>
                         </a:rPr>
-                        <a:t>관계 / 속성</a:t>
+                        <a:t>CQ</a:t>
                       </a:r>
                     </a:p>
                   </a:txBody>
@@ -2685,7 +2685,7 @@
                         </a:lnSpc>
                       </a:pPr>
                       <a:r>
-                        <a:rPr lang="ko-KR" altLang="en-US" sz="2200" b="0" dirty="0">
+                        <a:rPr lang="ko-KR" altLang="en-US" sz="1900" b="0" dirty="0">
                           <a:solidFill>
                             <a:schemeClr val="tx1">
                               <a:lumMod val="85000"/>
@@ -2696,7 +2696,7 @@
                           <a:ea typeface="나눔고딕" pitchFamily="50" charset="-127"/>
                           <a:cs typeface="Arial" panose="020B0604020202020204" pitchFamily="34" charset="0"/>
                         </a:rPr>
-                        <a:t>관계는 개체 사이의 연결(예: 승인이 운영행위를 허가함), 속성은 개체가 가진 값(예: 승인일)</a:t>
+                        <a:t>Competency Question. 온톨로지가 답할 수 있어야 하는 질문으로, 필요한 Class·관계를 정하는 기준</a:t>
                       </a:r>
                     </a:p>
                   </a:txBody>
@@ -2727,7 +2727,7 @@
                   </a:tcPr>
                 </a:tc>
               </a:tr>
-              <a:tr h="848500">
+              <a:tr h="753250">
                 <a:tc>
                   <a:txBody>
                     <a:bodyPr/>
@@ -2739,7 +2739,7 @@
                         </a:lnSpc>
                       </a:pPr>
                       <a:r>
-                        <a:rPr lang="ko-KR" altLang="en-US" sz="2200" b="1" dirty="0">
+                        <a:rPr lang="ko-KR" altLang="en-US" sz="1900" b="1" dirty="0">
                           <a:solidFill>
                             <a:schemeClr val="tx1">
                               <a:lumMod val="85000"/>
@@ -2750,7 +2750,7 @@
                           <a:ea typeface="나눔고딕" pitchFamily="50" charset="-127"/>
                           <a:cs typeface="Arial" panose="020B0604020202020204" pitchFamily="34" charset="0"/>
                         </a:rPr>
-                        <a:t>CQ (Competency Question)</a:t>
+                        <a:t>지식그래프 (KG)</a:t>
                       </a:r>
                     </a:p>
                   </a:txBody>
@@ -2791,7 +2791,7 @@
                         </a:lnSpc>
                       </a:pPr>
                       <a:r>
-                        <a:rPr lang="ko-KR" altLang="en-US" sz="2200" b="0" dirty="0">
+                        <a:rPr lang="ko-KR" altLang="en-US" sz="1900" b="0" dirty="0">
                           <a:solidFill>
                             <a:schemeClr val="tx1">
                               <a:lumMod val="85000"/>
@@ -2802,7 +2802,7 @@
                           <a:ea typeface="나눔고딕" pitchFamily="50" charset="-127"/>
                           <a:cs typeface="Arial" panose="020B0604020202020204" pitchFamily="34" charset="0"/>
                         </a:rPr>
-                        <a:t>온톨로지가 답할 수 있어야 하는 질문. 연구 범위와 필요한 Class·관계를 정하는 기준</a:t>
+                        <a:t>온톨로지에 실제 개체·관계·값을 채운 그래프. Neo4j(그래프 DB)에 저장하고 Cypher(연결 패턴으로 찾는 질의 언어)로 조회</a:t>
                       </a:r>
                     </a:p>
                   </a:txBody>
@@ -2833,7 +2833,7 @@
                   </a:tcPr>
                 </a:tc>
               </a:tr>
-              <a:tr h="848500">
+              <a:tr h="753250">
                 <a:tc>
                   <a:txBody>
                     <a:bodyPr/>
@@ -2845,7 +2845,7 @@
                         </a:lnSpc>
                       </a:pPr>
                       <a:r>
-                        <a:rPr lang="ko-KR" altLang="en-US" sz="2200" b="1" dirty="0">
+                        <a:rPr lang="ko-KR" altLang="en-US" sz="1900" b="1" dirty="0">
                           <a:solidFill>
                             <a:schemeClr val="tx1">
                               <a:lumMod val="85000"/>
@@ -2856,7 +2856,7 @@
                           <a:ea typeface="나눔고딕" pitchFamily="50" charset="-127"/>
                           <a:cs typeface="Arial" panose="020B0604020202020204" pitchFamily="34" charset="0"/>
                         </a:rPr>
-                        <a:t>지식그래프 (KG)</a:t>
+                        <a:t>구조화 자료 / 문서 자료</a:t>
                       </a:r>
                     </a:p>
                   </a:txBody>
@@ -2897,7 +2897,7 @@
                         </a:lnSpc>
                       </a:pPr>
                       <a:r>
-                        <a:rPr lang="ko-KR" altLang="en-US" sz="2200" b="0" dirty="0">
+                        <a:rPr lang="ko-KR" altLang="en-US" sz="1900" b="0" dirty="0">
                           <a:solidFill>
                             <a:schemeClr val="tx1">
                               <a:lumMod val="85000"/>
@@ -2908,7 +2908,7 @@
                           <a:ea typeface="나눔고딕" pitchFamily="50" charset="-127"/>
                           <a:cs typeface="Arial" panose="020B0604020202020204" pitchFamily="34" charset="0"/>
                         </a:rPr>
-                        <a:t>온톨로지에 실제 개체·관계·값을 채워 만든 그래프. Neo4j(그래프 데이터베이스)에 저장하고 Cypher(점과 선의 연결 패턴으로 찾는 질의 언어)로 조회함</a:t>
+                        <a:t>표(구조화 자료)는 규칙으로 개체·속성에 옮기고, 글 속의 값(승인 비고, 규정 별표)은 규칙으로 추출</a:t>
                       </a:r>
                     </a:p>
                   </a:txBody>
@@ -2939,7 +2939,7 @@
                   </a:tcPr>
                 </a:tc>
               </a:tr>
-              <a:tr h="848500">
+              <a:tr h="753250">
                 <a:tc>
                   <a:txBody>
                     <a:bodyPr/>
@@ -2951,7 +2951,7 @@
                         </a:lnSpc>
                       </a:pPr>
                       <a:r>
-                        <a:rPr lang="ko-KR" altLang="en-US" sz="2200" b="1" dirty="0">
+                        <a:rPr lang="ko-KR" altLang="en-US" sz="1900" b="1" dirty="0">
                           <a:solidFill>
                             <a:schemeClr val="tx1">
                               <a:lumMod val="85000"/>
@@ -2962,7 +2962,7 @@
                           <a:ea typeface="나눔고딕" pitchFamily="50" charset="-127"/>
                           <a:cs typeface="Arial" panose="020B0604020202020204" pitchFamily="34" charset="0"/>
                         </a:rPr>
-                        <a:t>구조화 자료 / 문서 자료</a:t>
+                        <a:t>외부 저장소</a:t>
                       </a:r>
                     </a:p>
                   </a:txBody>
@@ -3003,7 +3003,7 @@
                         </a:lnSpc>
                       </a:pPr>
                       <a:r>
-                        <a:rPr lang="ko-KR" altLang="en-US" sz="2200" b="0" dirty="0">
+                        <a:rPr lang="ko-KR" altLang="en-US" sz="1900" b="0" dirty="0">
                           <a:solidFill>
                             <a:schemeClr val="tx1">
                               <a:lumMod val="85000"/>
@@ -3014,7 +3014,7 @@
                           <a:ea typeface="나눔고딕" pitchFamily="50" charset="-127"/>
                           <a:cs typeface="Arial" panose="020B0604020202020204" pitchFamily="34" charset="0"/>
                         </a:rPr>
-                        <a:t>열의 의미가 정해진 표(구조화 자료)는 규칙에 따라 개체·속성으로 옮기고, 글 속에 값이 있는 자료(승인 비고, 규정 별표)는 규칙(정규식)으로 값을 추출함</a:t>
+                        <a:t>KG 밖에 둔 측정값 전체(측정자료 저장소)와 규정 원문(문서 저장소). KG에는 찾아가는 키만 둠</a:t>
                       </a:r>
                     </a:p>
                   </a:txBody>
@@ -3045,7 +3045,7 @@
                   </a:tcPr>
                 </a:tc>
               </a:tr>
-              <a:tr h="848500">
+              <a:tr h="451625">
                 <a:tc>
                   <a:txBody>
                     <a:bodyPr/>
@@ -3057,7 +3057,7 @@
                         </a:lnSpc>
                       </a:pPr>
                       <a:r>
-                        <a:rPr lang="ko-KR" altLang="en-US" sz="2200" b="1" dirty="0">
+                        <a:rPr lang="ko-KR" altLang="en-US" sz="1900" b="1" dirty="0">
                           <a:solidFill>
                             <a:schemeClr val="tx1">
                               <a:lumMod val="85000"/>
@@ -3068,7 +3068,7 @@
                           <a:ea typeface="나눔고딕" pitchFamily="50" charset="-127"/>
                           <a:cs typeface="Arial" panose="020B0604020202020204" pitchFamily="34" charset="0"/>
                         </a:rPr>
-                        <a:t>외부 저장소</a:t>
+                        <a:t>RAG</a:t>
                       </a:r>
                     </a:p>
                   </a:txBody>
@@ -3109,7 +3109,7 @@
                         </a:lnSpc>
                       </a:pPr>
                       <a:r>
-                        <a:rPr lang="ko-KR" altLang="en-US" sz="2200" b="0" dirty="0">
+                        <a:rPr lang="ko-KR" altLang="en-US" sz="1900" b="0" dirty="0">
                           <a:solidFill>
                             <a:schemeClr val="tx1">
                               <a:lumMod val="85000"/>
@@ -3120,7 +3120,7 @@
                           <a:ea typeface="나눔고딕" pitchFamily="50" charset="-127"/>
                           <a:cs typeface="Arial" panose="020B0604020202020204" pitchFamily="34" charset="0"/>
                         </a:rPr>
-                        <a:t>KG에 넣지 않은 측정값 전체(측정자료 저장소)와 규정 원문(문서 저장소). KG에는 이를 찾아가는 키만 둠</a:t>
+                        <a:t>질문과 관련된 근거를 검색해 LLM에 함께 주고, 그 근거로 답하게 하는 방식</a:t>
                       </a:r>
                     </a:p>
                   </a:txBody>
@@ -3151,7 +3151,7 @@
                   </a:tcPr>
                 </a:tc>
               </a:tr>
-              <a:tr h="848500">
+              <a:tr h="753250">
                 <a:tc>
                   <a:txBody>
                     <a:bodyPr/>
@@ -3163,7 +3163,7 @@
                         </a:lnSpc>
                       </a:pPr>
                       <a:r>
-                        <a:rPr lang="ko-KR" altLang="en-US" sz="2200" b="1" dirty="0">
+                        <a:rPr lang="ko-KR" altLang="en-US" sz="1900" b="1" dirty="0">
                           <a:solidFill>
                             <a:schemeClr val="tx1">
                               <a:lumMod val="85000"/>
@@ -3174,7 +3174,7 @@
                           <a:ea typeface="나눔고딕" pitchFamily="50" charset="-127"/>
                           <a:cs typeface="Arial" panose="020B0604020202020204" pitchFamily="34" charset="0"/>
                         </a:rPr>
-                        <a:t>RAG (검색증강생성)</a:t>
+                        <a:t>의도 / 근거 묶음</a:t>
                       </a:r>
                     </a:p>
                   </a:txBody>
@@ -3215,7 +3215,7 @@
                         </a:lnSpc>
                       </a:pPr>
                       <a:r>
-                        <a:rPr lang="ko-KR" altLang="en-US" sz="2200" b="0" dirty="0">
+                        <a:rPr lang="ko-KR" altLang="en-US" sz="1900" b="0" dirty="0">
                           <a:solidFill>
                             <a:schemeClr val="tx1">
                               <a:lumMod val="85000"/>
@@ -3226,219 +3226,7 @@
                           <a:ea typeface="나눔고딕" pitchFamily="50" charset="-127"/>
                           <a:cs typeface="Arial" panose="020B0604020202020204" pitchFamily="34" charset="0"/>
                         </a:rPr>
-                        <a:t>질문과 관련된 근거를 검색해 LLM(대규모 언어모델)에 함께 주고, 그 근거로 답하게 하는 방식</a:t>
-                      </a:r>
-                    </a:p>
-                  </a:txBody>
-                  <a:tcPr marL="91440" marR="91440" marT="60000" marB="60000" anchor="ctr">
-                    <a:lnL w="9525">
-                      <a:solidFill>
-                        <a:srgbClr val="9AA7B5"/>
-                      </a:solidFill>
-                    </a:lnL>
-                    <a:lnR w="9525">
-                      <a:solidFill>
-                        <a:srgbClr val="9AA7B5"/>
-                      </a:solidFill>
-                    </a:lnR>
-                    <a:lnT w="9525">
-                      <a:solidFill>
-                        <a:srgbClr val="9AA7B5"/>
-                      </a:solidFill>
-                    </a:lnT>
-                    <a:lnB w="9525">
-                      <a:solidFill>
-                        <a:srgbClr val="9AA7B5"/>
-                      </a:solidFill>
-                    </a:lnB>
-                    <a:solidFill>
-                      <a:srgbClr val="EEF3F8"/>
-                    </a:solidFill>
-                  </a:tcPr>
-                </a:tc>
-              </a:tr>
-              <a:tr h="848500">
-                <a:tc>
-                  <a:txBody>
-                    <a:bodyPr/>
-                    <a:lstStyle/>
-                    <a:p>
-                      <a:pPr algn="l">
-                        <a:lnSpc>
-                          <a:spcPct val="105000"/>
-                        </a:lnSpc>
-                      </a:pPr>
-                      <a:r>
-                        <a:rPr lang="ko-KR" altLang="en-US" sz="2200" b="1" dirty="0">
-                          <a:solidFill>
-                            <a:schemeClr val="tx1">
-                              <a:lumMod val="85000"/>
-                              <a:lumOff val="15000"/>
-                            </a:schemeClr>
-                          </a:solidFill>
-                          <a:latin typeface="나눔고딕" pitchFamily="50" charset="-127"/>
-                          <a:ea typeface="나눔고딕" pitchFamily="50" charset="-127"/>
-                          <a:cs typeface="Arial" panose="020B0604020202020204" pitchFamily="34" charset="0"/>
-                        </a:rPr>
-                        <a:t>의도 (Intent)</a:t>
-                      </a:r>
-                    </a:p>
-                  </a:txBody>
-                  <a:tcPr marL="91440" marR="91440" marT="60000" marB="60000" anchor="ctr">
-                    <a:lnL w="9525">
-                      <a:solidFill>
-                        <a:srgbClr val="9AA7B5"/>
-                      </a:solidFill>
-                    </a:lnL>
-                    <a:lnR w="9525">
-                      <a:solidFill>
-                        <a:srgbClr val="9AA7B5"/>
-                      </a:solidFill>
-                    </a:lnR>
-                    <a:lnT w="9525">
-                      <a:solidFill>
-                        <a:srgbClr val="9AA7B5"/>
-                      </a:solidFill>
-                    </a:lnT>
-                    <a:lnB w="9525">
-                      <a:solidFill>
-                        <a:srgbClr val="9AA7B5"/>
-                      </a:solidFill>
-                    </a:lnB>
-                    <a:solidFill>
-                      <a:srgbClr val="FFFFFF"/>
-                    </a:solidFill>
-                  </a:tcPr>
-                </a:tc>
-                <a:tc>
-                  <a:txBody>
-                    <a:bodyPr/>
-                    <a:lstStyle/>
-                    <a:p>
-                      <a:pPr algn="l">
-                        <a:lnSpc>
-                          <a:spcPct val="105000"/>
-                        </a:lnSpc>
-                      </a:pPr>
-                      <a:r>
-                        <a:rPr lang="ko-KR" altLang="en-US" sz="2200" b="0" dirty="0">
-                          <a:solidFill>
-                            <a:schemeClr val="tx1">
-                              <a:lumMod val="85000"/>
-                              <a:lumOff val="15000"/>
-                            </a:schemeClr>
-                          </a:solidFill>
-                          <a:latin typeface="나눔고딕" pitchFamily="50" charset="-127"/>
-                          <a:ea typeface="나눔고딕" pitchFamily="50" charset="-127"/>
-                          <a:cs typeface="Arial" panose="020B0604020202020204" pitchFamily="34" charset="0"/>
-                        </a:rPr>
-                        <a:t>사용자 질문이 CQ1~CQ6 중 무엇을 묻는지의 분류(복수 가능). 의도에 따라 찾을 근거가 정해짐</a:t>
-                      </a:r>
-                    </a:p>
-                  </a:txBody>
-                  <a:tcPr marL="91440" marR="91440" marT="60000" marB="60000" anchor="ctr">
-                    <a:lnL w="9525">
-                      <a:solidFill>
-                        <a:srgbClr val="9AA7B5"/>
-                      </a:solidFill>
-                    </a:lnL>
-                    <a:lnR w="9525">
-                      <a:solidFill>
-                        <a:srgbClr val="9AA7B5"/>
-                      </a:solidFill>
-                    </a:lnR>
-                    <a:lnT w="9525">
-                      <a:solidFill>
-                        <a:srgbClr val="9AA7B5"/>
-                      </a:solidFill>
-                    </a:lnT>
-                    <a:lnB w="9525">
-                      <a:solidFill>
-                        <a:srgbClr val="9AA7B5"/>
-                      </a:solidFill>
-                    </a:lnB>
-                    <a:solidFill>
-                      <a:srgbClr val="FFFFFF"/>
-                    </a:solidFill>
-                  </a:tcPr>
-                </a:tc>
-              </a:tr>
-              <a:tr h="848500">
-                <a:tc>
-                  <a:txBody>
-                    <a:bodyPr/>
-                    <a:lstStyle/>
-                    <a:p>
-                      <a:pPr algn="l">
-                        <a:lnSpc>
-                          <a:spcPct val="105000"/>
-                        </a:lnSpc>
-                      </a:pPr>
-                      <a:r>
-                        <a:rPr lang="ko-KR" altLang="en-US" sz="2200" b="1" dirty="0">
-                          <a:solidFill>
-                            <a:schemeClr val="tx1">
-                              <a:lumMod val="85000"/>
-                              <a:lumOff val="15000"/>
-                            </a:schemeClr>
-                          </a:solidFill>
-                          <a:latin typeface="나눔고딕" pitchFamily="50" charset="-127"/>
-                          <a:ea typeface="나눔고딕" pitchFamily="50" charset="-127"/>
-                          <a:cs typeface="Arial" panose="020B0604020202020204" pitchFamily="34" charset="0"/>
-                        </a:rPr>
-                        <a:t>근거 묶음</a:t>
-                      </a:r>
-                    </a:p>
-                  </a:txBody>
-                  <a:tcPr marL="91440" marR="91440" marT="60000" marB="60000" anchor="ctr">
-                    <a:lnL w="9525">
-                      <a:solidFill>
-                        <a:srgbClr val="9AA7B5"/>
-                      </a:solidFill>
-                    </a:lnL>
-                    <a:lnR w="9525">
-                      <a:solidFill>
-                        <a:srgbClr val="9AA7B5"/>
-                      </a:solidFill>
-                    </a:lnR>
-                    <a:lnT w="9525">
-                      <a:solidFill>
-                        <a:srgbClr val="9AA7B5"/>
-                      </a:solidFill>
-                    </a:lnT>
-                    <a:lnB w="9525">
-                      <a:solidFill>
-                        <a:srgbClr val="9AA7B5"/>
-                      </a:solidFill>
-                    </a:lnB>
-                    <a:solidFill>
-                      <a:srgbClr val="EEF3F8"/>
-                    </a:solidFill>
-                  </a:tcPr>
-                </a:tc>
-                <a:tc>
-                  <a:txBody>
-                    <a:bodyPr/>
-                    <a:lstStyle/>
-                    <a:p>
-                      <a:pPr algn="l">
-                        <a:lnSpc>
-                          <a:spcPct val="105000"/>
-                        </a:lnSpc>
-                      </a:pPr>
-                      <a:r>
-                        <a:rPr lang="ko-KR" altLang="en-US" sz="2200" b="0" dirty="0">
-                          <a:solidFill>
-                            <a:schemeClr val="tx1">
-                              <a:lumMod val="85000"/>
-                              <a:lumOff val="15000"/>
-                            </a:schemeClr>
-                          </a:solidFill>
-                          <a:latin typeface="나눔고딕" pitchFamily="50" charset="-127"/>
-                          <a:ea typeface="나눔고딕" pitchFamily="50" charset="-127"/>
-                          <a:cs typeface="Arial" panose="020B0604020202020204" pitchFamily="34" charset="0"/>
-                        </a:rPr>
-                        <a:t>검색한 근거에 출처 번호를 붙여 LLM이 읽을 수 있게 정리한 입력. 값은 저장소의 원값이며 비교·해석은 LLM이 수행함</a:t>
+                        <a:t>의도는 질문이 CQ1~CQ6 중 무엇을 묻는지의 분류(복수 가능), 근거 묶음은 검색한 근거에 출처 번호를 붙여 LLM에 주는 입력</a:t>
                       </a:r>
                     </a:p>
                   </a:txBody>
@@ -3481,7 +3269,7 @@
         </p:nvSpPr>
         <p:spPr>
           <a:xfrm>
-            <a:off x="674157" y="22082968"/>
+            <a:off x="674157" y="19263968"/>
             <a:ext cx="13943667" cy="1023024"/>
           </a:xfrm>
           <a:prstGeom prst="rect">
@@ -3527,7 +3315,7 @@
                 <a:ea typeface="나눔고딕 ExtraBold" panose="020D0904000000000000" pitchFamily="50" charset="-127"/>
                 <a:cs typeface="Arial Unicode MS" panose="020B0604020202020204" pitchFamily="50" charset="-127"/>
               </a:rPr>
-              <a:t>사용 데이터 및 방법론</a:t>
+              <a:t>사용 데이터</a:t>
             </a:r>
           </a:p>
         </p:txBody>
@@ -3540,8 +3328,8 @@
         </p:nvSpPr>
         <p:spPr>
           <a:xfrm>
-            <a:off x="597946" y="23225992"/>
-            <a:ext cx="14113138" cy="2021145"/>
+            <a:off x="597946" y="20406992"/>
+            <a:ext cx="14113138" cy="2528941"/>
           </a:xfrm>
           <a:prstGeom prst="rect">
             <a:avLst/>
@@ -3594,7 +3382,7 @@
                 <a:ea typeface="나눔고딕" pitchFamily="50" charset="-127"/>
                 <a:cs typeface="Arial" panose="020B0604020202020204" pitchFamily="34" charset="0"/>
               </a:rPr>
-              <a:t>: 한강홍수통제소 공공데이터, 충주·소양강·횡성·광동 4개 댐의 승인 80건 (2010-09 ~ 2021-07)</a:t>
+              <a:t>: 한강홍수통제소, 충주·소양강·횡성·광동 4개 댐 승인 80건 (2010-09 ~ 2021-07)</a:t>
             </a:r>
           </a:p>
           <a:p>
@@ -3635,7 +3423,7 @@
                 <a:ea typeface="나눔고딕" pitchFamily="50" charset="-127"/>
                 <a:cs typeface="Arial" panose="020B0604020202020204" pitchFamily="34" charset="0"/>
               </a:rPr>
-              <a:t>: K-water 시간자료 508,246행 (수위, 저수량, 강우량, 유입량, 총방류량, 저수율)</a:t>
+              <a:t>: K-water, 508,246행 (수위, 저수량, 강우량, 유입량, 총방류량, 저수율)</a:t>
             </a:r>
           </a:p>
           <a:p>
@@ -3679,112 +3467,6 @@
               <a:t>: 연계운영규정의 홍수기 제한수위 (현행)</a:t>
             </a:r>
           </a:p>
-        </p:txBody>
-      </p:sp>
-      <p:pic>
-        <p:nvPicPr>
-          <p:cNvPr id="1013" name="그림 1. 연구의 구성: Ontology 설계 → KG 구축 → 질문 응답(RAG)" descr="그림 1. 연구의 구성: Ontology 설계 → KG 구축 → 질문 응답(RAG)"/>
-          <p:cNvPicPr>
-            <a:picLocks noChangeAspect="1"/>
-          </p:cNvPicPr>
-          <p:nvPr/>
-        </p:nvPicPr>
-        <p:blipFill>
-          <a:blip r:embed="rId11"/>
-          <a:stretch>
-            <a:fillRect/>
-          </a:stretch>
-        </p:blipFill>
-        <p:spPr>
-          <a:xfrm>
-            <a:off x="1204515" y="25307137"/>
-            <a:ext cx="12900000" cy="9085285"/>
-          </a:xfrm>
-          <a:prstGeom prst="rect">
-            <a:avLst/>
-          </a:prstGeom>
-          <a:ln w="12700">
-            <a:solidFill>
-              <a:srgbClr val="BFC5CC"/>
-            </a:solidFill>
-          </a:ln>
-        </p:spPr>
-      </p:pic>
-      <p:sp>
-        <p:nvSpPr>
-          <p:cNvPr id="1014" name="본문"/>
-          <p:cNvSpPr txBox="1"/>
-          <p:nvPr/>
-        </p:nvSpPr>
-        <p:spPr>
-          <a:xfrm>
-            <a:off x="597946" y="34452422"/>
-            <a:ext cx="14113138" cy="800000"/>
-          </a:xfrm>
-          <a:prstGeom prst="rect">
-            <a:avLst/>
-          </a:prstGeom>
-          <a:noFill/>
-          <a:ln>
-            <a:noFill/>
-          </a:ln>
-        </p:spPr>
-        <p:txBody>
-          <a:bodyPr wrap="square" lIns="66158" tIns="33079" rIns="66158" bIns="33079" anchor="t">
-            <a:noAutofit/>
-          </a:bodyPr>
-          <a:lstStyle/>
-          <a:p>
-            <a:pPr marL="0" indent="0" algn="ctr">
-              <a:lnSpc>
-                <a:spcPct val="118000"/>
-              </a:lnSpc>
-              <a:spcAft>
-                <a:spcPts val="600"/>
-              </a:spcAft>
-              <a:buNone/>
-            </a:pPr>
-            <a:r>
-              <a:rPr lang="ko-KR" altLang="en-US" sz="2400" b="0" dirty="0">
-                <a:solidFill>
-                  <a:schemeClr val="tx1">
-                    <a:lumMod val="85000"/>
-                    <a:lumOff val="15000"/>
-                  </a:schemeClr>
-                </a:solidFill>
-                <a:latin typeface="나눔고딕" pitchFamily="50" charset="-127"/>
-                <a:ea typeface="나눔고딕" pitchFamily="50" charset="-127"/>
-                <a:cs typeface="Arial" panose="020B0604020202020204" pitchFamily="34" charset="0"/>
-              </a:rPr>
-              <a:t>그림 1. 연구의 구성: Ontology 설계 → KG 구축 → 질문 응답(RAG)</a:t>
-            </a:r>
-          </a:p>
-        </p:txBody>
-      </p:sp>
-      <p:sp>
-        <p:nvSpPr>
-          <p:cNvPr id="1015" name="본문"/>
-          <p:cNvSpPr txBox="1"/>
-          <p:nvPr/>
-        </p:nvSpPr>
-        <p:spPr>
-          <a:xfrm>
-            <a:off x="597946" y="35252422"/>
-            <a:ext cx="14113138" cy="4610726"/>
-          </a:xfrm>
-          <a:prstGeom prst="rect">
-            <a:avLst/>
-          </a:prstGeom>
-          <a:noFill/>
-          <a:ln>
-            <a:noFill/>
-          </a:ln>
-        </p:spPr>
-        <p:txBody>
-          <a:bodyPr wrap="square" lIns="66158" tIns="33079" rIns="66158" bIns="33079" anchor="t">
-            <a:noAutofit/>
-          </a:bodyPr>
-          <a:lstStyle/>
           <a:p>
             <a:pPr marL="334726" indent="-334726">
               <a:lnSpc>
@@ -3809,7 +3491,7 @@
                 <a:ea typeface="나눔고딕" pitchFamily="50" charset="-127"/>
                 <a:cs typeface="Arial" panose="020B0604020202020204" pitchFamily="34" charset="0"/>
               </a:rPr>
-              <a:t>STEP 1 Ontology 설계</a:t>
+              <a:t>댐 기본 정보</a:t>
             </a:r>
             <a:r>
               <a:rPr lang="ko-KR" altLang="en-US" sz="2400" b="0" dirty="0">
@@ -3823,354 +3505,20 @@
                 <a:ea typeface="나눔고딕" pitchFamily="50" charset="-127"/>
                 <a:cs typeface="Arial" panose="020B0604020202020204" pitchFamily="34" charset="0"/>
               </a:rPr>
-              <a:t>: 운영자에게 필요한 질문을 </a:t>
-            </a:r>
-            <a:r>
-              <a:rPr lang="ko-KR" altLang="en-US" sz="2400" b="1" dirty="0">
-                <a:solidFill>
-                  <a:schemeClr val="tx1">
-                    <a:lumMod val="85000"/>
-                    <a:lumOff val="15000"/>
-                  </a:schemeClr>
-                </a:solidFill>
-                <a:latin typeface="나눔고딕" pitchFamily="50" charset="-127"/>
-                <a:ea typeface="나눔고딕" pitchFamily="50" charset="-127"/>
-                <a:cs typeface="Arial" panose="020B0604020202020204" pitchFamily="34" charset="0"/>
-              </a:rPr>
-              <a:t>전체 질문 1개와 세부 질문 6개(CQ1~CQ6)</a:t>
-            </a:r>
-            <a:r>
-              <a:rPr lang="ko-KR" altLang="en-US" sz="2400" b="0" dirty="0">
-                <a:solidFill>
-                  <a:schemeClr val="tx1">
-                    <a:lumMod val="85000"/>
-                    <a:lumOff val="15000"/>
-                  </a:schemeClr>
-                </a:solidFill>
-                <a:latin typeface="나눔고딕" pitchFamily="50" charset="-127"/>
-                <a:ea typeface="나눔고딕" pitchFamily="50" charset="-127"/>
-                <a:cs typeface="Arial" panose="020B0604020202020204" pitchFamily="34" charset="0"/>
-              </a:rPr>
-              <a:t> 로 먼저 정하고, 이에 답하는 데 필요한 </a:t>
-            </a:r>
-            <a:r>
-              <a:rPr lang="ko-KR" altLang="en-US" sz="2400" b="1" dirty="0">
-                <a:solidFill>
-                  <a:schemeClr val="tx1">
-                    <a:lumMod val="85000"/>
-                    <a:lumOff val="15000"/>
-                  </a:schemeClr>
-                </a:solidFill>
-                <a:latin typeface="나눔고딕" pitchFamily="50" charset="-127"/>
-                <a:ea typeface="나눔고딕" pitchFamily="50" charset="-127"/>
-                <a:cs typeface="Arial" panose="020B0604020202020204" pitchFamily="34" charset="0"/>
-              </a:rPr>
-              <a:t>Class 6개와 관계 9개</a:t>
-            </a:r>
-            <a:r>
-              <a:rPr lang="ko-KR" altLang="en-US" sz="2400" b="0" dirty="0">
-                <a:solidFill>
-                  <a:schemeClr val="tx1">
-                    <a:lumMod val="85000"/>
-                    <a:lumOff val="15000"/>
-                  </a:schemeClr>
-                </a:solidFill>
-                <a:latin typeface="나눔고딕" pitchFamily="50" charset="-127"/>
-                <a:ea typeface="나눔고딕" pitchFamily="50" charset="-127"/>
-                <a:cs typeface="Arial" panose="020B0604020202020204" pitchFamily="34" charset="0"/>
-              </a:rPr>
-              <a:t>를 정의함. 세부 질문은 현재 상태, 과거 상태, 과거 운영행위, 과거 방류 승인, 현재 운영기준, 공식 근거이며, 전체 질문은 이들을 이어 </a:t>
-            </a:r>
-            <a:r>
-              <a:rPr lang="ko-KR" altLang="en-US" sz="2400" b="1" dirty="0">
-                <a:solidFill>
-                  <a:schemeClr val="tx1">
-                    <a:lumMod val="85000"/>
-                    <a:lumOff val="15000"/>
-                  </a:schemeClr>
-                </a:solidFill>
-                <a:latin typeface="나눔고딕" pitchFamily="50" charset="-127"/>
-                <a:ea typeface="나눔고딕" pitchFamily="50" charset="-127"/>
-                <a:cs typeface="Arial" panose="020B0604020202020204" pitchFamily="34" charset="0"/>
-              </a:rPr>
-              <a:t>현재 상태와 기준을 확인하고 과거 사례의 상태·운영행위·승인·근거를 추적</a:t>
-            </a:r>
-            <a:r>
-              <a:rPr lang="ko-KR" altLang="en-US" sz="2400" b="0" dirty="0">
-                <a:solidFill>
-                  <a:schemeClr val="tx1">
-                    <a:lumMod val="85000"/>
-                    <a:lumOff val="15000"/>
-                  </a:schemeClr>
-                </a:solidFill>
-                <a:latin typeface="나눔고딕" pitchFamily="50" charset="-127"/>
-                <a:ea typeface="나눔고딕" pitchFamily="50" charset="-127"/>
-                <a:cs typeface="Arial" panose="020B0604020202020204" pitchFamily="34" charset="0"/>
-              </a:rPr>
-              <a:t>함</a:t>
-            </a:r>
-          </a:p>
-          <a:p>
-            <a:pPr marL="334726" indent="-334726">
-              <a:lnSpc>
-                <a:spcPct val="118000"/>
-              </a:lnSpc>
-              <a:spcAft>
-                <a:spcPts val="600"/>
-              </a:spcAft>
-              <a:buBlip>
-                <a:blip r:embed="rId4"/>
-              </a:buBlip>
-            </a:pPr>
-            <a:r>
-              <a:rPr lang="ko-KR" altLang="en-US" sz="2400" b="1" dirty="0">
-                <a:solidFill>
-                  <a:schemeClr val="tx1">
-                    <a:lumMod val="85000"/>
-                    <a:lumOff val="15000"/>
-                  </a:schemeClr>
-                </a:solidFill>
-                <a:latin typeface="나눔고딕" pitchFamily="50" charset="-127"/>
-                <a:ea typeface="나눔고딕" pitchFamily="50" charset="-127"/>
-                <a:cs typeface="Arial" panose="020B0604020202020204" pitchFamily="34" charset="0"/>
-              </a:rPr>
-              <a:t>STEP 2 KG 구축</a:t>
-            </a:r>
-            <a:r>
-              <a:rPr lang="ko-KR" altLang="en-US" sz="2400" b="0" dirty="0">
-                <a:solidFill>
-                  <a:schemeClr val="tx1">
-                    <a:lumMod val="85000"/>
-                    <a:lumOff val="15000"/>
-                  </a:schemeClr>
-                </a:solidFill>
-                <a:latin typeface="나눔고딕" pitchFamily="50" charset="-127"/>
-                <a:ea typeface="나눔고딕" pitchFamily="50" charset="-127"/>
-                <a:cs typeface="Arial" panose="020B0604020202020204" pitchFamily="34" charset="0"/>
-              </a:rPr>
-              <a:t>: 원자료를 </a:t>
-            </a:r>
-            <a:r>
-              <a:rPr lang="ko-KR" altLang="en-US" sz="2400" b="1" dirty="0">
-                <a:solidFill>
-                  <a:schemeClr val="tx1">
-                    <a:lumMod val="85000"/>
-                    <a:lumOff val="15000"/>
-                  </a:schemeClr>
-                </a:solidFill>
-                <a:latin typeface="나눔고딕" pitchFamily="50" charset="-127"/>
-                <a:ea typeface="나눔고딕" pitchFamily="50" charset="-127"/>
-                <a:cs typeface="Arial" panose="020B0604020202020204" pitchFamily="34" charset="0"/>
-              </a:rPr>
-              <a:t>전처리 → 구조화 자료 매핑 → 문서 자료 추출 → 관계 연결 → 검증 → 저장</a:t>
-            </a:r>
-            <a:r>
-              <a:rPr lang="ko-KR" altLang="en-US" sz="2400" b="0" dirty="0">
-                <a:solidFill>
-                  <a:schemeClr val="tx1">
-                    <a:lumMod val="85000"/>
-                    <a:lumOff val="15000"/>
-                  </a:schemeClr>
-                </a:solidFill>
-                <a:latin typeface="나눔고딕" pitchFamily="50" charset="-127"/>
-                <a:ea typeface="나눔고딕" pitchFamily="50" charset="-127"/>
-                <a:cs typeface="Arial" panose="020B0604020202020204" pitchFamily="34" charset="0"/>
-              </a:rPr>
-              <a:t>의 6단계로 처리하여 KG(개체 264, 관계 418)를 구축함. 관계는 자료의 코드·이름이 일치하는 개체 쌍에만 연결하고, 측정값 전체와 원문은 외부 저장소에 두어 KG에는 </a:t>
-            </a:r>
-            <a:r>
-              <a:rPr lang="ko-KR" altLang="en-US" sz="2400" b="1" dirty="0">
-                <a:solidFill>
-                  <a:schemeClr val="tx1">
-                    <a:lumMod val="85000"/>
-                    <a:lumOff val="15000"/>
-                  </a:schemeClr>
-                </a:solidFill>
-                <a:latin typeface="나눔고딕" pitchFamily="50" charset="-127"/>
-                <a:ea typeface="나눔고딕" pitchFamily="50" charset="-127"/>
-                <a:cs typeface="Arial" panose="020B0604020202020204" pitchFamily="34" charset="0"/>
-              </a:rPr>
-              <a:t>찾아가는 키</a:t>
-            </a:r>
-            <a:r>
-              <a:rPr lang="ko-KR" altLang="en-US" sz="2400" b="0" dirty="0">
-                <a:solidFill>
-                  <a:schemeClr val="tx1">
-                    <a:lumMod val="85000"/>
-                    <a:lumOff val="15000"/>
-                  </a:schemeClr>
-                </a:solidFill>
-                <a:latin typeface="나눔고딕" pitchFamily="50" charset="-127"/>
-                <a:ea typeface="나눔고딕" pitchFamily="50" charset="-127"/>
-                <a:cs typeface="Arial" panose="020B0604020202020204" pitchFamily="34" charset="0"/>
-              </a:rPr>
-              <a:t>만 저장함</a:t>
-            </a:r>
-          </a:p>
-          <a:p>
-            <a:pPr marL="334726" indent="-334726">
-              <a:lnSpc>
-                <a:spcPct val="118000"/>
-              </a:lnSpc>
-              <a:spcAft>
-                <a:spcPts val="600"/>
-              </a:spcAft>
-              <a:buBlip>
-                <a:blip r:embed="rId4"/>
-              </a:buBlip>
-            </a:pPr>
-            <a:r>
-              <a:rPr lang="ko-KR" altLang="en-US" sz="2400" b="1" dirty="0">
-                <a:solidFill>
-                  <a:schemeClr val="tx1">
-                    <a:lumMod val="85000"/>
-                    <a:lumOff val="15000"/>
-                  </a:schemeClr>
-                </a:solidFill>
-                <a:latin typeface="나눔고딕" pitchFamily="50" charset="-127"/>
-                <a:ea typeface="나눔고딕" pitchFamily="50" charset="-127"/>
-                <a:cs typeface="Arial" panose="020B0604020202020204" pitchFamily="34" charset="0"/>
-              </a:rPr>
-              <a:t>STEP 3 질문 응답(RAG)</a:t>
-            </a:r>
-            <a:r>
-              <a:rPr lang="ko-KR" altLang="en-US" sz="2400" b="0" dirty="0">
-                <a:solidFill>
-                  <a:schemeClr val="tx1">
-                    <a:lumMod val="85000"/>
-                    <a:lumOff val="15000"/>
-                  </a:schemeClr>
-                </a:solidFill>
-                <a:latin typeface="나눔고딕" pitchFamily="50" charset="-127"/>
-                <a:ea typeface="나눔고딕" pitchFamily="50" charset="-127"/>
-                <a:cs typeface="Arial" panose="020B0604020202020204" pitchFamily="34" charset="0"/>
-              </a:rPr>
-              <a:t>: ① LLM이 질문의 </a:t>
-            </a:r>
-            <a:r>
-              <a:rPr lang="ko-KR" altLang="en-US" sz="2400" b="1" dirty="0">
-                <a:solidFill>
-                  <a:schemeClr val="tx1">
-                    <a:lumMod val="85000"/>
-                    <a:lumOff val="15000"/>
-                  </a:schemeClr>
-                </a:solidFill>
-                <a:latin typeface="나눔고딕" pitchFamily="50" charset="-127"/>
-                <a:ea typeface="나눔고딕" pitchFamily="50" charset="-127"/>
-                <a:cs typeface="Arial" panose="020B0604020202020204" pitchFamily="34" charset="0"/>
-              </a:rPr>
-              <a:t>의도(CQ, 복수 가능)</a:t>
-            </a:r>
-            <a:r>
-              <a:rPr lang="ko-KR" altLang="en-US" sz="2400" b="0" dirty="0">
-                <a:solidFill>
-                  <a:schemeClr val="tx1">
-                    <a:lumMod val="85000"/>
-                    <a:lumOff val="15000"/>
-                  </a:schemeClr>
-                </a:solidFill>
-                <a:latin typeface="나눔고딕" pitchFamily="50" charset="-127"/>
-                <a:ea typeface="나눔고딕" pitchFamily="50" charset="-127"/>
-                <a:cs typeface="Arial" panose="020B0604020202020204" pitchFamily="34" charset="0"/>
-              </a:rPr>
-              <a:t> 와 댐·시점을 추출 → ② 코드가 입력을 확인하고 의도별 </a:t>
-            </a:r>
-            <a:r>
-              <a:rPr lang="ko-KR" altLang="en-US" sz="2400" b="1" dirty="0">
-                <a:solidFill>
-                  <a:schemeClr val="tx1">
-                    <a:lumMod val="85000"/>
-                    <a:lumOff val="15000"/>
-                  </a:schemeClr>
-                </a:solidFill>
-                <a:latin typeface="나눔고딕" pitchFamily="50" charset="-127"/>
-                <a:ea typeface="나눔고딕" pitchFamily="50" charset="-127"/>
-                <a:cs typeface="Arial" panose="020B0604020202020204" pitchFamily="34" charset="0"/>
-              </a:rPr>
-              <a:t>Cypher</a:t>
-            </a:r>
-            <a:r>
-              <a:rPr lang="ko-KR" altLang="en-US" sz="2400" b="0" dirty="0">
-                <a:solidFill>
-                  <a:schemeClr val="tx1">
-                    <a:lumMod val="85000"/>
-                    <a:lumOff val="15000"/>
-                  </a:schemeClr>
-                </a:solidFill>
-                <a:latin typeface="나눔고딕" pitchFamily="50" charset="-127"/>
-                <a:ea typeface="나눔고딕" pitchFamily="50" charset="-127"/>
-                <a:cs typeface="Arial" panose="020B0604020202020204" pitchFamily="34" charset="0"/>
-              </a:rPr>
-              <a:t>로 KG를 조회 → ③ 키로 측정자료·문서 저장소에서 값과 원문을 읽음 → ④ 출처 번호를 붙인 </a:t>
-            </a:r>
-            <a:r>
-              <a:rPr lang="ko-KR" altLang="en-US" sz="2400" b="1" dirty="0">
-                <a:solidFill>
-                  <a:schemeClr val="tx1">
-                    <a:lumMod val="85000"/>
-                    <a:lumOff val="15000"/>
-                  </a:schemeClr>
-                </a:solidFill>
-                <a:latin typeface="나눔고딕" pitchFamily="50" charset="-127"/>
-                <a:ea typeface="나눔고딕" pitchFamily="50" charset="-127"/>
-                <a:cs typeface="Arial" panose="020B0604020202020204" pitchFamily="34" charset="0"/>
-              </a:rPr>
-              <a:t>근거 묶음</a:t>
-            </a:r>
-            <a:r>
-              <a:rPr lang="ko-KR" altLang="en-US" sz="2400" b="0" dirty="0">
-                <a:solidFill>
-                  <a:schemeClr val="tx1">
-                    <a:lumMod val="85000"/>
-                    <a:lumOff val="15000"/>
-                  </a:schemeClr>
-                </a:solidFill>
-                <a:latin typeface="나눔고딕" pitchFamily="50" charset="-127"/>
-                <a:ea typeface="나눔고딕" pitchFamily="50" charset="-127"/>
-                <a:cs typeface="Arial" panose="020B0604020202020204" pitchFamily="34" charset="0"/>
-              </a:rPr>
-              <a:t> 구성 → ⑤ LLM이 근거 묶음으로 </a:t>
-            </a:r>
-            <a:r>
-              <a:rPr lang="ko-KR" altLang="en-US" sz="2400" b="1" dirty="0">
-                <a:solidFill>
-                  <a:schemeClr val="tx1">
-                    <a:lumMod val="85000"/>
-                    <a:lumOff val="15000"/>
-                  </a:schemeClr>
-                </a:solidFill>
-                <a:latin typeface="나눔고딕" pitchFamily="50" charset="-127"/>
-                <a:ea typeface="나눔고딕" pitchFamily="50" charset="-127"/>
-                <a:cs typeface="Arial" panose="020B0604020202020204" pitchFamily="34" charset="0"/>
-              </a:rPr>
-              <a:t>근거와 판단을 나누어</a:t>
-            </a:r>
-            <a:r>
-              <a:rPr lang="ko-KR" altLang="en-US" sz="2400" b="0" dirty="0">
-                <a:solidFill>
-                  <a:schemeClr val="tx1">
-                    <a:lumMod val="85000"/>
-                    <a:lumOff val="15000"/>
-                  </a:schemeClr>
-                </a:solidFill>
-                <a:latin typeface="나눔고딕" pitchFamily="50" charset="-127"/>
-                <a:ea typeface="나눔고딕" pitchFamily="50" charset="-127"/>
-                <a:cs typeface="Arial" panose="020B0604020202020204" pitchFamily="34" charset="0"/>
-              </a:rPr>
-              <a:t> 답변</a:t>
+              <a:t>: K-water, 4개 댐의 댐 코드·이름·유형</a:t>
             </a:r>
           </a:p>
         </p:txBody>
       </p:sp>
       <p:sp>
         <p:nvSpPr>
-          <p:cNvPr id="1016" name="직사각형 1"/>
+          <p:cNvPr id="1013" name="직사각형 1"/>
           <p:cNvSpPr/>
           <p:nvPr/>
         </p:nvSpPr>
         <p:spPr>
           <a:xfrm>
-            <a:off x="15691431" y="6350000"/>
+            <a:off x="674157" y="23135933"/>
             <a:ext cx="13943667" cy="1023024"/>
           </a:xfrm>
           <a:prstGeom prst="rect">
@@ -4216,20 +3564,20 @@
                 <a:ea typeface="나눔고딕 ExtraBold" panose="020D0904000000000000" pitchFamily="50" charset="-127"/>
                 <a:cs typeface="Arial Unicode MS" panose="020B0604020202020204" pitchFamily="50" charset="-127"/>
               </a:rPr>
-              <a:t>KG 구축 결과</a:t>
+              <a:t>연구 질문과 Ontology</a:t>
             </a:r>
           </a:p>
         </p:txBody>
       </p:sp>
       <p:sp>
         <p:nvSpPr>
-          <p:cNvPr id="1017" name="직사각형 415"/>
+          <p:cNvPr id="1014" name="직사각형 415"/>
           <p:cNvSpPr/>
           <p:nvPr/>
         </p:nvSpPr>
         <p:spPr>
           <a:xfrm>
-            <a:off x="15803042" y="7493024"/>
+            <a:off x="830804" y="24278957"/>
             <a:ext cx="13649422" cy="645985"/>
           </a:xfrm>
           <a:prstGeom prst="rect">
@@ -4288,33 +3636,32 @@
                 <a:ea typeface="나눔고딕" pitchFamily="50" charset="-127"/>
                 <a:cs typeface="Arial" panose="020B0604020202020204" pitchFamily="34" charset="0"/>
               </a:rPr>
-              <a:t>Table 2. 구축한 지식그래프의 규모</a:t>
+              <a:t>Table 2. 전체 질문과 세부 질문(CQ)</a:t>
             </a:r>
           </a:p>
         </p:txBody>
       </p:sp>
       <p:graphicFrame>
         <p:nvGraphicFramePr>
-          <p:cNvPr id="1018" name="표"/>
+          <p:cNvPr id="1015" name="표"/>
           <p:cNvGraphicFramePr>
             <a:graphicFrameLocks noGrp="1"/>
           </p:cNvGraphicFramePr>
           <p:nvPr/>
         </p:nvGraphicFramePr>
         <p:xfrm>
-          <a:off x="15670184" y="8229009"/>
-          <a:ext cx="13500000" cy="2346250"/>
+          <a:off x="697946" y="25014942"/>
+          <a:ext cx="13500000" cy="3914625"/>
         </p:xfrm>
         <a:graphic>
           <a:graphicData uri="http://schemas.openxmlformats.org/drawingml/2006/table">
             <a:tbl>
               <a:tblPr firstRow="1" bandRow="1"/>
               <a:tblGrid>
-                <a:gridCol w="1500000"/>
-                <a:gridCol w="10400000"/>
-                <a:gridCol w="1600000"/>
+                <a:gridCol w="2000000"/>
+                <a:gridCol w="11500000"/>
               </a:tblGrid>
-              <a:tr h="499250">
+              <a:tr h="451625">
                 <a:tc>
                   <a:txBody>
                     <a:bodyPr/>
@@ -4326,7 +3673,7 @@
                         </a:lnSpc>
                       </a:pPr>
                       <a:r>
-                        <a:rPr lang="ko-KR" altLang="en-US" sz="2200" b="1" dirty="0">
+                        <a:rPr lang="ko-KR" altLang="en-US" sz="1900" b="1" dirty="0">
                           <a:solidFill>
                             <a:schemeClr val="bg1"/>
                           </a:solidFill>
@@ -4334,7 +3681,7 @@
                           <a:ea typeface="나눔고딕" pitchFamily="50" charset="-127"/>
                           <a:cs typeface="Arial" panose="020B0604020202020204" pitchFamily="34" charset="0"/>
                         </a:rPr>
-                        <a:t>구분</a:t>
+                        <a:t>번호</a:t>
                       </a:r>
                     </a:p>
                   </a:txBody>
@@ -4375,7 +3722,7 @@
                         </a:lnSpc>
                       </a:pPr>
                       <a:r>
-                        <a:rPr lang="ko-KR" altLang="en-US" sz="2200" b="1" dirty="0">
+                        <a:rPr lang="ko-KR" altLang="en-US" sz="1900" b="1" dirty="0">
                           <a:solidFill>
                             <a:schemeClr val="bg1"/>
                           </a:solidFill>
@@ -4383,56 +3730,7 @@
                           <a:ea typeface="나눔고딕" pitchFamily="50" charset="-127"/>
                           <a:cs typeface="Arial" panose="020B0604020202020204" pitchFamily="34" charset="0"/>
                         </a:rPr>
-                        <a:t>종류</a:t>
-                      </a:r>
-                    </a:p>
-                  </a:txBody>
-                  <a:tcPr marL="91440" marR="91440" marT="60000" marB="60000" anchor="ctr">
-                    <a:lnL w="9525">
-                      <a:solidFill>
-                        <a:srgbClr val="9AA7B5"/>
-                      </a:solidFill>
-                    </a:lnL>
-                    <a:lnR w="9525">
-                      <a:solidFill>
-                        <a:srgbClr val="9AA7B5"/>
-                      </a:solidFill>
-                    </a:lnR>
-                    <a:lnT w="9525">
-                      <a:solidFill>
-                        <a:srgbClr val="9AA7B5"/>
-                      </a:solidFill>
-                    </a:lnT>
-                    <a:lnB w="9525">
-                      <a:solidFill>
-                        <a:srgbClr val="9AA7B5"/>
-                      </a:solidFill>
-                    </a:lnB>
-                    <a:solidFill>
-                      <a:srgbClr val="1F4E79"/>
-                    </a:solidFill>
-                  </a:tcPr>
-                </a:tc>
-                <a:tc>
-                  <a:txBody>
-                    <a:bodyPr/>
-                    <a:lstStyle/>
-                    <a:p>
-                      <a:pPr algn="ctr">
-                        <a:lnSpc>
-                          <a:spcPct val="105000"/>
-                        </a:lnSpc>
-                      </a:pPr>
-                      <a:r>
-                        <a:rPr lang="ko-KR" altLang="en-US" sz="2200" b="1" dirty="0">
-                          <a:solidFill>
-                            <a:schemeClr val="bg1"/>
-                          </a:solidFill>
-                          <a:latin typeface="나눔고딕" pitchFamily="50" charset="-127"/>
-                          <a:ea typeface="나눔고딕" pitchFamily="50" charset="-127"/>
-                          <a:cs typeface="Arial" panose="020B0604020202020204" pitchFamily="34" charset="0"/>
-                        </a:rPr>
-                        <a:t>개수</a:t>
+                        <a:t>질문 (Competency Question)</a:t>
                       </a:r>
                     </a:p>
                   </a:txBody>
@@ -4463,7 +3761,7 @@
                   </a:tcPr>
                 </a:tc>
               </a:tr>
-              <a:tr h="848500">
+              <a:tr h="753250">
                 <a:tc>
                   <a:txBody>
                     <a:bodyPr/>
@@ -4475,7 +3773,7 @@
                         </a:lnSpc>
                       </a:pPr>
                       <a:r>
-                        <a:rPr lang="ko-KR" altLang="en-US" sz="2200" b="1" dirty="0">
+                        <a:rPr lang="ko-KR" altLang="en-US" sz="1900" b="1" dirty="0">
                           <a:solidFill>
                             <a:schemeClr val="tx1">
                               <a:lumMod val="85000"/>
@@ -4486,7 +3784,7 @@
                           <a:ea typeface="나눔고딕" pitchFamily="50" charset="-127"/>
                           <a:cs typeface="Arial" panose="020B0604020202020204" pitchFamily="34" charset="0"/>
                         </a:rPr>
-                        <a:t>개체</a:t>
+                        <a:t>전체 질문</a:t>
                       </a:r>
                     </a:p>
                   </a:txBody>
@@ -4527,7 +3825,7 @@
                         </a:lnSpc>
                       </a:pPr>
                       <a:r>
-                        <a:rPr lang="ko-KR" altLang="en-US" sz="2200" b="0" dirty="0">
+                        <a:rPr lang="ko-KR" altLang="en-US" sz="1900" b="0" dirty="0">
                           <a:solidFill>
                             <a:schemeClr val="tx1">
                               <a:lumMod val="85000"/>
@@ -4538,59 +3836,7 @@
                           <a:ea typeface="나눔고딕" pitchFamily="50" charset="-127"/>
                           <a:cs typeface="Arial" panose="020B0604020202020204" pitchFamily="34" charset="0"/>
                         </a:rPr>
-                        <a:t>Dam 4, HMS 24, Approval 80, Operation 68, Criterion 3, EvidenceSource 85</a:t>
-                      </a:r>
-                    </a:p>
-                  </a:txBody>
-                  <a:tcPr marL="91440" marR="91440" marT="60000" marB="60000" anchor="ctr">
-                    <a:lnL w="9525">
-                      <a:solidFill>
-                        <a:srgbClr val="9AA7B5"/>
-                      </a:solidFill>
-                    </a:lnL>
-                    <a:lnR w="9525">
-                      <a:solidFill>
-                        <a:srgbClr val="9AA7B5"/>
-                      </a:solidFill>
-                    </a:lnR>
-                    <a:lnT w="9525">
-                      <a:solidFill>
-                        <a:srgbClr val="9AA7B5"/>
-                      </a:solidFill>
-                    </a:lnT>
-                    <a:lnB w="9525">
-                      <a:solidFill>
-                        <a:srgbClr val="9AA7B5"/>
-                      </a:solidFill>
-                    </a:lnB>
-                    <a:solidFill>
-                      <a:srgbClr val="FFFFFF"/>
-                    </a:solidFill>
-                  </a:tcPr>
-                </a:tc>
-                <a:tc>
-                  <a:txBody>
-                    <a:bodyPr/>
-                    <a:lstStyle/>
-                    <a:p>
-                      <a:pPr algn="ctr">
-                        <a:lnSpc>
-                          <a:spcPct val="105000"/>
-                        </a:lnSpc>
-                      </a:pPr>
-                      <a:r>
-                        <a:rPr lang="ko-KR" altLang="en-US" sz="2200" b="0" dirty="0">
-                          <a:solidFill>
-                            <a:schemeClr val="tx1">
-                              <a:lumMod val="85000"/>
-                              <a:lumOff val="15000"/>
-                            </a:schemeClr>
-                          </a:solidFill>
-                          <a:latin typeface="나눔고딕" pitchFamily="50" charset="-127"/>
-                          <a:ea typeface="나눔고딕" pitchFamily="50" charset="-127"/>
-                          <a:cs typeface="Arial" panose="020B0604020202020204" pitchFamily="34" charset="0"/>
-                        </a:rPr>
-                        <a:t>264</a:t>
+                        <a:t>특정 댐의 현재 수문·기상 상태와 운영기준을 확인하고, 선택된 과거 사례의 상태·운영행위·승인·근거를 함께 추적하여 운영 판단을 지원할 수 있는가?</a:t>
                       </a:r>
                     </a:p>
                   </a:txBody>
@@ -4621,7 +3867,7 @@
                   </a:tcPr>
                 </a:tc>
               </a:tr>
-              <a:tr h="499250">
+              <a:tr h="451625">
                 <a:tc>
                   <a:txBody>
                     <a:bodyPr/>
@@ -4633,7 +3879,7 @@
                         </a:lnSpc>
                       </a:pPr>
                       <a:r>
-                        <a:rPr lang="ko-KR" altLang="en-US" sz="2200" b="1" dirty="0">
+                        <a:rPr lang="ko-KR" altLang="en-US" sz="1900" b="1" dirty="0">
                           <a:solidFill>
                             <a:schemeClr val="tx1">
                               <a:lumMod val="85000"/>
@@ -4644,7 +3890,7 @@
                           <a:ea typeface="나눔고딕" pitchFamily="50" charset="-127"/>
                           <a:cs typeface="Arial" panose="020B0604020202020204" pitchFamily="34" charset="0"/>
                         </a:rPr>
-                        <a:t>관계</a:t>
+                        <a:t>CQ1</a:t>
                       </a:r>
                     </a:p>
                   </a:txBody>
@@ -4685,7 +3931,7 @@
                         </a:lnSpc>
                       </a:pPr>
                       <a:r>
-                        <a:rPr lang="ko-KR" altLang="en-US" sz="2200" b="0" dirty="0">
+                        <a:rPr lang="ko-KR" altLang="en-US" sz="1900" b="0" dirty="0">
                           <a:solidFill>
                             <a:schemeClr val="tx1">
                               <a:lumMod val="85000"/>
@@ -4696,59 +3942,7 @@
                           <a:ea typeface="나눔고딕" pitchFamily="50" charset="-127"/>
                           <a:cs typeface="Arial" panose="020B0604020202020204" pitchFamily="34" charset="0"/>
                         </a:rPr>
-                        <a:t>승인–댐, 허가, 수행된 댐, 상태 보유, 적용되는 댐, 근거 등 9종류</a:t>
-                      </a:r>
-                    </a:p>
-                  </a:txBody>
-                  <a:tcPr marL="91440" marR="91440" marT="60000" marB="60000" anchor="ctr">
-                    <a:lnL w="9525">
-                      <a:solidFill>
-                        <a:srgbClr val="9AA7B5"/>
-                      </a:solidFill>
-                    </a:lnL>
-                    <a:lnR w="9525">
-                      <a:solidFill>
-                        <a:srgbClr val="9AA7B5"/>
-                      </a:solidFill>
-                    </a:lnR>
-                    <a:lnT w="9525">
-                      <a:solidFill>
-                        <a:srgbClr val="9AA7B5"/>
-                      </a:solidFill>
-                    </a:lnT>
-                    <a:lnB w="9525">
-                      <a:solidFill>
-                        <a:srgbClr val="9AA7B5"/>
-                      </a:solidFill>
-                    </a:lnB>
-                    <a:solidFill>
-                      <a:srgbClr val="EEF3F8"/>
-                    </a:solidFill>
-                  </a:tcPr>
-                </a:tc>
-                <a:tc>
-                  <a:txBody>
-                    <a:bodyPr/>
-                    <a:lstStyle/>
-                    <a:p>
-                      <a:pPr algn="ctr">
-                        <a:lnSpc>
-                          <a:spcPct val="105000"/>
-                        </a:lnSpc>
-                      </a:pPr>
-                      <a:r>
-                        <a:rPr lang="ko-KR" altLang="en-US" sz="2200" b="0" dirty="0">
-                          <a:solidFill>
-                            <a:schemeClr val="tx1">
-                              <a:lumMod val="85000"/>
-                              <a:lumOff val="15000"/>
-                            </a:schemeClr>
-                          </a:solidFill>
-                          <a:latin typeface="나눔고딕" pitchFamily="50" charset="-127"/>
-                          <a:ea typeface="나눔고딕" pitchFamily="50" charset="-127"/>
-                          <a:cs typeface="Arial" panose="020B0604020202020204" pitchFamily="34" charset="0"/>
-                        </a:rPr>
-                        <a:t>418</a:t>
+                        <a:t>대상 댐의 현재 수문·기상 상태는 무엇인가?</a:t>
                       </a:r>
                     </a:p>
                   </a:txBody>
@@ -4779,7 +3973,7 @@
                   </a:tcPr>
                 </a:tc>
               </a:tr>
-              <a:tr h="499250">
+              <a:tr h="451625">
                 <a:tc>
                   <a:txBody>
                     <a:bodyPr/>
@@ -4791,7 +3985,7 @@
                         </a:lnSpc>
                       </a:pPr>
                       <a:r>
-                        <a:rPr lang="ko-KR" altLang="en-US" sz="2200" b="1" dirty="0">
+                        <a:rPr lang="ko-KR" altLang="en-US" sz="1900" b="1" dirty="0">
                           <a:solidFill>
                             <a:schemeClr val="tx1">
                               <a:lumMod val="85000"/>
@@ -4802,7 +3996,7 @@
                           <a:ea typeface="나눔고딕" pitchFamily="50" charset="-127"/>
                           <a:cs typeface="Arial" panose="020B0604020202020204" pitchFamily="34" charset="0"/>
                         </a:rPr>
-                        <a:t>속성</a:t>
+                        <a:t>CQ2</a:t>
                       </a:r>
                     </a:p>
                   </a:txBody>
@@ -4843,7 +4037,7 @@
                         </a:lnSpc>
                       </a:pPr>
                       <a:r>
-                        <a:rPr lang="ko-KR" altLang="en-US" sz="2200" b="0" dirty="0">
+                        <a:rPr lang="ko-KR" altLang="en-US" sz="1900" b="0" dirty="0">
                           <a:solidFill>
                             <a:schemeClr val="tx1">
                               <a:lumMod val="85000"/>
@@ -4854,7 +4048,167 @@
                           <a:ea typeface="나눔고딕" pitchFamily="50" charset="-127"/>
                           <a:cs typeface="Arial" panose="020B0604020202020204" pitchFamily="34" charset="0"/>
                         </a:rPr>
-                        <a:t>승인일, 승인 내용, 운영행위 종류·시각, 제한수위 등</a:t>
+                        <a:t>선택된 과거 시점 또는 사례의 수문·기상 상태는 어떠했는가?</a:t>
+                      </a:r>
+                    </a:p>
+                  </a:txBody>
+                  <a:tcPr marL="91440" marR="91440" marT="60000" marB="60000" anchor="ctr">
+                    <a:lnL w="9525">
+                      <a:solidFill>
+                        <a:srgbClr val="9AA7B5"/>
+                      </a:solidFill>
+                    </a:lnL>
+                    <a:lnR w="9525">
+                      <a:solidFill>
+                        <a:srgbClr val="9AA7B5"/>
+                      </a:solidFill>
+                    </a:lnR>
+                    <a:lnT w="9525">
+                      <a:solidFill>
+                        <a:srgbClr val="9AA7B5"/>
+                      </a:solidFill>
+                    </a:lnT>
+                    <a:lnB w="9525">
+                      <a:solidFill>
+                        <a:srgbClr val="9AA7B5"/>
+                      </a:solidFill>
+                    </a:lnB>
+                    <a:solidFill>
+                      <a:srgbClr val="FFFFFF"/>
+                    </a:solidFill>
+                  </a:tcPr>
+                </a:tc>
+              </a:tr>
+              <a:tr h="451625">
+                <a:tc>
+                  <a:txBody>
+                    <a:bodyPr/>
+                    <a:lstStyle/>
+                    <a:p>
+                      <a:pPr algn="l">
+                        <a:lnSpc>
+                          <a:spcPct val="105000"/>
+                        </a:lnSpc>
+                      </a:pPr>
+                      <a:r>
+                        <a:rPr lang="ko-KR" altLang="en-US" sz="1900" b="1" dirty="0">
+                          <a:solidFill>
+                            <a:schemeClr val="tx1">
+                              <a:lumMod val="85000"/>
+                              <a:lumOff val="15000"/>
+                            </a:schemeClr>
+                          </a:solidFill>
+                          <a:latin typeface="나눔고딕" pitchFamily="50" charset="-127"/>
+                          <a:ea typeface="나눔고딕" pitchFamily="50" charset="-127"/>
+                          <a:cs typeface="Arial" panose="020B0604020202020204" pitchFamily="34" charset="0"/>
+                        </a:rPr>
+                        <a:t>CQ3</a:t>
+                      </a:r>
+                    </a:p>
+                  </a:txBody>
+                  <a:tcPr marL="91440" marR="91440" marT="60000" marB="60000" anchor="ctr">
+                    <a:lnL w="9525">
+                      <a:solidFill>
+                        <a:srgbClr val="9AA7B5"/>
+                      </a:solidFill>
+                    </a:lnL>
+                    <a:lnR w="9525">
+                      <a:solidFill>
+                        <a:srgbClr val="9AA7B5"/>
+                      </a:solidFill>
+                    </a:lnR>
+                    <a:lnT w="9525">
+                      <a:solidFill>
+                        <a:srgbClr val="9AA7B5"/>
+                      </a:solidFill>
+                    </a:lnT>
+                    <a:lnB w="9525">
+                      <a:solidFill>
+                        <a:srgbClr val="9AA7B5"/>
+                      </a:solidFill>
+                    </a:lnB>
+                    <a:solidFill>
+                      <a:srgbClr val="EEF3F8"/>
+                    </a:solidFill>
+                  </a:tcPr>
+                </a:tc>
+                <a:tc>
+                  <a:txBody>
+                    <a:bodyPr/>
+                    <a:lstStyle/>
+                    <a:p>
+                      <a:pPr algn="l">
+                        <a:lnSpc>
+                          <a:spcPct val="105000"/>
+                        </a:lnSpc>
+                      </a:pPr>
+                      <a:r>
+                        <a:rPr lang="ko-KR" altLang="en-US" sz="1900" b="0" dirty="0">
+                          <a:solidFill>
+                            <a:schemeClr val="tx1">
+                              <a:lumMod val="85000"/>
+                              <a:lumOff val="15000"/>
+                            </a:schemeClr>
+                          </a:solidFill>
+                          <a:latin typeface="나눔고딕" pitchFamily="50" charset="-127"/>
+                          <a:ea typeface="나눔고딕" pitchFamily="50" charset="-127"/>
+                          <a:cs typeface="Arial" panose="020B0604020202020204" pitchFamily="34" charset="0"/>
+                        </a:rPr>
+                        <a:t>해당 과거 시점 또는 사례에서 수행된 운영행위는 무엇이었는가?</a:t>
+                      </a:r>
+                    </a:p>
+                  </a:txBody>
+                  <a:tcPr marL="91440" marR="91440" marT="60000" marB="60000" anchor="ctr">
+                    <a:lnL w="9525">
+                      <a:solidFill>
+                        <a:srgbClr val="9AA7B5"/>
+                      </a:solidFill>
+                    </a:lnL>
+                    <a:lnR w="9525">
+                      <a:solidFill>
+                        <a:srgbClr val="9AA7B5"/>
+                      </a:solidFill>
+                    </a:lnR>
+                    <a:lnT w="9525">
+                      <a:solidFill>
+                        <a:srgbClr val="9AA7B5"/>
+                      </a:solidFill>
+                    </a:lnT>
+                    <a:lnB w="9525">
+                      <a:solidFill>
+                        <a:srgbClr val="9AA7B5"/>
+                      </a:solidFill>
+                    </a:lnB>
+                    <a:solidFill>
+                      <a:srgbClr val="EEF3F8"/>
+                    </a:solidFill>
+                  </a:tcPr>
+                </a:tc>
+              </a:tr>
+              <a:tr h="451625">
+                <a:tc>
+                  <a:txBody>
+                    <a:bodyPr/>
+                    <a:lstStyle/>
+                    <a:p>
+                      <a:pPr algn="l">
+                        <a:lnSpc>
+                          <a:spcPct val="105000"/>
+                        </a:lnSpc>
+                      </a:pPr>
+                      <a:r>
+                        <a:rPr lang="ko-KR" altLang="en-US" sz="1900" b="1" dirty="0">
+                          <a:solidFill>
+                            <a:schemeClr val="tx1">
+                              <a:lumMod val="85000"/>
+                              <a:lumOff val="15000"/>
+                            </a:schemeClr>
+                          </a:solidFill>
+                          <a:latin typeface="나눔고딕" pitchFamily="50" charset="-127"/>
+                          <a:ea typeface="나눔고딕" pitchFamily="50" charset="-127"/>
+                          <a:cs typeface="Arial" panose="020B0604020202020204" pitchFamily="34" charset="0"/>
+                        </a:rPr>
+                        <a:t>CQ4</a:t>
                       </a:r>
                     </a:p>
                   </a:txBody>
@@ -4889,13 +4243,13 @@
                     <a:bodyPr/>
                     <a:lstStyle/>
                     <a:p>
-                      <a:pPr algn="ctr">
+                      <a:pPr algn="l">
                         <a:lnSpc>
                           <a:spcPct val="105000"/>
                         </a:lnSpc>
                       </a:pPr>
                       <a:r>
-                        <a:rPr lang="ko-KR" altLang="en-US" sz="2200" b="0" dirty="0">
+                        <a:rPr lang="ko-KR" altLang="en-US" sz="1900" b="0" dirty="0">
                           <a:solidFill>
                             <a:schemeClr val="tx1">
                               <a:lumMod val="85000"/>
@@ -4906,7 +4260,219 @@
                           <a:ea typeface="나눔고딕" pitchFamily="50" charset="-127"/>
                           <a:cs typeface="Arial" panose="020B0604020202020204" pitchFamily="34" charset="0"/>
                         </a:rPr>
-                        <a:t>616행</a:t>
+                        <a:t>해당 과거 시점 또는 사례의 방류 승인과 승인 내용은 무엇인가?</a:t>
+                      </a:r>
+                    </a:p>
+                  </a:txBody>
+                  <a:tcPr marL="91440" marR="91440" marT="60000" marB="60000" anchor="ctr">
+                    <a:lnL w="9525">
+                      <a:solidFill>
+                        <a:srgbClr val="9AA7B5"/>
+                      </a:solidFill>
+                    </a:lnL>
+                    <a:lnR w="9525">
+                      <a:solidFill>
+                        <a:srgbClr val="9AA7B5"/>
+                      </a:solidFill>
+                    </a:lnR>
+                    <a:lnT w="9525">
+                      <a:solidFill>
+                        <a:srgbClr val="9AA7B5"/>
+                      </a:solidFill>
+                    </a:lnT>
+                    <a:lnB w="9525">
+                      <a:solidFill>
+                        <a:srgbClr val="9AA7B5"/>
+                      </a:solidFill>
+                    </a:lnB>
+                    <a:solidFill>
+                      <a:srgbClr val="FFFFFF"/>
+                    </a:solidFill>
+                  </a:tcPr>
+                </a:tc>
+              </a:tr>
+              <a:tr h="451625">
+                <a:tc>
+                  <a:txBody>
+                    <a:bodyPr/>
+                    <a:lstStyle/>
+                    <a:p>
+                      <a:pPr algn="l">
+                        <a:lnSpc>
+                          <a:spcPct val="105000"/>
+                        </a:lnSpc>
+                      </a:pPr>
+                      <a:r>
+                        <a:rPr lang="ko-KR" altLang="en-US" sz="1900" b="1" dirty="0">
+                          <a:solidFill>
+                            <a:schemeClr val="tx1">
+                              <a:lumMod val="85000"/>
+                              <a:lumOff val="15000"/>
+                            </a:schemeClr>
+                          </a:solidFill>
+                          <a:latin typeface="나눔고딕" pitchFamily="50" charset="-127"/>
+                          <a:ea typeface="나눔고딕" pitchFamily="50" charset="-127"/>
+                          <a:cs typeface="Arial" panose="020B0604020202020204" pitchFamily="34" charset="0"/>
+                        </a:rPr>
+                        <a:t>CQ5</a:t>
+                      </a:r>
+                    </a:p>
+                  </a:txBody>
+                  <a:tcPr marL="91440" marR="91440" marT="60000" marB="60000" anchor="ctr">
+                    <a:lnL w="9525">
+                      <a:solidFill>
+                        <a:srgbClr val="9AA7B5"/>
+                      </a:solidFill>
+                    </a:lnL>
+                    <a:lnR w="9525">
+                      <a:solidFill>
+                        <a:srgbClr val="9AA7B5"/>
+                      </a:solidFill>
+                    </a:lnR>
+                    <a:lnT w="9525">
+                      <a:solidFill>
+                        <a:srgbClr val="9AA7B5"/>
+                      </a:solidFill>
+                    </a:lnT>
+                    <a:lnB w="9525">
+                      <a:solidFill>
+                        <a:srgbClr val="9AA7B5"/>
+                      </a:solidFill>
+                    </a:lnB>
+                    <a:solidFill>
+                      <a:srgbClr val="EEF3F8"/>
+                    </a:solidFill>
+                  </a:tcPr>
+                </a:tc>
+                <a:tc>
+                  <a:txBody>
+                    <a:bodyPr/>
+                    <a:lstStyle/>
+                    <a:p>
+                      <a:pPr algn="l">
+                        <a:lnSpc>
+                          <a:spcPct val="105000"/>
+                        </a:lnSpc>
+                      </a:pPr>
+                      <a:r>
+                        <a:rPr lang="ko-KR" altLang="en-US" sz="1900" b="0" dirty="0">
+                          <a:solidFill>
+                            <a:schemeClr val="tx1">
+                              <a:lumMod val="85000"/>
+                              <a:lumOff val="15000"/>
+                            </a:schemeClr>
+                          </a:solidFill>
+                          <a:latin typeface="나눔고딕" pitchFamily="50" charset="-127"/>
+                          <a:ea typeface="나눔고딕" pitchFamily="50" charset="-127"/>
+                          <a:cs typeface="Arial" panose="020B0604020202020204" pitchFamily="34" charset="0"/>
+                        </a:rPr>
+                        <a:t>현재 대상 댐에 적용되는 운영기준과 기준값은 무엇인가?</a:t>
+                      </a:r>
+                    </a:p>
+                  </a:txBody>
+                  <a:tcPr marL="91440" marR="91440" marT="60000" marB="60000" anchor="ctr">
+                    <a:lnL w="9525">
+                      <a:solidFill>
+                        <a:srgbClr val="9AA7B5"/>
+                      </a:solidFill>
+                    </a:lnL>
+                    <a:lnR w="9525">
+                      <a:solidFill>
+                        <a:srgbClr val="9AA7B5"/>
+                      </a:solidFill>
+                    </a:lnR>
+                    <a:lnT w="9525">
+                      <a:solidFill>
+                        <a:srgbClr val="9AA7B5"/>
+                      </a:solidFill>
+                    </a:lnT>
+                    <a:lnB w="9525">
+                      <a:solidFill>
+                        <a:srgbClr val="9AA7B5"/>
+                      </a:solidFill>
+                    </a:lnB>
+                    <a:solidFill>
+                      <a:srgbClr val="EEF3F8"/>
+                    </a:solidFill>
+                  </a:tcPr>
+                </a:tc>
+              </a:tr>
+              <a:tr h="451625">
+                <a:tc>
+                  <a:txBody>
+                    <a:bodyPr/>
+                    <a:lstStyle/>
+                    <a:p>
+                      <a:pPr algn="l">
+                        <a:lnSpc>
+                          <a:spcPct val="105000"/>
+                        </a:lnSpc>
+                      </a:pPr>
+                      <a:r>
+                        <a:rPr lang="ko-KR" altLang="en-US" sz="1900" b="1" dirty="0">
+                          <a:solidFill>
+                            <a:schemeClr val="tx1">
+                              <a:lumMod val="85000"/>
+                              <a:lumOff val="15000"/>
+                            </a:schemeClr>
+                          </a:solidFill>
+                          <a:latin typeface="나눔고딕" pitchFamily="50" charset="-127"/>
+                          <a:ea typeface="나눔고딕" pitchFamily="50" charset="-127"/>
+                          <a:cs typeface="Arial" panose="020B0604020202020204" pitchFamily="34" charset="0"/>
+                        </a:rPr>
+                        <a:t>CQ6</a:t>
+                      </a:r>
+                    </a:p>
+                  </a:txBody>
+                  <a:tcPr marL="91440" marR="91440" marT="60000" marB="60000" anchor="ctr">
+                    <a:lnL w="9525">
+                      <a:solidFill>
+                        <a:srgbClr val="9AA7B5"/>
+                      </a:solidFill>
+                    </a:lnL>
+                    <a:lnR w="9525">
+                      <a:solidFill>
+                        <a:srgbClr val="9AA7B5"/>
+                      </a:solidFill>
+                    </a:lnR>
+                    <a:lnT w="9525">
+                      <a:solidFill>
+                        <a:srgbClr val="9AA7B5"/>
+                      </a:solidFill>
+                    </a:lnT>
+                    <a:lnB w="9525">
+                      <a:solidFill>
+                        <a:srgbClr val="9AA7B5"/>
+                      </a:solidFill>
+                    </a:lnB>
+                    <a:solidFill>
+                      <a:srgbClr val="FFFFFF"/>
+                    </a:solidFill>
+                  </a:tcPr>
+                </a:tc>
+                <a:tc>
+                  <a:txBody>
+                    <a:bodyPr/>
+                    <a:lstStyle/>
+                    <a:p>
+                      <a:pPr algn="l">
+                        <a:lnSpc>
+                          <a:spcPct val="105000"/>
+                        </a:lnSpc>
+                      </a:pPr>
+                      <a:r>
+                        <a:rPr lang="ko-KR" altLang="en-US" sz="1900" b="0" dirty="0">
+                          <a:solidFill>
+                            <a:schemeClr val="tx1">
+                              <a:lumMod val="85000"/>
+                              <a:lumOff val="15000"/>
+                            </a:schemeClr>
+                          </a:solidFill>
+                          <a:latin typeface="나눔고딕" pitchFamily="50" charset="-127"/>
+                          <a:ea typeface="나눔고딕" pitchFamily="50" charset="-127"/>
+                          <a:cs typeface="Arial" panose="020B0604020202020204" pitchFamily="34" charset="0"/>
+                        </a:rPr>
+                        <a:t>위 정보를 확인할 수 있는 공식 자료 또는 근거문서는 무엇인가?</a:t>
                       </a:r>
                     </a:p>
                   </a:txBody>
@@ -4941,95 +4507,15 @@
           </a:graphicData>
         </a:graphic>
       </p:graphicFrame>
-      <p:pic>
-        <p:nvPicPr>
-          <p:cNvPr id="1019" name="그림 2. 지식그래프의 일부: 충주댐 승인 1368번 (Class 6, 관계 9)" descr="그림 2. 지식그래프의 일부: 충주댐 승인 1368번 (Class 6, 관계 9)"/>
-          <p:cNvPicPr>
-            <a:picLocks noChangeAspect="1"/>
-          </p:cNvPicPr>
-          <p:nvPr/>
-        </p:nvPicPr>
-        <p:blipFill>
-          <a:blip r:embed="rId12"/>
-          <a:stretch>
-            <a:fillRect/>
-          </a:stretch>
-        </p:blipFill>
-        <p:spPr>
-          <a:xfrm>
-            <a:off x="17626753" y="10695259"/>
-            <a:ext cx="10000000" cy="6634615"/>
-          </a:xfrm>
-          <a:prstGeom prst="rect">
-            <a:avLst/>
-          </a:prstGeom>
-          <a:ln w="12700">
-            <a:solidFill>
-              <a:srgbClr val="BFC5CC"/>
-            </a:solidFill>
-          </a:ln>
-        </p:spPr>
-      </p:pic>
       <p:sp>
         <p:nvSpPr>
-          <p:cNvPr id="1020" name="본문"/>
+          <p:cNvPr id="1016" name="본문"/>
           <p:cNvSpPr txBox="1"/>
           <p:nvPr/>
         </p:nvSpPr>
         <p:spPr>
           <a:xfrm>
-            <a:off x="15570184" y="17389874"/>
-            <a:ext cx="14113138" cy="800000"/>
-          </a:xfrm>
-          <a:prstGeom prst="rect">
-            <a:avLst/>
-          </a:prstGeom>
-          <a:noFill/>
-          <a:ln>
-            <a:noFill/>
-          </a:ln>
-        </p:spPr>
-        <p:txBody>
-          <a:bodyPr wrap="square" lIns="66158" tIns="33079" rIns="66158" bIns="33079" anchor="t">
-            <a:noAutofit/>
-          </a:bodyPr>
-          <a:lstStyle/>
-          <a:p>
-            <a:pPr marL="0" indent="0" algn="ctr">
-              <a:lnSpc>
-                <a:spcPct val="118000"/>
-              </a:lnSpc>
-              <a:spcAft>
-                <a:spcPts val="600"/>
-              </a:spcAft>
-              <a:buNone/>
-            </a:pPr>
-            <a:r>
-              <a:rPr lang="ko-KR" altLang="en-US" sz="2400" b="0" dirty="0">
-                <a:solidFill>
-                  <a:schemeClr val="tx1">
-                    <a:lumMod val="85000"/>
-                    <a:lumOff val="15000"/>
-                  </a:schemeClr>
-                </a:solidFill>
-                <a:latin typeface="나눔고딕" pitchFamily="50" charset="-127"/>
-                <a:ea typeface="나눔고딕" pitchFamily="50" charset="-127"/>
-                <a:cs typeface="Arial" panose="020B0604020202020204" pitchFamily="34" charset="0"/>
-              </a:rPr>
-              <a:t>그림 2. 지식그래프의 일부: 충주댐 승인 1368번 (Class 6, 관계 9)</a:t>
-            </a:r>
-          </a:p>
-        </p:txBody>
-      </p:sp>
-      <p:sp>
-        <p:nvSpPr>
-          <p:cNvPr id="1021" name="본문"/>
-          <p:cNvSpPr txBox="1"/>
-          <p:nvPr/>
-        </p:nvSpPr>
-        <p:spPr>
-          <a:xfrm>
-            <a:off x="15570184" y="18189874"/>
+            <a:off x="597946" y="29049567"/>
             <a:ext cx="14113138" cy="1005551"/>
           </a:xfrm>
           <a:prstGeom prst="rect">
@@ -5058,7 +4544,7 @@
               </a:buBlip>
             </a:pPr>
             <a:r>
-              <a:rPr lang="ko-KR" altLang="en-US" sz="2400" b="0" dirty="0">
+              <a:rPr lang="ko-KR" altLang="en-US" sz="2400" b="1" dirty="0">
                 <a:solidFill>
                   <a:schemeClr val="tx1">
                     <a:lumMod val="85000"/>
@@ -5069,10 +4555,10 @@
                 <a:ea typeface="나눔고딕" pitchFamily="50" charset="-127"/>
                 <a:cs typeface="Arial" panose="020B0604020202020204" pitchFamily="34" charset="0"/>
               </a:rPr>
-              <a:t>구조 검사 </a:t>
-            </a:r>
-            <a:r>
-              <a:rPr lang="ko-KR" altLang="en-US" sz="2400" b="1" dirty="0">
+              <a:t>Ontology</a:t>
+            </a:r>
+            <a:r>
+              <a:rPr lang="ko-KR" altLang="en-US" sz="2400" b="0" dirty="0">
                 <a:solidFill>
                   <a:schemeClr val="tx1">
                     <a:lumMod val="85000"/>
@@ -5083,10 +4569,10 @@
                 <a:ea typeface="나눔고딕" pitchFamily="50" charset="-127"/>
                 <a:cs typeface="Arial" panose="020B0604020202020204" pitchFamily="34" charset="0"/>
               </a:rPr>
-              <a:t>5개 항목</a:t>
-            </a:r>
-            <a:r>
-              <a:rPr lang="ko-KR" altLang="en-US" sz="2400" b="0" dirty="0">
+              <a:t>: 위 질문에 필요한 </a:t>
+            </a:r>
+            <a:r>
+              <a:rPr lang="ko-KR" altLang="en-US" sz="2400" b="1" dirty="0">
                 <a:solidFill>
                   <a:schemeClr val="tx1">
                     <a:lumMod val="85000"/>
@@ -5097,10 +4583,10 @@
                 <a:ea typeface="나눔고딕" pitchFamily="50" charset="-127"/>
                 <a:cs typeface="Arial" panose="020B0604020202020204" pitchFamily="34" charset="0"/>
               </a:rPr>
-              <a:t>에서 어긋남은 0건이었고, 검증 중 </a:t>
-            </a:r>
-            <a:r>
-              <a:rPr lang="ko-KR" altLang="en-US" sz="2400" b="1" dirty="0">
+              <a:t>Class 6개</a:t>
+            </a:r>
+            <a:r>
+              <a:rPr lang="ko-KR" altLang="en-US" sz="2400" b="0" dirty="0">
                 <a:solidFill>
                   <a:schemeClr val="tx1">
                     <a:lumMod val="85000"/>
@@ -5111,10 +4597,10 @@
                 <a:ea typeface="나눔고딕" pitchFamily="50" charset="-127"/>
                 <a:cs typeface="Arial" panose="020B0604020202020204" pitchFamily="34" charset="0"/>
               </a:rPr>
-              <a:t>승인과 댐을 잇는 관계</a:t>
-            </a:r>
-            <a:r>
-              <a:rPr lang="ko-KR" altLang="en-US" sz="2400" b="0" dirty="0">
+              <a:t>와 </a:t>
+            </a:r>
+            <a:r>
+              <a:rPr lang="ko-KR" altLang="en-US" sz="2400" b="1" dirty="0">
                 <a:solidFill>
                   <a:schemeClr val="tx1">
                     <a:lumMod val="85000"/>
@@ -5125,20 +4611,62 @@
                 <a:ea typeface="나눔고딕" pitchFamily="50" charset="-127"/>
                 <a:cs typeface="Arial" panose="020B0604020202020204" pitchFamily="34" charset="0"/>
               </a:rPr>
-              <a:t>가 없음을 발견해 Ontology에 추가함으로써 승인 80건 모두 댐에서 찾을 수 있고 근거자료와 연결됨</a:t>
+              <a:t>관계 9개</a:t>
+            </a:r>
+            <a:r>
+              <a:rPr lang="ko-KR" altLang="en-US" sz="2400" b="0" dirty="0">
+                <a:solidFill>
+                  <a:schemeClr val="tx1">
+                    <a:lumMod val="85000"/>
+                    <a:lumOff val="15000"/>
+                  </a:schemeClr>
+                </a:solidFill>
+                <a:latin typeface="나눔고딕" pitchFamily="50" charset="-127"/>
+                <a:ea typeface="나눔고딕" pitchFamily="50" charset="-127"/>
+                <a:cs typeface="Arial" panose="020B0604020202020204" pitchFamily="34" charset="0"/>
+              </a:rPr>
+              <a:t>, Class별 </a:t>
+            </a:r>
+            <a:r>
+              <a:rPr lang="ko-KR" altLang="en-US" sz="2400" b="1" dirty="0">
+                <a:solidFill>
+                  <a:schemeClr val="tx1">
+                    <a:lumMod val="85000"/>
+                    <a:lumOff val="15000"/>
+                  </a:schemeClr>
+                </a:solidFill>
+                <a:latin typeface="나눔고딕" pitchFamily="50" charset="-127"/>
+                <a:ea typeface="나눔고딕" pitchFamily="50" charset="-127"/>
+                <a:cs typeface="Arial" panose="020B0604020202020204" pitchFamily="34" charset="0"/>
+              </a:rPr>
+              <a:t>Data Property</a:t>
+            </a:r>
+            <a:r>
+              <a:rPr lang="ko-KR" altLang="en-US" sz="2400" b="0" dirty="0">
+                <a:solidFill>
+                  <a:schemeClr val="tx1">
+                    <a:lumMod val="85000"/>
+                    <a:lumOff val="15000"/>
+                  </a:schemeClr>
+                </a:solidFill>
+                <a:latin typeface="나눔고딕" pitchFamily="50" charset="-127"/>
+                <a:ea typeface="나눔고딕" pitchFamily="50" charset="-127"/>
+                <a:cs typeface="Arial" panose="020B0604020202020204" pitchFamily="34" charset="0"/>
+              </a:rPr>
+              <a:t>를 정의함 (그림 2)</a:t>
             </a:r>
           </a:p>
         </p:txBody>
       </p:sp>
       <p:sp>
         <p:nvSpPr>
-          <p:cNvPr id="1022" name="직사각형 1"/>
+          <p:cNvPr id="1017" name="직사각형 1"/>
           <p:cNvSpPr/>
           <p:nvPr/>
         </p:nvSpPr>
         <p:spPr>
           <a:xfrm>
-            <a:off x="15691431" y="19575425"/>
+            <a:off x="674157" y="30255118"/>
             <a:ext cx="13943667" cy="1023024"/>
           </a:xfrm>
           <a:prstGeom prst="rect">
@@ -5184,20 +4712,4261 @@
                 <a:ea typeface="나눔고딕 ExtraBold" panose="020D0904000000000000" pitchFamily="50" charset="-127"/>
                 <a:cs typeface="Arial Unicode MS" panose="020B0604020202020204" pitchFamily="50" charset="-127"/>
               </a:rPr>
-              <a:t>질문 응답 예시</a:t>
+              <a:t>방법론 개요</a:t>
+            </a:r>
+          </a:p>
+        </p:txBody>
+      </p:sp>
+      <p:grpSp>
+        <p:nvGrpSpPr>
+          <p:cNvPr id="5034" name="그림1 전체 구조"/>
+          <p:cNvGrpSpPr/>
+          <p:nvPr/>
+        </p:nvGrpSpPr>
+        <p:grpSpPr>
+          <a:xfrm>
+            <a:off x="2354515" y="31398142"/>
+            <a:ext cx="10600000" cy="6890000"/>
+            <a:chOff x="2354515" y="31398142"/>
+            <a:chExt cx="10600000" cy="6890000"/>
+          </a:xfrm>
+        </p:grpSpPr>
+        <p:sp>
+          <p:nvSpPr>
+            <p:cNvPr id="5001" name="도형"/>
+            <p:cNvSpPr/>
+            <p:nvPr/>
+          </p:nvSpPr>
+          <p:spPr>
+            <a:xfrm>
+              <a:off x="2354515" y="31398142"/>
+              <a:ext cx="2809000" cy="3074000"/>
+            </a:xfrm>
+            <a:prstGeom prst="rect">
+              <a:avLst/>
+            </a:prstGeom>
+            <a:noFill/>
+            <a:ln w="19050">
+              <a:solidFill>
+                <a:srgbClr val="888888"/>
+              </a:solidFill>
+              <a:prstDash val="dash"/>
+            </a:ln>
+          </p:spPr>
+          <p:txBody>
+            <a:bodyPr wrap="square" lIns="84800" tIns="42400" rIns="84800" bIns="42400" anchor="ctr">
+              <a:noAutofit/>
+            </a:bodyPr>
+            <a:lstStyle/>
+            <a:p>
+              <a:endParaRPr lang="ko-KR"/>
+            </a:p>
+          </p:txBody>
+        </p:sp>
+        <p:sp>
+          <p:nvSpPr>
+            <p:cNvPr id="5002" name="글상자"/>
+            <p:cNvSpPr/>
+            <p:nvPr/>
+          </p:nvSpPr>
+          <p:spPr>
+            <a:xfrm>
+              <a:off x="2460515" y="31461742"/>
+              <a:ext cx="2597000" cy="392200"/>
+            </a:xfrm>
+            <a:prstGeom prst="rect">
+              <a:avLst/>
+            </a:prstGeom>
+            <a:noFill/>
+            <a:ln>
+              <a:noFill/>
+            </a:ln>
+          </p:spPr>
+          <p:txBody>
+            <a:bodyPr wrap="square" lIns="21200" tIns="10600" rIns="21200" bIns="10600" anchor="ctr">
+              <a:noAutofit/>
+            </a:bodyPr>
+            <a:lstStyle/>
+            <a:p>
+              <a:pPr algn="l">
+                <a:lnSpc>
+                  <a:spcPct val="100000"/>
+                </a:lnSpc>
+              </a:pPr>
+              <a:r>
+                <a:rPr lang="ko-KR" altLang="en-US" sz="2087" b="1" dirty="0">
+                  <a:solidFill>
+                    <a:srgbClr val="1F3A5F"/>
+                  </a:solidFill>
+                  <a:latin typeface="나눔고딕" pitchFamily="50" charset="-127"/>
+                  <a:ea typeface="나눔고딕" pitchFamily="50" charset="-127"/>
+                  <a:cs typeface="Arial" panose="020B0604020202020204" pitchFamily="34" charset="0"/>
+                </a:rPr>
+                <a:t>(a) Ontology 설계</a:t>
+              </a:r>
+            </a:p>
+          </p:txBody>
+        </p:sp>
+        <p:sp>
+          <p:nvSpPr>
+            <p:cNvPr id="5003" name="도형"/>
+            <p:cNvSpPr/>
+            <p:nvPr/>
+          </p:nvSpPr>
+          <p:spPr>
+            <a:xfrm>
+              <a:off x="2566515" y="31906942"/>
+              <a:ext cx="2385000" cy="1060000"/>
+            </a:xfrm>
+            <a:prstGeom prst="roundRect">
+              <a:avLst>
+                <a:gd name="adj" fmla="val 6000"/>
+              </a:avLst>
+            </a:prstGeom>
+            <a:solidFill>
+              <a:srgbClr val="FFFFFF"/>
+            </a:solidFill>
+            <a:ln w="22225">
+              <a:solidFill>
+                <a:srgbClr val="262626"/>
+              </a:solidFill>
+            </a:ln>
+          </p:spPr>
+          <p:txBody>
+            <a:bodyPr wrap="square" lIns="84800" tIns="42400" rIns="84800" bIns="42400" anchor="ctr">
+              <a:noAutofit/>
+            </a:bodyPr>
+            <a:lstStyle/>
+            <a:p>
+              <a:pPr algn="ctr">
+                <a:lnSpc>
+                  <a:spcPct val="100000"/>
+                </a:lnSpc>
+              </a:pPr>
+              <a:r>
+                <a:rPr lang="ko-KR" altLang="en-US" sz="2170" b="1" dirty="0">
+                  <a:solidFill>
+                    <a:srgbClr val="222222"/>
+                  </a:solidFill>
+                  <a:latin typeface="나눔고딕" pitchFamily="50" charset="-127"/>
+                  <a:ea typeface="나눔고딕" pitchFamily="50" charset="-127"/>
+                  <a:cs typeface="Arial" panose="020B0604020202020204" pitchFamily="34" charset="0"/>
+                </a:rPr>
+                <a:t>CQ</a:t>
+              </a:r>
+            </a:p>
+            <a:p>
+              <a:pPr algn="ctr">
+                <a:lnSpc>
+                  <a:spcPct val="100000"/>
+                </a:lnSpc>
+              </a:pPr>
+              <a:r>
+                <a:rPr lang="ko-KR" altLang="en-US" sz="1753" b="0" dirty="0">
+                  <a:solidFill>
+                    <a:srgbClr val="444444"/>
+                  </a:solidFill>
+                  <a:latin typeface="나눔고딕" pitchFamily="50" charset="-127"/>
+                  <a:ea typeface="나눔고딕" pitchFamily="50" charset="-127"/>
+                  <a:cs typeface="Arial" panose="020B0604020202020204" pitchFamily="34" charset="0"/>
+                </a:rPr>
+                <a:t>전체 질문 1개</a:t>
+              </a:r>
+            </a:p>
+            <a:p>
+              <a:pPr algn="ctr">
+                <a:lnSpc>
+                  <a:spcPct val="100000"/>
+                </a:lnSpc>
+              </a:pPr>
+              <a:r>
+                <a:rPr lang="ko-KR" altLang="en-US" sz="1753" b="0" dirty="0">
+                  <a:solidFill>
+                    <a:srgbClr val="444444"/>
+                  </a:solidFill>
+                  <a:latin typeface="나눔고딕" pitchFamily="50" charset="-127"/>
+                  <a:ea typeface="나눔고딕" pitchFamily="50" charset="-127"/>
+                  <a:cs typeface="Arial" panose="020B0604020202020204" pitchFamily="34" charset="0"/>
+                </a:rPr>
+                <a:t>세부 질문 6개</a:t>
+              </a:r>
+            </a:p>
+          </p:txBody>
+        </p:sp>
+        <p:cxnSp>
+          <p:nvCxnSpPr>
+            <p:cNvPr id="5004" name="선"/>
+            <p:cNvCxnSpPr/>
+            <p:nvPr/>
+          </p:nvCxnSpPr>
+          <p:spPr>
+            <a:xfrm>
+              <a:off x="3753715" y="32988142"/>
+              <a:ext cx="0" cy="233200"/>
+            </a:xfrm>
+            <a:prstGeom prst="line">
+              <a:avLst/>
+            </a:prstGeom>
+            <a:ln w="31750">
+              <a:solidFill>
+                <a:srgbClr val="3B4A63"/>
+              </a:solidFill>
+              <a:tailEnd type="triangle" w="med" len="med"/>
+            </a:ln>
+          </p:spPr>
+        </p:cxnSp>
+        <p:sp>
+          <p:nvSpPr>
+            <p:cNvPr id="5005" name="도형"/>
+            <p:cNvSpPr/>
+            <p:nvPr/>
+          </p:nvSpPr>
+          <p:spPr>
+            <a:xfrm>
+              <a:off x="2566515" y="33242542"/>
+              <a:ext cx="2385000" cy="1060000"/>
+            </a:xfrm>
+            <a:prstGeom prst="roundRect">
+              <a:avLst>
+                <a:gd name="adj" fmla="val 6000"/>
+              </a:avLst>
+            </a:prstGeom>
+            <a:solidFill>
+              <a:srgbClr val="FFFFFF"/>
+            </a:solidFill>
+            <a:ln w="22225">
+              <a:solidFill>
+                <a:srgbClr val="262626"/>
+              </a:solidFill>
+            </a:ln>
+          </p:spPr>
+          <p:txBody>
+            <a:bodyPr wrap="square" lIns="84800" tIns="42400" rIns="84800" bIns="42400" anchor="ctr">
+              <a:noAutofit/>
+            </a:bodyPr>
+            <a:lstStyle/>
+            <a:p>
+              <a:pPr algn="ctr">
+                <a:lnSpc>
+                  <a:spcPct val="100000"/>
+                </a:lnSpc>
+              </a:pPr>
+              <a:r>
+                <a:rPr lang="ko-KR" altLang="en-US" sz="2170" b="1" dirty="0">
+                  <a:solidFill>
+                    <a:srgbClr val="222222"/>
+                  </a:solidFill>
+                  <a:latin typeface="나눔고딕" pitchFamily="50" charset="-127"/>
+                  <a:ea typeface="나눔고딕" pitchFamily="50" charset="-127"/>
+                  <a:cs typeface="Arial" panose="020B0604020202020204" pitchFamily="34" charset="0"/>
+                </a:rPr>
+                <a:t>Class · 관계</a:t>
+              </a:r>
+            </a:p>
+            <a:p>
+              <a:pPr algn="ctr">
+                <a:lnSpc>
+                  <a:spcPct val="100000"/>
+                </a:lnSpc>
+              </a:pPr>
+              <a:r>
+                <a:rPr lang="ko-KR" altLang="en-US" sz="1753" b="0" dirty="0">
+                  <a:solidFill>
+                    <a:srgbClr val="444444"/>
+                  </a:solidFill>
+                  <a:latin typeface="나눔고딕" pitchFamily="50" charset="-127"/>
+                  <a:ea typeface="나눔고딕" pitchFamily="50" charset="-127"/>
+                  <a:cs typeface="Arial" panose="020B0604020202020204" pitchFamily="34" charset="0"/>
+                </a:rPr>
+                <a:t>Class 6, 관계 9</a:t>
+              </a:r>
+            </a:p>
+            <a:p>
+              <a:pPr algn="ctr">
+                <a:lnSpc>
+                  <a:spcPct val="100000"/>
+                </a:lnSpc>
+              </a:pPr>
+              <a:r>
+                <a:rPr lang="ko-KR" altLang="en-US" sz="1753" b="0" dirty="0">
+                  <a:solidFill>
+                    <a:srgbClr val="444444"/>
+                  </a:solidFill>
+                  <a:latin typeface="나눔고딕" pitchFamily="50" charset="-127"/>
+                  <a:ea typeface="나눔고딕" pitchFamily="50" charset="-127"/>
+                  <a:cs typeface="Arial" panose="020B0604020202020204" pitchFamily="34" charset="0"/>
+                </a:rPr>
+                <a:t>Data Property</a:t>
+              </a:r>
+            </a:p>
+          </p:txBody>
+        </p:sp>
+        <p:sp>
+          <p:nvSpPr>
+            <p:cNvPr id="5006" name="도형"/>
+            <p:cNvSpPr/>
+            <p:nvPr/>
+          </p:nvSpPr>
+          <p:spPr>
+            <a:xfrm>
+              <a:off x="5375515" y="31398142"/>
+              <a:ext cx="7579000" cy="3074000"/>
+            </a:xfrm>
+            <a:prstGeom prst="rect">
+              <a:avLst/>
+            </a:prstGeom>
+            <a:noFill/>
+            <a:ln w="19050">
+              <a:solidFill>
+                <a:srgbClr val="888888"/>
+              </a:solidFill>
+              <a:prstDash val="dash"/>
+            </a:ln>
+          </p:spPr>
+          <p:txBody>
+            <a:bodyPr wrap="square" lIns="84800" tIns="42400" rIns="84800" bIns="42400" anchor="ctr">
+              <a:noAutofit/>
+            </a:bodyPr>
+            <a:lstStyle/>
+            <a:p>
+              <a:endParaRPr lang="ko-KR"/>
+            </a:p>
+          </p:txBody>
+        </p:sp>
+        <p:sp>
+          <p:nvSpPr>
+            <p:cNvPr id="5007" name="글상자"/>
+            <p:cNvSpPr/>
+            <p:nvPr/>
+          </p:nvSpPr>
+          <p:spPr>
+            <a:xfrm>
+              <a:off x="5481515" y="31461742"/>
+              <a:ext cx="7367000" cy="392200"/>
+            </a:xfrm>
+            <a:prstGeom prst="rect">
+              <a:avLst/>
+            </a:prstGeom>
+            <a:noFill/>
+            <a:ln>
+              <a:noFill/>
+            </a:ln>
+          </p:spPr>
+          <p:txBody>
+            <a:bodyPr wrap="square" lIns="21200" tIns="10600" rIns="21200" bIns="10600" anchor="ctr">
+              <a:noAutofit/>
+            </a:bodyPr>
+            <a:lstStyle/>
+            <a:p>
+              <a:pPr algn="l">
+                <a:lnSpc>
+                  <a:spcPct val="100000"/>
+                </a:lnSpc>
+              </a:pPr>
+              <a:r>
+                <a:rPr lang="ko-KR" altLang="en-US" sz="2087" b="1" dirty="0">
+                  <a:solidFill>
+                    <a:srgbClr val="1F3A5F"/>
+                  </a:solidFill>
+                  <a:latin typeface="나눔고딕" pitchFamily="50" charset="-127"/>
+                  <a:ea typeface="나눔고딕" pitchFamily="50" charset="-127"/>
+                  <a:cs typeface="Arial" panose="020B0604020202020204" pitchFamily="34" charset="0"/>
+                </a:rPr>
+                <a:t>(b) 지식그래프(KG) 구축</a:t>
+              </a:r>
+            </a:p>
+          </p:txBody>
+        </p:sp>
+        <p:sp>
+          <p:nvSpPr>
+            <p:cNvPr id="5008" name="도형"/>
+            <p:cNvSpPr/>
+            <p:nvPr/>
+          </p:nvSpPr>
+          <p:spPr>
+            <a:xfrm>
+              <a:off x="5534515" y="31928142"/>
+              <a:ext cx="1696000" cy="2385000"/>
+            </a:xfrm>
+            <a:prstGeom prst="roundRect">
+              <a:avLst>
+                <a:gd name="adj" fmla="val 6000"/>
+              </a:avLst>
+            </a:prstGeom>
+            <a:solidFill>
+              <a:srgbClr val="FFFFFF"/>
+            </a:solidFill>
+            <a:ln w="22225">
+              <a:solidFill>
+                <a:srgbClr val="262626"/>
+              </a:solidFill>
+            </a:ln>
+          </p:spPr>
+          <p:txBody>
+            <a:bodyPr wrap="square" lIns="84800" tIns="42400" rIns="84800" bIns="42400" anchor="ctr">
+              <a:noAutofit/>
+            </a:bodyPr>
+            <a:lstStyle/>
+            <a:p>
+              <a:pPr algn="ctr">
+                <a:lnSpc>
+                  <a:spcPct val="100000"/>
+                </a:lnSpc>
+              </a:pPr>
+              <a:r>
+                <a:rPr lang="ko-KR" altLang="en-US" sz="2170" b="1" dirty="0">
+                  <a:solidFill>
+                    <a:srgbClr val="222222"/>
+                  </a:solidFill>
+                  <a:latin typeface="나눔고딕" pitchFamily="50" charset="-127"/>
+                  <a:ea typeface="나눔고딕" pitchFamily="50" charset="-127"/>
+                  <a:cs typeface="Arial" panose="020B0604020202020204" pitchFamily="34" charset="0"/>
+                </a:rPr>
+                <a:t>원자료 4종</a:t>
+              </a:r>
+            </a:p>
+            <a:p>
+              <a:pPr algn="ctr">
+                <a:lnSpc>
+                  <a:spcPct val="100000"/>
+                </a:lnSpc>
+              </a:pPr>
+              <a:r>
+                <a:rPr lang="ko-KR" altLang="en-US" sz="1753" b="0" dirty="0">
+                  <a:solidFill>
+                    <a:srgbClr val="444444"/>
+                  </a:solidFill>
+                  <a:latin typeface="나눔고딕" pitchFamily="50" charset="-127"/>
+                  <a:ea typeface="나눔고딕" pitchFamily="50" charset="-127"/>
+                  <a:cs typeface="Arial" panose="020B0604020202020204" pitchFamily="34" charset="0"/>
+                </a:rPr>
+                <a:t>승인 기록</a:t>
+              </a:r>
+            </a:p>
+            <a:p>
+              <a:pPr algn="ctr">
+                <a:lnSpc>
+                  <a:spcPct val="100000"/>
+                </a:lnSpc>
+              </a:pPr>
+              <a:r>
+                <a:rPr lang="ko-KR" altLang="en-US" sz="1753" b="0" dirty="0">
+                  <a:solidFill>
+                    <a:srgbClr val="444444"/>
+                  </a:solidFill>
+                  <a:latin typeface="나눔고딕" pitchFamily="50" charset="-127"/>
+                  <a:ea typeface="나눔고딕" pitchFamily="50" charset="-127"/>
+                  <a:cs typeface="Arial" panose="020B0604020202020204" pitchFamily="34" charset="0"/>
+                </a:rPr>
+                <a:t>시간 자료</a:t>
+              </a:r>
+            </a:p>
+            <a:p>
+              <a:pPr algn="ctr">
+                <a:lnSpc>
+                  <a:spcPct val="100000"/>
+                </a:lnSpc>
+              </a:pPr>
+              <a:r>
+                <a:rPr lang="ko-KR" altLang="en-US" sz="1753" b="0" dirty="0">
+                  <a:solidFill>
+                    <a:srgbClr val="444444"/>
+                  </a:solidFill>
+                  <a:latin typeface="나눔고딕" pitchFamily="50" charset="-127"/>
+                  <a:ea typeface="나눔고딕" pitchFamily="50" charset="-127"/>
+                  <a:cs typeface="Arial" panose="020B0604020202020204" pitchFamily="34" charset="0"/>
+                </a:rPr>
+                <a:t>규정 별표3</a:t>
+              </a:r>
+            </a:p>
+            <a:p>
+              <a:pPr algn="ctr">
+                <a:lnSpc>
+                  <a:spcPct val="100000"/>
+                </a:lnSpc>
+              </a:pPr>
+              <a:r>
+                <a:rPr lang="ko-KR" altLang="en-US" sz="1753" b="0" dirty="0">
+                  <a:solidFill>
+                    <a:srgbClr val="444444"/>
+                  </a:solidFill>
+                  <a:latin typeface="나눔고딕" pitchFamily="50" charset="-127"/>
+                  <a:ea typeface="나눔고딕" pitchFamily="50" charset="-127"/>
+                  <a:cs typeface="Arial" panose="020B0604020202020204" pitchFamily="34" charset="0"/>
+                </a:rPr>
+                <a:t>댐 정보</a:t>
+              </a:r>
+            </a:p>
+          </p:txBody>
+        </p:sp>
+        <p:cxnSp>
+          <p:nvCxnSpPr>
+            <p:cNvPr id="5009" name="선"/>
+            <p:cNvCxnSpPr/>
+            <p:nvPr/>
+          </p:nvCxnSpPr>
+          <p:spPr>
+            <a:xfrm>
+              <a:off x="7251715" y="33115342"/>
+              <a:ext cx="381600" cy="0"/>
+            </a:xfrm>
+            <a:prstGeom prst="line">
+              <a:avLst/>
+            </a:prstGeom>
+            <a:ln w="31750">
+              <a:solidFill>
+                <a:srgbClr val="3B4A63"/>
+              </a:solidFill>
+              <a:tailEnd type="triangle" w="med" len="med"/>
+            </a:ln>
+          </p:spPr>
+        </p:cxnSp>
+        <p:sp>
+          <p:nvSpPr>
+            <p:cNvPr id="5010" name="도형"/>
+            <p:cNvSpPr/>
+            <p:nvPr/>
+          </p:nvSpPr>
+          <p:spPr>
+            <a:xfrm>
+              <a:off x="7654515" y="31928142"/>
+              <a:ext cx="1802000" cy="2385000"/>
+            </a:xfrm>
+            <a:prstGeom prst="roundRect">
+              <a:avLst>
+                <a:gd name="adj" fmla="val 6000"/>
+              </a:avLst>
+            </a:prstGeom>
+            <a:solidFill>
+              <a:srgbClr val="FFFFFF"/>
+            </a:solidFill>
+            <a:ln w="22225">
+              <a:solidFill>
+                <a:srgbClr val="262626"/>
+              </a:solidFill>
+            </a:ln>
+          </p:spPr>
+          <p:txBody>
+            <a:bodyPr wrap="square" lIns="84800" tIns="42400" rIns="84800" bIns="42400" anchor="ctr">
+              <a:noAutofit/>
+            </a:bodyPr>
+            <a:lstStyle/>
+            <a:p>
+              <a:pPr algn="ctr">
+                <a:lnSpc>
+                  <a:spcPct val="100000"/>
+                </a:lnSpc>
+              </a:pPr>
+              <a:r>
+                <a:rPr lang="ko-KR" altLang="en-US" sz="2170" b="1" dirty="0">
+                  <a:solidFill>
+                    <a:srgbClr val="222222"/>
+                  </a:solidFill>
+                  <a:latin typeface="나눔고딕" pitchFamily="50" charset="-127"/>
+                  <a:ea typeface="나눔고딕" pitchFamily="50" charset="-127"/>
+                  <a:cs typeface="Arial" panose="020B0604020202020204" pitchFamily="34" charset="0"/>
+                </a:rPr>
+                <a:t>6단계</a:t>
+              </a:r>
+            </a:p>
+            <a:p>
+              <a:pPr algn="ctr">
+                <a:lnSpc>
+                  <a:spcPct val="100000"/>
+                </a:lnSpc>
+              </a:pPr>
+              <a:r>
+                <a:rPr lang="ko-KR" altLang="en-US" sz="1753" b="0" dirty="0">
+                  <a:solidFill>
+                    <a:srgbClr val="444444"/>
+                  </a:solidFill>
+                  <a:latin typeface="나눔고딕" pitchFamily="50" charset="-127"/>
+                  <a:ea typeface="나눔고딕" pitchFamily="50" charset="-127"/>
+                  <a:cs typeface="Arial" panose="020B0604020202020204" pitchFamily="34" charset="0"/>
+                </a:rPr>
+                <a:t>전처리</a:t>
+              </a:r>
+            </a:p>
+            <a:p>
+              <a:pPr algn="ctr">
+                <a:lnSpc>
+                  <a:spcPct val="100000"/>
+                </a:lnSpc>
+              </a:pPr>
+              <a:r>
+                <a:rPr lang="ko-KR" altLang="en-US" sz="1753" b="0" dirty="0">
+                  <a:solidFill>
+                    <a:srgbClr val="444444"/>
+                  </a:solidFill>
+                  <a:latin typeface="나눔고딕" pitchFamily="50" charset="-127"/>
+                  <a:ea typeface="나눔고딕" pitchFamily="50" charset="-127"/>
+                  <a:cs typeface="Arial" panose="020B0604020202020204" pitchFamily="34" charset="0"/>
+                </a:rPr>
+                <a:t>매핑 · 추출</a:t>
+              </a:r>
+            </a:p>
+            <a:p>
+              <a:pPr algn="ctr">
+                <a:lnSpc>
+                  <a:spcPct val="100000"/>
+                </a:lnSpc>
+              </a:pPr>
+              <a:r>
+                <a:rPr lang="ko-KR" altLang="en-US" sz="1753" b="0" dirty="0">
+                  <a:solidFill>
+                    <a:srgbClr val="444444"/>
+                  </a:solidFill>
+                  <a:latin typeface="나눔고딕" pitchFamily="50" charset="-127"/>
+                  <a:ea typeface="나눔고딕" pitchFamily="50" charset="-127"/>
+                  <a:cs typeface="Arial" panose="020B0604020202020204" pitchFamily="34" charset="0"/>
+                </a:rPr>
+                <a:t>관계 연결</a:t>
+              </a:r>
+            </a:p>
+            <a:p>
+              <a:pPr algn="ctr">
+                <a:lnSpc>
+                  <a:spcPct val="100000"/>
+                </a:lnSpc>
+              </a:pPr>
+              <a:r>
+                <a:rPr lang="ko-KR" altLang="en-US" sz="1753" b="0" dirty="0">
+                  <a:solidFill>
+                    <a:srgbClr val="444444"/>
+                  </a:solidFill>
+                  <a:latin typeface="나눔고딕" pitchFamily="50" charset="-127"/>
+                  <a:ea typeface="나눔고딕" pitchFamily="50" charset="-127"/>
+                  <a:cs typeface="Arial" panose="020B0604020202020204" pitchFamily="34" charset="0"/>
+                </a:rPr>
+                <a:t>검증 · 저장</a:t>
+              </a:r>
+            </a:p>
+          </p:txBody>
+        </p:sp>
+        <p:cxnSp>
+          <p:nvCxnSpPr>
+            <p:cNvPr id="5011" name="선"/>
+            <p:cNvCxnSpPr/>
+            <p:nvPr/>
+          </p:nvCxnSpPr>
+          <p:spPr>
+            <a:xfrm>
+              <a:off x="9477715" y="33115342"/>
+              <a:ext cx="381600" cy="0"/>
+            </a:xfrm>
+            <a:prstGeom prst="line">
+              <a:avLst/>
+            </a:prstGeom>
+            <a:ln w="31750">
+              <a:solidFill>
+                <a:srgbClr val="3B4A63"/>
+              </a:solidFill>
+              <a:tailEnd type="triangle" w="med" len="med"/>
+            </a:ln>
+          </p:spPr>
+        </p:cxnSp>
+        <p:sp>
+          <p:nvSpPr>
+            <p:cNvPr id="5012" name="도형"/>
+            <p:cNvSpPr/>
+            <p:nvPr/>
+          </p:nvSpPr>
+          <p:spPr>
+            <a:xfrm>
+              <a:off x="9880515" y="31885742"/>
+              <a:ext cx="2915000" cy="742000"/>
+            </a:xfrm>
+            <a:prstGeom prst="can">
+              <a:avLst/>
+            </a:prstGeom>
+            <a:solidFill>
+              <a:srgbClr val="F2F2F2"/>
+            </a:solidFill>
+            <a:ln w="22225">
+              <a:solidFill>
+                <a:srgbClr val="262626"/>
+              </a:solidFill>
+            </a:ln>
+          </p:spPr>
+          <p:txBody>
+            <a:bodyPr wrap="square" lIns="84800" tIns="42400" rIns="84800" bIns="42400" anchor="ctr">
+              <a:noAutofit/>
+            </a:bodyPr>
+            <a:lstStyle/>
+            <a:p>
+              <a:pPr algn="ctr">
+                <a:lnSpc>
+                  <a:spcPct val="100000"/>
+                </a:lnSpc>
+              </a:pPr>
+              <a:r>
+                <a:rPr lang="ko-KR" altLang="en-US" sz="2003" b="1" dirty="0">
+                  <a:solidFill>
+                    <a:srgbClr val="222222"/>
+                  </a:solidFill>
+                  <a:latin typeface="나눔고딕" pitchFamily="50" charset="-127"/>
+                  <a:ea typeface="나눔고딕" pitchFamily="50" charset="-127"/>
+                  <a:cs typeface="Arial" panose="020B0604020202020204" pitchFamily="34" charset="0"/>
+                </a:rPr>
+                <a:t>KG (Neo4j)</a:t>
+              </a:r>
+            </a:p>
+          </p:txBody>
+        </p:sp>
+        <p:sp>
+          <p:nvSpPr>
+            <p:cNvPr id="5013" name="도형"/>
+            <p:cNvSpPr/>
+            <p:nvPr/>
+          </p:nvSpPr>
+          <p:spPr>
+            <a:xfrm>
+              <a:off x="9880515" y="32733742"/>
+              <a:ext cx="2915000" cy="742000"/>
+            </a:xfrm>
+            <a:prstGeom prst="can">
+              <a:avLst/>
+            </a:prstGeom>
+            <a:solidFill>
+              <a:srgbClr val="F2F2F2"/>
+            </a:solidFill>
+            <a:ln w="22225">
+              <a:solidFill>
+                <a:srgbClr val="262626"/>
+              </a:solidFill>
+            </a:ln>
+          </p:spPr>
+          <p:txBody>
+            <a:bodyPr wrap="square" lIns="84800" tIns="42400" rIns="84800" bIns="42400" anchor="ctr">
+              <a:noAutofit/>
+            </a:bodyPr>
+            <a:lstStyle/>
+            <a:p>
+              <a:pPr algn="ctr">
+                <a:lnSpc>
+                  <a:spcPct val="100000"/>
+                </a:lnSpc>
+              </a:pPr>
+              <a:r>
+                <a:rPr lang="ko-KR" altLang="en-US" sz="2003" b="1" dirty="0">
+                  <a:solidFill>
+                    <a:srgbClr val="222222"/>
+                  </a:solidFill>
+                  <a:latin typeface="나눔고딕" pitchFamily="50" charset="-127"/>
+                  <a:ea typeface="나눔고딕" pitchFamily="50" charset="-127"/>
+                  <a:cs typeface="Arial" panose="020B0604020202020204" pitchFamily="34" charset="0"/>
+                </a:rPr>
+                <a:t>측정자료 저장소</a:t>
+              </a:r>
+            </a:p>
+          </p:txBody>
+        </p:sp>
+        <p:sp>
+          <p:nvSpPr>
+            <p:cNvPr id="5014" name="도형"/>
+            <p:cNvSpPr/>
+            <p:nvPr/>
+          </p:nvSpPr>
+          <p:spPr>
+            <a:xfrm>
+              <a:off x="9880515" y="33581742"/>
+              <a:ext cx="2915000" cy="742000"/>
+            </a:xfrm>
+            <a:prstGeom prst="can">
+              <a:avLst/>
+            </a:prstGeom>
+            <a:solidFill>
+              <a:srgbClr val="F2F2F2"/>
+            </a:solidFill>
+            <a:ln w="22225">
+              <a:solidFill>
+                <a:srgbClr val="262626"/>
+              </a:solidFill>
+            </a:ln>
+          </p:spPr>
+          <p:txBody>
+            <a:bodyPr wrap="square" lIns="84800" tIns="42400" rIns="84800" bIns="42400" anchor="ctr">
+              <a:noAutofit/>
+            </a:bodyPr>
+            <a:lstStyle/>
+            <a:p>
+              <a:pPr algn="ctr">
+                <a:lnSpc>
+                  <a:spcPct val="100000"/>
+                </a:lnSpc>
+              </a:pPr>
+              <a:r>
+                <a:rPr lang="ko-KR" altLang="en-US" sz="2003" b="1" dirty="0">
+                  <a:solidFill>
+                    <a:srgbClr val="222222"/>
+                  </a:solidFill>
+                  <a:latin typeface="나눔고딕" pitchFamily="50" charset="-127"/>
+                  <a:ea typeface="나눔고딕" pitchFamily="50" charset="-127"/>
+                  <a:cs typeface="Arial" panose="020B0604020202020204" pitchFamily="34" charset="0"/>
+                </a:rPr>
+                <a:t>문서 저장소</a:t>
+              </a:r>
+            </a:p>
+          </p:txBody>
+        </p:sp>
+        <p:sp>
+          <p:nvSpPr>
+            <p:cNvPr id="5015" name="도형"/>
+            <p:cNvSpPr/>
+            <p:nvPr/>
+          </p:nvSpPr>
+          <p:spPr>
+            <a:xfrm>
+              <a:off x="2354515" y="34896142"/>
+              <a:ext cx="10600000" cy="3180000"/>
+            </a:xfrm>
+            <a:prstGeom prst="rect">
+              <a:avLst/>
+            </a:prstGeom>
+            <a:noFill/>
+            <a:ln w="19050">
+              <a:solidFill>
+                <a:srgbClr val="888888"/>
+              </a:solidFill>
+              <a:prstDash val="dash"/>
+            </a:ln>
+          </p:spPr>
+          <p:txBody>
+            <a:bodyPr wrap="square" lIns="84800" tIns="42400" rIns="84800" bIns="42400" anchor="ctr">
+              <a:noAutofit/>
+            </a:bodyPr>
+            <a:lstStyle/>
+            <a:p>
+              <a:endParaRPr lang="ko-KR"/>
+            </a:p>
+          </p:txBody>
+        </p:sp>
+        <p:sp>
+          <p:nvSpPr>
+            <p:cNvPr id="5016" name="글상자"/>
+            <p:cNvSpPr/>
+            <p:nvPr/>
+          </p:nvSpPr>
+          <p:spPr>
+            <a:xfrm>
+              <a:off x="2460515" y="34959742"/>
+              <a:ext cx="10388000" cy="392200"/>
+            </a:xfrm>
+            <a:prstGeom prst="rect">
+              <a:avLst/>
+            </a:prstGeom>
+            <a:noFill/>
+            <a:ln>
+              <a:noFill/>
+            </a:ln>
+          </p:spPr>
+          <p:txBody>
+            <a:bodyPr wrap="square" lIns="21200" tIns="10600" rIns="21200" bIns="10600" anchor="ctr">
+              <a:noAutofit/>
+            </a:bodyPr>
+            <a:lstStyle/>
+            <a:p>
+              <a:pPr algn="l">
+                <a:lnSpc>
+                  <a:spcPct val="100000"/>
+                </a:lnSpc>
+              </a:pPr>
+              <a:r>
+                <a:rPr lang="ko-KR" altLang="en-US" sz="2087" b="1" dirty="0">
+                  <a:solidFill>
+                    <a:srgbClr val="1F3A5F"/>
+                  </a:solidFill>
+                  <a:latin typeface="나눔고딕" pitchFamily="50" charset="-127"/>
+                  <a:ea typeface="나눔고딕" pitchFamily="50" charset="-127"/>
+                  <a:cs typeface="Arial" panose="020B0604020202020204" pitchFamily="34" charset="0"/>
+                </a:rPr>
+                <a:t>(c) 질문 응답 (RAG)</a:t>
+              </a:r>
+            </a:p>
+          </p:txBody>
+        </p:sp>
+        <p:sp>
+          <p:nvSpPr>
+            <p:cNvPr id="5017" name="도형"/>
+            <p:cNvSpPr/>
+            <p:nvPr/>
+          </p:nvSpPr>
+          <p:spPr>
+            <a:xfrm>
+              <a:off x="2502915" y="35553342"/>
+              <a:ext cx="1823200" cy="1484000"/>
+            </a:xfrm>
+            <a:prstGeom prst="roundRect">
+              <a:avLst>
+                <a:gd name="adj" fmla="val 6000"/>
+              </a:avLst>
+            </a:prstGeom>
+            <a:solidFill>
+              <a:srgbClr val="FFFFFF"/>
+            </a:solidFill>
+            <a:ln w="22225">
+              <a:solidFill>
+                <a:srgbClr val="262626"/>
+              </a:solidFill>
+            </a:ln>
+          </p:spPr>
+          <p:txBody>
+            <a:bodyPr wrap="square" lIns="84800" tIns="42400" rIns="84800" bIns="42400" anchor="ctr">
+              <a:noAutofit/>
+            </a:bodyPr>
+            <a:lstStyle/>
+            <a:p>
+              <a:pPr algn="ctr">
+                <a:lnSpc>
+                  <a:spcPct val="100000"/>
+                </a:lnSpc>
+              </a:pPr>
+              <a:r>
+                <a:rPr lang="ko-KR" altLang="en-US" sz="2337" b="1" dirty="0">
+                  <a:solidFill>
+                    <a:srgbClr val="222222"/>
+                  </a:solidFill>
+                  <a:latin typeface="나눔고딕" pitchFamily="50" charset="-127"/>
+                  <a:ea typeface="나눔고딕" pitchFamily="50" charset="-127"/>
+                  <a:cs typeface="Arial" panose="020B0604020202020204" pitchFamily="34" charset="0"/>
+                </a:rPr>
+                <a:t>사용자</a:t>
+              </a:r>
+            </a:p>
+            <a:p>
+              <a:pPr algn="ctr">
+                <a:lnSpc>
+                  <a:spcPct val="100000"/>
+                </a:lnSpc>
+              </a:pPr>
+              <a:r>
+                <a:rPr lang="ko-KR" altLang="en-US" sz="2003" b="0" dirty="0">
+                  <a:solidFill>
+                    <a:srgbClr val="444444"/>
+                  </a:solidFill>
+                  <a:latin typeface="나눔고딕" pitchFamily="50" charset="-127"/>
+                  <a:ea typeface="나눔고딕" pitchFamily="50" charset="-127"/>
+                  <a:cs typeface="Arial" panose="020B0604020202020204" pitchFamily="34" charset="0"/>
+                </a:rPr>
+                <a:t>질문</a:t>
+              </a:r>
+            </a:p>
+          </p:txBody>
+        </p:sp>
+        <p:sp>
+          <p:nvSpPr>
+            <p:cNvPr id="5018" name="도형"/>
+            <p:cNvSpPr/>
+            <p:nvPr/>
+          </p:nvSpPr>
+          <p:spPr>
+            <a:xfrm>
+              <a:off x="4622915" y="35553342"/>
+              <a:ext cx="1823200" cy="1484000"/>
+            </a:xfrm>
+            <a:prstGeom prst="roundRect">
+              <a:avLst>
+                <a:gd name="adj" fmla="val 6000"/>
+              </a:avLst>
+            </a:prstGeom>
+            <a:solidFill>
+              <a:srgbClr val="FFFFFF"/>
+            </a:solidFill>
+            <a:ln w="44450">
+              <a:solidFill>
+                <a:srgbClr val="262626"/>
+              </a:solidFill>
+            </a:ln>
+          </p:spPr>
+          <p:txBody>
+            <a:bodyPr wrap="square" lIns="84800" tIns="42400" rIns="84800" bIns="42400" anchor="ctr">
+              <a:noAutofit/>
+            </a:bodyPr>
+            <a:lstStyle/>
+            <a:p>
+              <a:pPr algn="ctr">
+                <a:lnSpc>
+                  <a:spcPct val="100000"/>
+                </a:lnSpc>
+              </a:pPr>
+              <a:r>
+                <a:rPr lang="ko-KR" altLang="en-US" sz="2170" b="1" dirty="0">
+                  <a:solidFill>
+                    <a:srgbClr val="222222"/>
+                  </a:solidFill>
+                  <a:latin typeface="나눔고딕" pitchFamily="50" charset="-127"/>
+                  <a:ea typeface="나눔고딕" pitchFamily="50" charset="-127"/>
+                  <a:cs typeface="Arial" panose="020B0604020202020204" pitchFamily="34" charset="0"/>
+                </a:rPr>
+                <a:t>질문 해석</a:t>
+              </a:r>
+            </a:p>
+            <a:p>
+              <a:pPr algn="ctr">
+                <a:lnSpc>
+                  <a:spcPct val="100000"/>
+                </a:lnSpc>
+              </a:pPr>
+              <a:r>
+                <a:rPr lang="ko-KR" altLang="en-US" sz="1586" b="0" dirty="0">
+                  <a:solidFill>
+                    <a:srgbClr val="444444"/>
+                  </a:solidFill>
+                  <a:latin typeface="나눔고딕" pitchFamily="50" charset="-127"/>
+                  <a:ea typeface="나눔고딕" pitchFamily="50" charset="-127"/>
+                  <a:cs typeface="Arial" panose="020B0604020202020204" pitchFamily="34" charset="0"/>
+                </a:rPr>
+                <a:t>의도 CQ1~6</a:t>
+              </a:r>
+            </a:p>
+            <a:p>
+              <a:pPr algn="ctr">
+                <a:lnSpc>
+                  <a:spcPct val="100000"/>
+                </a:lnSpc>
+              </a:pPr>
+              <a:r>
+                <a:rPr lang="ko-KR" altLang="en-US" sz="1586" b="0" dirty="0">
+                  <a:solidFill>
+                    <a:srgbClr val="444444"/>
+                  </a:solidFill>
+                  <a:latin typeface="나눔고딕" pitchFamily="50" charset="-127"/>
+                  <a:ea typeface="나눔고딕" pitchFamily="50" charset="-127"/>
+                  <a:cs typeface="Arial" panose="020B0604020202020204" pitchFamily="34" charset="0"/>
+                </a:rPr>
+                <a:t>댐 · 시점</a:t>
+              </a:r>
+            </a:p>
+          </p:txBody>
+        </p:sp>
+        <p:sp>
+          <p:nvSpPr>
+            <p:cNvPr id="5019" name="도형"/>
+            <p:cNvSpPr/>
+            <p:nvPr/>
+          </p:nvSpPr>
+          <p:spPr>
+            <a:xfrm>
+              <a:off x="6742915" y="35553342"/>
+              <a:ext cx="1823200" cy="1484000"/>
+            </a:xfrm>
+            <a:prstGeom prst="roundRect">
+              <a:avLst>
+                <a:gd name="adj" fmla="val 6000"/>
+              </a:avLst>
+            </a:prstGeom>
+            <a:solidFill>
+              <a:srgbClr val="FFFFFF"/>
+            </a:solidFill>
+            <a:ln w="22225">
+              <a:solidFill>
+                <a:srgbClr val="262626"/>
+              </a:solidFill>
+            </a:ln>
+          </p:spPr>
+          <p:txBody>
+            <a:bodyPr wrap="square" lIns="84800" tIns="42400" rIns="84800" bIns="42400" anchor="ctr">
+              <a:noAutofit/>
+            </a:bodyPr>
+            <a:lstStyle/>
+            <a:p>
+              <a:pPr algn="ctr">
+                <a:lnSpc>
+                  <a:spcPct val="100000"/>
+                </a:lnSpc>
+              </a:pPr>
+              <a:r>
+                <a:rPr lang="ko-KR" altLang="en-US" sz="2170" b="1" dirty="0">
+                  <a:solidFill>
+                    <a:srgbClr val="222222"/>
+                  </a:solidFill>
+                  <a:latin typeface="나눔고딕" pitchFamily="50" charset="-127"/>
+                  <a:ea typeface="나눔고딕" pitchFamily="50" charset="-127"/>
+                  <a:cs typeface="Arial" panose="020B0604020202020204" pitchFamily="34" charset="0"/>
+                </a:rPr>
+                <a:t>근거 검색</a:t>
+              </a:r>
+            </a:p>
+            <a:p>
+              <a:pPr algn="ctr">
+                <a:lnSpc>
+                  <a:spcPct val="100000"/>
+                </a:lnSpc>
+              </a:pPr>
+              <a:r>
+                <a:rPr lang="ko-KR" altLang="en-US" sz="1586" b="0" dirty="0">
+                  <a:solidFill>
+                    <a:srgbClr val="444444"/>
+                  </a:solidFill>
+                  <a:latin typeface="나눔고딕" pitchFamily="50" charset="-127"/>
+                  <a:ea typeface="나눔고딕" pitchFamily="50" charset="-127"/>
+                  <a:cs typeface="Arial" panose="020B0604020202020204" pitchFamily="34" charset="0"/>
+                </a:rPr>
+                <a:t>입력 확인</a:t>
+              </a:r>
+            </a:p>
+            <a:p>
+              <a:pPr algn="ctr">
+                <a:lnSpc>
+                  <a:spcPct val="100000"/>
+                </a:lnSpc>
+              </a:pPr>
+              <a:r>
+                <a:rPr lang="ko-KR" altLang="en-US" sz="1586" b="0" dirty="0">
+                  <a:solidFill>
+                    <a:srgbClr val="444444"/>
+                  </a:solidFill>
+                  <a:latin typeface="나눔고딕" pitchFamily="50" charset="-127"/>
+                  <a:ea typeface="나눔고딕" pitchFamily="50" charset="-127"/>
+                  <a:cs typeface="Arial" panose="020B0604020202020204" pitchFamily="34" charset="0"/>
+                </a:rPr>
+                <a:t>KG · 저장소</a:t>
+              </a:r>
+            </a:p>
+            <a:p>
+              <a:pPr algn="ctr">
+                <a:lnSpc>
+                  <a:spcPct val="100000"/>
+                </a:lnSpc>
+              </a:pPr>
+              <a:r>
+                <a:rPr lang="ko-KR" altLang="en-US" sz="1586" b="0" dirty="0">
+                  <a:solidFill>
+                    <a:srgbClr val="444444"/>
+                  </a:solidFill>
+                  <a:latin typeface="나눔고딕" pitchFamily="50" charset="-127"/>
+                  <a:ea typeface="나눔고딕" pitchFamily="50" charset="-127"/>
+                  <a:cs typeface="Arial" panose="020B0604020202020204" pitchFamily="34" charset="0"/>
+                </a:rPr>
+                <a:t>조회</a:t>
+              </a:r>
+            </a:p>
+          </p:txBody>
+        </p:sp>
+        <p:sp>
+          <p:nvSpPr>
+            <p:cNvPr id="5020" name="도형"/>
+            <p:cNvSpPr/>
+            <p:nvPr/>
+          </p:nvSpPr>
+          <p:spPr>
+            <a:xfrm>
+              <a:off x="8862915" y="35553342"/>
+              <a:ext cx="1823200" cy="1484000"/>
+            </a:xfrm>
+            <a:prstGeom prst="roundRect">
+              <a:avLst>
+                <a:gd name="adj" fmla="val 6000"/>
+              </a:avLst>
+            </a:prstGeom>
+            <a:solidFill>
+              <a:srgbClr val="FFFFFF"/>
+            </a:solidFill>
+            <a:ln w="22225">
+              <a:solidFill>
+                <a:srgbClr val="262626"/>
+              </a:solidFill>
+            </a:ln>
+          </p:spPr>
+          <p:txBody>
+            <a:bodyPr wrap="square" lIns="84800" tIns="42400" rIns="84800" bIns="42400" anchor="ctr">
+              <a:noAutofit/>
+            </a:bodyPr>
+            <a:lstStyle/>
+            <a:p>
+              <a:pPr algn="ctr">
+                <a:lnSpc>
+                  <a:spcPct val="100000"/>
+                </a:lnSpc>
+              </a:pPr>
+              <a:r>
+                <a:rPr lang="ko-KR" altLang="en-US" sz="2170" b="1" dirty="0">
+                  <a:solidFill>
+                    <a:srgbClr val="222222"/>
+                  </a:solidFill>
+                  <a:latin typeface="나눔고딕" pitchFamily="50" charset="-127"/>
+                  <a:ea typeface="나눔고딕" pitchFamily="50" charset="-127"/>
+                  <a:cs typeface="Arial" panose="020B0604020202020204" pitchFamily="34" charset="0"/>
+                </a:rPr>
+                <a:t>근거 묶음</a:t>
+              </a:r>
+            </a:p>
+            <a:p>
+              <a:pPr algn="ctr">
+                <a:lnSpc>
+                  <a:spcPct val="100000"/>
+                </a:lnSpc>
+              </a:pPr>
+              <a:r>
+                <a:rPr lang="ko-KR" altLang="en-US" sz="1586" b="0" dirty="0">
+                  <a:solidFill>
+                    <a:srgbClr val="444444"/>
+                  </a:solidFill>
+                  <a:latin typeface="나눔고딕" pitchFamily="50" charset="-127"/>
+                  <a:ea typeface="나눔고딕" pitchFamily="50" charset="-127"/>
+                  <a:cs typeface="Arial" panose="020B0604020202020204" pitchFamily="34" charset="0"/>
+                </a:rPr>
+                <a:t>출처 번호 부착</a:t>
+              </a:r>
+            </a:p>
+            <a:p>
+              <a:pPr algn="ctr">
+                <a:lnSpc>
+                  <a:spcPct val="100000"/>
+                </a:lnSpc>
+              </a:pPr>
+              <a:r>
+                <a:rPr lang="ko-KR" altLang="en-US" sz="1586" b="0" dirty="0">
+                  <a:solidFill>
+                    <a:srgbClr val="444444"/>
+                  </a:solidFill>
+                  <a:latin typeface="나눔고딕" pitchFamily="50" charset="-127"/>
+                  <a:ea typeface="나눔고딕" pitchFamily="50" charset="-127"/>
+                  <a:cs typeface="Arial" panose="020B0604020202020204" pitchFamily="34" charset="0"/>
+                </a:rPr>
+                <a:t>원값 근거</a:t>
+              </a:r>
+            </a:p>
+          </p:txBody>
+        </p:sp>
+        <p:sp>
+          <p:nvSpPr>
+            <p:cNvPr id="5021" name="도형"/>
+            <p:cNvSpPr/>
+            <p:nvPr/>
+          </p:nvSpPr>
+          <p:spPr>
+            <a:xfrm>
+              <a:off x="10982915" y="35553342"/>
+              <a:ext cx="1823200" cy="1484000"/>
+            </a:xfrm>
+            <a:prstGeom prst="roundRect">
+              <a:avLst>
+                <a:gd name="adj" fmla="val 6000"/>
+              </a:avLst>
+            </a:prstGeom>
+            <a:solidFill>
+              <a:srgbClr val="FFFFFF"/>
+            </a:solidFill>
+            <a:ln w="44450">
+              <a:solidFill>
+                <a:srgbClr val="262626"/>
+              </a:solidFill>
+            </a:ln>
+          </p:spPr>
+          <p:txBody>
+            <a:bodyPr wrap="square" lIns="84800" tIns="42400" rIns="84800" bIns="42400" anchor="ctr">
+              <a:noAutofit/>
+            </a:bodyPr>
+            <a:lstStyle/>
+            <a:p>
+              <a:pPr algn="ctr">
+                <a:lnSpc>
+                  <a:spcPct val="100000"/>
+                </a:lnSpc>
+              </a:pPr>
+              <a:r>
+                <a:rPr lang="ko-KR" altLang="en-US" sz="2170" b="1" dirty="0">
+                  <a:solidFill>
+                    <a:srgbClr val="222222"/>
+                  </a:solidFill>
+                  <a:latin typeface="나눔고딕" pitchFamily="50" charset="-127"/>
+                  <a:ea typeface="나눔고딕" pitchFamily="50" charset="-127"/>
+                  <a:cs typeface="Arial" panose="020B0604020202020204" pitchFamily="34" charset="0"/>
+                </a:rPr>
+                <a:t>답변 생성</a:t>
+              </a:r>
+            </a:p>
+            <a:p>
+              <a:pPr algn="ctr">
+                <a:lnSpc>
+                  <a:spcPct val="100000"/>
+                </a:lnSpc>
+              </a:pPr>
+              <a:r>
+                <a:rPr lang="ko-KR" altLang="en-US" sz="1586" b="0" dirty="0">
+                  <a:solidFill>
+                    <a:srgbClr val="444444"/>
+                  </a:solidFill>
+                  <a:latin typeface="나눔고딕" pitchFamily="50" charset="-127"/>
+                  <a:ea typeface="나눔고딕" pitchFamily="50" charset="-127"/>
+                  <a:cs typeface="Arial" panose="020B0604020202020204" pitchFamily="34" charset="0"/>
+                </a:rPr>
+                <a:t>근거 / 판단</a:t>
+              </a:r>
+            </a:p>
+            <a:p>
+              <a:pPr algn="ctr">
+                <a:lnSpc>
+                  <a:spcPct val="100000"/>
+                </a:lnSpc>
+              </a:pPr>
+              <a:r>
+                <a:rPr lang="ko-KR" altLang="en-US" sz="1586" b="0" dirty="0">
+                  <a:solidFill>
+                    <a:srgbClr val="444444"/>
+                  </a:solidFill>
+                  <a:latin typeface="나눔고딕" pitchFamily="50" charset="-127"/>
+                  <a:ea typeface="나눔고딕" pitchFamily="50" charset="-127"/>
+                  <a:cs typeface="Arial" panose="020B0604020202020204" pitchFamily="34" charset="0"/>
+                </a:rPr>
+                <a:t>분리 작성</a:t>
+              </a:r>
+            </a:p>
+          </p:txBody>
+        </p:sp>
+        <p:cxnSp>
+          <p:nvCxnSpPr>
+            <p:cNvPr id="5022" name="선"/>
+            <p:cNvCxnSpPr/>
+            <p:nvPr/>
+          </p:nvCxnSpPr>
+          <p:spPr>
+            <a:xfrm>
+              <a:off x="4347315" y="36295342"/>
+              <a:ext cx="254400" cy="0"/>
+            </a:xfrm>
+            <a:prstGeom prst="line">
+              <a:avLst/>
+            </a:prstGeom>
+            <a:ln w="31750">
+              <a:solidFill>
+                <a:srgbClr val="3B4A63"/>
+              </a:solidFill>
+              <a:tailEnd type="triangle" w="med" len="med"/>
+            </a:ln>
+          </p:spPr>
+        </p:cxnSp>
+        <p:cxnSp>
+          <p:nvCxnSpPr>
+            <p:cNvPr id="5023" name="선"/>
+            <p:cNvCxnSpPr/>
+            <p:nvPr/>
+          </p:nvCxnSpPr>
+          <p:spPr>
+            <a:xfrm>
+              <a:off x="6467315" y="36295342"/>
+              <a:ext cx="254400" cy="0"/>
+            </a:xfrm>
+            <a:prstGeom prst="line">
+              <a:avLst/>
+            </a:prstGeom>
+            <a:ln w="31750">
+              <a:solidFill>
+                <a:srgbClr val="3B4A63"/>
+              </a:solidFill>
+              <a:tailEnd type="triangle" w="med" len="med"/>
+            </a:ln>
+          </p:spPr>
+        </p:cxnSp>
+        <p:cxnSp>
+          <p:nvCxnSpPr>
+            <p:cNvPr id="5024" name="선"/>
+            <p:cNvCxnSpPr/>
+            <p:nvPr/>
+          </p:nvCxnSpPr>
+          <p:spPr>
+            <a:xfrm>
+              <a:off x="8587315" y="36295342"/>
+              <a:ext cx="254400" cy="0"/>
+            </a:xfrm>
+            <a:prstGeom prst="line">
+              <a:avLst/>
+            </a:prstGeom>
+            <a:ln w="31750">
+              <a:solidFill>
+                <a:srgbClr val="3B4A63"/>
+              </a:solidFill>
+              <a:tailEnd type="triangle" w="med" len="med"/>
+            </a:ln>
+          </p:spPr>
+        </p:cxnSp>
+        <p:cxnSp>
+          <p:nvCxnSpPr>
+            <p:cNvPr id="5025" name="선"/>
+            <p:cNvCxnSpPr/>
+            <p:nvPr/>
+          </p:nvCxnSpPr>
+          <p:spPr>
+            <a:xfrm>
+              <a:off x="10707315" y="36295342"/>
+              <a:ext cx="254400" cy="0"/>
+            </a:xfrm>
+            <a:prstGeom prst="line">
+              <a:avLst/>
+            </a:prstGeom>
+            <a:ln w="31750">
+              <a:solidFill>
+                <a:srgbClr val="3B4A63"/>
+              </a:solidFill>
+              <a:tailEnd type="triangle" w="med" len="med"/>
+            </a:ln>
+          </p:spPr>
+        </p:cxnSp>
+        <p:cxnSp>
+          <p:nvCxnSpPr>
+            <p:cNvPr id="5026" name="선"/>
+            <p:cNvCxnSpPr/>
+            <p:nvPr/>
+          </p:nvCxnSpPr>
+          <p:spPr>
+            <a:xfrm>
+              <a:off x="11343315" y="34344942"/>
+              <a:ext cx="0" cy="360400"/>
+            </a:xfrm>
+            <a:prstGeom prst="line">
+              <a:avLst/>
+            </a:prstGeom>
+            <a:ln w="25400">
+              <a:solidFill>
+                <a:srgbClr val="555555"/>
+              </a:solidFill>
+              <a:prstDash val="dash"/>
+            </a:ln>
+          </p:spPr>
+        </p:cxnSp>
+        <p:cxnSp>
+          <p:nvCxnSpPr>
+            <p:cNvPr id="5027" name="선"/>
+            <p:cNvCxnSpPr/>
+            <p:nvPr/>
+          </p:nvCxnSpPr>
+          <p:spPr>
+            <a:xfrm flipH="1">
+              <a:off x="7654515" y="34705342"/>
+              <a:ext cx="3688800" cy="0"/>
+            </a:xfrm>
+            <a:prstGeom prst="line">
+              <a:avLst/>
+            </a:prstGeom>
+            <a:ln w="25400">
+              <a:solidFill>
+                <a:srgbClr val="555555"/>
+              </a:solidFill>
+              <a:prstDash val="dash"/>
+            </a:ln>
+          </p:spPr>
+        </p:cxnSp>
+        <p:cxnSp>
+          <p:nvCxnSpPr>
+            <p:cNvPr id="5028" name="선"/>
+            <p:cNvCxnSpPr/>
+            <p:nvPr/>
+          </p:nvCxnSpPr>
+          <p:spPr>
+            <a:xfrm>
+              <a:off x="7654515" y="34705342"/>
+              <a:ext cx="0" cy="826800"/>
+            </a:xfrm>
+            <a:prstGeom prst="line">
+              <a:avLst/>
+            </a:prstGeom>
+            <a:ln w="25400">
+              <a:solidFill>
+                <a:srgbClr val="555555"/>
+              </a:solidFill>
+              <a:prstDash val="dash"/>
+              <a:tailEnd type="triangle" w="med" len="med"/>
+            </a:ln>
+          </p:spPr>
+        </p:cxnSp>
+        <p:sp>
+          <p:nvSpPr>
+            <p:cNvPr id="5029" name="글상자"/>
+            <p:cNvSpPr/>
+            <p:nvPr/>
+          </p:nvSpPr>
+          <p:spPr>
+            <a:xfrm>
+              <a:off x="7866515" y="34768942"/>
+              <a:ext cx="3180000" cy="296800"/>
+            </a:xfrm>
+            <a:prstGeom prst="rect">
+              <a:avLst/>
+            </a:prstGeom>
+            <a:noFill/>
+            <a:ln>
+              <a:noFill/>
+            </a:ln>
+          </p:spPr>
+          <p:txBody>
+            <a:bodyPr wrap="square" lIns="21200" tIns="10600" rIns="21200" bIns="10600" anchor="ctr">
+              <a:noAutofit/>
+            </a:bodyPr>
+            <a:lstStyle/>
+            <a:p>
+              <a:pPr algn="l">
+                <a:lnSpc>
+                  <a:spcPct val="100000"/>
+                </a:lnSpc>
+              </a:pPr>
+              <a:r>
+                <a:rPr lang="ko-KR" altLang="en-US" sz="1669" b="0" dirty="0">
+                  <a:solidFill>
+                    <a:srgbClr val="444444"/>
+                  </a:solidFill>
+                  <a:latin typeface="나눔고딕" pitchFamily="50" charset="-127"/>
+                  <a:ea typeface="나눔고딕" pitchFamily="50" charset="-127"/>
+                  <a:cs typeface="Arial" panose="020B0604020202020204" pitchFamily="34" charset="0"/>
+                </a:rPr>
+                <a:t>저장소에서 읽어 옴</a:t>
+              </a:r>
+            </a:p>
+          </p:txBody>
+        </p:sp>
+        <p:sp>
+          <p:nvSpPr>
+            <p:cNvPr id="5030" name="도형"/>
+            <p:cNvSpPr/>
+            <p:nvPr/>
+          </p:nvSpPr>
+          <p:spPr>
+            <a:xfrm>
+              <a:off x="4622915" y="37206942"/>
+              <a:ext cx="1823200" cy="424000"/>
+            </a:xfrm>
+            <a:prstGeom prst="roundRect">
+              <a:avLst>
+                <a:gd name="adj" fmla="val 8000"/>
+              </a:avLst>
+            </a:prstGeom>
+            <a:solidFill>
+              <a:srgbClr val="FFFFFF"/>
+            </a:solidFill>
+            <a:ln w="44450">
+              <a:solidFill>
+                <a:srgbClr val="262626"/>
+              </a:solidFill>
+            </a:ln>
+          </p:spPr>
+          <p:txBody>
+            <a:bodyPr wrap="square" lIns="84800" tIns="42400" rIns="84800" bIns="42400" anchor="ctr">
+              <a:noAutofit/>
+            </a:bodyPr>
+            <a:lstStyle/>
+            <a:p>
+              <a:pPr algn="ctr">
+                <a:lnSpc>
+                  <a:spcPct val="100000"/>
+                </a:lnSpc>
+              </a:pPr>
+              <a:r>
+                <a:rPr lang="ko-KR" altLang="en-US" sz="2003" b="1" dirty="0">
+                  <a:solidFill>
+                    <a:srgbClr val="222222"/>
+                  </a:solidFill>
+                  <a:latin typeface="나눔고딕" pitchFamily="50" charset="-127"/>
+                  <a:ea typeface="나눔고딕" pitchFamily="50" charset="-127"/>
+                  <a:cs typeface="Arial" panose="020B0604020202020204" pitchFamily="34" charset="0"/>
+                </a:rPr>
+                <a:t>LLM</a:t>
+              </a:r>
+            </a:p>
+          </p:txBody>
+        </p:sp>
+        <p:sp>
+          <p:nvSpPr>
+            <p:cNvPr id="5031" name="도형"/>
+            <p:cNvSpPr/>
+            <p:nvPr/>
+          </p:nvSpPr>
+          <p:spPr>
+            <a:xfrm>
+              <a:off x="6742915" y="37206942"/>
+              <a:ext cx="3943200" cy="424000"/>
+            </a:xfrm>
+            <a:prstGeom prst="roundRect">
+              <a:avLst>
+                <a:gd name="adj" fmla="val 8000"/>
+              </a:avLst>
+            </a:prstGeom>
+            <a:solidFill>
+              <a:srgbClr val="FFFFFF"/>
+            </a:solidFill>
+            <a:ln w="22225">
+              <a:solidFill>
+                <a:srgbClr val="262626"/>
+              </a:solidFill>
+            </a:ln>
+          </p:spPr>
+          <p:txBody>
+            <a:bodyPr wrap="square" lIns="84800" tIns="42400" rIns="84800" bIns="42400" anchor="ctr">
+              <a:noAutofit/>
+            </a:bodyPr>
+            <a:lstStyle/>
+            <a:p>
+              <a:pPr algn="ctr">
+                <a:lnSpc>
+                  <a:spcPct val="100000"/>
+                </a:lnSpc>
+              </a:pPr>
+              <a:r>
+                <a:rPr lang="ko-KR" altLang="en-US" sz="2003" b="1" dirty="0">
+                  <a:solidFill>
+                    <a:srgbClr val="222222"/>
+                  </a:solidFill>
+                  <a:latin typeface="나눔고딕" pitchFamily="50" charset="-127"/>
+                  <a:ea typeface="나눔고딕" pitchFamily="50" charset="-127"/>
+                  <a:cs typeface="Arial" panose="020B0604020202020204" pitchFamily="34" charset="0"/>
+                </a:rPr>
+                <a:t>자동화 (코드)</a:t>
+              </a:r>
+            </a:p>
+          </p:txBody>
+        </p:sp>
+        <p:sp>
+          <p:nvSpPr>
+            <p:cNvPr id="5032" name="도형"/>
+            <p:cNvSpPr/>
+            <p:nvPr/>
+          </p:nvSpPr>
+          <p:spPr>
+            <a:xfrm>
+              <a:off x="10982915" y="37206942"/>
+              <a:ext cx="1823200" cy="424000"/>
+            </a:xfrm>
+            <a:prstGeom prst="roundRect">
+              <a:avLst>
+                <a:gd name="adj" fmla="val 8000"/>
+              </a:avLst>
+            </a:prstGeom>
+            <a:solidFill>
+              <a:srgbClr val="FFFFFF"/>
+            </a:solidFill>
+            <a:ln w="44450">
+              <a:solidFill>
+                <a:srgbClr val="262626"/>
+              </a:solidFill>
+            </a:ln>
+          </p:spPr>
+          <p:txBody>
+            <a:bodyPr wrap="square" lIns="84800" tIns="42400" rIns="84800" bIns="42400" anchor="ctr">
+              <a:noAutofit/>
+            </a:bodyPr>
+            <a:lstStyle/>
+            <a:p>
+              <a:pPr algn="ctr">
+                <a:lnSpc>
+                  <a:spcPct val="100000"/>
+                </a:lnSpc>
+              </a:pPr>
+              <a:r>
+                <a:rPr lang="ko-KR" altLang="en-US" sz="2003" b="1" dirty="0">
+                  <a:solidFill>
+                    <a:srgbClr val="222222"/>
+                  </a:solidFill>
+                  <a:latin typeface="나눔고딕" pitchFamily="50" charset="-127"/>
+                  <a:ea typeface="나눔고딕" pitchFamily="50" charset="-127"/>
+                  <a:cs typeface="Arial" panose="020B0604020202020204" pitchFamily="34" charset="0"/>
+                </a:rPr>
+                <a:t>LLM</a:t>
+              </a:r>
+            </a:p>
+          </p:txBody>
+        </p:sp>
+        <p:sp>
+          <p:nvSpPr>
+            <p:cNvPr id="5033" name="글상자"/>
+            <p:cNvSpPr/>
+            <p:nvPr/>
+          </p:nvSpPr>
+          <p:spPr>
+            <a:xfrm>
+              <a:off x="2354515" y="37715742"/>
+              <a:ext cx="10600000" cy="318000"/>
+            </a:xfrm>
+            <a:prstGeom prst="rect">
+              <a:avLst/>
+            </a:prstGeom>
+            <a:noFill/>
+            <a:ln>
+              <a:noFill/>
+            </a:ln>
+          </p:spPr>
+          <p:txBody>
+            <a:bodyPr wrap="square" lIns="21200" tIns="10600" rIns="21200" bIns="10600" anchor="ctr">
+              <a:noAutofit/>
+            </a:bodyPr>
+            <a:lstStyle/>
+            <a:p>
+              <a:pPr algn="ctr">
+                <a:lnSpc>
+                  <a:spcPct val="100000"/>
+                </a:lnSpc>
+              </a:pPr>
+              <a:r>
+                <a:rPr lang="ko-KR" altLang="en-US" sz="1753" b="0" dirty="0">
+                  <a:solidFill>
+                    <a:srgbClr val="444444"/>
+                  </a:solidFill>
+                  <a:latin typeface="나눔고딕" pitchFamily="50" charset="-127"/>
+                  <a:ea typeface="나눔고딕" pitchFamily="50" charset="-127"/>
+                  <a:cs typeface="Arial" panose="020B0604020202020204" pitchFamily="34" charset="0"/>
+                </a:rPr>
+                <a:t>굵은 테두리: LLM,  가는 테두리: 정해진 규칙으로 동작하는 코드</a:t>
+              </a:r>
+            </a:p>
+          </p:txBody>
+        </p:sp>
+      </p:grpSp>
+      <p:sp>
+        <p:nvSpPr>
+          <p:cNvPr id="1018" name="본문"/>
+          <p:cNvSpPr txBox="1"/>
+          <p:nvPr/>
+        </p:nvSpPr>
+        <p:spPr>
+          <a:xfrm>
+            <a:off x="597946" y="38348142"/>
+            <a:ext cx="14113138" cy="600000"/>
+          </a:xfrm>
+          <a:prstGeom prst="rect">
+            <a:avLst/>
+          </a:prstGeom>
+          <a:noFill/>
+          <a:ln>
+            <a:noFill/>
+          </a:ln>
+        </p:spPr>
+        <p:txBody>
+          <a:bodyPr wrap="square" lIns="66158" tIns="33079" rIns="66158" bIns="33079" anchor="t">
+            <a:noAutofit/>
+          </a:bodyPr>
+          <a:lstStyle/>
+          <a:p>
+            <a:pPr marL="0" indent="0" algn="ctr">
+              <a:lnSpc>
+                <a:spcPct val="118000"/>
+              </a:lnSpc>
+              <a:spcAft>
+                <a:spcPts val="600"/>
+              </a:spcAft>
+              <a:buNone/>
+            </a:pPr>
+            <a:r>
+              <a:rPr lang="ko-KR" altLang="en-US" sz="2200" b="0" dirty="0">
+                <a:solidFill>
+                  <a:schemeClr val="tx1">
+                    <a:lumMod val="85000"/>
+                    <a:lumOff val="15000"/>
+                  </a:schemeClr>
+                </a:solidFill>
+                <a:latin typeface="나눔고딕" pitchFamily="50" charset="-127"/>
+                <a:ea typeface="나눔고딕" pitchFamily="50" charset="-127"/>
+                <a:cs typeface="Arial" panose="020B0604020202020204" pitchFamily="34" charset="0"/>
+              </a:rPr>
+              <a:t>그림 1. 연구의 구성</a:t>
             </a:r>
           </a:p>
         </p:txBody>
       </p:sp>
       <p:sp>
         <p:nvSpPr>
-          <p:cNvPr id="1023" name="직사각형 415"/>
+          <p:cNvPr id="1019" name="본문"/>
+          <p:cNvSpPr txBox="1"/>
+          <p:nvPr/>
+        </p:nvSpPr>
+        <p:spPr>
+          <a:xfrm>
+            <a:off x="597946" y="38948142"/>
+            <a:ext cx="14113138" cy="2021145"/>
+          </a:xfrm>
+          <a:prstGeom prst="rect">
+            <a:avLst/>
+          </a:prstGeom>
+          <a:noFill/>
+          <a:ln>
+            <a:noFill/>
+          </a:ln>
+        </p:spPr>
+        <p:txBody>
+          <a:bodyPr wrap="square" lIns="66158" tIns="33079" rIns="66158" bIns="33079" anchor="t">
+            <a:noAutofit/>
+          </a:bodyPr>
+          <a:lstStyle/>
+          <a:p>
+            <a:pPr marL="334726" indent="-334726">
+              <a:lnSpc>
+                <a:spcPct val="118000"/>
+              </a:lnSpc>
+              <a:spcAft>
+                <a:spcPts val="600"/>
+              </a:spcAft>
+              <a:buBlip>
+                <a:blip r:embed="rId4"/>
+              </a:buBlip>
+            </a:pPr>
+            <a:r>
+              <a:rPr lang="ko-KR" altLang="en-US" sz="2400" b="1" dirty="0">
+                <a:solidFill>
+                  <a:schemeClr val="tx1">
+                    <a:lumMod val="85000"/>
+                    <a:lumOff val="15000"/>
+                  </a:schemeClr>
+                </a:solidFill>
+                <a:latin typeface="나눔고딕" pitchFamily="50" charset="-127"/>
+                <a:ea typeface="나눔고딕" pitchFamily="50" charset="-127"/>
+                <a:cs typeface="Arial" panose="020B0604020202020204" pitchFamily="34" charset="0"/>
+              </a:rPr>
+              <a:t>KG 구축</a:t>
+            </a:r>
+            <a:r>
+              <a:rPr lang="ko-KR" altLang="en-US" sz="2400" b="0" dirty="0">
+                <a:solidFill>
+                  <a:schemeClr val="tx1">
+                    <a:lumMod val="85000"/>
+                    <a:lumOff val="15000"/>
+                  </a:schemeClr>
+                </a:solidFill>
+                <a:latin typeface="나눔고딕" pitchFamily="50" charset="-127"/>
+                <a:ea typeface="나눔고딕" pitchFamily="50" charset="-127"/>
+                <a:cs typeface="Arial" panose="020B0604020202020204" pitchFamily="34" charset="0"/>
+              </a:rPr>
+              <a:t>: 원자료 4종을 6단계로 처리하고, 측정값과 원문은 KG 밖 저장소에 둠</a:t>
+            </a:r>
+          </a:p>
+          <a:p>
+            <a:pPr marL="334726" indent="-334726">
+              <a:lnSpc>
+                <a:spcPct val="118000"/>
+              </a:lnSpc>
+              <a:spcAft>
+                <a:spcPts val="600"/>
+              </a:spcAft>
+              <a:buBlip>
+                <a:blip r:embed="rId4"/>
+              </a:buBlip>
+            </a:pPr>
+            <a:r>
+              <a:rPr lang="ko-KR" altLang="en-US" sz="2400" b="1" dirty="0">
+                <a:solidFill>
+                  <a:schemeClr val="tx1">
+                    <a:lumMod val="85000"/>
+                    <a:lumOff val="15000"/>
+                  </a:schemeClr>
+                </a:solidFill>
+                <a:latin typeface="나눔고딕" pitchFamily="50" charset="-127"/>
+                <a:ea typeface="나눔고딕" pitchFamily="50" charset="-127"/>
+                <a:cs typeface="Arial" panose="020B0604020202020204" pitchFamily="34" charset="0"/>
+              </a:rPr>
+              <a:t>근거 검색</a:t>
+            </a:r>
+            <a:r>
+              <a:rPr lang="ko-KR" altLang="en-US" sz="2400" b="0" dirty="0">
+                <a:solidFill>
+                  <a:schemeClr val="tx1">
+                    <a:lumMod val="85000"/>
+                    <a:lumOff val="15000"/>
+                  </a:schemeClr>
+                </a:solidFill>
+                <a:latin typeface="나눔고딕" pitchFamily="50" charset="-127"/>
+                <a:ea typeface="나눔고딕" pitchFamily="50" charset="-127"/>
+                <a:cs typeface="Arial" panose="020B0604020202020204" pitchFamily="34" charset="0"/>
+              </a:rPr>
+              <a:t>: 의도로 KG·저장소에서 근거를 모아 출처 번호가 붙은 </a:t>
+            </a:r>
+            <a:r>
+              <a:rPr lang="ko-KR" altLang="en-US" sz="2400" b="1" dirty="0">
+                <a:solidFill>
+                  <a:schemeClr val="tx1">
+                    <a:lumMod val="85000"/>
+                    <a:lumOff val="15000"/>
+                  </a:schemeClr>
+                </a:solidFill>
+                <a:latin typeface="나눔고딕" pitchFamily="50" charset="-127"/>
+                <a:ea typeface="나눔고딕" pitchFamily="50" charset="-127"/>
+                <a:cs typeface="Arial" panose="020B0604020202020204" pitchFamily="34" charset="0"/>
+              </a:rPr>
+              <a:t>근거 묶음</a:t>
+            </a:r>
+            <a:r>
+              <a:rPr lang="ko-KR" altLang="en-US" sz="2400" b="0" dirty="0">
+                <a:solidFill>
+                  <a:schemeClr val="tx1">
+                    <a:lumMod val="85000"/>
+                    <a:lumOff val="15000"/>
+                  </a:schemeClr>
+                </a:solidFill>
+                <a:latin typeface="나눔고딕" pitchFamily="50" charset="-127"/>
+                <a:ea typeface="나눔고딕" pitchFamily="50" charset="-127"/>
+                <a:cs typeface="Arial" panose="020B0604020202020204" pitchFamily="34" charset="0"/>
+              </a:rPr>
+              <a:t>을 만드는 일은 </a:t>
+            </a:r>
+            <a:r>
+              <a:rPr lang="ko-KR" altLang="en-US" sz="2400" b="1" dirty="0">
+                <a:solidFill>
+                  <a:schemeClr val="tx1">
+                    <a:lumMod val="85000"/>
+                    <a:lumOff val="15000"/>
+                  </a:schemeClr>
+                </a:solidFill>
+                <a:latin typeface="나눔고딕" pitchFamily="50" charset="-127"/>
+                <a:ea typeface="나눔고딕" pitchFamily="50" charset="-127"/>
+                <a:cs typeface="Arial" panose="020B0604020202020204" pitchFamily="34" charset="0"/>
+              </a:rPr>
+              <a:t>코드로 자동화</a:t>
+            </a:r>
+            <a:r>
+              <a:rPr lang="ko-KR" altLang="en-US" sz="2400" b="0" dirty="0">
+                <a:solidFill>
+                  <a:schemeClr val="tx1">
+                    <a:lumMod val="85000"/>
+                    <a:lumOff val="15000"/>
+                  </a:schemeClr>
+                </a:solidFill>
+                <a:latin typeface="나눔고딕" pitchFamily="50" charset="-127"/>
+                <a:ea typeface="나눔고딕" pitchFamily="50" charset="-127"/>
+                <a:cs typeface="Arial" panose="020B0604020202020204" pitchFamily="34" charset="0"/>
+              </a:rPr>
+              <a:t>함</a:t>
+            </a:r>
+          </a:p>
+          <a:p>
+            <a:pPr marL="334726" indent="-334726">
+              <a:lnSpc>
+                <a:spcPct val="118000"/>
+              </a:lnSpc>
+              <a:spcAft>
+                <a:spcPts val="600"/>
+              </a:spcAft>
+              <a:buBlip>
+                <a:blip r:embed="rId4"/>
+              </a:buBlip>
+            </a:pPr>
+            <a:r>
+              <a:rPr lang="ko-KR" altLang="en-US" sz="2400" b="1" dirty="0">
+                <a:solidFill>
+                  <a:schemeClr val="tx1">
+                    <a:lumMod val="85000"/>
+                    <a:lumOff val="15000"/>
+                  </a:schemeClr>
+                </a:solidFill>
+                <a:latin typeface="나눔고딕" pitchFamily="50" charset="-127"/>
+                <a:ea typeface="나눔고딕" pitchFamily="50" charset="-127"/>
+                <a:cs typeface="Arial" panose="020B0604020202020204" pitchFamily="34" charset="0"/>
+              </a:rPr>
+              <a:t>LLM</a:t>
+            </a:r>
+            <a:r>
+              <a:rPr lang="ko-KR" altLang="en-US" sz="2400" b="0" dirty="0">
+                <a:solidFill>
+                  <a:schemeClr val="tx1">
+                    <a:lumMod val="85000"/>
+                    <a:lumOff val="15000"/>
+                  </a:schemeClr>
+                </a:solidFill>
+                <a:latin typeface="나눔고딕" pitchFamily="50" charset="-127"/>
+                <a:ea typeface="나눔고딕" pitchFamily="50" charset="-127"/>
+                <a:cs typeface="Arial" panose="020B0604020202020204" pitchFamily="34" charset="0"/>
+              </a:rPr>
+              <a:t>은 질문 해석과 답변 생성만 맡고, 비교·판단은 LLM이 하되 </a:t>
+            </a:r>
+            <a:r>
+              <a:rPr lang="ko-KR" altLang="en-US" sz="2400" b="1" dirty="0">
+                <a:solidFill>
+                  <a:schemeClr val="tx1">
+                    <a:lumMod val="85000"/>
+                    <a:lumOff val="15000"/>
+                  </a:schemeClr>
+                </a:solidFill>
+                <a:latin typeface="나눔고딕" pitchFamily="50" charset="-127"/>
+                <a:ea typeface="나눔고딕" pitchFamily="50" charset="-127"/>
+                <a:cs typeface="Arial" panose="020B0604020202020204" pitchFamily="34" charset="0"/>
+              </a:rPr>
+              <a:t>근거와 판단을 나누어</a:t>
+            </a:r>
+            <a:r>
+              <a:rPr lang="ko-KR" altLang="en-US" sz="2400" b="0" dirty="0">
+                <a:solidFill>
+                  <a:schemeClr val="tx1">
+                    <a:lumMod val="85000"/>
+                    <a:lumOff val="15000"/>
+                  </a:schemeClr>
+                </a:solidFill>
+                <a:latin typeface="나눔고딕" pitchFamily="50" charset="-127"/>
+                <a:ea typeface="나눔고딕" pitchFamily="50" charset="-127"/>
+                <a:cs typeface="Arial" panose="020B0604020202020204" pitchFamily="34" charset="0"/>
+              </a:rPr>
+              <a:t> 표시함</a:t>
+            </a:r>
+          </a:p>
+        </p:txBody>
+      </p:sp>
+      <p:sp>
+        <p:nvSpPr>
+          <p:cNvPr id="1020" name="직사각형 1"/>
           <p:cNvSpPr/>
           <p:nvPr/>
         </p:nvSpPr>
         <p:spPr>
           <a:xfrm>
-            <a:off x="15803042" y="20718449"/>
+            <a:off x="15691431" y="6350000"/>
+            <a:ext cx="13943667" cy="1023024"/>
+          </a:xfrm>
+          <a:prstGeom prst="rect">
+            <a:avLst/>
+          </a:prstGeom>
+          <a:solidFill>
+            <a:schemeClr val="accent1">
+              <a:lumMod val="75000"/>
+            </a:schemeClr>
+          </a:solidFill>
+          <a:ln w="9525">
+            <a:noFill/>
+            <a:miter lim="800000"/>
+            <a:headEnd/>
+            <a:tailEnd/>
+          </a:ln>
+        </p:spPr>
+        <p:txBody>
+          <a:bodyPr wrap="square" lIns="222728" tIns="111366" rIns="222728" bIns="111366" anchor="ctr"/>
+          <a:lstStyle/>
+          <a:p>
+            <a:pPr defTabSz="2048653"/>
+            <a:r>
+              <a:rPr lang="ko-KR" altLang="en-US" sz="4800" b="1" dirty="0">
+                <a:ln>
+                  <a:solidFill>
+                    <a:schemeClr val="accent1">
+                      <a:alpha val="0"/>
+                    </a:schemeClr>
+                  </a:solidFill>
+                </a:ln>
+                <a:solidFill>
+                  <a:schemeClr val="bg1"/>
+                </a:solidFill>
+                <a:effectLst>
+                  <a:outerShdw blurRad="38100" dist="38100" dir="2700000" algn="tl">
+                    <a:srgbClr val="000000">
+                      <a:alpha val="43137"/>
+                    </a:srgbClr>
+                  </a:outerShdw>
+                </a:effectLst>
+                <a:latin typeface="나눔고딕 ExtraBold" panose="020D0904000000000000" pitchFamily="50" charset="-127"/>
+                <a:ea typeface="나눔고딕 ExtraBold" panose="020D0904000000000000" pitchFamily="50" charset="-127"/>
+                <a:cs typeface="Arial Unicode MS" panose="020B0604020202020204" pitchFamily="50" charset="-127"/>
+              </a:rPr>
+              <a:t>KG 구축</a:t>
+            </a:r>
+          </a:p>
+        </p:txBody>
+      </p:sp>
+      <p:sp>
+        <p:nvSpPr>
+          <p:cNvPr id="1021" name="본문"/>
+          <p:cNvSpPr txBox="1"/>
+          <p:nvPr/>
+        </p:nvSpPr>
+        <p:spPr>
+          <a:xfrm>
+            <a:off x="15570184" y="7493024"/>
+            <a:ext cx="14113138" cy="1944945"/>
+          </a:xfrm>
+          <a:prstGeom prst="rect">
+            <a:avLst/>
+          </a:prstGeom>
+          <a:noFill/>
+          <a:ln>
+            <a:noFill/>
+          </a:ln>
+        </p:spPr>
+        <p:txBody>
+          <a:bodyPr wrap="square" lIns="66158" tIns="33079" rIns="66158" bIns="33079" anchor="t">
+            <a:noAutofit/>
+          </a:bodyPr>
+          <a:lstStyle/>
+          <a:p>
+            <a:pPr marL="334726" indent="-334726">
+              <a:lnSpc>
+                <a:spcPct val="118000"/>
+              </a:lnSpc>
+              <a:spcAft>
+                <a:spcPts val="600"/>
+              </a:spcAft>
+              <a:buBlip>
+                <a:blip r:embed="rId4"/>
+              </a:buBlip>
+            </a:pPr>
+            <a:r>
+              <a:rPr lang="ko-KR" altLang="en-US" sz="2400" b="1" dirty="0">
+                <a:solidFill>
+                  <a:schemeClr val="tx1">
+                    <a:lumMod val="85000"/>
+                    <a:lumOff val="15000"/>
+                  </a:schemeClr>
+                </a:solidFill>
+                <a:latin typeface="나눔고딕" pitchFamily="50" charset="-127"/>
+                <a:ea typeface="나눔고딕" pitchFamily="50" charset="-127"/>
+                <a:cs typeface="Arial" panose="020B0604020202020204" pitchFamily="34" charset="0"/>
+              </a:rPr>
+              <a:t>6단계</a:t>
+            </a:r>
+            <a:r>
+              <a:rPr lang="ko-KR" altLang="en-US" sz="2400" b="0" dirty="0">
+                <a:solidFill>
+                  <a:schemeClr val="tx1">
+                    <a:lumMod val="85000"/>
+                    <a:lumOff val="15000"/>
+                  </a:schemeClr>
+                </a:solidFill>
+                <a:latin typeface="나눔고딕" pitchFamily="50" charset="-127"/>
+                <a:ea typeface="나눔고딕" pitchFamily="50" charset="-127"/>
+                <a:cs typeface="Arial" panose="020B0604020202020204" pitchFamily="34" charset="0"/>
+              </a:rPr>
+              <a:t>: 전처리 → 구조화 자료 매핑 → 문서 자료 추출 → 관계 연결 → 검증 → 저장</a:t>
+            </a:r>
+          </a:p>
+          <a:p>
+            <a:pPr marL="334726" indent="-334726">
+              <a:lnSpc>
+                <a:spcPct val="118000"/>
+              </a:lnSpc>
+              <a:spcAft>
+                <a:spcPts val="600"/>
+              </a:spcAft>
+              <a:buBlip>
+                <a:blip r:embed="rId4"/>
+              </a:buBlip>
+            </a:pPr>
+            <a:r>
+              <a:rPr lang="ko-KR" altLang="en-US" sz="2400" b="0" dirty="0">
+                <a:solidFill>
+                  <a:schemeClr val="tx1">
+                    <a:lumMod val="85000"/>
+                    <a:lumOff val="15000"/>
+                  </a:schemeClr>
+                </a:solidFill>
+                <a:latin typeface="나눔고딕" pitchFamily="50" charset="-127"/>
+                <a:ea typeface="나눔고딕" pitchFamily="50" charset="-127"/>
+                <a:cs typeface="Arial" panose="020B0604020202020204" pitchFamily="34" charset="0"/>
+              </a:rPr>
+              <a:t>승인 기록 한 행은 </a:t>
+            </a:r>
+            <a:r>
+              <a:rPr lang="ko-KR" altLang="en-US" sz="2400" b="1" dirty="0">
+                <a:solidFill>
+                  <a:schemeClr val="tx1">
+                    <a:lumMod val="85000"/>
+                    <a:lumOff val="15000"/>
+                  </a:schemeClr>
+                </a:solidFill>
+                <a:latin typeface="나눔고딕" pitchFamily="50" charset="-127"/>
+                <a:ea typeface="나눔고딕" pitchFamily="50" charset="-127"/>
+                <a:cs typeface="Arial" panose="020B0604020202020204" pitchFamily="34" charset="0"/>
+              </a:rPr>
+              <a:t>Approval</a:t>
+            </a:r>
+            <a:r>
+              <a:rPr lang="ko-KR" altLang="en-US" sz="2400" b="0" dirty="0">
+                <a:solidFill>
+                  <a:schemeClr val="tx1">
+                    <a:lumMod val="85000"/>
+                    <a:lumOff val="15000"/>
+                  </a:schemeClr>
+                </a:solidFill>
+                <a:latin typeface="나눔고딕" pitchFamily="50" charset="-127"/>
+                <a:ea typeface="나눔고딕" pitchFamily="50" charset="-127"/>
+                <a:cs typeface="Arial" panose="020B0604020202020204" pitchFamily="34" charset="0"/>
+              </a:rPr>
+              <a:t>과 근거자료로, 비고에서 규칙으로 읽은 운영행위는 </a:t>
+            </a:r>
+            <a:r>
+              <a:rPr lang="ko-KR" altLang="en-US" sz="2400" b="1" dirty="0">
+                <a:solidFill>
+                  <a:schemeClr val="tx1">
+                    <a:lumMod val="85000"/>
+                    <a:lumOff val="15000"/>
+                  </a:schemeClr>
+                </a:solidFill>
+                <a:latin typeface="나눔고딕" pitchFamily="50" charset="-127"/>
+                <a:ea typeface="나눔고딕" pitchFamily="50" charset="-127"/>
+                <a:cs typeface="Arial" panose="020B0604020202020204" pitchFamily="34" charset="0"/>
+              </a:rPr>
+              <a:t>Operation</a:t>
+            </a:r>
+            <a:r>
+              <a:rPr lang="ko-KR" altLang="en-US" sz="2400" b="0" dirty="0">
+                <a:solidFill>
+                  <a:schemeClr val="tx1">
+                    <a:lumMod val="85000"/>
+                    <a:lumOff val="15000"/>
+                  </a:schemeClr>
+                </a:solidFill>
+                <a:latin typeface="나눔고딕" pitchFamily="50" charset="-127"/>
+                <a:ea typeface="나눔고딕" pitchFamily="50" charset="-127"/>
+                <a:cs typeface="Arial" panose="020B0604020202020204" pitchFamily="34" charset="0"/>
+              </a:rPr>
+              <a:t>으로, 별표3의 제한수위는 </a:t>
+            </a:r>
+            <a:r>
+              <a:rPr lang="ko-KR" altLang="en-US" sz="2400" b="1" dirty="0">
+                <a:solidFill>
+                  <a:schemeClr val="tx1">
+                    <a:lumMod val="85000"/>
+                    <a:lumOff val="15000"/>
+                  </a:schemeClr>
+                </a:solidFill>
+                <a:latin typeface="나눔고딕" pitchFamily="50" charset="-127"/>
+                <a:ea typeface="나눔고딕" pitchFamily="50" charset="-127"/>
+                <a:cs typeface="Arial" panose="020B0604020202020204" pitchFamily="34" charset="0"/>
+              </a:rPr>
+              <a:t>Criterion</a:t>
+            </a:r>
+            <a:r>
+              <a:rPr lang="ko-KR" altLang="en-US" sz="2400" b="0" dirty="0">
+                <a:solidFill>
+                  <a:schemeClr val="tx1">
+                    <a:lumMod val="85000"/>
+                    <a:lumOff val="15000"/>
+                  </a:schemeClr>
+                </a:solidFill>
+                <a:latin typeface="나눔고딕" pitchFamily="50" charset="-127"/>
+                <a:ea typeface="나눔고딕" pitchFamily="50" charset="-127"/>
+                <a:cs typeface="Arial" panose="020B0604020202020204" pitchFamily="34" charset="0"/>
+              </a:rPr>
+              <a:t>으로 만듦. 측정값은 KG에 넣지 않고 찾아가는 키(</a:t>
+            </a:r>
+            <a:r>
+              <a:rPr lang="ko-KR" altLang="en-US" sz="2400" b="1" dirty="0">
+                <a:solidFill>
+                  <a:schemeClr val="tx1">
+                    <a:lumMod val="85000"/>
+                    <a:lumOff val="15000"/>
+                  </a:schemeClr>
+                </a:solidFill>
+                <a:latin typeface="나눔고딕" pitchFamily="50" charset="-127"/>
+                <a:ea typeface="나눔고딕" pitchFamily="50" charset="-127"/>
+                <a:cs typeface="Arial" panose="020B0604020202020204" pitchFamily="34" charset="0"/>
+              </a:rPr>
+              <a:t>stationCode</a:t>
+            </a:r>
+            <a:r>
+              <a:rPr lang="ko-KR" altLang="en-US" sz="2400" b="0" dirty="0">
+                <a:solidFill>
+                  <a:schemeClr val="tx1">
+                    <a:lumMod val="85000"/>
+                    <a:lumOff val="15000"/>
+                  </a:schemeClr>
+                </a:solidFill>
+                <a:latin typeface="나눔고딕" pitchFamily="50" charset="-127"/>
+                <a:ea typeface="나눔고딕" pitchFamily="50" charset="-127"/>
+                <a:cs typeface="Arial" panose="020B0604020202020204" pitchFamily="34" charset="0"/>
+              </a:rPr>
+              <a:t>)만 둠</a:t>
+            </a:r>
+          </a:p>
+        </p:txBody>
+      </p:sp>
+      <p:grpSp>
+        <p:nvGrpSpPr>
+          <p:cNvPr id="5075" name="그림2 KG 예시"/>
+          <p:cNvGrpSpPr/>
+          <p:nvPr/>
+        </p:nvGrpSpPr>
+        <p:grpSpPr>
+          <a:xfrm>
+            <a:off x="17026753" y="9437969"/>
+            <a:ext cx="11200000" cy="6987156"/>
+            <a:chOff x="17026753" y="9437969"/>
+            <a:chExt cx="11200000" cy="6987156"/>
+          </a:xfrm>
+        </p:grpSpPr>
+        <p:sp>
+          <p:nvSpPr>
+            <p:cNvPr id="5035" name="도형"/>
+            <p:cNvSpPr/>
+            <p:nvPr/>
+          </p:nvSpPr>
+          <p:spPr>
+            <a:xfrm>
+              <a:off x="17489138" y="9437969"/>
+              <a:ext cx="4521101" cy="1541284"/>
+            </a:xfrm>
+            <a:prstGeom prst="rect">
+              <a:avLst/>
+            </a:prstGeom>
+            <a:solidFill>
+              <a:srgbClr val="FFFFFF"/>
+            </a:solidFill>
+            <a:ln w="22225">
+              <a:solidFill>
+                <a:srgbClr val="262626"/>
+              </a:solidFill>
+            </a:ln>
+          </p:spPr>
+          <p:txBody>
+            <a:bodyPr wrap="square" lIns="82202" tIns="41101" rIns="82202" bIns="41101" anchor="ctr">
+              <a:noAutofit/>
+            </a:bodyPr>
+            <a:lstStyle/>
+            <a:p>
+              <a:endParaRPr lang="ko-KR"/>
+            </a:p>
+          </p:txBody>
+        </p:sp>
+        <p:sp>
+          <p:nvSpPr>
+            <p:cNvPr id="5036" name="도형"/>
+            <p:cNvSpPr/>
+            <p:nvPr/>
+          </p:nvSpPr>
+          <p:spPr>
+            <a:xfrm>
+              <a:off x="17489138" y="9437969"/>
+              <a:ext cx="4521101" cy="452110"/>
+            </a:xfrm>
+            <a:prstGeom prst="rect">
+              <a:avLst/>
+            </a:prstGeom>
+            <a:solidFill>
+              <a:srgbClr val="E9EEF5"/>
+            </a:solidFill>
+            <a:ln w="22225">
+              <a:solidFill>
+                <a:srgbClr val="262626"/>
+              </a:solidFill>
+            </a:ln>
+          </p:spPr>
+          <p:txBody>
+            <a:bodyPr wrap="square" lIns="143853" tIns="71926" rIns="143853" bIns="71926" anchor="ctr">
+              <a:noAutofit/>
+            </a:bodyPr>
+            <a:lstStyle/>
+            <a:p>
+              <a:pPr algn="l">
+                <a:lnSpc>
+                  <a:spcPct val="100000"/>
+                </a:lnSpc>
+              </a:pPr>
+              <a:r>
+                <a:rPr lang="ko-KR" altLang="en-US" sz="1942" b="1" dirty="0">
+                  <a:solidFill>
+                    <a:srgbClr val="1F4E79"/>
+                  </a:solidFill>
+                  <a:latin typeface="나눔고딕" pitchFamily="50" charset="-127"/>
+                  <a:ea typeface="나눔고딕" pitchFamily="50" charset="-127"/>
+                  <a:cs typeface="Arial" panose="020B0604020202020204" pitchFamily="34" charset="0"/>
+                </a:rPr>
+                <a:t>Approval</a:t>
+              </a:r>
+            </a:p>
+          </p:txBody>
+        </p:sp>
+        <p:sp>
+          <p:nvSpPr>
+            <p:cNvPr id="5037" name="속성"/>
+            <p:cNvSpPr/>
+            <p:nvPr/>
+          </p:nvSpPr>
+          <p:spPr>
+            <a:xfrm>
+              <a:off x="17489138" y="9910630"/>
+              <a:ext cx="4521101" cy="1068624"/>
+            </a:xfrm>
+            <a:prstGeom prst="rect">
+              <a:avLst/>
+            </a:prstGeom>
+            <a:noFill/>
+            <a:ln>
+              <a:noFill/>
+            </a:ln>
+          </p:spPr>
+          <p:txBody>
+            <a:bodyPr wrap="square" lIns="143853" tIns="71926" rIns="143853" bIns="71926" anchor="t">
+              <a:noAutofit/>
+            </a:bodyPr>
+            <a:lstStyle/>
+            <a:p>
+              <a:pPr algn="l">
+                <a:lnSpc>
+                  <a:spcPct val="100000"/>
+                </a:lnSpc>
+              </a:pPr>
+              <a:r>
+                <a:rPr lang="ko-KR" altLang="en-US" sz="1456" b="1" dirty="0">
+                  <a:solidFill>
+                    <a:srgbClr val="222222"/>
+                  </a:solidFill>
+                  <a:latin typeface="나눔고딕" pitchFamily="50" charset="-127"/>
+                  <a:ea typeface="나눔고딕" pitchFamily="50" charset="-127"/>
+                  <a:cs typeface="Arial" panose="020B0604020202020204" pitchFamily="34" charset="0"/>
+                </a:rPr>
+                <a:t>APR:1368</a:t>
+              </a:r>
+            </a:p>
+            <a:p>
+              <a:pPr algn="l">
+                <a:lnSpc>
+                  <a:spcPct val="100000"/>
+                </a:lnSpc>
+              </a:pPr>
+              <a:r>
+                <a:rPr lang="ko-KR" altLang="en-US" sz="1456" b="0" dirty="0">
+                  <a:solidFill>
+                    <a:srgbClr val="222222"/>
+                  </a:solidFill>
+                  <a:latin typeface="나눔고딕" pitchFamily="50" charset="-127"/>
+                  <a:ea typeface="나눔고딕" pitchFamily="50" charset="-127"/>
+                  <a:cs typeface="Arial" panose="020B0604020202020204" pitchFamily="34" charset="0"/>
+                </a:rPr>
+                <a:t>approvalTime = 2012-08-24</a:t>
+              </a:r>
+            </a:p>
+            <a:p>
+              <a:pPr algn="l">
+                <a:lnSpc>
+                  <a:spcPct val="100000"/>
+                </a:lnSpc>
+              </a:pPr>
+              <a:r>
+                <a:rPr lang="ko-KR" altLang="en-US" sz="1456" b="0" dirty="0">
+                  <a:solidFill>
+                    <a:srgbClr val="222222"/>
+                  </a:solidFill>
+                  <a:latin typeface="나눔고딕" pitchFamily="50" charset="-127"/>
+                  <a:ea typeface="나눔고딕" pitchFamily="50" charset="-127"/>
+                  <a:cs typeface="Arial" panose="020B0604020202020204" pitchFamily="34" charset="0"/>
+                </a:rPr>
+                <a:t>approvalContent = “방류시작 15:00; 2000㎥/s”</a:t>
+              </a:r>
+            </a:p>
+          </p:txBody>
+        </p:sp>
+        <p:sp>
+          <p:nvSpPr>
+            <p:cNvPr id="5038" name="도형"/>
+            <p:cNvSpPr/>
+            <p:nvPr/>
+          </p:nvSpPr>
+          <p:spPr>
+            <a:xfrm>
+              <a:off x="23397395" y="9437969"/>
+              <a:ext cx="4521101" cy="1828991"/>
+            </a:xfrm>
+            <a:prstGeom prst="rect">
+              <a:avLst/>
+            </a:prstGeom>
+            <a:solidFill>
+              <a:srgbClr val="FFFFFF"/>
+            </a:solidFill>
+            <a:ln w="22225">
+              <a:solidFill>
+                <a:srgbClr val="262626"/>
+              </a:solidFill>
+            </a:ln>
+          </p:spPr>
+          <p:txBody>
+            <a:bodyPr wrap="square" lIns="82202" tIns="41101" rIns="82202" bIns="41101" anchor="ctr">
+              <a:noAutofit/>
+            </a:bodyPr>
+            <a:lstStyle/>
+            <a:p>
+              <a:endParaRPr lang="ko-KR"/>
+            </a:p>
+          </p:txBody>
+        </p:sp>
+        <p:sp>
+          <p:nvSpPr>
+            <p:cNvPr id="5039" name="도형"/>
+            <p:cNvSpPr/>
+            <p:nvPr/>
+          </p:nvSpPr>
+          <p:spPr>
+            <a:xfrm>
+              <a:off x="23397395" y="9437969"/>
+              <a:ext cx="4521101" cy="452110"/>
+            </a:xfrm>
+            <a:prstGeom prst="rect">
+              <a:avLst/>
+            </a:prstGeom>
+            <a:solidFill>
+              <a:srgbClr val="E9EEF5"/>
+            </a:solidFill>
+            <a:ln w="22225">
+              <a:solidFill>
+                <a:srgbClr val="262626"/>
+              </a:solidFill>
+            </a:ln>
+          </p:spPr>
+          <p:txBody>
+            <a:bodyPr wrap="square" lIns="143853" tIns="71926" rIns="143853" bIns="71926" anchor="ctr">
+              <a:noAutofit/>
+            </a:bodyPr>
+            <a:lstStyle/>
+            <a:p>
+              <a:pPr algn="l">
+                <a:lnSpc>
+                  <a:spcPct val="100000"/>
+                </a:lnSpc>
+              </a:pPr>
+              <a:r>
+                <a:rPr lang="ko-KR" altLang="en-US" sz="1942" b="1" dirty="0">
+                  <a:solidFill>
+                    <a:srgbClr val="1F4E79"/>
+                  </a:solidFill>
+                  <a:latin typeface="나눔고딕" pitchFamily="50" charset="-127"/>
+                  <a:ea typeface="나눔고딕" pitchFamily="50" charset="-127"/>
+                  <a:cs typeface="Arial" panose="020B0604020202020204" pitchFamily="34" charset="0"/>
+                </a:rPr>
+                <a:t>Criterion</a:t>
+              </a:r>
+            </a:p>
+          </p:txBody>
+        </p:sp>
+        <p:sp>
+          <p:nvSpPr>
+            <p:cNvPr id="5040" name="속성"/>
+            <p:cNvSpPr/>
+            <p:nvPr/>
+          </p:nvSpPr>
+          <p:spPr>
+            <a:xfrm>
+              <a:off x="23397395" y="9910630"/>
+              <a:ext cx="4521101" cy="1356330"/>
+            </a:xfrm>
+            <a:prstGeom prst="rect">
+              <a:avLst/>
+            </a:prstGeom>
+            <a:noFill/>
+            <a:ln>
+              <a:noFill/>
+            </a:ln>
+          </p:spPr>
+          <p:txBody>
+            <a:bodyPr wrap="square" lIns="143853" tIns="71926" rIns="143853" bIns="71926" anchor="t">
+              <a:noAutofit/>
+            </a:bodyPr>
+            <a:lstStyle/>
+            <a:p>
+              <a:pPr algn="l">
+                <a:lnSpc>
+                  <a:spcPct val="100000"/>
+                </a:lnSpc>
+              </a:pPr>
+              <a:r>
+                <a:rPr lang="ko-KR" altLang="en-US" sz="1456" b="1" dirty="0">
+                  <a:solidFill>
+                    <a:srgbClr val="222222"/>
+                  </a:solidFill>
+                  <a:latin typeface="나눔고딕" pitchFamily="50" charset="-127"/>
+                  <a:ea typeface="나눔고딕" pitchFamily="50" charset="-127"/>
+                  <a:cs typeface="Arial" panose="020B0604020202020204" pitchFamily="34" charset="0"/>
+                </a:rPr>
+                <a:t>CRI:CR-02</a:t>
+              </a:r>
+            </a:p>
+            <a:p>
+              <a:pPr algn="l">
+                <a:lnSpc>
+                  <a:spcPct val="100000"/>
+                </a:lnSpc>
+              </a:pPr>
+              <a:r>
+                <a:rPr lang="ko-KR" altLang="en-US" sz="1456" b="0" dirty="0">
+                  <a:solidFill>
+                    <a:srgbClr val="222222"/>
+                  </a:solidFill>
+                  <a:latin typeface="나눔고딕" pitchFamily="50" charset="-127"/>
+                  <a:ea typeface="나눔고딕" pitchFamily="50" charset="-127"/>
+                  <a:cs typeface="Arial" panose="020B0604020202020204" pitchFamily="34" charset="0"/>
+                </a:rPr>
+                <a:t>criterionType = 홍수기 제한수위</a:t>
+              </a:r>
+            </a:p>
+            <a:p>
+              <a:pPr algn="l">
+                <a:lnSpc>
+                  <a:spcPct val="100000"/>
+                </a:lnSpc>
+              </a:pPr>
+              <a:r>
+                <a:rPr lang="ko-KR" altLang="en-US" sz="1456" b="0" dirty="0">
+                  <a:solidFill>
+                    <a:srgbClr val="222222"/>
+                  </a:solidFill>
+                  <a:latin typeface="나눔고딕" pitchFamily="50" charset="-127"/>
+                  <a:ea typeface="나눔고딕" pitchFamily="50" charset="-127"/>
+                  <a:cs typeface="Arial" panose="020B0604020202020204" pitchFamily="34" charset="0"/>
+                </a:rPr>
+                <a:t>criterionValue = 138.0</a:t>
+              </a:r>
+            </a:p>
+            <a:p>
+              <a:pPr algn="l">
+                <a:lnSpc>
+                  <a:spcPct val="100000"/>
+                </a:lnSpc>
+              </a:pPr>
+              <a:r>
+                <a:rPr lang="ko-KR" altLang="en-US" sz="1456" b="0" dirty="0">
+                  <a:solidFill>
+                    <a:srgbClr val="222222"/>
+                  </a:solidFill>
+                  <a:latin typeface="나눔고딕" pitchFamily="50" charset="-127"/>
+                  <a:ea typeface="나눔고딕" pitchFamily="50" charset="-127"/>
+                  <a:cs typeface="Arial" panose="020B0604020202020204" pitchFamily="34" charset="0"/>
+                </a:rPr>
+                <a:t>unit = EL.m</a:t>
+              </a:r>
+            </a:p>
+          </p:txBody>
+        </p:sp>
+        <p:sp>
+          <p:nvSpPr>
+            <p:cNvPr id="5041" name="도형"/>
+            <p:cNvSpPr/>
+            <p:nvPr/>
+          </p:nvSpPr>
+          <p:spPr>
+            <a:xfrm>
+              <a:off x="17489138" y="11842373"/>
+              <a:ext cx="4521101" cy="1541284"/>
+            </a:xfrm>
+            <a:prstGeom prst="rect">
+              <a:avLst/>
+            </a:prstGeom>
+            <a:solidFill>
+              <a:srgbClr val="FFFFFF"/>
+            </a:solidFill>
+            <a:ln w="22225">
+              <a:solidFill>
+                <a:srgbClr val="262626"/>
+              </a:solidFill>
+            </a:ln>
+          </p:spPr>
+          <p:txBody>
+            <a:bodyPr wrap="square" lIns="82202" tIns="41101" rIns="82202" bIns="41101" anchor="ctr">
+              <a:noAutofit/>
+            </a:bodyPr>
+            <a:lstStyle/>
+            <a:p>
+              <a:endParaRPr lang="ko-KR"/>
+            </a:p>
+          </p:txBody>
+        </p:sp>
+        <p:sp>
+          <p:nvSpPr>
+            <p:cNvPr id="5042" name="도형"/>
+            <p:cNvSpPr/>
+            <p:nvPr/>
+          </p:nvSpPr>
+          <p:spPr>
+            <a:xfrm>
+              <a:off x="17489138" y="11842373"/>
+              <a:ext cx="4521101" cy="452110"/>
+            </a:xfrm>
+            <a:prstGeom prst="rect">
+              <a:avLst/>
+            </a:prstGeom>
+            <a:solidFill>
+              <a:srgbClr val="E9EEF5"/>
+            </a:solidFill>
+            <a:ln w="22225">
+              <a:solidFill>
+                <a:srgbClr val="262626"/>
+              </a:solidFill>
+            </a:ln>
+          </p:spPr>
+          <p:txBody>
+            <a:bodyPr wrap="square" lIns="143853" tIns="71926" rIns="143853" bIns="71926" anchor="ctr">
+              <a:noAutofit/>
+            </a:bodyPr>
+            <a:lstStyle/>
+            <a:p>
+              <a:pPr algn="l">
+                <a:lnSpc>
+                  <a:spcPct val="100000"/>
+                </a:lnSpc>
+              </a:pPr>
+              <a:r>
+                <a:rPr lang="ko-KR" altLang="en-US" sz="1942" b="1" dirty="0">
+                  <a:solidFill>
+                    <a:srgbClr val="1F4E79"/>
+                  </a:solidFill>
+                  <a:latin typeface="나눔고딕" pitchFamily="50" charset="-127"/>
+                  <a:ea typeface="나눔고딕" pitchFamily="50" charset="-127"/>
+                  <a:cs typeface="Arial" panose="020B0604020202020204" pitchFamily="34" charset="0"/>
+                </a:rPr>
+                <a:t>Operation</a:t>
+              </a:r>
+            </a:p>
+          </p:txBody>
+        </p:sp>
+        <p:sp>
+          <p:nvSpPr>
+            <p:cNvPr id="5043" name="속성"/>
+            <p:cNvSpPr/>
+            <p:nvPr/>
+          </p:nvSpPr>
+          <p:spPr>
+            <a:xfrm>
+              <a:off x="17489138" y="12315033"/>
+              <a:ext cx="4521101" cy="1068624"/>
+            </a:xfrm>
+            <a:prstGeom prst="rect">
+              <a:avLst/>
+            </a:prstGeom>
+            <a:noFill/>
+            <a:ln>
+              <a:noFill/>
+            </a:ln>
+          </p:spPr>
+          <p:txBody>
+            <a:bodyPr wrap="square" lIns="143853" tIns="71926" rIns="143853" bIns="71926" anchor="t">
+              <a:noAutofit/>
+            </a:bodyPr>
+            <a:lstStyle/>
+            <a:p>
+              <a:pPr algn="l">
+                <a:lnSpc>
+                  <a:spcPct val="100000"/>
+                </a:lnSpc>
+              </a:pPr>
+              <a:r>
+                <a:rPr lang="ko-KR" altLang="en-US" sz="1456" b="1" dirty="0">
+                  <a:solidFill>
+                    <a:srgbClr val="222222"/>
+                  </a:solidFill>
+                  <a:latin typeface="나눔고딕" pitchFamily="50" charset="-127"/>
+                  <a:ea typeface="나눔고딕" pitchFamily="50" charset="-127"/>
+                  <a:cs typeface="Arial" panose="020B0604020202020204" pitchFamily="34" charset="0"/>
+                </a:rPr>
+                <a:t>OPR:1368:1</a:t>
+              </a:r>
+            </a:p>
+            <a:p>
+              <a:pPr algn="l">
+                <a:lnSpc>
+                  <a:spcPct val="100000"/>
+                </a:lnSpc>
+              </a:pPr>
+              <a:r>
+                <a:rPr lang="ko-KR" altLang="en-US" sz="1456" b="0" dirty="0">
+                  <a:solidFill>
+                    <a:srgbClr val="222222"/>
+                  </a:solidFill>
+                  <a:latin typeface="나눔고딕" pitchFamily="50" charset="-127"/>
+                  <a:ea typeface="나눔고딕" pitchFamily="50" charset="-127"/>
+                  <a:cs typeface="Arial" panose="020B0604020202020204" pitchFamily="34" charset="0"/>
+                </a:rPr>
+                <a:t>operationType = 탄력적 방류</a:t>
+              </a:r>
+            </a:p>
+            <a:p>
+              <a:pPr algn="l">
+                <a:lnSpc>
+                  <a:spcPct val="100000"/>
+                </a:lnSpc>
+              </a:pPr>
+              <a:r>
+                <a:rPr lang="ko-KR" altLang="en-US" sz="1456" b="0" dirty="0">
+                  <a:solidFill>
+                    <a:srgbClr val="222222"/>
+                  </a:solidFill>
+                  <a:latin typeface="나눔고딕" pitchFamily="50" charset="-127"/>
+                  <a:ea typeface="나눔고딕" pitchFamily="50" charset="-127"/>
+                  <a:cs typeface="Arial" panose="020B0604020202020204" pitchFamily="34" charset="0"/>
+                </a:rPr>
+                <a:t>operationTime = 2012-08-24T15:00</a:t>
+              </a:r>
+            </a:p>
+          </p:txBody>
+        </p:sp>
+        <p:sp>
+          <p:nvSpPr>
+            <p:cNvPr id="5044" name="도형"/>
+            <p:cNvSpPr/>
+            <p:nvPr/>
+          </p:nvSpPr>
+          <p:spPr>
+            <a:xfrm>
+              <a:off x="23397395" y="11842373"/>
+              <a:ext cx="4521101" cy="1541284"/>
+            </a:xfrm>
+            <a:prstGeom prst="rect">
+              <a:avLst/>
+            </a:prstGeom>
+            <a:solidFill>
+              <a:srgbClr val="FFFFFF"/>
+            </a:solidFill>
+            <a:ln w="22225">
+              <a:solidFill>
+                <a:srgbClr val="262626"/>
+              </a:solidFill>
+            </a:ln>
+          </p:spPr>
+          <p:txBody>
+            <a:bodyPr wrap="square" lIns="82202" tIns="41101" rIns="82202" bIns="41101" anchor="ctr">
+              <a:noAutofit/>
+            </a:bodyPr>
+            <a:lstStyle/>
+            <a:p>
+              <a:endParaRPr lang="ko-KR"/>
+            </a:p>
+          </p:txBody>
+        </p:sp>
+        <p:sp>
+          <p:nvSpPr>
+            <p:cNvPr id="5045" name="도형"/>
+            <p:cNvSpPr/>
+            <p:nvPr/>
+          </p:nvSpPr>
+          <p:spPr>
+            <a:xfrm>
+              <a:off x="23397395" y="11842373"/>
+              <a:ext cx="4521101" cy="452110"/>
+            </a:xfrm>
+            <a:prstGeom prst="rect">
+              <a:avLst/>
+            </a:prstGeom>
+            <a:solidFill>
+              <a:srgbClr val="E9EEF5"/>
+            </a:solidFill>
+            <a:ln w="22225">
+              <a:solidFill>
+                <a:srgbClr val="262626"/>
+              </a:solidFill>
+            </a:ln>
+          </p:spPr>
+          <p:txBody>
+            <a:bodyPr wrap="square" lIns="143853" tIns="71926" rIns="143853" bIns="71926" anchor="ctr">
+              <a:noAutofit/>
+            </a:bodyPr>
+            <a:lstStyle/>
+            <a:p>
+              <a:pPr algn="l">
+                <a:lnSpc>
+                  <a:spcPct val="100000"/>
+                </a:lnSpc>
+              </a:pPr>
+              <a:r>
+                <a:rPr lang="ko-KR" altLang="en-US" sz="1942" b="1" dirty="0">
+                  <a:solidFill>
+                    <a:srgbClr val="1F4E79"/>
+                  </a:solidFill>
+                  <a:latin typeface="나눔고딕" pitchFamily="50" charset="-127"/>
+                  <a:ea typeface="나눔고딕" pitchFamily="50" charset="-127"/>
+                  <a:cs typeface="Arial" panose="020B0604020202020204" pitchFamily="34" charset="0"/>
+                </a:rPr>
+                <a:t>Dam</a:t>
+              </a:r>
+            </a:p>
+          </p:txBody>
+        </p:sp>
+        <p:sp>
+          <p:nvSpPr>
+            <p:cNvPr id="5046" name="속성"/>
+            <p:cNvSpPr/>
+            <p:nvPr/>
+          </p:nvSpPr>
+          <p:spPr>
+            <a:xfrm>
+              <a:off x="23397395" y="12315033"/>
+              <a:ext cx="4521101" cy="1068624"/>
+            </a:xfrm>
+            <a:prstGeom prst="rect">
+              <a:avLst/>
+            </a:prstGeom>
+            <a:noFill/>
+            <a:ln>
+              <a:noFill/>
+            </a:ln>
+          </p:spPr>
+          <p:txBody>
+            <a:bodyPr wrap="square" lIns="143853" tIns="71926" rIns="143853" bIns="71926" anchor="t">
+              <a:noAutofit/>
+            </a:bodyPr>
+            <a:lstStyle/>
+            <a:p>
+              <a:pPr algn="l">
+                <a:lnSpc>
+                  <a:spcPct val="100000"/>
+                </a:lnSpc>
+              </a:pPr>
+              <a:r>
+                <a:rPr lang="ko-KR" altLang="en-US" sz="1456" b="1" dirty="0">
+                  <a:solidFill>
+                    <a:srgbClr val="222222"/>
+                  </a:solidFill>
+                  <a:latin typeface="나눔고딕" pitchFamily="50" charset="-127"/>
+                  <a:ea typeface="나눔고딕" pitchFamily="50" charset="-127"/>
+                  <a:cs typeface="Arial" panose="020B0604020202020204" pitchFamily="34" charset="0"/>
+                </a:rPr>
+                <a:t>DAM:1003110</a:t>
+              </a:r>
+            </a:p>
+            <a:p>
+              <a:pPr algn="l">
+                <a:lnSpc>
+                  <a:spcPct val="100000"/>
+                </a:lnSpc>
+              </a:pPr>
+              <a:r>
+                <a:rPr lang="ko-KR" altLang="en-US" sz="1456" b="0" dirty="0">
+                  <a:solidFill>
+                    <a:srgbClr val="222222"/>
+                  </a:solidFill>
+                  <a:latin typeface="나눔고딕" pitchFamily="50" charset="-127"/>
+                  <a:ea typeface="나눔고딕" pitchFamily="50" charset="-127"/>
+                  <a:cs typeface="Arial" panose="020B0604020202020204" pitchFamily="34" charset="0"/>
+                </a:rPr>
+                <a:t>damName = 충주댐</a:t>
+              </a:r>
+            </a:p>
+            <a:p>
+              <a:pPr algn="l">
+                <a:lnSpc>
+                  <a:spcPct val="100000"/>
+                </a:lnSpc>
+              </a:pPr>
+              <a:r>
+                <a:rPr lang="ko-KR" altLang="en-US" sz="1456" b="0" dirty="0">
+                  <a:solidFill>
+                    <a:srgbClr val="222222"/>
+                  </a:solidFill>
+                  <a:latin typeface="나눔고딕" pitchFamily="50" charset="-127"/>
+                  <a:ea typeface="나눔고딕" pitchFamily="50" charset="-127"/>
+                  <a:cs typeface="Arial" panose="020B0604020202020204" pitchFamily="34" charset="0"/>
+                </a:rPr>
+                <a:t>damType = 다목적댐</a:t>
+              </a:r>
+            </a:p>
+          </p:txBody>
+        </p:sp>
+        <p:sp>
+          <p:nvSpPr>
+            <p:cNvPr id="5047" name="도형"/>
+            <p:cNvSpPr/>
+            <p:nvPr/>
+          </p:nvSpPr>
+          <p:spPr>
+            <a:xfrm>
+              <a:off x="17489138" y="13959070"/>
+              <a:ext cx="4521101" cy="1828991"/>
+            </a:xfrm>
+            <a:prstGeom prst="rect">
+              <a:avLst/>
+            </a:prstGeom>
+            <a:solidFill>
+              <a:srgbClr val="FFFFFF"/>
+            </a:solidFill>
+            <a:ln w="22225">
+              <a:solidFill>
+                <a:srgbClr val="262626"/>
+              </a:solidFill>
+            </a:ln>
+          </p:spPr>
+          <p:txBody>
+            <a:bodyPr wrap="square" lIns="82202" tIns="41101" rIns="82202" bIns="41101" anchor="ctr">
+              <a:noAutofit/>
+            </a:bodyPr>
+            <a:lstStyle/>
+            <a:p>
+              <a:endParaRPr lang="ko-KR"/>
+            </a:p>
+          </p:txBody>
+        </p:sp>
+        <p:sp>
+          <p:nvSpPr>
+            <p:cNvPr id="5048" name="도형"/>
+            <p:cNvSpPr/>
+            <p:nvPr/>
+          </p:nvSpPr>
+          <p:spPr>
+            <a:xfrm>
+              <a:off x="17489138" y="13959070"/>
+              <a:ext cx="4521101" cy="452110"/>
+            </a:xfrm>
+            <a:prstGeom prst="rect">
+              <a:avLst/>
+            </a:prstGeom>
+            <a:solidFill>
+              <a:srgbClr val="E9EEF5"/>
+            </a:solidFill>
+            <a:ln w="22225">
+              <a:solidFill>
+                <a:srgbClr val="262626"/>
+              </a:solidFill>
+            </a:ln>
+          </p:spPr>
+          <p:txBody>
+            <a:bodyPr wrap="square" lIns="143853" tIns="71926" rIns="143853" bIns="71926" anchor="ctr">
+              <a:noAutofit/>
+            </a:bodyPr>
+            <a:lstStyle/>
+            <a:p>
+              <a:pPr algn="l">
+                <a:lnSpc>
+                  <a:spcPct val="100000"/>
+                </a:lnSpc>
+              </a:pPr>
+              <a:r>
+                <a:rPr lang="ko-KR" altLang="en-US" sz="1942" b="1" dirty="0">
+                  <a:solidFill>
+                    <a:srgbClr val="1F4E79"/>
+                  </a:solidFill>
+                  <a:latin typeface="나눔고딕" pitchFamily="50" charset="-127"/>
+                  <a:ea typeface="나눔고딕" pitchFamily="50" charset="-127"/>
+                  <a:cs typeface="Arial" panose="020B0604020202020204" pitchFamily="34" charset="0"/>
+                </a:rPr>
+                <a:t>EvidenceSource</a:t>
+              </a:r>
+            </a:p>
+          </p:txBody>
+        </p:sp>
+        <p:sp>
+          <p:nvSpPr>
+            <p:cNvPr id="5049" name="속성"/>
+            <p:cNvSpPr/>
+            <p:nvPr/>
+          </p:nvSpPr>
+          <p:spPr>
+            <a:xfrm>
+              <a:off x="17489138" y="14431730"/>
+              <a:ext cx="4521101" cy="1356330"/>
+            </a:xfrm>
+            <a:prstGeom prst="rect">
+              <a:avLst/>
+            </a:prstGeom>
+            <a:noFill/>
+            <a:ln>
+              <a:noFill/>
+            </a:ln>
+          </p:spPr>
+          <p:txBody>
+            <a:bodyPr wrap="square" lIns="143853" tIns="71926" rIns="143853" bIns="71926" anchor="t">
+              <a:noAutofit/>
+            </a:bodyPr>
+            <a:lstStyle/>
+            <a:p>
+              <a:pPr algn="l">
+                <a:lnSpc>
+                  <a:spcPct val="100000"/>
+                </a:lnSpc>
+              </a:pPr>
+              <a:r>
+                <a:rPr lang="ko-KR" altLang="en-US" sz="1456" b="1" dirty="0">
+                  <a:solidFill>
+                    <a:srgbClr val="222222"/>
+                  </a:solidFill>
+                  <a:latin typeface="나눔고딕" pitchFamily="50" charset="-127"/>
+                  <a:ea typeface="나눔고딕" pitchFamily="50" charset="-127"/>
+                  <a:cs typeface="Arial" panose="020B0604020202020204" pitchFamily="34" charset="0"/>
+                </a:rPr>
+                <a:t>EVI:AP:1368</a:t>
+              </a:r>
+            </a:p>
+            <a:p>
+              <a:pPr algn="l">
+                <a:lnSpc>
+                  <a:spcPct val="100000"/>
+                </a:lnSpc>
+              </a:pPr>
+              <a:r>
+                <a:rPr lang="ko-KR" altLang="en-US" sz="1456" b="0" dirty="0">
+                  <a:solidFill>
+                    <a:srgbClr val="222222"/>
+                  </a:solidFill>
+                  <a:latin typeface="나눔고딕" pitchFamily="50" charset="-127"/>
+                  <a:ea typeface="나눔고딕" pitchFamily="50" charset="-127"/>
+                  <a:cs typeface="Arial" panose="020B0604020202020204" pitchFamily="34" charset="0"/>
+                </a:rPr>
+                <a:t>sourceTitle = 홍수예보 댐방류승인</a:t>
+              </a:r>
+            </a:p>
+            <a:p>
+              <a:pPr algn="l">
+                <a:lnSpc>
+                  <a:spcPct val="100000"/>
+                </a:lnSpc>
+              </a:pPr>
+              <a:r>
+                <a:rPr lang="ko-KR" altLang="en-US" sz="1456" b="0" dirty="0">
+                  <a:solidFill>
+                    <a:srgbClr val="222222"/>
+                  </a:solidFill>
+                  <a:latin typeface="나눔고딕" pitchFamily="50" charset="-127"/>
+                  <a:ea typeface="나눔고딕" pitchFamily="50" charset="-127"/>
+                  <a:cs typeface="Arial" panose="020B0604020202020204" pitchFamily="34" charset="0"/>
+                </a:rPr>
+                <a:t>sourceType = 승인자료</a:t>
+              </a:r>
+            </a:p>
+            <a:p>
+              <a:pPr algn="l">
+                <a:lnSpc>
+                  <a:spcPct val="100000"/>
+                </a:lnSpc>
+              </a:pPr>
+              <a:r>
+                <a:rPr lang="ko-KR" altLang="en-US" sz="1456" b="0" dirty="0">
+                  <a:solidFill>
+                    <a:srgbClr val="222222"/>
+                  </a:solidFill>
+                  <a:latin typeface="나눔고딕" pitchFamily="50" charset="-127"/>
+                  <a:ea typeface="나눔고딕" pitchFamily="50" charset="-127"/>
+                  <a:cs typeface="Arial" panose="020B0604020202020204" pitchFamily="34" charset="0"/>
+                </a:rPr>
+                <a:t>sourceLocator = 순차번호 1368</a:t>
+              </a:r>
+            </a:p>
+          </p:txBody>
+        </p:sp>
+        <p:sp>
+          <p:nvSpPr>
+            <p:cNvPr id="5050" name="도형"/>
+            <p:cNvSpPr/>
+            <p:nvPr/>
+          </p:nvSpPr>
+          <p:spPr>
+            <a:xfrm>
+              <a:off x="23397395" y="13959070"/>
+              <a:ext cx="4521101" cy="1541284"/>
+            </a:xfrm>
+            <a:prstGeom prst="rect">
+              <a:avLst/>
+            </a:prstGeom>
+            <a:solidFill>
+              <a:srgbClr val="FFFFFF"/>
+            </a:solidFill>
+            <a:ln w="22225">
+              <a:solidFill>
+                <a:srgbClr val="262626"/>
+              </a:solidFill>
+            </a:ln>
+          </p:spPr>
+          <p:txBody>
+            <a:bodyPr wrap="square" lIns="82202" tIns="41101" rIns="82202" bIns="41101" anchor="ctr">
+              <a:noAutofit/>
+            </a:bodyPr>
+            <a:lstStyle/>
+            <a:p>
+              <a:endParaRPr lang="ko-KR"/>
+            </a:p>
+          </p:txBody>
+        </p:sp>
+        <p:sp>
+          <p:nvSpPr>
+            <p:cNvPr id="5051" name="도형"/>
+            <p:cNvSpPr/>
+            <p:nvPr/>
+          </p:nvSpPr>
+          <p:spPr>
+            <a:xfrm>
+              <a:off x="23397395" y="13959070"/>
+              <a:ext cx="4521101" cy="452110"/>
+            </a:xfrm>
+            <a:prstGeom prst="rect">
+              <a:avLst/>
+            </a:prstGeom>
+            <a:solidFill>
+              <a:srgbClr val="E9EEF5"/>
+            </a:solidFill>
+            <a:ln w="22225">
+              <a:solidFill>
+                <a:srgbClr val="262626"/>
+              </a:solidFill>
+            </a:ln>
+          </p:spPr>
+          <p:txBody>
+            <a:bodyPr wrap="square" lIns="143853" tIns="71926" rIns="143853" bIns="71926" anchor="ctr">
+              <a:noAutofit/>
+            </a:bodyPr>
+            <a:lstStyle/>
+            <a:p>
+              <a:pPr algn="l">
+                <a:lnSpc>
+                  <a:spcPct val="100000"/>
+                </a:lnSpc>
+              </a:pPr>
+              <a:r>
+                <a:rPr lang="ko-KR" altLang="en-US" sz="1942" b="1" dirty="0">
+                  <a:solidFill>
+                    <a:srgbClr val="1F4E79"/>
+                  </a:solidFill>
+                  <a:latin typeface="나눔고딕" pitchFamily="50" charset="-127"/>
+                  <a:ea typeface="나눔고딕" pitchFamily="50" charset="-127"/>
+                  <a:cs typeface="Arial" panose="020B0604020202020204" pitchFamily="34" charset="0"/>
+                </a:rPr>
+                <a:t>HydrometeorologicalState</a:t>
+              </a:r>
+            </a:p>
+          </p:txBody>
+        </p:sp>
+        <p:sp>
+          <p:nvSpPr>
+            <p:cNvPr id="5052" name="속성"/>
+            <p:cNvSpPr/>
+            <p:nvPr/>
+          </p:nvSpPr>
+          <p:spPr>
+            <a:xfrm>
+              <a:off x="23397395" y="14431730"/>
+              <a:ext cx="4521101" cy="1068624"/>
+            </a:xfrm>
+            <a:prstGeom prst="rect">
+              <a:avLst/>
+            </a:prstGeom>
+            <a:noFill/>
+            <a:ln>
+              <a:noFill/>
+            </a:ln>
+          </p:spPr>
+          <p:txBody>
+            <a:bodyPr wrap="square" lIns="143853" tIns="71926" rIns="143853" bIns="71926" anchor="t">
+              <a:noAutofit/>
+            </a:bodyPr>
+            <a:lstStyle/>
+            <a:p>
+              <a:pPr algn="l">
+                <a:lnSpc>
+                  <a:spcPct val="100000"/>
+                </a:lnSpc>
+              </a:pPr>
+              <a:r>
+                <a:rPr lang="ko-KR" altLang="en-US" sz="1456" b="1" dirty="0">
+                  <a:solidFill>
+                    <a:srgbClr val="222222"/>
+                  </a:solidFill>
+                  <a:latin typeface="나눔고딕" pitchFamily="50" charset="-127"/>
+                  <a:ea typeface="나눔고딕" pitchFamily="50" charset="-127"/>
+                  <a:cs typeface="Arial" panose="020B0604020202020204" pitchFamily="34" charset="0"/>
+                </a:rPr>
+                <a:t>HMS:1003110:수위</a:t>
+              </a:r>
+            </a:p>
+            <a:p>
+              <a:pPr algn="l">
+                <a:lnSpc>
+                  <a:spcPct val="100000"/>
+                </a:lnSpc>
+              </a:pPr>
+              <a:r>
+                <a:rPr lang="ko-KR" altLang="en-US" sz="1456" b="0" dirty="0">
+                  <a:solidFill>
+                    <a:srgbClr val="222222"/>
+                  </a:solidFill>
+                  <a:latin typeface="나눔고딕" pitchFamily="50" charset="-127"/>
+                  <a:ea typeface="나눔고딕" pitchFamily="50" charset="-127"/>
+                  <a:cs typeface="Arial" panose="020B0604020202020204" pitchFamily="34" charset="0"/>
+                </a:rPr>
+                <a:t>variableType = 수위</a:t>
+              </a:r>
+            </a:p>
+            <a:p>
+              <a:pPr algn="l">
+                <a:lnSpc>
+                  <a:spcPct val="100000"/>
+                </a:lnSpc>
+              </a:pPr>
+              <a:r>
+                <a:rPr lang="ko-KR" altLang="en-US" sz="1456" b="0" dirty="0">
+                  <a:solidFill>
+                    <a:srgbClr val="222222"/>
+                  </a:solidFill>
+                  <a:latin typeface="나눔고딕" pitchFamily="50" charset="-127"/>
+                  <a:ea typeface="나눔고딕" pitchFamily="50" charset="-127"/>
+                  <a:cs typeface="Arial" panose="020B0604020202020204" pitchFamily="34" charset="0"/>
+                </a:rPr>
+                <a:t>stationCode = 1003110</a:t>
+              </a:r>
+            </a:p>
+          </p:txBody>
+        </p:sp>
+        <p:cxnSp>
+          <p:nvCxnSpPr>
+            <p:cNvPr id="5053" name="선"/>
+            <p:cNvCxnSpPr/>
+            <p:nvPr/>
+          </p:nvCxnSpPr>
+          <p:spPr>
+            <a:xfrm>
+              <a:off x="19749689" y="10999804"/>
+              <a:ext cx="0" cy="822018"/>
+            </a:xfrm>
+            <a:prstGeom prst="line">
+              <a:avLst/>
+            </a:prstGeom>
+            <a:ln w="31750">
+              <a:solidFill>
+                <a:srgbClr val="3B4A63"/>
+              </a:solidFill>
+              <a:tailEnd type="triangle" w="med" len="med"/>
+            </a:ln>
+          </p:spPr>
+        </p:cxnSp>
+        <p:sp>
+          <p:nvSpPr>
+            <p:cNvPr id="5054" name="글상자"/>
+            <p:cNvSpPr/>
+            <p:nvPr/>
+          </p:nvSpPr>
+          <p:spPr>
+            <a:xfrm>
+              <a:off x="20012735" y="11202226"/>
+              <a:ext cx="1117945" cy="273321"/>
+            </a:xfrm>
+            <a:prstGeom prst="rect">
+              <a:avLst/>
+            </a:prstGeom>
+            <a:solidFill>
+              <a:srgbClr val="FFFFFF"/>
+            </a:solidFill>
+            <a:ln>
+              <a:noFill/>
+            </a:ln>
+          </p:spPr>
+          <p:txBody>
+            <a:bodyPr wrap="square" lIns="20550" tIns="10275" rIns="20550" bIns="10275" anchor="ctr">
+              <a:noAutofit/>
+            </a:bodyPr>
+            <a:lstStyle/>
+            <a:p>
+              <a:pPr algn="ctr">
+                <a:lnSpc>
+                  <a:spcPct val="100000"/>
+                </a:lnSpc>
+              </a:pPr>
+              <a:r>
+                <a:rPr lang="ko-KR" altLang="en-US" sz="1537" b="0" dirty="0">
+                  <a:solidFill>
+                    <a:srgbClr val="222222"/>
+                  </a:solidFill>
+                  <a:latin typeface="나눔고딕" pitchFamily="50" charset="-127"/>
+                  <a:ea typeface="나눔고딕" pitchFamily="50" charset="-127"/>
+                  <a:cs typeface="Arial" panose="020B0604020202020204" pitchFamily="34" charset="0"/>
+                </a:rPr>
+                <a:t>authorizes</a:t>
+              </a:r>
+            </a:p>
+          </p:txBody>
+        </p:sp>
+        <p:cxnSp>
+          <p:nvCxnSpPr>
+            <p:cNvPr id="5055" name="선"/>
+            <p:cNvCxnSpPr/>
+            <p:nvPr/>
+          </p:nvCxnSpPr>
+          <p:spPr>
+            <a:xfrm>
+              <a:off x="22030790" y="10362740"/>
+              <a:ext cx="1346055" cy="1890642"/>
+            </a:xfrm>
+            <a:prstGeom prst="line">
+              <a:avLst/>
+            </a:prstGeom>
+            <a:ln w="31750">
+              <a:solidFill>
+                <a:srgbClr val="3B4A63"/>
+              </a:solidFill>
+              <a:tailEnd type="triangle" w="med" len="med"/>
+            </a:ln>
+          </p:spPr>
+        </p:cxnSp>
+        <p:sp>
+          <p:nvSpPr>
+            <p:cNvPr id="5056" name="글상자"/>
+            <p:cNvSpPr/>
+            <p:nvPr/>
+          </p:nvSpPr>
+          <p:spPr>
+            <a:xfrm>
+              <a:off x="22139913" y="10849786"/>
+              <a:ext cx="1179185" cy="258936"/>
+            </a:xfrm>
+            <a:prstGeom prst="rect">
+              <a:avLst/>
+            </a:prstGeom>
+            <a:solidFill>
+              <a:srgbClr val="FFFFFF"/>
+            </a:solidFill>
+            <a:ln>
+              <a:noFill/>
+            </a:ln>
+          </p:spPr>
+          <p:txBody>
+            <a:bodyPr wrap="square" lIns="20550" tIns="10275" rIns="20550" bIns="10275" anchor="ctr">
+              <a:noAutofit/>
+            </a:bodyPr>
+            <a:lstStyle/>
+            <a:p>
+              <a:pPr algn="ctr">
+                <a:lnSpc>
+                  <a:spcPct val="100000"/>
+                </a:lnSpc>
+              </a:pPr>
+              <a:r>
+                <a:rPr lang="ko-KR" altLang="en-US" sz="1456" b="0" dirty="0">
+                  <a:solidFill>
+                    <a:srgbClr val="222222"/>
+                  </a:solidFill>
+                  <a:latin typeface="나눔고딕" pitchFamily="50" charset="-127"/>
+                  <a:ea typeface="나눔고딕" pitchFamily="50" charset="-127"/>
+                  <a:cs typeface="Arial" panose="020B0604020202020204" pitchFamily="34" charset="0"/>
+                </a:rPr>
+                <a:t>concernsDam</a:t>
+              </a:r>
+            </a:p>
+          </p:txBody>
+        </p:sp>
+        <p:cxnSp>
+          <p:nvCxnSpPr>
+            <p:cNvPr id="5057" name="선"/>
+            <p:cNvCxnSpPr/>
+            <p:nvPr/>
+          </p:nvCxnSpPr>
+          <p:spPr>
+            <a:xfrm>
+              <a:off x="22030790" y="12767143"/>
+              <a:ext cx="1346055" cy="0"/>
+            </a:xfrm>
+            <a:prstGeom prst="line">
+              <a:avLst/>
+            </a:prstGeom>
+            <a:ln w="31750">
+              <a:solidFill>
+                <a:srgbClr val="3B4A63"/>
+              </a:solidFill>
+              <a:tailEnd type="triangle" w="med" len="med"/>
+            </a:ln>
+          </p:spPr>
+        </p:cxnSp>
+        <p:sp>
+          <p:nvSpPr>
+            <p:cNvPr id="5058" name="글상자"/>
+            <p:cNvSpPr/>
+            <p:nvPr/>
+          </p:nvSpPr>
+          <p:spPr>
+            <a:xfrm>
+              <a:off x="22081138" y="12433198"/>
+              <a:ext cx="1255633" cy="215780"/>
+            </a:xfrm>
+            <a:prstGeom prst="rect">
+              <a:avLst/>
+            </a:prstGeom>
+            <a:solidFill>
+              <a:srgbClr val="FFFFFF"/>
+            </a:solidFill>
+            <a:ln>
+              <a:noFill/>
+            </a:ln>
+          </p:spPr>
+          <p:txBody>
+            <a:bodyPr wrap="square" lIns="20550" tIns="10275" rIns="20550" bIns="10275" anchor="ctr">
+              <a:noAutofit/>
+            </a:bodyPr>
+            <a:lstStyle/>
+            <a:p>
+              <a:pPr algn="ctr">
+                <a:lnSpc>
+                  <a:spcPct val="100000"/>
+                </a:lnSpc>
+              </a:pPr>
+              <a:r>
+                <a:rPr lang="ko-KR" altLang="en-US" sz="1214" b="0" dirty="0">
+                  <a:solidFill>
+                    <a:srgbClr val="222222"/>
+                  </a:solidFill>
+                  <a:latin typeface="나눔고딕" pitchFamily="50" charset="-127"/>
+                  <a:ea typeface="나눔고딕" pitchFamily="50" charset="-127"/>
+                  <a:cs typeface="Arial" panose="020B0604020202020204" pitchFamily="34" charset="0"/>
+                </a:rPr>
+                <a:t>performedOnDam</a:t>
+              </a:r>
+            </a:p>
+          </p:txBody>
+        </p:sp>
+        <p:cxnSp>
+          <p:nvCxnSpPr>
+            <p:cNvPr id="5059" name="선"/>
+            <p:cNvCxnSpPr/>
+            <p:nvPr/>
+          </p:nvCxnSpPr>
+          <p:spPr>
+            <a:xfrm>
+              <a:off x="25657946" y="11287510"/>
+              <a:ext cx="0" cy="534312"/>
+            </a:xfrm>
+            <a:prstGeom prst="line">
+              <a:avLst/>
+            </a:prstGeom>
+            <a:ln w="31750">
+              <a:solidFill>
+                <a:srgbClr val="3B4A63"/>
+              </a:solidFill>
+              <a:tailEnd type="triangle" w="med" len="med"/>
+            </a:ln>
+          </p:spPr>
+        </p:cxnSp>
+        <p:sp>
+          <p:nvSpPr>
+            <p:cNvPr id="5060" name="글상자"/>
+            <p:cNvSpPr/>
+            <p:nvPr/>
+          </p:nvSpPr>
+          <p:spPr>
+            <a:xfrm>
+              <a:off x="25851325" y="11489932"/>
+              <a:ext cx="1360029" cy="273321"/>
+            </a:xfrm>
+            <a:prstGeom prst="rect">
+              <a:avLst/>
+            </a:prstGeom>
+            <a:solidFill>
+              <a:srgbClr val="FFFFFF"/>
+            </a:solidFill>
+            <a:ln>
+              <a:noFill/>
+            </a:ln>
+          </p:spPr>
+          <p:txBody>
+            <a:bodyPr wrap="square" lIns="20550" tIns="10275" rIns="20550" bIns="10275" anchor="ctr">
+              <a:noAutofit/>
+            </a:bodyPr>
+            <a:lstStyle/>
+            <a:p>
+              <a:pPr algn="ctr">
+                <a:lnSpc>
+                  <a:spcPct val="100000"/>
+                </a:lnSpc>
+              </a:pPr>
+              <a:r>
+                <a:rPr lang="ko-KR" altLang="en-US" sz="1537" b="0" dirty="0">
+                  <a:solidFill>
+                    <a:srgbClr val="222222"/>
+                  </a:solidFill>
+                  <a:latin typeface="나눔고딕" pitchFamily="50" charset="-127"/>
+                  <a:ea typeface="나눔고딕" pitchFamily="50" charset="-127"/>
+                  <a:cs typeface="Arial" panose="020B0604020202020204" pitchFamily="34" charset="0"/>
+                </a:rPr>
+                <a:t>appliesToDam</a:t>
+              </a:r>
+            </a:p>
+          </p:txBody>
+        </p:sp>
+        <p:cxnSp>
+          <p:nvCxnSpPr>
+            <p:cNvPr id="5061" name="선"/>
+            <p:cNvCxnSpPr/>
+            <p:nvPr/>
+          </p:nvCxnSpPr>
+          <p:spPr>
+            <a:xfrm>
+              <a:off x="25657946" y="13404208"/>
+              <a:ext cx="0" cy="534312"/>
+            </a:xfrm>
+            <a:prstGeom prst="line">
+              <a:avLst/>
+            </a:prstGeom>
+            <a:ln w="31750">
+              <a:solidFill>
+                <a:srgbClr val="3B4A63"/>
+              </a:solidFill>
+              <a:tailEnd type="triangle" w="med" len="med"/>
+            </a:ln>
+          </p:spPr>
+        </p:cxnSp>
+        <p:sp>
+          <p:nvSpPr>
+            <p:cNvPr id="5062" name="글상자"/>
+            <p:cNvSpPr/>
+            <p:nvPr/>
+          </p:nvSpPr>
+          <p:spPr>
+            <a:xfrm>
+              <a:off x="25669043" y="13628208"/>
+              <a:ext cx="2443861" cy="230165"/>
+            </a:xfrm>
+            <a:prstGeom prst="rect">
+              <a:avLst/>
+            </a:prstGeom>
+            <a:solidFill>
+              <a:srgbClr val="FFFFFF"/>
+            </a:solidFill>
+            <a:ln>
+              <a:noFill/>
+            </a:ln>
+          </p:spPr>
+          <p:txBody>
+            <a:bodyPr wrap="square" lIns="20550" tIns="10275" rIns="20550" bIns="10275" anchor="ctr">
+              <a:noAutofit/>
+            </a:bodyPr>
+            <a:lstStyle/>
+            <a:p>
+              <a:pPr algn="ctr">
+                <a:lnSpc>
+                  <a:spcPct val="100000"/>
+                </a:lnSpc>
+              </a:pPr>
+              <a:r>
+                <a:rPr lang="ko-KR" altLang="en-US" sz="1295" b="0" dirty="0">
+                  <a:solidFill>
+                    <a:srgbClr val="222222"/>
+                  </a:solidFill>
+                  <a:latin typeface="나눔고딕" pitchFamily="50" charset="-127"/>
+                  <a:ea typeface="나눔고딕" pitchFamily="50" charset="-127"/>
+                  <a:cs typeface="Arial" panose="020B0604020202020204" pitchFamily="34" charset="0"/>
+                </a:rPr>
+                <a:t>hasHydrometeorologicalState</a:t>
+              </a:r>
+            </a:p>
+          </p:txBody>
+        </p:sp>
+        <p:cxnSp>
+          <p:nvCxnSpPr>
+            <p:cNvPr id="5063" name="선"/>
+            <p:cNvCxnSpPr/>
+            <p:nvPr/>
+          </p:nvCxnSpPr>
+          <p:spPr>
+            <a:xfrm>
+              <a:off x="19749689" y="13404208"/>
+              <a:ext cx="0" cy="534312"/>
+            </a:xfrm>
+            <a:prstGeom prst="line">
+              <a:avLst/>
+            </a:prstGeom>
+            <a:ln w="31750">
+              <a:solidFill>
+                <a:srgbClr val="3B4A63"/>
+              </a:solidFill>
+              <a:tailEnd type="triangle" w="med" len="med"/>
+            </a:ln>
+          </p:spPr>
+        </p:cxnSp>
+        <p:sp>
+          <p:nvSpPr>
+            <p:cNvPr id="5064" name="글상자"/>
+            <p:cNvSpPr/>
+            <p:nvPr/>
+          </p:nvSpPr>
+          <p:spPr>
+            <a:xfrm>
+              <a:off x="19849461" y="13606630"/>
+              <a:ext cx="1238987" cy="273321"/>
+            </a:xfrm>
+            <a:prstGeom prst="rect">
+              <a:avLst/>
+            </a:prstGeom>
+            <a:solidFill>
+              <a:srgbClr val="FFFFFF"/>
+            </a:solidFill>
+            <a:ln>
+              <a:noFill/>
+            </a:ln>
+          </p:spPr>
+          <p:txBody>
+            <a:bodyPr wrap="square" lIns="20550" tIns="10275" rIns="20550" bIns="10275" anchor="ctr">
+              <a:noAutofit/>
+            </a:bodyPr>
+            <a:lstStyle/>
+            <a:p>
+              <a:pPr algn="ctr">
+                <a:lnSpc>
+                  <a:spcPct val="100000"/>
+                </a:lnSpc>
+              </a:pPr>
+              <a:r>
+                <a:rPr lang="ko-KR" altLang="en-US" sz="1537" b="0" dirty="0">
+                  <a:solidFill>
+                    <a:srgbClr val="222222"/>
+                  </a:solidFill>
+                  <a:latin typeface="나눔고딕" pitchFamily="50" charset="-127"/>
+                  <a:ea typeface="나눔고딕" pitchFamily="50" charset="-127"/>
+                  <a:cs typeface="Arial" panose="020B0604020202020204" pitchFamily="34" charset="0"/>
+                </a:rPr>
+                <a:t>supportedBy</a:t>
+              </a:r>
+            </a:p>
+          </p:txBody>
+        </p:sp>
+        <p:cxnSp>
+          <p:nvCxnSpPr>
+            <p:cNvPr id="5065" name="선"/>
+            <p:cNvCxnSpPr/>
+            <p:nvPr/>
+          </p:nvCxnSpPr>
+          <p:spPr>
+            <a:xfrm flipH="1">
+              <a:off x="22030790" y="14883841"/>
+              <a:ext cx="1346055" cy="0"/>
+            </a:xfrm>
+            <a:prstGeom prst="line">
+              <a:avLst/>
+            </a:prstGeom>
+            <a:ln w="31750">
+              <a:solidFill>
+                <a:srgbClr val="3B4A63"/>
+              </a:solidFill>
+              <a:tailEnd type="triangle" w="med" len="med"/>
+            </a:ln>
+          </p:spPr>
+        </p:cxnSp>
+        <p:sp>
+          <p:nvSpPr>
+            <p:cNvPr id="5066" name="글상자"/>
+            <p:cNvSpPr/>
+            <p:nvPr/>
+          </p:nvSpPr>
+          <p:spPr>
+            <a:xfrm>
+              <a:off x="22119362" y="14528318"/>
+              <a:ext cx="1179185" cy="258936"/>
+            </a:xfrm>
+            <a:prstGeom prst="rect">
+              <a:avLst/>
+            </a:prstGeom>
+            <a:solidFill>
+              <a:srgbClr val="FFFFFF"/>
+            </a:solidFill>
+            <a:ln>
+              <a:noFill/>
+            </a:ln>
+          </p:spPr>
+          <p:txBody>
+            <a:bodyPr wrap="square" lIns="20550" tIns="10275" rIns="20550" bIns="10275" anchor="ctr">
+              <a:noAutofit/>
+            </a:bodyPr>
+            <a:lstStyle/>
+            <a:p>
+              <a:pPr algn="ctr">
+                <a:lnSpc>
+                  <a:spcPct val="100000"/>
+                </a:lnSpc>
+              </a:pPr>
+              <a:r>
+                <a:rPr lang="ko-KR" altLang="en-US" sz="1456" b="0" dirty="0">
+                  <a:solidFill>
+                    <a:srgbClr val="222222"/>
+                  </a:solidFill>
+                  <a:latin typeface="나눔고딕" pitchFamily="50" charset="-127"/>
+                  <a:ea typeface="나눔고딕" pitchFamily="50" charset="-127"/>
+                  <a:cs typeface="Arial" panose="020B0604020202020204" pitchFamily="34" charset="0"/>
+                </a:rPr>
+                <a:t>supportedBy</a:t>
+              </a:r>
+            </a:p>
+          </p:txBody>
+        </p:sp>
+        <p:cxnSp>
+          <p:nvCxnSpPr>
+            <p:cNvPr id="5067" name="선"/>
+            <p:cNvCxnSpPr/>
+            <p:nvPr/>
+          </p:nvCxnSpPr>
+          <p:spPr>
+            <a:xfrm flipH="1">
+              <a:off x="17211707" y="10157235"/>
+              <a:ext cx="277431" cy="0"/>
+            </a:xfrm>
+            <a:prstGeom prst="line">
+              <a:avLst/>
+            </a:prstGeom>
+            <a:ln w="31750">
+              <a:solidFill>
+                <a:srgbClr val="3B4A63"/>
+              </a:solidFill>
+            </a:ln>
+          </p:spPr>
+        </p:cxnSp>
+        <p:cxnSp>
+          <p:nvCxnSpPr>
+            <p:cNvPr id="5068" name="선"/>
+            <p:cNvCxnSpPr/>
+            <p:nvPr/>
+          </p:nvCxnSpPr>
+          <p:spPr>
+            <a:xfrm>
+              <a:off x="17211707" y="10157235"/>
+              <a:ext cx="0" cy="5034862"/>
+            </a:xfrm>
+            <a:prstGeom prst="line">
+              <a:avLst/>
+            </a:prstGeom>
+            <a:ln w="31750">
+              <a:solidFill>
+                <a:srgbClr val="3B4A63"/>
+              </a:solidFill>
+            </a:ln>
+          </p:spPr>
+        </p:cxnSp>
+        <p:cxnSp>
+          <p:nvCxnSpPr>
+            <p:cNvPr id="5069" name="선"/>
+            <p:cNvCxnSpPr/>
+            <p:nvPr/>
+          </p:nvCxnSpPr>
+          <p:spPr>
+            <a:xfrm>
+              <a:off x="17211707" y="15192097"/>
+              <a:ext cx="256881" cy="0"/>
+            </a:xfrm>
+            <a:prstGeom prst="line">
+              <a:avLst/>
+            </a:prstGeom>
+            <a:ln w="31750">
+              <a:solidFill>
+                <a:srgbClr val="3B4A63"/>
+              </a:solidFill>
+              <a:tailEnd type="triangle" w="med" len="med"/>
+            </a:ln>
+          </p:spPr>
+        </p:cxnSp>
+        <p:cxnSp>
+          <p:nvCxnSpPr>
+            <p:cNvPr id="5070" name="선"/>
+            <p:cNvCxnSpPr/>
+            <p:nvPr/>
+          </p:nvCxnSpPr>
+          <p:spPr>
+            <a:xfrm>
+              <a:off x="27918496" y="10157235"/>
+              <a:ext cx="102752" cy="0"/>
+            </a:xfrm>
+            <a:prstGeom prst="line">
+              <a:avLst/>
+            </a:prstGeom>
+            <a:ln w="31750">
+              <a:solidFill>
+                <a:srgbClr val="3B4A63"/>
+              </a:solidFill>
+            </a:ln>
+          </p:spPr>
+        </p:cxnSp>
+        <p:cxnSp>
+          <p:nvCxnSpPr>
+            <p:cNvPr id="5071" name="선"/>
+            <p:cNvCxnSpPr/>
+            <p:nvPr/>
+          </p:nvCxnSpPr>
+          <p:spPr>
+            <a:xfrm>
+              <a:off x="28021248" y="10157235"/>
+              <a:ext cx="0" cy="5918532"/>
+            </a:xfrm>
+            <a:prstGeom prst="line">
+              <a:avLst/>
+            </a:prstGeom>
+            <a:ln w="31750">
+              <a:solidFill>
+                <a:srgbClr val="3B4A63"/>
+              </a:solidFill>
+            </a:ln>
+          </p:spPr>
+        </p:cxnSp>
+        <p:cxnSp>
+          <p:nvCxnSpPr>
+            <p:cNvPr id="5072" name="선"/>
+            <p:cNvCxnSpPr/>
+            <p:nvPr/>
+          </p:nvCxnSpPr>
+          <p:spPr>
+            <a:xfrm flipH="1">
+              <a:off x="20571707" y="16075767"/>
+              <a:ext cx="7449541" cy="0"/>
+            </a:xfrm>
+            <a:prstGeom prst="line">
+              <a:avLst/>
+            </a:prstGeom>
+            <a:ln w="31750">
+              <a:solidFill>
+                <a:srgbClr val="3B4A63"/>
+              </a:solidFill>
+            </a:ln>
+          </p:spPr>
+        </p:cxnSp>
+        <p:cxnSp>
+          <p:nvCxnSpPr>
+            <p:cNvPr id="5073" name="선"/>
+            <p:cNvCxnSpPr/>
+            <p:nvPr/>
+          </p:nvCxnSpPr>
+          <p:spPr>
+            <a:xfrm flipV="1">
+              <a:off x="20571707" y="15808611"/>
+              <a:ext cx="0" cy="267156"/>
+            </a:xfrm>
+            <a:prstGeom prst="line">
+              <a:avLst/>
+            </a:prstGeom>
+            <a:ln w="31750">
+              <a:solidFill>
+                <a:srgbClr val="3B4A63"/>
+              </a:solidFill>
+              <a:tailEnd type="triangle" w="med" len="med"/>
+            </a:ln>
+          </p:spPr>
+        </p:cxnSp>
+        <p:sp>
+          <p:nvSpPr>
+            <p:cNvPr id="5074" name="글상자"/>
+            <p:cNvSpPr/>
+            <p:nvPr/>
+          </p:nvSpPr>
+          <p:spPr>
+            <a:xfrm>
+              <a:off x="17026753" y="16199070"/>
+              <a:ext cx="11200000" cy="287706"/>
+            </a:xfrm>
+            <a:prstGeom prst="rect">
+              <a:avLst/>
+            </a:prstGeom>
+            <a:noFill/>
+            <a:ln>
+              <a:noFill/>
+            </a:ln>
+          </p:spPr>
+          <p:txBody>
+            <a:bodyPr wrap="square" lIns="20550" tIns="10275" rIns="20550" bIns="10275" anchor="ctr">
+              <a:noAutofit/>
+            </a:bodyPr>
+            <a:lstStyle/>
+            <a:p>
+              <a:pPr algn="ctr">
+                <a:lnSpc>
+                  <a:spcPct val="100000"/>
+                </a:lnSpc>
+              </a:pPr>
+              <a:r>
+                <a:rPr lang="ko-KR" altLang="en-US" sz="1618" b="0" dirty="0">
+                  <a:solidFill>
+                    <a:srgbClr val="444444"/>
+                  </a:solidFill>
+                  <a:latin typeface="나눔고딕" pitchFamily="50" charset="-127"/>
+                  <a:ea typeface="나눔고딕" pitchFamily="50" charset="-127"/>
+                  <a:cs typeface="Arial" panose="020B0604020202020204" pitchFamily="34" charset="0"/>
+                </a:rPr>
+                <a:t>카드: Class 이름, 개체(Entity) ID, Data Property = 값.   화살표: 관계(Relation) 9종류</a:t>
+              </a:r>
+            </a:p>
+          </p:txBody>
+        </p:sp>
+      </p:grpSp>
+      <p:sp>
+        <p:nvSpPr>
+          <p:cNvPr id="1022" name="본문"/>
+          <p:cNvSpPr txBox="1"/>
+          <p:nvPr/>
+        </p:nvSpPr>
+        <p:spPr>
+          <a:xfrm>
+            <a:off x="15570184" y="16485125"/>
+            <a:ext cx="14113138" cy="600000"/>
+          </a:xfrm>
+          <a:prstGeom prst="rect">
+            <a:avLst/>
+          </a:prstGeom>
+          <a:noFill/>
+          <a:ln>
+            <a:noFill/>
+          </a:ln>
+        </p:spPr>
+        <p:txBody>
+          <a:bodyPr wrap="square" lIns="66158" tIns="33079" rIns="66158" bIns="33079" anchor="t">
+            <a:noAutofit/>
+          </a:bodyPr>
+          <a:lstStyle/>
+          <a:p>
+            <a:pPr marL="0" indent="0" algn="ctr">
+              <a:lnSpc>
+                <a:spcPct val="118000"/>
+              </a:lnSpc>
+              <a:spcAft>
+                <a:spcPts val="600"/>
+              </a:spcAft>
+              <a:buNone/>
+            </a:pPr>
+            <a:r>
+              <a:rPr lang="ko-KR" altLang="en-US" sz="2200" b="0" dirty="0">
+                <a:solidFill>
+                  <a:schemeClr val="tx1">
+                    <a:lumMod val="85000"/>
+                    <a:lumOff val="15000"/>
+                  </a:schemeClr>
+                </a:solidFill>
+                <a:latin typeface="나눔고딕" pitchFamily="50" charset="-127"/>
+                <a:ea typeface="나눔고딕" pitchFamily="50" charset="-127"/>
+                <a:cs typeface="Arial" panose="020B0604020202020204" pitchFamily="34" charset="0"/>
+              </a:rPr>
+              <a:t>그림 2. 지식그래프의 일부: 충주댐 승인 1368번</a:t>
+            </a:r>
+          </a:p>
+        </p:txBody>
+      </p:sp>
+      <p:sp>
+        <p:nvSpPr>
+          <p:cNvPr id="1023" name="본문"/>
+          <p:cNvSpPr txBox="1"/>
+          <p:nvPr/>
+        </p:nvSpPr>
+        <p:spPr>
+          <a:xfrm>
+            <a:off x="15570184" y="17085125"/>
+            <a:ext cx="14113138" cy="1005551"/>
+          </a:xfrm>
+          <a:prstGeom prst="rect">
+            <a:avLst/>
+          </a:prstGeom>
+          <a:noFill/>
+          <a:ln>
+            <a:noFill/>
+          </a:ln>
+        </p:spPr>
+        <p:txBody>
+          <a:bodyPr wrap="square" lIns="66158" tIns="33079" rIns="66158" bIns="33079" anchor="t">
+            <a:noAutofit/>
+          </a:bodyPr>
+          <a:lstStyle/>
+          <a:p>
+            <a:pPr marL="334726" indent="-334726">
+              <a:lnSpc>
+                <a:spcPct val="118000"/>
+              </a:lnSpc>
+              <a:spcAft>
+                <a:spcPts val="600"/>
+              </a:spcAft>
+              <a:buBlip>
+                <a:blip r:embed="rId4"/>
+              </a:buBlip>
+            </a:pPr>
+            <a:r>
+              <a:rPr lang="ko-KR" altLang="en-US" sz="2400" b="1" dirty="0">
+                <a:solidFill>
+                  <a:schemeClr val="tx1">
+                    <a:lumMod val="85000"/>
+                    <a:lumOff val="15000"/>
+                  </a:schemeClr>
+                </a:solidFill>
+                <a:latin typeface="나눔고딕" pitchFamily="50" charset="-127"/>
+                <a:ea typeface="나눔고딕" pitchFamily="50" charset="-127"/>
+                <a:cs typeface="Arial" panose="020B0604020202020204" pitchFamily="34" charset="0"/>
+              </a:rPr>
+              <a:t>개체 264, 관계 418</a:t>
+            </a:r>
+            <a:r>
+              <a:rPr lang="ko-KR" altLang="en-US" sz="2400" b="0" dirty="0">
+                <a:solidFill>
+                  <a:schemeClr val="tx1">
+                    <a:lumMod val="85000"/>
+                    <a:lumOff val="15000"/>
+                  </a:schemeClr>
+                </a:solidFill>
+                <a:latin typeface="나눔고딕" pitchFamily="50" charset="-127"/>
+                <a:ea typeface="나눔고딕" pitchFamily="50" charset="-127"/>
+                <a:cs typeface="Arial" panose="020B0604020202020204" pitchFamily="34" charset="0"/>
+              </a:rPr>
+              <a:t>. 검증에서 </a:t>
+            </a:r>
+            <a:r>
+              <a:rPr lang="ko-KR" altLang="en-US" sz="2400" b="1" dirty="0">
+                <a:solidFill>
+                  <a:schemeClr val="tx1">
+                    <a:lumMod val="85000"/>
+                    <a:lumOff val="15000"/>
+                  </a:schemeClr>
+                </a:solidFill>
+                <a:latin typeface="나눔고딕" pitchFamily="50" charset="-127"/>
+                <a:ea typeface="나눔고딕" pitchFamily="50" charset="-127"/>
+                <a:cs typeface="Arial" panose="020B0604020202020204" pitchFamily="34" charset="0"/>
+              </a:rPr>
+              <a:t>승인–댐 관계</a:t>
+            </a:r>
+            <a:r>
+              <a:rPr lang="ko-KR" altLang="en-US" sz="2400" b="0" dirty="0">
+                <a:solidFill>
+                  <a:schemeClr val="tx1">
+                    <a:lumMod val="85000"/>
+                    <a:lumOff val="15000"/>
+                  </a:schemeClr>
+                </a:solidFill>
+                <a:latin typeface="나눔고딕" pitchFamily="50" charset="-127"/>
+                <a:ea typeface="나눔고딕" pitchFamily="50" charset="-127"/>
+                <a:cs typeface="Arial" panose="020B0604020202020204" pitchFamily="34" charset="0"/>
+              </a:rPr>
+              <a:t>의 부재를 발견해 추가하여 승인 80건 모두 댐에서 도달 가능함</a:t>
+            </a:r>
+          </a:p>
+        </p:txBody>
+      </p:sp>
+      <p:sp>
+        <p:nvSpPr>
+          <p:cNvPr id="1024" name="직사각형 1"/>
+          <p:cNvSpPr/>
+          <p:nvPr/>
+        </p:nvSpPr>
+        <p:spPr>
+          <a:xfrm>
+            <a:off x="15691431" y="18290676"/>
+            <a:ext cx="13943667" cy="1023024"/>
+          </a:xfrm>
+          <a:prstGeom prst="rect">
+            <a:avLst/>
+          </a:prstGeom>
+          <a:solidFill>
+            <a:schemeClr val="accent1">
+              <a:lumMod val="75000"/>
+            </a:schemeClr>
+          </a:solidFill>
+          <a:ln w="9525">
+            <a:noFill/>
+            <a:miter lim="800000"/>
+            <a:headEnd/>
+            <a:tailEnd/>
+          </a:ln>
+        </p:spPr>
+        <p:txBody>
+          <a:bodyPr wrap="square" lIns="222728" tIns="111366" rIns="222728" bIns="111366" anchor="ctr"/>
+          <a:lstStyle/>
+          <a:p>
+            <a:pPr defTabSz="2048653"/>
+            <a:r>
+              <a:rPr lang="ko-KR" altLang="en-US" sz="4800" b="1" dirty="0">
+                <a:ln>
+                  <a:solidFill>
+                    <a:schemeClr val="accent1">
+                      <a:alpha val="0"/>
+                    </a:schemeClr>
+                  </a:solidFill>
+                </a:ln>
+                <a:solidFill>
+                  <a:schemeClr val="bg1"/>
+                </a:solidFill>
+                <a:effectLst>
+                  <a:outerShdw blurRad="38100" dist="38100" dir="2700000" algn="tl">
+                    <a:srgbClr val="000000">
+                      <a:alpha val="43137"/>
+                    </a:srgbClr>
+                  </a:outerShdw>
+                </a:effectLst>
+                <a:latin typeface="나눔고딕 ExtraBold" panose="020D0904000000000000" pitchFamily="50" charset="-127"/>
+                <a:ea typeface="나눔고딕 ExtraBold" panose="020D0904000000000000" pitchFamily="50" charset="-127"/>
+                <a:cs typeface="Arial Unicode MS" panose="020B0604020202020204" pitchFamily="50" charset="-127"/>
+              </a:rPr>
+              <a:t>근거 검색과 근거 묶음</a:t>
+            </a:r>
+          </a:p>
+        </p:txBody>
+      </p:sp>
+      <p:sp>
+        <p:nvSpPr>
+          <p:cNvPr id="1025" name="본문"/>
+          <p:cNvSpPr txBox="1"/>
+          <p:nvPr/>
+        </p:nvSpPr>
+        <p:spPr>
+          <a:xfrm>
+            <a:off x="15570184" y="19433700"/>
+            <a:ext cx="14113138" cy="1005551"/>
+          </a:xfrm>
+          <a:prstGeom prst="rect">
+            <a:avLst/>
+          </a:prstGeom>
+          <a:noFill/>
+          <a:ln>
+            <a:noFill/>
+          </a:ln>
+        </p:spPr>
+        <p:txBody>
+          <a:bodyPr wrap="square" lIns="66158" tIns="33079" rIns="66158" bIns="33079" anchor="t">
+            <a:noAutofit/>
+          </a:bodyPr>
+          <a:lstStyle/>
+          <a:p>
+            <a:pPr marL="334726" indent="-334726">
+              <a:lnSpc>
+                <a:spcPct val="118000"/>
+              </a:lnSpc>
+              <a:spcAft>
+                <a:spcPts val="600"/>
+              </a:spcAft>
+              <a:buBlip>
+                <a:blip r:embed="rId4"/>
+              </a:buBlip>
+            </a:pPr>
+            <a:r>
+              <a:rPr lang="ko-KR" altLang="en-US" sz="2400" b="0" dirty="0">
+                <a:solidFill>
+                  <a:schemeClr val="tx1">
+                    <a:lumMod val="85000"/>
+                    <a:lumOff val="15000"/>
+                  </a:schemeClr>
+                </a:solidFill>
+                <a:latin typeface="나눔고딕" pitchFamily="50" charset="-127"/>
+                <a:ea typeface="나눔고딕" pitchFamily="50" charset="-127"/>
+                <a:cs typeface="Arial" panose="020B0604020202020204" pitchFamily="34" charset="0"/>
+              </a:rPr>
+              <a:t>LLM이 </a:t>
+            </a:r>
+            <a:r>
+              <a:rPr lang="ko-KR" altLang="en-US" sz="2400" b="1" dirty="0">
+                <a:solidFill>
+                  <a:schemeClr val="tx1">
+                    <a:lumMod val="85000"/>
+                    <a:lumOff val="15000"/>
+                  </a:schemeClr>
+                </a:solidFill>
+                <a:latin typeface="나눔고딕" pitchFamily="50" charset="-127"/>
+                <a:ea typeface="나눔고딕" pitchFamily="50" charset="-127"/>
+                <a:cs typeface="Arial" panose="020B0604020202020204" pitchFamily="34" charset="0"/>
+              </a:rPr>
+              <a:t>의도(복수 가능)·댐·시점</a:t>
+            </a:r>
+            <a:r>
+              <a:rPr lang="ko-KR" altLang="en-US" sz="2400" b="0" dirty="0">
+                <a:solidFill>
+                  <a:schemeClr val="tx1">
+                    <a:lumMod val="85000"/>
+                    <a:lumOff val="15000"/>
+                  </a:schemeClr>
+                </a:solidFill>
+                <a:latin typeface="나눔고딕" pitchFamily="50" charset="-127"/>
+                <a:ea typeface="나눔고딕" pitchFamily="50" charset="-127"/>
+                <a:cs typeface="Arial" panose="020B0604020202020204" pitchFamily="34" charset="0"/>
+              </a:rPr>
+              <a:t>을 뽑아 넘기면 코드가 </a:t>
+            </a:r>
+            <a:r>
+              <a:rPr lang="ko-KR" altLang="en-US" sz="2400" b="1" dirty="0">
+                <a:solidFill>
+                  <a:schemeClr val="tx1">
+                    <a:lumMod val="85000"/>
+                    <a:lumOff val="15000"/>
+                  </a:schemeClr>
+                </a:solidFill>
+                <a:latin typeface="나눔고딕" pitchFamily="50" charset="-127"/>
+                <a:ea typeface="나눔고딕" pitchFamily="50" charset="-127"/>
+                <a:cs typeface="Arial" panose="020B0604020202020204" pitchFamily="34" charset="0"/>
+              </a:rPr>
+              <a:t>① 입력 확인 → ② KG 조회(의도별 Cypher) → ③ 측정값·원문 조회 → ④ 근거 묶음 구성</a:t>
+            </a:r>
+            <a:r>
+              <a:rPr lang="ko-KR" altLang="en-US" sz="2400" b="0" dirty="0">
+                <a:solidFill>
+                  <a:schemeClr val="tx1">
+                    <a:lumMod val="85000"/>
+                    <a:lumOff val="15000"/>
+                  </a:schemeClr>
+                </a:solidFill>
+                <a:latin typeface="나눔고딕" pitchFamily="50" charset="-127"/>
+                <a:ea typeface="나눔고딕" pitchFamily="50" charset="-127"/>
+                <a:cs typeface="Arial" panose="020B0604020202020204" pitchFamily="34" charset="0"/>
+              </a:rPr>
+              <a:t> 순으로 근거를 모음</a:t>
+            </a:r>
+          </a:p>
+        </p:txBody>
+      </p:sp>
+      <p:sp>
+        <p:nvSpPr>
+          <p:cNvPr id="1026" name="직사각형 415"/>
+          <p:cNvSpPr/>
+          <p:nvPr/>
+        </p:nvSpPr>
+        <p:spPr>
+          <a:xfrm>
+            <a:off x="15803042" y="20499251"/>
             <a:ext cx="13649422" cy="645985"/>
           </a:xfrm>
           <a:prstGeom prst="rect">
@@ -5256,32 +9025,33 @@
                 <a:ea typeface="나눔고딕" pitchFamily="50" charset="-127"/>
                 <a:cs typeface="Arial" panose="020B0604020202020204" pitchFamily="34" charset="0"/>
               </a:rPr>
-              <a:t>Table 3. 전체 질문에 대한 근거 검색과 답변 구성</a:t>
+              <a:t>Table 3. 근거 묶음의 구성 (충주댐 전체 질문)</a:t>
             </a:r>
           </a:p>
         </p:txBody>
       </p:sp>
       <p:graphicFrame>
         <p:nvGraphicFramePr>
-          <p:cNvPr id="1024" name="표"/>
+          <p:cNvPr id="1027" name="표"/>
           <p:cNvGraphicFramePr>
             <a:graphicFrameLocks noGrp="1"/>
           </p:cNvGraphicFramePr>
           <p:nvPr/>
         </p:nvGraphicFramePr>
         <p:xfrm>
-          <a:off x="15670184" y="21454434"/>
-          <a:ext cx="13500000" cy="4591750"/>
+          <a:off x="15670184" y="21235236"/>
+          <a:ext cx="13500000" cy="3463000"/>
         </p:xfrm>
         <a:graphic>
           <a:graphicData uri="http://schemas.openxmlformats.org/drawingml/2006/table">
             <a:tbl>
               <a:tblPr firstRow="1" bandRow="1"/>
               <a:tblGrid>
-                <a:gridCol w="2600000"/>
-                <a:gridCol w="10900000"/>
+                <a:gridCol w="3700000"/>
+                <a:gridCol w="3300000"/>
+                <a:gridCol w="6500000"/>
               </a:tblGrid>
-              <a:tr h="499250">
+              <a:tr h="451625">
                 <a:tc>
                   <a:txBody>
                     <a:bodyPr/>
@@ -5293,7 +9063,7 @@
                         </a:lnSpc>
                       </a:pPr>
                       <a:r>
-                        <a:rPr lang="ko-KR" altLang="en-US" sz="2200" b="1" dirty="0">
+                        <a:rPr lang="ko-KR" altLang="en-US" sz="1900" b="1" dirty="0">
                           <a:solidFill>
                             <a:schemeClr val="bg1"/>
                           </a:solidFill>
@@ -5301,7 +9071,7 @@
                           <a:ea typeface="나눔고딕" pitchFamily="50" charset="-127"/>
                           <a:cs typeface="Arial" panose="020B0604020202020204" pitchFamily="34" charset="0"/>
                         </a:rPr>
-                        <a:t>단계</a:t>
+                        <a:t>근거 구역</a:t>
                       </a:r>
                     </a:p>
                   </a:txBody>
@@ -5342,7 +9112,7 @@
                         </a:lnSpc>
                       </a:pPr>
                       <a:r>
-                        <a:rPr lang="ko-KR" altLang="en-US" sz="2200" b="1" dirty="0">
+                        <a:rPr lang="ko-KR" altLang="en-US" sz="1900" b="1" dirty="0">
                           <a:solidFill>
                             <a:schemeClr val="bg1"/>
                           </a:solidFill>
@@ -5350,7 +9120,56 @@
                           <a:ea typeface="나눔고딕" pitchFamily="50" charset="-127"/>
                           <a:cs typeface="Arial" panose="020B0604020202020204" pitchFamily="34" charset="0"/>
                         </a:rPr>
-                        <a:t>내용</a:t>
+                        <a:t>출처 번호</a:t>
+                      </a:r>
+                    </a:p>
+                  </a:txBody>
+                  <a:tcPr marL="91440" marR="91440" marT="60000" marB="60000" anchor="ctr">
+                    <a:lnL w="9525">
+                      <a:solidFill>
+                        <a:srgbClr val="9AA7B5"/>
+                      </a:solidFill>
+                    </a:lnL>
+                    <a:lnR w="9525">
+                      <a:solidFill>
+                        <a:srgbClr val="9AA7B5"/>
+                      </a:solidFill>
+                    </a:lnR>
+                    <a:lnT w="9525">
+                      <a:solidFill>
+                        <a:srgbClr val="9AA7B5"/>
+                      </a:solidFill>
+                    </a:lnT>
+                    <a:lnB w="9525">
+                      <a:solidFill>
+                        <a:srgbClr val="9AA7B5"/>
+                      </a:solidFill>
+                    </a:lnB>
+                    <a:solidFill>
+                      <a:srgbClr val="1F4E79"/>
+                    </a:solidFill>
+                  </a:tcPr>
+                </a:tc>
+                <a:tc>
+                  <a:txBody>
+                    <a:bodyPr/>
+                    <a:lstStyle/>
+                    <a:p>
+                      <a:pPr algn="ctr">
+                        <a:lnSpc>
+                          <a:spcPct val="105000"/>
+                        </a:lnSpc>
+                      </a:pPr>
+                      <a:r>
+                        <a:rPr lang="ko-KR" altLang="en-US" sz="1900" b="1" dirty="0">
+                          <a:solidFill>
+                            <a:schemeClr val="bg1"/>
+                          </a:solidFill>
+                          <a:latin typeface="나눔고딕" pitchFamily="50" charset="-127"/>
+                          <a:ea typeface="나눔고딕" pitchFamily="50" charset="-127"/>
+                          <a:cs typeface="Arial" panose="020B0604020202020204" pitchFamily="34" charset="0"/>
+                        </a:rPr>
+                        <a:t>충주댐의 경우</a:t>
                       </a:r>
                     </a:p>
                   </a:txBody>
@@ -5381,7 +9200,7 @@
                   </a:tcPr>
                 </a:tc>
               </a:tr>
-              <a:tr h="848500">
+              <a:tr h="451625">
                 <a:tc>
                   <a:txBody>
                     <a:bodyPr/>
@@ -5393,7 +9212,7 @@
                         </a:lnSpc>
                       </a:pPr>
                       <a:r>
-                        <a:rPr lang="ko-KR" altLang="en-US" sz="2200" b="1" dirty="0">
+                        <a:rPr lang="ko-KR" altLang="en-US" sz="1900" b="1" dirty="0">
                           <a:solidFill>
                             <a:schemeClr val="tx1">
                               <a:lumMod val="85000"/>
@@ -5404,7 +9223,7 @@
                           <a:ea typeface="나눔고딕" pitchFamily="50" charset="-127"/>
                           <a:cs typeface="Arial" panose="020B0604020202020204" pitchFamily="34" charset="0"/>
                         </a:rPr>
-                        <a:t>질문</a:t>
+                        <a:t>1 현재 상태 (CQ1)</a:t>
                       </a:r>
                     </a:p>
                   </a:txBody>
@@ -5445,7 +9264,7 @@
                         </a:lnSpc>
                       </a:pPr>
                       <a:r>
-                        <a:rPr lang="ko-KR" altLang="en-US" sz="2200" b="0" dirty="0">
+                        <a:rPr lang="ko-KR" altLang="en-US" sz="1900" b="0" dirty="0">
                           <a:solidFill>
                             <a:schemeClr val="tx1">
                               <a:lumMod val="85000"/>
@@ -5456,7 +9275,7 @@
                           <a:ea typeface="나눔고딕" pitchFamily="50" charset="-127"/>
                           <a:cs typeface="Arial" panose="020B0604020202020204" pitchFamily="34" charset="0"/>
                         </a:rPr>
-                        <a:t>“충주댐 현재 수문, 기상 데이터를 가져오고 제한수위와 비교한 후에, 이와 비슷한 수문상태일 때의 승인 및 운영 행위가 있었으면 알려줘”</a:t>
+                        <a:t>[MEA:코드:시각]</a:t>
                       </a:r>
                     </a:p>
                   </a:txBody>
@@ -5486,8 +9305,6 @@
                     </a:solidFill>
                   </a:tcPr>
                 </a:tc>
-              </a:tr>
-              <a:tr h="499250">
                 <a:tc>
                   <a:txBody>
                     <a:bodyPr/>
@@ -5499,7 +9316,7 @@
                         </a:lnSpc>
                       </a:pPr>
                       <a:r>
-                        <a:rPr lang="ko-KR" altLang="en-US" sz="2200" b="1" dirty="0">
+                        <a:rPr lang="ko-KR" altLang="en-US" sz="1900" b="0" dirty="0">
                           <a:solidFill>
                             <a:schemeClr val="tx1">
                               <a:lumMod val="85000"/>
@@ -5510,7 +9327,61 @@
                           <a:ea typeface="나눔고딕" pitchFamily="50" charset="-127"/>
                           <a:cs typeface="Arial" panose="020B0604020202020204" pitchFamily="34" charset="0"/>
                         </a:rPr>
-                        <a:t>의도·값</a:t>
+                        <a:t>2026-09-28 23:00, 수위 131.6689 EL.m</a:t>
+                      </a:r>
+                    </a:p>
+                  </a:txBody>
+                  <a:tcPr marL="91440" marR="91440" marT="60000" marB="60000" anchor="ctr">
+                    <a:lnL w="9525">
+                      <a:solidFill>
+                        <a:srgbClr val="9AA7B5"/>
+                      </a:solidFill>
+                    </a:lnL>
+                    <a:lnR w="9525">
+                      <a:solidFill>
+                        <a:srgbClr val="9AA7B5"/>
+                      </a:solidFill>
+                    </a:lnR>
+                    <a:lnT w="9525">
+                      <a:solidFill>
+                        <a:srgbClr val="9AA7B5"/>
+                      </a:solidFill>
+                    </a:lnT>
+                    <a:lnB w="9525">
+                      <a:solidFill>
+                        <a:srgbClr val="9AA7B5"/>
+                      </a:solidFill>
+                    </a:lnB>
+                    <a:solidFill>
+                      <a:srgbClr val="FFFFFF"/>
+                    </a:solidFill>
+                  </a:tcPr>
+                </a:tc>
+              </a:tr>
+              <a:tr h="451625">
+                <a:tc>
+                  <a:txBody>
+                    <a:bodyPr/>
+                    <a:lstStyle/>
+                    <a:p>
+                      <a:pPr algn="l">
+                        <a:lnSpc>
+                          <a:spcPct val="105000"/>
+                        </a:lnSpc>
+                      </a:pPr>
+                      <a:r>
+                        <a:rPr lang="ko-KR" altLang="en-US" sz="1900" b="1" dirty="0">
+                          <a:solidFill>
+                            <a:schemeClr val="tx1">
+                              <a:lumMod val="85000"/>
+                              <a:lumOff val="15000"/>
+                            </a:schemeClr>
+                          </a:solidFill>
+                          <a:latin typeface="나눔고딕" pitchFamily="50" charset="-127"/>
+                          <a:ea typeface="나눔고딕" pitchFamily="50" charset="-127"/>
+                          <a:cs typeface="Arial" panose="020B0604020202020204" pitchFamily="34" charset="0"/>
+                        </a:rPr>
+                        <a:t>2 운영기준 (CQ5)</a:t>
                       </a:r>
                     </a:p>
                   </a:txBody>
@@ -5551,7 +9422,7 @@
                         </a:lnSpc>
                       </a:pPr>
                       <a:r>
-                        <a:rPr lang="ko-KR" altLang="en-US" sz="2200" b="0" dirty="0">
+                        <a:rPr lang="ko-KR" altLang="en-US" sz="1900" b="0" dirty="0">
                           <a:solidFill>
                             <a:schemeClr val="tx1">
                               <a:lumMod val="85000"/>
@@ -5562,7 +9433,7 @@
                           <a:ea typeface="나눔고딕" pitchFamily="50" charset="-127"/>
                           <a:cs typeface="Arial" panose="020B0604020202020204" pitchFamily="34" charset="0"/>
                         </a:rPr>
-                        <a:t>CQ1~CQ6 (복수), 댐 = 충주댐, 시점 = 전체</a:t>
+                        <a:t>[CRI:번호]</a:t>
                       </a:r>
                     </a:p>
                   </a:txBody>
@@ -5592,8 +9463,6 @@
                     </a:solidFill>
                   </a:tcPr>
                 </a:tc>
-              </a:tr>
-              <a:tr h="1896250">
                 <a:tc>
                   <a:txBody>
                     <a:bodyPr/>
@@ -5605,7 +9474,7 @@
                         </a:lnSpc>
                       </a:pPr>
                       <a:r>
-                        <a:rPr lang="ko-KR" altLang="en-US" sz="2200" b="1" dirty="0">
+                        <a:rPr lang="ko-KR" altLang="en-US" sz="1900" b="0" dirty="0">
                           <a:solidFill>
                             <a:schemeClr val="tx1">
                               <a:lumMod val="85000"/>
@@ -5616,7 +9485,61 @@
                           <a:ea typeface="나눔고딕" pitchFamily="50" charset="-127"/>
                           <a:cs typeface="Arial" panose="020B0604020202020204" pitchFamily="34" charset="0"/>
                         </a:rPr>
-                        <a:t>근거 묶음</a:t>
+                        <a:t>제한수위 138.0 EL.m, 별표3 원문</a:t>
+                      </a:r>
+                    </a:p>
+                  </a:txBody>
+                  <a:tcPr marL="91440" marR="91440" marT="60000" marB="60000" anchor="ctr">
+                    <a:lnL w="9525">
+                      <a:solidFill>
+                        <a:srgbClr val="9AA7B5"/>
+                      </a:solidFill>
+                    </a:lnL>
+                    <a:lnR w="9525">
+                      <a:solidFill>
+                        <a:srgbClr val="9AA7B5"/>
+                      </a:solidFill>
+                    </a:lnR>
+                    <a:lnT w="9525">
+                      <a:solidFill>
+                        <a:srgbClr val="9AA7B5"/>
+                      </a:solidFill>
+                    </a:lnT>
+                    <a:lnB w="9525">
+                      <a:solidFill>
+                        <a:srgbClr val="9AA7B5"/>
+                      </a:solidFill>
+                    </a:lnB>
+                    <a:solidFill>
+                      <a:srgbClr val="EEF3F8"/>
+                    </a:solidFill>
+                  </a:tcPr>
+                </a:tc>
+              </a:tr>
+              <a:tr h="753250">
+                <a:tc>
+                  <a:txBody>
+                    <a:bodyPr/>
+                    <a:lstStyle/>
+                    <a:p>
+                      <a:pPr algn="l">
+                        <a:lnSpc>
+                          <a:spcPct val="105000"/>
+                        </a:lnSpc>
+                      </a:pPr>
+                      <a:r>
+                        <a:rPr lang="ko-KR" altLang="en-US" sz="1900" b="1" dirty="0">
+                          <a:solidFill>
+                            <a:schemeClr val="tx1">
+                              <a:lumMod val="85000"/>
+                              <a:lumOff val="15000"/>
+                            </a:schemeClr>
+                          </a:solidFill>
+                          <a:latin typeface="나눔고딕" pitchFamily="50" charset="-127"/>
+                          <a:ea typeface="나눔고딕" pitchFamily="50" charset="-127"/>
+                          <a:cs typeface="Arial" panose="020B0604020202020204" pitchFamily="34" charset="0"/>
+                        </a:rPr>
+                        <a:t>3 운영행위·승인 (CQ3)</a:t>
                       </a:r>
                     </a:p>
                   </a:txBody>
@@ -5657,7 +9580,7 @@
                         </a:lnSpc>
                       </a:pPr>
                       <a:r>
-                        <a:rPr lang="ko-KR" altLang="en-US" sz="2200" b="0" dirty="0">
+                        <a:rPr lang="ko-KR" altLang="en-US" sz="1900" b="0" dirty="0">
                           <a:solidFill>
                             <a:schemeClr val="tx1">
                               <a:lumMod val="85000"/>
@@ -5668,70 +9591,7 @@
                           <a:ea typeface="나눔고딕" pitchFamily="50" charset="-127"/>
                           <a:cs typeface="Arial" panose="020B0604020202020204" pitchFamily="34" charset="0"/>
                         </a:rPr>
-                        <a:t>현재 상태 2026-09-28 23:00, 수위 131.6689 EL.m [MEA:1003110:2026092823]</a:t>
-                      </a:r>
-                    </a:p>
-                    <a:p>
-                      <a:pPr algn="l">
-                        <a:lnSpc>
-                          <a:spcPct val="105000"/>
-                        </a:lnSpc>
-                      </a:pPr>
-                      <a:r>
-                        <a:rPr lang="ko-KR" altLang="en-US" sz="2200" b="0" dirty="0">
-                          <a:solidFill>
-                            <a:schemeClr val="tx1">
-                              <a:lumMod val="85000"/>
-                              <a:lumOff val="15000"/>
-                            </a:schemeClr>
-                          </a:solidFill>
-                          <a:latin typeface="나눔고딕" pitchFamily="50" charset="-127"/>
-                          <a:ea typeface="나눔고딕" pitchFamily="50" charset="-127"/>
-                          <a:cs typeface="Arial" panose="020B0604020202020204" pitchFamily="34" charset="0"/>
-                        </a:rPr>
-                        <a:t>제한수위 138.0 EL.m [CRI:CR-02]</a:t>
-                      </a:r>
-                    </a:p>
-                    <a:p>
-                      <a:pPr algn="l">
-                        <a:lnSpc>
-                          <a:spcPct val="105000"/>
-                        </a:lnSpc>
-                      </a:pPr>
-                      <a:r>
-                        <a:rPr lang="ko-KR" altLang="en-US" sz="2200" b="0" dirty="0">
-                          <a:solidFill>
-                            <a:schemeClr val="tx1">
-                              <a:lumMod val="85000"/>
-                              <a:lumOff val="15000"/>
-                            </a:schemeClr>
-                          </a:solidFill>
-                          <a:latin typeface="나눔고딕" pitchFamily="50" charset="-127"/>
-                          <a:ea typeface="나눔고딕" pitchFamily="50" charset="-127"/>
-                          <a:cs typeface="Arial" panose="020B0604020202020204" pitchFamily="34" charset="0"/>
-                        </a:rPr>
-                        <a:t>운영행위 14개와 허가한 승인, 각 운영 시각의 수문기상 상태</a:t>
-                      </a:r>
-                    </a:p>
-                    <a:p>
-                      <a:pPr algn="l">
-                        <a:lnSpc>
-                          <a:spcPct val="105000"/>
-                        </a:lnSpc>
-                      </a:pPr>
-                      <a:r>
-                        <a:rPr lang="ko-KR" altLang="en-US" sz="2200" b="0" dirty="0">
-                          <a:solidFill>
-                            <a:schemeClr val="tx1">
-                              <a:lumMod val="85000"/>
-                              <a:lumOff val="15000"/>
-                            </a:schemeClr>
-                          </a:solidFill>
-                          <a:latin typeface="나눔고딕" pitchFamily="50" charset="-127"/>
-                          <a:ea typeface="나눔고딕" pitchFamily="50" charset="-127"/>
-                          <a:cs typeface="Arial" panose="020B0604020202020204" pitchFamily="34" charset="0"/>
-                        </a:rPr>
-                        <a:t>예) 2012-08-24 15:00 탄력적 방류 [OPR:1368:1] ← 승인 [APR:1368]</a:t>
+                        <a:t>[OPR] ← [APR]</a:t>
                       </a:r>
                     </a:p>
                   </a:txBody>
@@ -5761,8 +9621,6 @@
                     </a:solidFill>
                   </a:tcPr>
                 </a:tc>
-              </a:tr>
-              <a:tr h="848500">
                 <a:tc>
                   <a:txBody>
                     <a:bodyPr/>
@@ -5774,7 +9632,7 @@
                         </a:lnSpc>
                       </a:pPr>
                       <a:r>
-                        <a:rPr lang="ko-KR" altLang="en-US" sz="2200" b="1" dirty="0">
+                        <a:rPr lang="ko-KR" altLang="en-US" sz="1900" b="0" dirty="0">
                           <a:solidFill>
                             <a:schemeClr val="tx1">
                               <a:lumMod val="85000"/>
@@ -5785,7 +9643,61 @@
                           <a:ea typeface="나눔고딕" pitchFamily="50" charset="-127"/>
                           <a:cs typeface="Arial" panose="020B0604020202020204" pitchFamily="34" charset="0"/>
                         </a:rPr>
-                        <a:t>답변 (LLM)</a:t>
+                        <a:t>운영행위 14개 (예: 2012-08-24 탄력적 방류 ← 승인 1368)</a:t>
+                      </a:r>
+                    </a:p>
+                  </a:txBody>
+                  <a:tcPr marL="91440" marR="91440" marT="60000" marB="60000" anchor="ctr">
+                    <a:lnL w="9525">
+                      <a:solidFill>
+                        <a:srgbClr val="9AA7B5"/>
+                      </a:solidFill>
+                    </a:lnL>
+                    <a:lnR w="9525">
+                      <a:solidFill>
+                        <a:srgbClr val="9AA7B5"/>
+                      </a:solidFill>
+                    </a:lnR>
+                    <a:lnT w="9525">
+                      <a:solidFill>
+                        <a:srgbClr val="9AA7B5"/>
+                      </a:solidFill>
+                    </a:lnT>
+                    <a:lnB w="9525">
+                      <a:solidFill>
+                        <a:srgbClr val="9AA7B5"/>
+                      </a:solidFill>
+                    </a:lnB>
+                    <a:solidFill>
+                      <a:srgbClr val="FFFFFF"/>
+                    </a:solidFill>
+                  </a:tcPr>
+                </a:tc>
+              </a:tr>
+              <a:tr h="451625">
+                <a:tc>
+                  <a:txBody>
+                    <a:bodyPr/>
+                    <a:lstStyle/>
+                    <a:p>
+                      <a:pPr algn="l">
+                        <a:lnSpc>
+                          <a:spcPct val="105000"/>
+                        </a:lnSpc>
+                      </a:pPr>
+                      <a:r>
+                        <a:rPr lang="ko-KR" altLang="en-US" sz="1900" b="1" dirty="0">
+                          <a:solidFill>
+                            <a:schemeClr val="tx1">
+                              <a:lumMod val="85000"/>
+                              <a:lumOff val="15000"/>
+                            </a:schemeClr>
+                          </a:solidFill>
+                          <a:latin typeface="나눔고딕" pitchFamily="50" charset="-127"/>
+                          <a:ea typeface="나눔고딕" pitchFamily="50" charset="-127"/>
+                          <a:cs typeface="Arial" panose="020B0604020202020204" pitchFamily="34" charset="0"/>
+                        </a:rPr>
+                        <a:t>4 운영 시각 상태 (CQ2)</a:t>
                       </a:r>
                     </a:p>
                   </a:txBody>
@@ -5826,7 +9738,7 @@
                         </a:lnSpc>
                       </a:pPr>
                       <a:r>
-                        <a:rPr lang="ko-KR" altLang="en-US" sz="2200" b="0" dirty="0">
+                        <a:rPr lang="ko-KR" altLang="en-US" sz="1900" b="0" dirty="0">
                           <a:solidFill>
                             <a:schemeClr val="tx1">
                               <a:lumMod val="85000"/>
@@ -5837,7 +9749,375 @@
                           <a:ea typeface="나눔고딕" pitchFamily="50" charset="-127"/>
                           <a:cs typeface="Arial" panose="020B0604020202020204" pitchFamily="34" charset="0"/>
                         </a:rPr>
-                        <a:t>근거(출처 번호 포함)와 판단(LLM)으로 나누어 작성하고, 판단에는 근거로 삼은 출처 번호를 함께 적음</a:t>
+                        <a:t>[MEA:코드:시각]</a:t>
+                      </a:r>
+                    </a:p>
+                  </a:txBody>
+                  <a:tcPr marL="91440" marR="91440" marT="60000" marB="60000" anchor="ctr">
+                    <a:lnL w="9525">
+                      <a:solidFill>
+                        <a:srgbClr val="9AA7B5"/>
+                      </a:solidFill>
+                    </a:lnL>
+                    <a:lnR w="9525">
+                      <a:solidFill>
+                        <a:srgbClr val="9AA7B5"/>
+                      </a:solidFill>
+                    </a:lnR>
+                    <a:lnT w="9525">
+                      <a:solidFill>
+                        <a:srgbClr val="9AA7B5"/>
+                      </a:solidFill>
+                    </a:lnT>
+                    <a:lnB w="9525">
+                      <a:solidFill>
+                        <a:srgbClr val="9AA7B5"/>
+                      </a:solidFill>
+                    </a:lnB>
+                    <a:solidFill>
+                      <a:srgbClr val="EEF3F8"/>
+                    </a:solidFill>
+                  </a:tcPr>
+                </a:tc>
+                <a:tc>
+                  <a:txBody>
+                    <a:bodyPr/>
+                    <a:lstStyle/>
+                    <a:p>
+                      <a:pPr algn="l">
+                        <a:lnSpc>
+                          <a:spcPct val="105000"/>
+                        </a:lnSpc>
+                      </a:pPr>
+                      <a:r>
+                        <a:rPr lang="ko-KR" altLang="en-US" sz="1900" b="0" dirty="0">
+                          <a:solidFill>
+                            <a:schemeClr val="tx1">
+                              <a:lumMod val="85000"/>
+                              <a:lumOff val="15000"/>
+                            </a:schemeClr>
+                          </a:solidFill>
+                          <a:latin typeface="나눔고딕" pitchFamily="50" charset="-127"/>
+                          <a:ea typeface="나눔고딕" pitchFamily="50" charset="-127"/>
+                          <a:cs typeface="Arial" panose="020B0604020202020204" pitchFamily="34" charset="0"/>
+                        </a:rPr>
+                        <a:t>각 운영행위 시각의 6개 변수</a:t>
+                      </a:r>
+                    </a:p>
+                  </a:txBody>
+                  <a:tcPr marL="91440" marR="91440" marT="60000" marB="60000" anchor="ctr">
+                    <a:lnL w="9525">
+                      <a:solidFill>
+                        <a:srgbClr val="9AA7B5"/>
+                      </a:solidFill>
+                    </a:lnL>
+                    <a:lnR w="9525">
+                      <a:solidFill>
+                        <a:srgbClr val="9AA7B5"/>
+                      </a:solidFill>
+                    </a:lnR>
+                    <a:lnT w="9525">
+                      <a:solidFill>
+                        <a:srgbClr val="9AA7B5"/>
+                      </a:solidFill>
+                    </a:lnT>
+                    <a:lnB w="9525">
+                      <a:solidFill>
+                        <a:srgbClr val="9AA7B5"/>
+                      </a:solidFill>
+                    </a:lnB>
+                    <a:solidFill>
+                      <a:srgbClr val="EEF3F8"/>
+                    </a:solidFill>
+                  </a:tcPr>
+                </a:tc>
+              </a:tr>
+              <a:tr h="451625">
+                <a:tc>
+                  <a:txBody>
+                    <a:bodyPr/>
+                    <a:lstStyle/>
+                    <a:p>
+                      <a:pPr algn="l">
+                        <a:lnSpc>
+                          <a:spcPct val="105000"/>
+                        </a:lnSpc>
+                      </a:pPr>
+                      <a:r>
+                        <a:rPr lang="ko-KR" altLang="en-US" sz="1900" b="1" dirty="0">
+                          <a:solidFill>
+                            <a:schemeClr val="tx1">
+                              <a:lumMod val="85000"/>
+                              <a:lumOff val="15000"/>
+                            </a:schemeClr>
+                          </a:solidFill>
+                          <a:latin typeface="나눔고딕" pitchFamily="50" charset="-127"/>
+                          <a:ea typeface="나눔고딕" pitchFamily="50" charset="-127"/>
+                          <a:cs typeface="Arial" panose="020B0604020202020204" pitchFamily="34" charset="0"/>
+                        </a:rPr>
+                        <a:t>5 방류 승인 (CQ4)</a:t>
+                      </a:r>
+                    </a:p>
+                  </a:txBody>
+                  <a:tcPr marL="91440" marR="91440" marT="60000" marB="60000" anchor="ctr">
+                    <a:lnL w="9525">
+                      <a:solidFill>
+                        <a:srgbClr val="9AA7B5"/>
+                      </a:solidFill>
+                    </a:lnL>
+                    <a:lnR w="9525">
+                      <a:solidFill>
+                        <a:srgbClr val="9AA7B5"/>
+                      </a:solidFill>
+                    </a:lnR>
+                    <a:lnT w="9525">
+                      <a:solidFill>
+                        <a:srgbClr val="9AA7B5"/>
+                      </a:solidFill>
+                    </a:lnT>
+                    <a:lnB w="9525">
+                      <a:solidFill>
+                        <a:srgbClr val="9AA7B5"/>
+                      </a:solidFill>
+                    </a:lnB>
+                    <a:solidFill>
+                      <a:srgbClr val="FFFFFF"/>
+                    </a:solidFill>
+                  </a:tcPr>
+                </a:tc>
+                <a:tc>
+                  <a:txBody>
+                    <a:bodyPr/>
+                    <a:lstStyle/>
+                    <a:p>
+                      <a:pPr algn="l">
+                        <a:lnSpc>
+                          <a:spcPct val="105000"/>
+                        </a:lnSpc>
+                      </a:pPr>
+                      <a:r>
+                        <a:rPr lang="ko-KR" altLang="en-US" sz="1900" b="0" dirty="0">
+                          <a:solidFill>
+                            <a:schemeClr val="tx1">
+                              <a:lumMod val="85000"/>
+                              <a:lumOff val="15000"/>
+                            </a:schemeClr>
+                          </a:solidFill>
+                          <a:latin typeface="나눔고딕" pitchFamily="50" charset="-127"/>
+                          <a:ea typeface="나눔고딕" pitchFamily="50" charset="-127"/>
+                          <a:cs typeface="Arial" panose="020B0604020202020204" pitchFamily="34" charset="0"/>
+                        </a:rPr>
+                        <a:t>[APR:번호]</a:t>
+                      </a:r>
+                    </a:p>
+                  </a:txBody>
+                  <a:tcPr marL="91440" marR="91440" marT="60000" marB="60000" anchor="ctr">
+                    <a:lnL w="9525">
+                      <a:solidFill>
+                        <a:srgbClr val="9AA7B5"/>
+                      </a:solidFill>
+                    </a:lnL>
+                    <a:lnR w="9525">
+                      <a:solidFill>
+                        <a:srgbClr val="9AA7B5"/>
+                      </a:solidFill>
+                    </a:lnR>
+                    <a:lnT w="9525">
+                      <a:solidFill>
+                        <a:srgbClr val="9AA7B5"/>
+                      </a:solidFill>
+                    </a:lnT>
+                    <a:lnB w="9525">
+                      <a:solidFill>
+                        <a:srgbClr val="9AA7B5"/>
+                      </a:solidFill>
+                    </a:lnB>
+                    <a:solidFill>
+                      <a:srgbClr val="FFFFFF"/>
+                    </a:solidFill>
+                  </a:tcPr>
+                </a:tc>
+                <a:tc>
+                  <a:txBody>
+                    <a:bodyPr/>
+                    <a:lstStyle/>
+                    <a:p>
+                      <a:pPr algn="l">
+                        <a:lnSpc>
+                          <a:spcPct val="105000"/>
+                        </a:lnSpc>
+                      </a:pPr>
+                      <a:r>
+                        <a:rPr lang="ko-KR" altLang="en-US" sz="1900" b="0" dirty="0">
+                          <a:solidFill>
+                            <a:schemeClr val="tx1">
+                              <a:lumMod val="85000"/>
+                              <a:lumOff val="15000"/>
+                            </a:schemeClr>
+                          </a:solidFill>
+                          <a:latin typeface="나눔고딕" pitchFamily="50" charset="-127"/>
+                          <a:ea typeface="나눔고딕" pitchFamily="50" charset="-127"/>
+                          <a:cs typeface="Arial" panose="020B0604020202020204" pitchFamily="34" charset="0"/>
+                        </a:rPr>
+                        <a:t>승인 15건 (예: 승인 1368, 접수방류량 2000㎥/s)</a:t>
+                      </a:r>
+                    </a:p>
+                  </a:txBody>
+                  <a:tcPr marL="91440" marR="91440" marT="60000" marB="60000" anchor="ctr">
+                    <a:lnL w="9525">
+                      <a:solidFill>
+                        <a:srgbClr val="9AA7B5"/>
+                      </a:solidFill>
+                    </a:lnL>
+                    <a:lnR w="9525">
+                      <a:solidFill>
+                        <a:srgbClr val="9AA7B5"/>
+                      </a:solidFill>
+                    </a:lnR>
+                    <a:lnT w="9525">
+                      <a:solidFill>
+                        <a:srgbClr val="9AA7B5"/>
+                      </a:solidFill>
+                    </a:lnT>
+                    <a:lnB w="9525">
+                      <a:solidFill>
+                        <a:srgbClr val="9AA7B5"/>
+                      </a:solidFill>
+                    </a:lnB>
+                    <a:solidFill>
+                      <a:srgbClr val="FFFFFF"/>
+                    </a:solidFill>
+                  </a:tcPr>
+                </a:tc>
+              </a:tr>
+              <a:tr h="451625">
+                <a:tc>
+                  <a:txBody>
+                    <a:bodyPr/>
+                    <a:lstStyle/>
+                    <a:p>
+                      <a:pPr algn="l">
+                        <a:lnSpc>
+                          <a:spcPct val="105000"/>
+                        </a:lnSpc>
+                      </a:pPr>
+                      <a:r>
+                        <a:rPr lang="ko-KR" altLang="en-US" sz="1900" b="1" dirty="0">
+                          <a:solidFill>
+                            <a:schemeClr val="tx1">
+                              <a:lumMod val="85000"/>
+                              <a:lumOff val="15000"/>
+                            </a:schemeClr>
+                          </a:solidFill>
+                          <a:latin typeface="나눔고딕" pitchFamily="50" charset="-127"/>
+                          <a:ea typeface="나눔고딕" pitchFamily="50" charset="-127"/>
+                          <a:cs typeface="Arial" panose="020B0604020202020204" pitchFamily="34" charset="0"/>
+                        </a:rPr>
+                        <a:t>6 출처 (CQ6)</a:t>
+                      </a:r>
+                    </a:p>
+                  </a:txBody>
+                  <a:tcPr marL="91440" marR="91440" marT="60000" marB="60000" anchor="ctr">
+                    <a:lnL w="9525">
+                      <a:solidFill>
+                        <a:srgbClr val="9AA7B5"/>
+                      </a:solidFill>
+                    </a:lnL>
+                    <a:lnR w="9525">
+                      <a:solidFill>
+                        <a:srgbClr val="9AA7B5"/>
+                      </a:solidFill>
+                    </a:lnR>
+                    <a:lnT w="9525">
+                      <a:solidFill>
+                        <a:srgbClr val="9AA7B5"/>
+                      </a:solidFill>
+                    </a:lnT>
+                    <a:lnB w="9525">
+                      <a:solidFill>
+                        <a:srgbClr val="9AA7B5"/>
+                      </a:solidFill>
+                    </a:lnB>
+                    <a:solidFill>
+                      <a:srgbClr val="EEF3F8"/>
+                    </a:solidFill>
+                  </a:tcPr>
+                </a:tc>
+                <a:tc>
+                  <a:txBody>
+                    <a:bodyPr/>
+                    <a:lstStyle/>
+                    <a:p>
+                      <a:pPr algn="l">
+                        <a:lnSpc>
+                          <a:spcPct val="105000"/>
+                        </a:lnSpc>
+                      </a:pPr>
+                      <a:r>
+                        <a:rPr lang="ko-KR" altLang="en-US" sz="1900" b="0" dirty="0">
+                          <a:solidFill>
+                            <a:schemeClr val="tx1">
+                              <a:lumMod val="85000"/>
+                              <a:lumOff val="15000"/>
+                            </a:schemeClr>
+                          </a:solidFill>
+                          <a:latin typeface="나눔고딕" pitchFamily="50" charset="-127"/>
+                          <a:ea typeface="나눔고딕" pitchFamily="50" charset="-127"/>
+                          <a:cs typeface="Arial" panose="020B0604020202020204" pitchFamily="34" charset="0"/>
+                        </a:rPr>
+                        <a:t>[EVI:…]</a:t>
+                      </a:r>
+                    </a:p>
+                  </a:txBody>
+                  <a:tcPr marL="91440" marR="91440" marT="60000" marB="60000" anchor="ctr">
+                    <a:lnL w="9525">
+                      <a:solidFill>
+                        <a:srgbClr val="9AA7B5"/>
+                      </a:solidFill>
+                    </a:lnL>
+                    <a:lnR w="9525">
+                      <a:solidFill>
+                        <a:srgbClr val="9AA7B5"/>
+                      </a:solidFill>
+                    </a:lnR>
+                    <a:lnT w="9525">
+                      <a:solidFill>
+                        <a:srgbClr val="9AA7B5"/>
+                      </a:solidFill>
+                    </a:lnT>
+                    <a:lnB w="9525">
+                      <a:solidFill>
+                        <a:srgbClr val="9AA7B5"/>
+                      </a:solidFill>
+                    </a:lnB>
+                    <a:solidFill>
+                      <a:srgbClr val="EEF3F8"/>
+                    </a:solidFill>
+                  </a:tcPr>
+                </a:tc>
+                <a:tc>
+                  <a:txBody>
+                    <a:bodyPr/>
+                    <a:lstStyle/>
+                    <a:p>
+                      <a:pPr algn="l">
+                        <a:lnSpc>
+                          <a:spcPct val="105000"/>
+                        </a:lnSpc>
+                      </a:pPr>
+                      <a:r>
+                        <a:rPr lang="ko-KR" altLang="en-US" sz="1900" b="0" dirty="0">
+                          <a:solidFill>
+                            <a:schemeClr val="tx1">
+                              <a:lumMod val="85000"/>
+                              <a:lumOff val="15000"/>
+                            </a:schemeClr>
+                          </a:solidFill>
+                          <a:latin typeface="나눔고딕" pitchFamily="50" charset="-127"/>
+                          <a:ea typeface="나눔고딕" pitchFamily="50" charset="-127"/>
+                          <a:cs typeface="Arial" panose="020B0604020202020204" pitchFamily="34" charset="0"/>
+                        </a:rPr>
+                        <a:t>한강홍수통제소 승인 기록, 순차번호 1368</a:t>
                       </a:r>
                     </a:p>
                   </a:txBody>
@@ -5874,13 +10154,72 @@
       </p:graphicFrame>
       <p:sp>
         <p:nvSpPr>
-          <p:cNvPr id="1025" name="본문"/>
+          <p:cNvPr id="1028" name="직사각형 1"/>
+          <p:cNvSpPr/>
+          <p:nvPr/>
+        </p:nvSpPr>
+        <p:spPr>
+          <a:xfrm>
+            <a:off x="15691431" y="24898236"/>
+            <a:ext cx="13943667" cy="1023024"/>
+          </a:xfrm>
+          <a:prstGeom prst="rect">
+            <a:avLst/>
+          </a:prstGeom>
+          <a:solidFill>
+            <a:schemeClr val="accent1">
+              <a:lumMod val="75000"/>
+            </a:schemeClr>
+          </a:solidFill>
+          <a:ln w="9525">
+            <a:noFill/>
+            <a:miter lim="800000"/>
+            <a:headEnd/>
+            <a:tailEnd/>
+          </a:ln>
+        </p:spPr>
+        <p:txBody>
+          <a:bodyPr wrap="square" lIns="222728" tIns="111366" rIns="222728" bIns="111366" anchor="ctr"/>
+          <a:lstStyle/>
+          <a:p>
+            <a:pPr defTabSz="2048653"/>
+            <a:r>
+              <a:rPr lang="ko-KR" altLang="en-US" sz="4800" b="1" dirty="0">
+                <a:ln>
+                  <a:solidFill>
+                    <a:schemeClr val="accent1">
+                      <a:alpha val="0"/>
+                    </a:schemeClr>
+                  </a:solidFill>
+                </a:ln>
+                <a:solidFill>
+                  <a:schemeClr val="bg1"/>
+                </a:solidFill>
+                <a:effectLst>
+                  <a:outerShdw blurRad="38100" dist="38100" dir="2700000" algn="tl">
+                    <a:srgbClr val="000000">
+                      <a:alpha val="43137"/>
+                    </a:srgbClr>
+                  </a:outerShdw>
+                </a:effectLst>
+                <a:latin typeface="나눔고딕 ExtraBold" panose="020D0904000000000000" pitchFamily="50" charset="-127"/>
+                <a:ea typeface="나눔고딕 ExtraBold" panose="020D0904000000000000" pitchFamily="50" charset="-127"/>
+                <a:cs typeface="Arial Unicode MS" panose="020B0604020202020204" pitchFamily="50" charset="-127"/>
+              </a:rPr>
+              <a:t>답변 생성</a:t>
+            </a:r>
+          </a:p>
+        </p:txBody>
+      </p:sp>
+      <p:sp>
+        <p:nvSpPr>
+          <p:cNvPr id="1029" name="본문"/>
           <p:cNvSpPr txBox="1"/>
           <p:nvPr/>
         </p:nvSpPr>
         <p:spPr>
           <a:xfrm>
-            <a:off x="15570184" y="26166184"/>
+            <a:off x="15570184" y="26041260"/>
             <a:ext cx="14113138" cy="1005551"/>
           </a:xfrm>
           <a:prstGeom prst="rect">
@@ -5920,7 +10259,7 @@
                 <a:ea typeface="나눔고딕" pitchFamily="50" charset="-127"/>
                 <a:cs typeface="Arial" panose="020B0604020202020204" pitchFamily="34" charset="0"/>
               </a:rPr>
-              <a:t>자료 연결과 근거 검색은 코드로 자동화하고 </a:t>
+              <a:t>LLM에는 근거 묶음과 </a:t>
             </a:r>
             <a:r>
               <a:rPr lang="ko-KR" altLang="en-US" sz="2400" b="1" dirty="0">
@@ -5934,7 +10273,7 @@
                 <a:ea typeface="나눔고딕" pitchFamily="50" charset="-127"/>
                 <a:cs typeface="Arial" panose="020B0604020202020204" pitchFamily="34" charset="0"/>
               </a:rPr>
-              <a:t>LLM은 질문 해석과 답변 작성</a:t>
+              <a:t>근거 사용 원칙</a:t>
             </a:r>
             <a:r>
               <a:rPr lang="ko-KR" altLang="en-US" sz="2400" b="0" dirty="0">
@@ -5948,20 +10287,1056 @@
                 <a:ea typeface="나눔고딕" pitchFamily="50" charset="-127"/>
                 <a:cs typeface="Arial" panose="020B0604020202020204" pitchFamily="34" charset="0"/>
               </a:rPr>
-              <a:t>을 맡아, 답변의 사실은 출처 번호로 원 자료까지 추적할 수 있고 LLM의 판단은 근거와 구분되어 표시됨</a:t>
+              <a:t>(① 근거만 사실로 쓰고 출처 번호를 붙임 ② 비교·해석은 LLM의 판단임을 밝히고 근거를 적음 ③ 근거에 없으면 “자료에 없음”)을 전달함</a:t>
             </a:r>
           </a:p>
         </p:txBody>
       </p:sp>
       <p:sp>
         <p:nvSpPr>
-          <p:cNvPr id="1026" name="직사각형 1"/>
+          <p:cNvPr id="1030" name="직사각형 415"/>
           <p:cNvSpPr/>
           <p:nvPr/>
         </p:nvSpPr>
         <p:spPr>
           <a:xfrm>
-            <a:off x="15691431" y="27551735"/>
+            <a:off x="15803042" y="27046811"/>
+            <a:ext cx="13649422" cy="645985"/>
+          </a:xfrm>
+          <a:prstGeom prst="rect">
+            <a:avLst/>
+          </a:prstGeom>
+          <a:solidFill>
+            <a:schemeClr val="bg1">
+              <a:lumMod val="85000"/>
+            </a:schemeClr>
+          </a:solidFill>
+          <a:ln>
+            <a:noFill/>
+          </a:ln>
+        </p:spPr>
+        <p:style>
+          <a:lnRef idx="2">
+            <a:schemeClr val="accent1">
+              <a:shade val="50000"/>
+            </a:schemeClr>
+          </a:lnRef>
+          <a:fillRef idx="1">
+            <a:schemeClr val="accent1"/>
+          </a:fillRef>
+          <a:effectRef idx="0">
+            <a:schemeClr val="accent1"/>
+          </a:effectRef>
+          <a:fontRef idx="minor">
+            <a:schemeClr val="lt1"/>
+          </a:fontRef>
+        </p:style>
+        <p:txBody>
+          <a:bodyPr lIns="88242" tIns="44120" rIns="88242" bIns="44120" spcCol="0" rtlCol="0" anchor="ctr"/>
+          <a:lstStyle/>
+          <a:p>
+            <a:pPr marL="0" lvl="1">
+              <a:lnSpc>
+                <a:spcPct val="107000"/>
+              </a:lnSpc>
+            </a:pPr>
+            <a:r>
+              <a:rPr lang="ko-KR" altLang="en-US" sz="2800" b="1" spc="-21" dirty="0">
+                <a:ln>
+                  <a:solidFill>
+                    <a:schemeClr val="accent1">
+                      <a:alpha val="0"/>
+                    </a:schemeClr>
+                  </a:solidFill>
+                </a:ln>
+                <a:solidFill>
+                  <a:schemeClr val="tx1">
+                    <a:lumMod val="85000"/>
+                    <a:lumOff val="15000"/>
+                  </a:schemeClr>
+                </a:solidFill>
+                <a:latin typeface="나눔고딕" pitchFamily="50" charset="-127"/>
+                <a:ea typeface="나눔고딕" pitchFamily="50" charset="-127"/>
+                <a:cs typeface="Arial" panose="020B0604020202020204" pitchFamily="34" charset="0"/>
+              </a:rPr>
+              <a:t>Table 4. 답변의 구성: 근거와 판단의 구분</a:t>
+            </a:r>
+          </a:p>
+        </p:txBody>
+      </p:sp>
+      <p:graphicFrame>
+        <p:nvGraphicFramePr>
+          <p:cNvPr id="1031" name="표"/>
+          <p:cNvGraphicFramePr>
+            <a:graphicFrameLocks noGrp="1"/>
+          </p:cNvGraphicFramePr>
+          <p:nvPr/>
+        </p:nvGraphicFramePr>
+        <p:xfrm>
+          <a:off x="15670184" y="27782796"/>
+          <a:ext cx="13500000" cy="3011375"/>
+        </p:xfrm>
+        <a:graphic>
+          <a:graphicData uri="http://schemas.openxmlformats.org/drawingml/2006/table">
+            <a:tbl>
+              <a:tblPr firstRow="1" bandRow="1"/>
+              <a:tblGrid>
+                <a:gridCol w="7400000"/>
+                <a:gridCol w="1900000"/>
+                <a:gridCol w="4200000"/>
+              </a:tblGrid>
+              <a:tr h="451625">
+                <a:tc>
+                  <a:txBody>
+                    <a:bodyPr/>
+                    <a:lstStyle/>
+                    <a:p>
+                      <a:pPr algn="ctr">
+                        <a:lnSpc>
+                          <a:spcPct val="105000"/>
+                        </a:lnSpc>
+                      </a:pPr>
+                      <a:r>
+                        <a:rPr lang="ko-KR" altLang="en-US" sz="1900" b="1" dirty="0">
+                          <a:solidFill>
+                            <a:schemeClr val="bg1"/>
+                          </a:solidFill>
+                          <a:latin typeface="나눔고딕" pitchFamily="50" charset="-127"/>
+                          <a:ea typeface="나눔고딕" pitchFamily="50" charset="-127"/>
+                          <a:cs typeface="Arial" panose="020B0604020202020204" pitchFamily="34" charset="0"/>
+                        </a:rPr>
+                        <a:t>답변의 문장 (예시)</a:t>
+                      </a:r>
+                    </a:p>
+                  </a:txBody>
+                  <a:tcPr marL="91440" marR="91440" marT="60000" marB="60000" anchor="ctr">
+                    <a:lnL w="9525">
+                      <a:solidFill>
+                        <a:srgbClr val="9AA7B5"/>
+                      </a:solidFill>
+                    </a:lnL>
+                    <a:lnR w="9525">
+                      <a:solidFill>
+                        <a:srgbClr val="9AA7B5"/>
+                      </a:solidFill>
+                    </a:lnR>
+                    <a:lnT w="9525">
+                      <a:solidFill>
+                        <a:srgbClr val="9AA7B5"/>
+                      </a:solidFill>
+                    </a:lnT>
+                    <a:lnB w="9525">
+                      <a:solidFill>
+                        <a:srgbClr val="9AA7B5"/>
+                      </a:solidFill>
+                    </a:lnB>
+                    <a:solidFill>
+                      <a:srgbClr val="1F4E79"/>
+                    </a:solidFill>
+                  </a:tcPr>
+                </a:tc>
+                <a:tc>
+                  <a:txBody>
+                    <a:bodyPr/>
+                    <a:lstStyle/>
+                    <a:p>
+                      <a:pPr algn="ctr">
+                        <a:lnSpc>
+                          <a:spcPct val="105000"/>
+                        </a:lnSpc>
+                      </a:pPr>
+                      <a:r>
+                        <a:rPr lang="ko-KR" altLang="en-US" sz="1900" b="1" dirty="0">
+                          <a:solidFill>
+                            <a:schemeClr val="bg1"/>
+                          </a:solidFill>
+                          <a:latin typeface="나눔고딕" pitchFamily="50" charset="-127"/>
+                          <a:ea typeface="나눔고딕" pitchFamily="50" charset="-127"/>
+                          <a:cs typeface="Arial" panose="020B0604020202020204" pitchFamily="34" charset="0"/>
+                        </a:rPr>
+                        <a:t>구분</a:t>
+                      </a:r>
+                    </a:p>
+                  </a:txBody>
+                  <a:tcPr marL="91440" marR="91440" marT="60000" marB="60000" anchor="ctr">
+                    <a:lnL w="9525">
+                      <a:solidFill>
+                        <a:srgbClr val="9AA7B5"/>
+                      </a:solidFill>
+                    </a:lnL>
+                    <a:lnR w="9525">
+                      <a:solidFill>
+                        <a:srgbClr val="9AA7B5"/>
+                      </a:solidFill>
+                    </a:lnR>
+                    <a:lnT w="9525">
+                      <a:solidFill>
+                        <a:srgbClr val="9AA7B5"/>
+                      </a:solidFill>
+                    </a:lnT>
+                    <a:lnB w="9525">
+                      <a:solidFill>
+                        <a:srgbClr val="9AA7B5"/>
+                      </a:solidFill>
+                    </a:lnB>
+                    <a:solidFill>
+                      <a:srgbClr val="1F4E79"/>
+                    </a:solidFill>
+                  </a:tcPr>
+                </a:tc>
+                <a:tc>
+                  <a:txBody>
+                    <a:bodyPr/>
+                    <a:lstStyle/>
+                    <a:p>
+                      <a:pPr algn="ctr">
+                        <a:lnSpc>
+                          <a:spcPct val="105000"/>
+                        </a:lnSpc>
+                      </a:pPr>
+                      <a:r>
+                        <a:rPr lang="ko-KR" altLang="en-US" sz="1900" b="1" dirty="0">
+                          <a:solidFill>
+                            <a:schemeClr val="bg1"/>
+                          </a:solidFill>
+                          <a:latin typeface="나눔고딕" pitchFamily="50" charset="-127"/>
+                          <a:ea typeface="나눔고딕" pitchFamily="50" charset="-127"/>
+                          <a:cs typeface="Arial" panose="020B0604020202020204" pitchFamily="34" charset="0"/>
+                        </a:rPr>
+                        <a:t>출처 번호</a:t>
+                      </a:r>
+                    </a:p>
+                  </a:txBody>
+                  <a:tcPr marL="91440" marR="91440" marT="60000" marB="60000" anchor="ctr">
+                    <a:lnL w="9525">
+                      <a:solidFill>
+                        <a:srgbClr val="9AA7B5"/>
+                      </a:solidFill>
+                    </a:lnL>
+                    <a:lnR w="9525">
+                      <a:solidFill>
+                        <a:srgbClr val="9AA7B5"/>
+                      </a:solidFill>
+                    </a:lnR>
+                    <a:lnT w="9525">
+                      <a:solidFill>
+                        <a:srgbClr val="9AA7B5"/>
+                      </a:solidFill>
+                    </a:lnT>
+                    <a:lnB w="9525">
+                      <a:solidFill>
+                        <a:srgbClr val="9AA7B5"/>
+                      </a:solidFill>
+                    </a:lnB>
+                    <a:solidFill>
+                      <a:srgbClr val="1F4E79"/>
+                    </a:solidFill>
+                  </a:tcPr>
+                </a:tc>
+              </a:tr>
+              <a:tr h="451625">
+                <a:tc>
+                  <a:txBody>
+                    <a:bodyPr/>
+                    <a:lstStyle/>
+                    <a:p>
+                      <a:pPr algn="l">
+                        <a:lnSpc>
+                          <a:spcPct val="105000"/>
+                        </a:lnSpc>
+                      </a:pPr>
+                      <a:r>
+                        <a:rPr lang="ko-KR" altLang="en-US" sz="1900" b="1" dirty="0">
+                          <a:solidFill>
+                            <a:schemeClr val="tx1">
+                              <a:lumMod val="85000"/>
+                              <a:lumOff val="15000"/>
+                            </a:schemeClr>
+                          </a:solidFill>
+                          <a:latin typeface="나눔고딕" pitchFamily="50" charset="-127"/>
+                          <a:ea typeface="나눔고딕" pitchFamily="50" charset="-127"/>
+                          <a:cs typeface="Arial" panose="020B0604020202020204" pitchFamily="34" charset="0"/>
+                        </a:rPr>
+                        <a:t>현재(2026-09-28 23:00) 수위는 131.6689 EL.m이다</a:t>
+                      </a:r>
+                    </a:p>
+                  </a:txBody>
+                  <a:tcPr marL="91440" marR="91440" marT="60000" marB="60000" anchor="ctr">
+                    <a:lnL w="9525">
+                      <a:solidFill>
+                        <a:srgbClr val="9AA7B5"/>
+                      </a:solidFill>
+                    </a:lnL>
+                    <a:lnR w="9525">
+                      <a:solidFill>
+                        <a:srgbClr val="9AA7B5"/>
+                      </a:solidFill>
+                    </a:lnR>
+                    <a:lnT w="9525">
+                      <a:solidFill>
+                        <a:srgbClr val="9AA7B5"/>
+                      </a:solidFill>
+                    </a:lnT>
+                    <a:lnB w="9525">
+                      <a:solidFill>
+                        <a:srgbClr val="9AA7B5"/>
+                      </a:solidFill>
+                    </a:lnB>
+                    <a:solidFill>
+                      <a:srgbClr val="FFFFFF"/>
+                    </a:solidFill>
+                  </a:tcPr>
+                </a:tc>
+                <a:tc>
+                  <a:txBody>
+                    <a:bodyPr/>
+                    <a:lstStyle/>
+                    <a:p>
+                      <a:pPr algn="l">
+                        <a:lnSpc>
+                          <a:spcPct val="105000"/>
+                        </a:lnSpc>
+                      </a:pPr>
+                      <a:r>
+                        <a:rPr lang="ko-KR" altLang="en-US" sz="1900" b="0" dirty="0">
+                          <a:solidFill>
+                            <a:schemeClr val="tx1">
+                              <a:lumMod val="85000"/>
+                              <a:lumOff val="15000"/>
+                            </a:schemeClr>
+                          </a:solidFill>
+                          <a:latin typeface="나눔고딕" pitchFamily="50" charset="-127"/>
+                          <a:ea typeface="나눔고딕" pitchFamily="50" charset="-127"/>
+                          <a:cs typeface="Arial" panose="020B0604020202020204" pitchFamily="34" charset="0"/>
+                        </a:rPr>
+                        <a:t>근거</a:t>
+                      </a:r>
+                    </a:p>
+                  </a:txBody>
+                  <a:tcPr marL="91440" marR="91440" marT="60000" marB="60000" anchor="ctr">
+                    <a:lnL w="9525">
+                      <a:solidFill>
+                        <a:srgbClr val="9AA7B5"/>
+                      </a:solidFill>
+                    </a:lnL>
+                    <a:lnR w="9525">
+                      <a:solidFill>
+                        <a:srgbClr val="9AA7B5"/>
+                      </a:solidFill>
+                    </a:lnR>
+                    <a:lnT w="9525">
+                      <a:solidFill>
+                        <a:srgbClr val="9AA7B5"/>
+                      </a:solidFill>
+                    </a:lnT>
+                    <a:lnB w="9525">
+                      <a:solidFill>
+                        <a:srgbClr val="9AA7B5"/>
+                      </a:solidFill>
+                    </a:lnB>
+                    <a:solidFill>
+                      <a:srgbClr val="FFFFFF"/>
+                    </a:solidFill>
+                  </a:tcPr>
+                </a:tc>
+                <a:tc>
+                  <a:txBody>
+                    <a:bodyPr/>
+                    <a:lstStyle/>
+                    <a:p>
+                      <a:pPr algn="l">
+                        <a:lnSpc>
+                          <a:spcPct val="105000"/>
+                        </a:lnSpc>
+                      </a:pPr>
+                      <a:r>
+                        <a:rPr lang="ko-KR" altLang="en-US" sz="1900" b="0" dirty="0">
+                          <a:solidFill>
+                            <a:schemeClr val="tx1">
+                              <a:lumMod val="85000"/>
+                              <a:lumOff val="15000"/>
+                            </a:schemeClr>
+                          </a:solidFill>
+                          <a:latin typeface="나눔고딕" pitchFamily="50" charset="-127"/>
+                          <a:ea typeface="나눔고딕" pitchFamily="50" charset="-127"/>
+                          <a:cs typeface="Arial" panose="020B0604020202020204" pitchFamily="34" charset="0"/>
+                        </a:rPr>
+                        <a:t>[MEA:1003110:2026092823]</a:t>
+                      </a:r>
+                    </a:p>
+                  </a:txBody>
+                  <a:tcPr marL="91440" marR="91440" marT="60000" marB="60000" anchor="ctr">
+                    <a:lnL w="9525">
+                      <a:solidFill>
+                        <a:srgbClr val="9AA7B5"/>
+                      </a:solidFill>
+                    </a:lnL>
+                    <a:lnR w="9525">
+                      <a:solidFill>
+                        <a:srgbClr val="9AA7B5"/>
+                      </a:solidFill>
+                    </a:lnR>
+                    <a:lnT w="9525">
+                      <a:solidFill>
+                        <a:srgbClr val="9AA7B5"/>
+                      </a:solidFill>
+                    </a:lnT>
+                    <a:lnB w="9525">
+                      <a:solidFill>
+                        <a:srgbClr val="9AA7B5"/>
+                      </a:solidFill>
+                    </a:lnB>
+                    <a:solidFill>
+                      <a:srgbClr val="FFFFFF"/>
+                    </a:solidFill>
+                  </a:tcPr>
+                </a:tc>
+              </a:tr>
+              <a:tr h="451625">
+                <a:tc>
+                  <a:txBody>
+                    <a:bodyPr/>
+                    <a:lstStyle/>
+                    <a:p>
+                      <a:pPr algn="l">
+                        <a:lnSpc>
+                          <a:spcPct val="105000"/>
+                        </a:lnSpc>
+                      </a:pPr>
+                      <a:r>
+                        <a:rPr lang="ko-KR" altLang="en-US" sz="1900" b="1" dirty="0">
+                          <a:solidFill>
+                            <a:schemeClr val="tx1">
+                              <a:lumMod val="85000"/>
+                              <a:lumOff val="15000"/>
+                            </a:schemeClr>
+                          </a:solidFill>
+                          <a:latin typeface="나눔고딕" pitchFamily="50" charset="-127"/>
+                          <a:ea typeface="나눔고딕" pitchFamily="50" charset="-127"/>
+                          <a:cs typeface="Arial" panose="020B0604020202020204" pitchFamily="34" charset="0"/>
+                        </a:rPr>
+                        <a:t>홍수기 제한수위는 138.0 EL.m이다</a:t>
+                      </a:r>
+                    </a:p>
+                  </a:txBody>
+                  <a:tcPr marL="91440" marR="91440" marT="60000" marB="60000" anchor="ctr">
+                    <a:lnL w="9525">
+                      <a:solidFill>
+                        <a:srgbClr val="9AA7B5"/>
+                      </a:solidFill>
+                    </a:lnL>
+                    <a:lnR w="9525">
+                      <a:solidFill>
+                        <a:srgbClr val="9AA7B5"/>
+                      </a:solidFill>
+                    </a:lnR>
+                    <a:lnT w="9525">
+                      <a:solidFill>
+                        <a:srgbClr val="9AA7B5"/>
+                      </a:solidFill>
+                    </a:lnT>
+                    <a:lnB w="9525">
+                      <a:solidFill>
+                        <a:srgbClr val="9AA7B5"/>
+                      </a:solidFill>
+                    </a:lnB>
+                    <a:solidFill>
+                      <a:srgbClr val="EEF3F8"/>
+                    </a:solidFill>
+                  </a:tcPr>
+                </a:tc>
+                <a:tc>
+                  <a:txBody>
+                    <a:bodyPr/>
+                    <a:lstStyle/>
+                    <a:p>
+                      <a:pPr algn="l">
+                        <a:lnSpc>
+                          <a:spcPct val="105000"/>
+                        </a:lnSpc>
+                      </a:pPr>
+                      <a:r>
+                        <a:rPr lang="ko-KR" altLang="en-US" sz="1900" b="0" dirty="0">
+                          <a:solidFill>
+                            <a:schemeClr val="tx1">
+                              <a:lumMod val="85000"/>
+                              <a:lumOff val="15000"/>
+                            </a:schemeClr>
+                          </a:solidFill>
+                          <a:latin typeface="나눔고딕" pitchFamily="50" charset="-127"/>
+                          <a:ea typeface="나눔고딕" pitchFamily="50" charset="-127"/>
+                          <a:cs typeface="Arial" panose="020B0604020202020204" pitchFamily="34" charset="0"/>
+                        </a:rPr>
+                        <a:t>근거</a:t>
+                      </a:r>
+                    </a:p>
+                  </a:txBody>
+                  <a:tcPr marL="91440" marR="91440" marT="60000" marB="60000" anchor="ctr">
+                    <a:lnL w="9525">
+                      <a:solidFill>
+                        <a:srgbClr val="9AA7B5"/>
+                      </a:solidFill>
+                    </a:lnL>
+                    <a:lnR w="9525">
+                      <a:solidFill>
+                        <a:srgbClr val="9AA7B5"/>
+                      </a:solidFill>
+                    </a:lnR>
+                    <a:lnT w="9525">
+                      <a:solidFill>
+                        <a:srgbClr val="9AA7B5"/>
+                      </a:solidFill>
+                    </a:lnT>
+                    <a:lnB w="9525">
+                      <a:solidFill>
+                        <a:srgbClr val="9AA7B5"/>
+                      </a:solidFill>
+                    </a:lnB>
+                    <a:solidFill>
+                      <a:srgbClr val="EEF3F8"/>
+                    </a:solidFill>
+                  </a:tcPr>
+                </a:tc>
+                <a:tc>
+                  <a:txBody>
+                    <a:bodyPr/>
+                    <a:lstStyle/>
+                    <a:p>
+                      <a:pPr algn="l">
+                        <a:lnSpc>
+                          <a:spcPct val="105000"/>
+                        </a:lnSpc>
+                      </a:pPr>
+                      <a:r>
+                        <a:rPr lang="ko-KR" altLang="en-US" sz="1900" b="0" dirty="0">
+                          <a:solidFill>
+                            <a:schemeClr val="tx1">
+                              <a:lumMod val="85000"/>
+                              <a:lumOff val="15000"/>
+                            </a:schemeClr>
+                          </a:solidFill>
+                          <a:latin typeface="나눔고딕" pitchFamily="50" charset="-127"/>
+                          <a:ea typeface="나눔고딕" pitchFamily="50" charset="-127"/>
+                          <a:cs typeface="Arial" panose="020B0604020202020204" pitchFamily="34" charset="0"/>
+                        </a:rPr>
+                        <a:t>[CRI:CR-02]</a:t>
+                      </a:r>
+                    </a:p>
+                  </a:txBody>
+                  <a:tcPr marL="91440" marR="91440" marT="60000" marB="60000" anchor="ctr">
+                    <a:lnL w="9525">
+                      <a:solidFill>
+                        <a:srgbClr val="9AA7B5"/>
+                      </a:solidFill>
+                    </a:lnL>
+                    <a:lnR w="9525">
+                      <a:solidFill>
+                        <a:srgbClr val="9AA7B5"/>
+                      </a:solidFill>
+                    </a:lnR>
+                    <a:lnT w="9525">
+                      <a:solidFill>
+                        <a:srgbClr val="9AA7B5"/>
+                      </a:solidFill>
+                    </a:lnT>
+                    <a:lnB w="9525">
+                      <a:solidFill>
+                        <a:srgbClr val="9AA7B5"/>
+                      </a:solidFill>
+                    </a:lnB>
+                    <a:solidFill>
+                      <a:srgbClr val="EEF3F8"/>
+                    </a:solidFill>
+                  </a:tcPr>
+                </a:tc>
+              </a:tr>
+              <a:tr h="451625">
+                <a:tc>
+                  <a:txBody>
+                    <a:bodyPr/>
+                    <a:lstStyle/>
+                    <a:p>
+                      <a:pPr algn="l">
+                        <a:lnSpc>
+                          <a:spcPct val="105000"/>
+                        </a:lnSpc>
+                      </a:pPr>
+                      <a:r>
+                        <a:rPr lang="ko-KR" altLang="en-US" sz="1900" b="1" dirty="0">
+                          <a:solidFill>
+                            <a:schemeClr val="tx1">
+                              <a:lumMod val="85000"/>
+                              <a:lumOff val="15000"/>
+                            </a:schemeClr>
+                          </a:solidFill>
+                          <a:latin typeface="나눔고딕" pitchFamily="50" charset="-127"/>
+                          <a:ea typeface="나눔고딕" pitchFamily="50" charset="-127"/>
+                          <a:cs typeface="Arial" panose="020B0604020202020204" pitchFamily="34" charset="0"/>
+                        </a:rPr>
+                        <a:t>현재 수위는 제한수위보다 6.3311 m 낮다</a:t>
+                      </a:r>
+                    </a:p>
+                  </a:txBody>
+                  <a:tcPr marL="91440" marR="91440" marT="60000" marB="60000" anchor="ctr">
+                    <a:lnL w="9525">
+                      <a:solidFill>
+                        <a:srgbClr val="9AA7B5"/>
+                      </a:solidFill>
+                    </a:lnL>
+                    <a:lnR w="9525">
+                      <a:solidFill>
+                        <a:srgbClr val="9AA7B5"/>
+                      </a:solidFill>
+                    </a:lnR>
+                    <a:lnT w="9525">
+                      <a:solidFill>
+                        <a:srgbClr val="9AA7B5"/>
+                      </a:solidFill>
+                    </a:lnT>
+                    <a:lnB w="9525">
+                      <a:solidFill>
+                        <a:srgbClr val="9AA7B5"/>
+                      </a:solidFill>
+                    </a:lnB>
+                    <a:solidFill>
+                      <a:srgbClr val="FFFFFF"/>
+                    </a:solidFill>
+                  </a:tcPr>
+                </a:tc>
+                <a:tc>
+                  <a:txBody>
+                    <a:bodyPr/>
+                    <a:lstStyle/>
+                    <a:p>
+                      <a:pPr algn="l">
+                        <a:lnSpc>
+                          <a:spcPct val="105000"/>
+                        </a:lnSpc>
+                      </a:pPr>
+                      <a:r>
+                        <a:rPr lang="ko-KR" altLang="en-US" sz="1900" b="0" dirty="0">
+                          <a:solidFill>
+                            <a:schemeClr val="tx1">
+                              <a:lumMod val="85000"/>
+                              <a:lumOff val="15000"/>
+                            </a:schemeClr>
+                          </a:solidFill>
+                          <a:latin typeface="나눔고딕" pitchFamily="50" charset="-127"/>
+                          <a:ea typeface="나눔고딕" pitchFamily="50" charset="-127"/>
+                          <a:cs typeface="Arial" panose="020B0604020202020204" pitchFamily="34" charset="0"/>
+                        </a:rPr>
+                        <a:t>판단 (LLM)</a:t>
+                      </a:r>
+                    </a:p>
+                  </a:txBody>
+                  <a:tcPr marL="91440" marR="91440" marT="60000" marB="60000" anchor="ctr">
+                    <a:lnL w="9525">
+                      <a:solidFill>
+                        <a:srgbClr val="9AA7B5"/>
+                      </a:solidFill>
+                    </a:lnL>
+                    <a:lnR w="9525">
+                      <a:solidFill>
+                        <a:srgbClr val="9AA7B5"/>
+                      </a:solidFill>
+                    </a:lnR>
+                    <a:lnT w="9525">
+                      <a:solidFill>
+                        <a:srgbClr val="9AA7B5"/>
+                      </a:solidFill>
+                    </a:lnT>
+                    <a:lnB w="9525">
+                      <a:solidFill>
+                        <a:srgbClr val="9AA7B5"/>
+                      </a:solidFill>
+                    </a:lnB>
+                    <a:solidFill>
+                      <a:srgbClr val="FFFFFF"/>
+                    </a:solidFill>
+                  </a:tcPr>
+                </a:tc>
+                <a:tc>
+                  <a:txBody>
+                    <a:bodyPr/>
+                    <a:lstStyle/>
+                    <a:p>
+                      <a:pPr algn="l">
+                        <a:lnSpc>
+                          <a:spcPct val="105000"/>
+                        </a:lnSpc>
+                      </a:pPr>
+                      <a:r>
+                        <a:rPr lang="ko-KR" altLang="en-US" sz="1900" b="0" dirty="0">
+                          <a:solidFill>
+                            <a:schemeClr val="tx1">
+                              <a:lumMod val="85000"/>
+                              <a:lumOff val="15000"/>
+                            </a:schemeClr>
+                          </a:solidFill>
+                          <a:latin typeface="나눔고딕" pitchFamily="50" charset="-127"/>
+                          <a:ea typeface="나눔고딕" pitchFamily="50" charset="-127"/>
+                          <a:cs typeface="Arial" panose="020B0604020202020204" pitchFamily="34" charset="0"/>
+                        </a:rPr>
+                        <a:t>위 두 근거</a:t>
+                      </a:r>
+                    </a:p>
+                  </a:txBody>
+                  <a:tcPr marL="91440" marR="91440" marT="60000" marB="60000" anchor="ctr">
+                    <a:lnL w="9525">
+                      <a:solidFill>
+                        <a:srgbClr val="9AA7B5"/>
+                      </a:solidFill>
+                    </a:lnL>
+                    <a:lnR w="9525">
+                      <a:solidFill>
+                        <a:srgbClr val="9AA7B5"/>
+                      </a:solidFill>
+                    </a:lnR>
+                    <a:lnT w="9525">
+                      <a:solidFill>
+                        <a:srgbClr val="9AA7B5"/>
+                      </a:solidFill>
+                    </a:lnT>
+                    <a:lnB w="9525">
+                      <a:solidFill>
+                        <a:srgbClr val="9AA7B5"/>
+                      </a:solidFill>
+                    </a:lnB>
+                    <a:solidFill>
+                      <a:srgbClr val="FFFFFF"/>
+                    </a:solidFill>
+                  </a:tcPr>
+                </a:tc>
+              </a:tr>
+              <a:tr h="451625">
+                <a:tc>
+                  <a:txBody>
+                    <a:bodyPr/>
+                    <a:lstStyle/>
+                    <a:p>
+                      <a:pPr algn="l">
+                        <a:lnSpc>
+                          <a:spcPct val="105000"/>
+                        </a:lnSpc>
+                      </a:pPr>
+                      <a:r>
+                        <a:rPr lang="ko-KR" altLang="en-US" sz="1900" b="1" dirty="0">
+                          <a:solidFill>
+                            <a:schemeClr val="tx1">
+                              <a:lumMod val="85000"/>
+                              <a:lumOff val="15000"/>
+                            </a:schemeClr>
+                          </a:solidFill>
+                          <a:latin typeface="나눔고딕" pitchFamily="50" charset="-127"/>
+                          <a:ea typeface="나눔고딕" pitchFamily="50" charset="-127"/>
+                          <a:cs typeface="Arial" panose="020B0604020202020204" pitchFamily="34" charset="0"/>
+                        </a:rPr>
+                        <a:t>2020-09-03 12:00 방류 때 수위는 129.69 EL.m였다</a:t>
+                      </a:r>
+                    </a:p>
+                  </a:txBody>
+                  <a:tcPr marL="91440" marR="91440" marT="60000" marB="60000" anchor="ctr">
+                    <a:lnL w="9525">
+                      <a:solidFill>
+                        <a:srgbClr val="9AA7B5"/>
+                      </a:solidFill>
+                    </a:lnL>
+                    <a:lnR w="9525">
+                      <a:solidFill>
+                        <a:srgbClr val="9AA7B5"/>
+                      </a:solidFill>
+                    </a:lnR>
+                    <a:lnT w="9525">
+                      <a:solidFill>
+                        <a:srgbClr val="9AA7B5"/>
+                      </a:solidFill>
+                    </a:lnT>
+                    <a:lnB w="9525">
+                      <a:solidFill>
+                        <a:srgbClr val="9AA7B5"/>
+                      </a:solidFill>
+                    </a:lnB>
+                    <a:solidFill>
+                      <a:srgbClr val="EEF3F8"/>
+                    </a:solidFill>
+                  </a:tcPr>
+                </a:tc>
+                <a:tc>
+                  <a:txBody>
+                    <a:bodyPr/>
+                    <a:lstStyle/>
+                    <a:p>
+                      <a:pPr algn="l">
+                        <a:lnSpc>
+                          <a:spcPct val="105000"/>
+                        </a:lnSpc>
+                      </a:pPr>
+                      <a:r>
+                        <a:rPr lang="ko-KR" altLang="en-US" sz="1900" b="0" dirty="0">
+                          <a:solidFill>
+                            <a:schemeClr val="tx1">
+                              <a:lumMod val="85000"/>
+                              <a:lumOff val="15000"/>
+                            </a:schemeClr>
+                          </a:solidFill>
+                          <a:latin typeface="나눔고딕" pitchFamily="50" charset="-127"/>
+                          <a:ea typeface="나눔고딕" pitchFamily="50" charset="-127"/>
+                          <a:cs typeface="Arial" panose="020B0604020202020204" pitchFamily="34" charset="0"/>
+                        </a:rPr>
+                        <a:t>근거</a:t>
+                      </a:r>
+                    </a:p>
+                  </a:txBody>
+                  <a:tcPr marL="91440" marR="91440" marT="60000" marB="60000" anchor="ctr">
+                    <a:lnL w="9525">
+                      <a:solidFill>
+                        <a:srgbClr val="9AA7B5"/>
+                      </a:solidFill>
+                    </a:lnL>
+                    <a:lnR w="9525">
+                      <a:solidFill>
+                        <a:srgbClr val="9AA7B5"/>
+                      </a:solidFill>
+                    </a:lnR>
+                    <a:lnT w="9525">
+                      <a:solidFill>
+                        <a:srgbClr val="9AA7B5"/>
+                      </a:solidFill>
+                    </a:lnT>
+                    <a:lnB w="9525">
+                      <a:solidFill>
+                        <a:srgbClr val="9AA7B5"/>
+                      </a:solidFill>
+                    </a:lnB>
+                    <a:solidFill>
+                      <a:srgbClr val="EEF3F8"/>
+                    </a:solidFill>
+                  </a:tcPr>
+                </a:tc>
+                <a:tc>
+                  <a:txBody>
+                    <a:bodyPr/>
+                    <a:lstStyle/>
+                    <a:p>
+                      <a:pPr algn="l">
+                        <a:lnSpc>
+                          <a:spcPct val="105000"/>
+                        </a:lnSpc>
+                      </a:pPr>
+                      <a:r>
+                        <a:rPr lang="ko-KR" altLang="en-US" sz="1900" b="0" dirty="0">
+                          <a:solidFill>
+                            <a:schemeClr val="tx1">
+                              <a:lumMod val="85000"/>
+                              <a:lumOff val="15000"/>
+                            </a:schemeClr>
+                          </a:solidFill>
+                          <a:latin typeface="나눔고딕" pitchFamily="50" charset="-127"/>
+                          <a:ea typeface="나눔고딕" pitchFamily="50" charset="-127"/>
+                          <a:cs typeface="Arial" panose="020B0604020202020204" pitchFamily="34" charset="0"/>
+                        </a:rPr>
+                        <a:t>[OPR:3771:1]</a:t>
+                      </a:r>
+                    </a:p>
+                  </a:txBody>
+                  <a:tcPr marL="91440" marR="91440" marT="60000" marB="60000" anchor="ctr">
+                    <a:lnL w="9525">
+                      <a:solidFill>
+                        <a:srgbClr val="9AA7B5"/>
+                      </a:solidFill>
+                    </a:lnL>
+                    <a:lnR w="9525">
+                      <a:solidFill>
+                        <a:srgbClr val="9AA7B5"/>
+                      </a:solidFill>
+                    </a:lnR>
+                    <a:lnT w="9525">
+                      <a:solidFill>
+                        <a:srgbClr val="9AA7B5"/>
+                      </a:solidFill>
+                    </a:lnT>
+                    <a:lnB w="9525">
+                      <a:solidFill>
+                        <a:srgbClr val="9AA7B5"/>
+                      </a:solidFill>
+                    </a:lnB>
+                    <a:solidFill>
+                      <a:srgbClr val="EEF3F8"/>
+                    </a:solidFill>
+                  </a:tcPr>
+                </a:tc>
+              </a:tr>
+              <a:tr h="753250">
+                <a:tc>
+                  <a:txBody>
+                    <a:bodyPr/>
+                    <a:lstStyle/>
+                    <a:p>
+                      <a:pPr algn="l">
+                        <a:lnSpc>
+                          <a:spcPct val="105000"/>
+                        </a:lnSpc>
+                      </a:pPr>
+                      <a:r>
+                        <a:rPr lang="ko-KR" altLang="en-US" sz="1900" b="1" dirty="0">
+                          <a:solidFill>
+                            <a:schemeClr val="tx1">
+                              <a:lumMod val="85000"/>
+                              <a:lumOff val="15000"/>
+                            </a:schemeClr>
+                          </a:solidFill>
+                          <a:latin typeface="나눔고딕" pitchFamily="50" charset="-127"/>
+                          <a:ea typeface="나눔고딕" pitchFamily="50" charset="-127"/>
+                          <a:cs typeface="Arial" panose="020B0604020202020204" pitchFamily="34" charset="0"/>
+                        </a:rPr>
+                        <a:t>당시 유입량·총방류량이 현재보다 훨씬 커 비슷한 상태로 보기 어렵다</a:t>
+                      </a:r>
+                    </a:p>
+                  </a:txBody>
+                  <a:tcPr marL="91440" marR="91440" marT="60000" marB="60000" anchor="ctr">
+                    <a:lnL w="9525">
+                      <a:solidFill>
+                        <a:srgbClr val="9AA7B5"/>
+                      </a:solidFill>
+                    </a:lnL>
+                    <a:lnR w="9525">
+                      <a:solidFill>
+                        <a:srgbClr val="9AA7B5"/>
+                      </a:solidFill>
+                    </a:lnR>
+                    <a:lnT w="9525">
+                      <a:solidFill>
+                        <a:srgbClr val="9AA7B5"/>
+                      </a:solidFill>
+                    </a:lnT>
+                    <a:lnB w="9525">
+                      <a:solidFill>
+                        <a:srgbClr val="9AA7B5"/>
+                      </a:solidFill>
+                    </a:lnB>
+                    <a:solidFill>
+                      <a:srgbClr val="FFFFFF"/>
+                    </a:solidFill>
+                  </a:tcPr>
+                </a:tc>
+                <a:tc>
+                  <a:txBody>
+                    <a:bodyPr/>
+                    <a:lstStyle/>
+                    <a:p>
+                      <a:pPr algn="l">
+                        <a:lnSpc>
+                          <a:spcPct val="105000"/>
+                        </a:lnSpc>
+                      </a:pPr>
+                      <a:r>
+                        <a:rPr lang="ko-KR" altLang="en-US" sz="1900" b="0" dirty="0">
+                          <a:solidFill>
+                            <a:schemeClr val="tx1">
+                              <a:lumMod val="85000"/>
+                              <a:lumOff val="15000"/>
+                            </a:schemeClr>
+                          </a:solidFill>
+                          <a:latin typeface="나눔고딕" pitchFamily="50" charset="-127"/>
+                          <a:ea typeface="나눔고딕" pitchFamily="50" charset="-127"/>
+                          <a:cs typeface="Arial" panose="020B0604020202020204" pitchFamily="34" charset="0"/>
+                        </a:rPr>
+                        <a:t>판단 (LLM)</a:t>
+                      </a:r>
+                    </a:p>
+                  </a:txBody>
+                  <a:tcPr marL="91440" marR="91440" marT="60000" marB="60000" anchor="ctr">
+                    <a:lnL w="9525">
+                      <a:solidFill>
+                        <a:srgbClr val="9AA7B5"/>
+                      </a:solidFill>
+                    </a:lnL>
+                    <a:lnR w="9525">
+                      <a:solidFill>
+                        <a:srgbClr val="9AA7B5"/>
+                      </a:solidFill>
+                    </a:lnR>
+                    <a:lnT w="9525">
+                      <a:solidFill>
+                        <a:srgbClr val="9AA7B5"/>
+                      </a:solidFill>
+                    </a:lnT>
+                    <a:lnB w="9525">
+                      <a:solidFill>
+                        <a:srgbClr val="9AA7B5"/>
+                      </a:solidFill>
+                    </a:lnB>
+                    <a:solidFill>
+                      <a:srgbClr val="FFFFFF"/>
+                    </a:solidFill>
+                  </a:tcPr>
+                </a:tc>
+                <a:tc>
+                  <a:txBody>
+                    <a:bodyPr/>
+                    <a:lstStyle/>
+                    <a:p>
+                      <a:pPr algn="l">
+                        <a:lnSpc>
+                          <a:spcPct val="105000"/>
+                        </a:lnSpc>
+                      </a:pPr>
+                      <a:r>
+                        <a:rPr lang="ko-KR" altLang="en-US" sz="1900" b="0" dirty="0">
+                          <a:solidFill>
+                            <a:schemeClr val="tx1">
+                              <a:lumMod val="85000"/>
+                              <a:lumOff val="15000"/>
+                            </a:schemeClr>
+                          </a:solidFill>
+                          <a:latin typeface="나눔고딕" pitchFamily="50" charset="-127"/>
+                          <a:ea typeface="나눔고딕" pitchFamily="50" charset="-127"/>
+                          <a:cs typeface="Arial" panose="020B0604020202020204" pitchFamily="34" charset="0"/>
+                        </a:rPr>
+                        <a:t>위 근거와 현재 상태</a:t>
+                      </a:r>
+                    </a:p>
+                  </a:txBody>
+                  <a:tcPr marL="91440" marR="91440" marT="60000" marB="60000" anchor="ctr">
+                    <a:lnL w="9525">
+                      <a:solidFill>
+                        <a:srgbClr val="9AA7B5"/>
+                      </a:solidFill>
+                    </a:lnL>
+                    <a:lnR w="9525">
+                      <a:solidFill>
+                        <a:srgbClr val="9AA7B5"/>
+                      </a:solidFill>
+                    </a:lnR>
+                    <a:lnT w="9525">
+                      <a:solidFill>
+                        <a:srgbClr val="9AA7B5"/>
+                      </a:solidFill>
+                    </a:lnT>
+                    <a:lnB w="9525">
+                      <a:solidFill>
+                        <a:srgbClr val="9AA7B5"/>
+                      </a:solidFill>
+                    </a:lnB>
+                    <a:solidFill>
+                      <a:srgbClr val="FFFFFF"/>
+                    </a:solidFill>
+                  </a:tcPr>
+                </a:tc>
+              </a:tr>
+            </a:tbl>
+          </a:graphicData>
+        </a:graphic>
+      </p:graphicFrame>
+      <p:sp>
+        <p:nvSpPr>
+          <p:cNvPr id="1032" name="직사각형 1"/>
+          <p:cNvSpPr/>
+          <p:nvPr/>
+        </p:nvSpPr>
+        <p:spPr>
+          <a:xfrm>
+            <a:off x="15691431" y="30994171"/>
             <a:ext cx="13943667" cy="1023024"/>
           </a:xfrm>
           <a:prstGeom prst="rect">
@@ -6014,14 +11389,14 @@
       </p:sp>
       <p:sp>
         <p:nvSpPr>
-          <p:cNvPr id="1027" name="본문"/>
+          <p:cNvPr id="1033" name="본문"/>
           <p:cNvSpPr txBox="1"/>
           <p:nvPr/>
         </p:nvSpPr>
         <p:spPr>
           <a:xfrm>
-            <a:off x="15570184" y="28694759"/>
-            <a:ext cx="14113138" cy="3315935"/>
+            <a:off x="15570184" y="32137195"/>
+            <a:ext cx="14113138" cy="2884338"/>
           </a:xfrm>
           <a:prstGeom prst="rect">
             <a:avLst/>
@@ -6060,7 +11435,7 @@
                 <a:ea typeface="나눔고딕" pitchFamily="50" charset="-127"/>
                 <a:cs typeface="Arial" panose="020B0604020202020204" pitchFamily="34" charset="0"/>
               </a:rPr>
-              <a:t>댐 운영 자료(방류 승인 기록, 수문기상 시간 자료, 규정 별표3)를 </a:t>
+              <a:t>운영 자료를 </a:t>
             </a:r>
             <a:r>
               <a:rPr lang="ko-KR" altLang="en-US" sz="2400" b="1" dirty="0">
@@ -6074,7 +11449,7 @@
                 <a:ea typeface="나눔고딕" pitchFamily="50" charset="-127"/>
                 <a:cs typeface="Arial" panose="020B0604020202020204" pitchFamily="34" charset="0"/>
               </a:rPr>
-              <a:t>Ontology(Class 6, 관계 9)</a:t>
+              <a:t>Ontology</a:t>
             </a:r>
             <a:r>
               <a:rPr lang="ko-KR" altLang="en-US" sz="2400" b="0" dirty="0">
@@ -6088,7 +11463,7 @@
                 <a:ea typeface="나눔고딕" pitchFamily="50" charset="-127"/>
                 <a:cs typeface="Arial" panose="020B0604020202020204" pitchFamily="34" charset="0"/>
               </a:rPr>
-              <a:t> 에 맞춰 6단계로 </a:t>
+              <a:t>에 맞춰 6단계로 </a:t>
             </a:r>
             <a:r>
               <a:rPr lang="ko-KR" altLang="en-US" sz="2400" b="1" dirty="0">
@@ -6116,7 +11491,7 @@
                 <a:ea typeface="나눔고딕" pitchFamily="50" charset="-127"/>
                 <a:cs typeface="Arial" panose="020B0604020202020204" pitchFamily="34" charset="0"/>
               </a:rPr>
-              <a:t> 로 구축하고, 수치·원문은 외부 저장소에 두어 KG는 연결과 근거 위치만 담도록 함</a:t>
+              <a:t> 로 구축하고 수치·원문은 외부 저장소에 둠</a:t>
             </a:r>
           </a:p>
           <a:p>
@@ -6143,7 +11518,7 @@
                 <a:ea typeface="나눔고딕" pitchFamily="50" charset="-127"/>
                 <a:cs typeface="Arial" panose="020B0604020202020204" pitchFamily="34" charset="0"/>
               </a:rPr>
-              <a:t>전체 질문과 세부 질문 6개(CQ)에 대해 KG와 측정자료·문서 저장소에서 근거를 찾아 </a:t>
+              <a:t>의도에 따라 근거를 찾아 </a:t>
             </a:r>
             <a:r>
               <a:rPr lang="ko-KR" altLang="en-US" sz="2400" b="1" dirty="0">
@@ -6171,7 +11546,7 @@
                 <a:ea typeface="나눔고딕" pitchFamily="50" charset="-127"/>
                 <a:cs typeface="Arial" panose="020B0604020202020204" pitchFamily="34" charset="0"/>
               </a:rPr>
-              <a:t>으로 정리하고, </a:t>
+              <a:t>으로 정리하고 </a:t>
             </a:r>
             <a:r>
               <a:rPr lang="ko-KR" altLang="en-US" sz="2400" b="1" dirty="0">
@@ -6213,7 +11588,7 @@
                 <a:ea typeface="나눔고딕" pitchFamily="50" charset="-127"/>
                 <a:cs typeface="Arial" panose="020B0604020202020204" pitchFamily="34" charset="0"/>
               </a:rPr>
-              <a:t>질문 응답 프레임워크</a:t>
+              <a:t>프레임워크</a:t>
             </a:r>
             <a:r>
               <a:rPr lang="ko-KR" altLang="en-US" sz="2400" b="0" dirty="0">
@@ -6282,7 +11657,7 @@
                 <a:ea typeface="나눔고딕" pitchFamily="50" charset="-127"/>
                 <a:cs typeface="Arial" panose="020B0604020202020204" pitchFamily="34" charset="0"/>
               </a:rPr>
-              <a:t> 확인할 수 있어 </a:t>
+              <a:t> 확인하여 </a:t>
             </a:r>
             <a:r>
               <a:rPr lang="ko-KR" altLang="en-US" sz="2400" b="1" dirty="0">
@@ -6296,7 +11671,7 @@
                 <a:ea typeface="나눔고딕" pitchFamily="50" charset="-127"/>
                 <a:cs typeface="Arial" panose="020B0604020202020204" pitchFamily="34" charset="0"/>
               </a:rPr>
-              <a:t>댐 운영 의사결정을 지원</a:t>
+              <a:t>운영 의사결정을 지원</a:t>
             </a:r>
             <a:r>
               <a:rPr lang="ko-KR" altLang="en-US" sz="2400" b="0" dirty="0">
@@ -6317,13 +11692,13 @@
       </p:sp>
       <p:sp>
         <p:nvSpPr>
-          <p:cNvPr id="1028" name="직사각형 1"/>
+          <p:cNvPr id="1034" name="직사각형 1"/>
           <p:cNvSpPr/>
           <p:nvPr/>
         </p:nvSpPr>
         <p:spPr>
           <a:xfrm>
-            <a:off x="15691431" y="32390694"/>
+            <a:off x="15691431" y="35221533"/>
             <a:ext cx="13943667" cy="1023024"/>
           </a:xfrm>
           <a:prstGeom prst="rect">
@@ -6376,14 +11751,14 @@
       </p:sp>
       <p:sp>
         <p:nvSpPr>
-          <p:cNvPr id="1029" name="본문"/>
+          <p:cNvPr id="1035" name="본문"/>
           <p:cNvSpPr txBox="1"/>
           <p:nvPr/>
         </p:nvSpPr>
         <p:spPr>
           <a:xfrm>
-            <a:off x="15570184" y="33533718"/>
-            <a:ext cx="14113138" cy="1221350"/>
+            <a:off x="15570184" y="36364557"/>
+            <a:ext cx="14113138" cy="717820"/>
           </a:xfrm>
           <a:prstGeom prst="rect">
             <a:avLst/>
@@ -6409,7 +11784,7 @@
               <a:buNone/>
             </a:pPr>
             <a:r>
-              <a:rPr lang="ko-KR" altLang="en-US" sz="2000" b="0" dirty="0">
+              <a:rPr lang="ko-KR" altLang="en-US" sz="1600" b="0" dirty="0">
                 <a:solidFill>
                   <a:schemeClr val="tx1">
                     <a:lumMod val="85000"/>
@@ -6427,13 +11802,13 @@
       </p:sp>
       <p:sp>
         <p:nvSpPr>
-          <p:cNvPr id="1030" name="직사각형 1"/>
+          <p:cNvPr id="1036" name="직사각형 1"/>
           <p:cNvSpPr/>
           <p:nvPr/>
         </p:nvSpPr>
         <p:spPr>
           <a:xfrm>
-            <a:off x="15691431" y="34905068"/>
+            <a:off x="15691431" y="37182377"/>
             <a:ext cx="13943667" cy="1023024"/>
           </a:xfrm>
           <a:prstGeom prst="rect">
@@ -6486,14 +11861,14 @@
       </p:sp>
       <p:sp>
         <p:nvSpPr>
-          <p:cNvPr id="1031" name="본문"/>
+          <p:cNvPr id="1037" name="본문"/>
           <p:cNvSpPr txBox="1"/>
           <p:nvPr/>
         </p:nvSpPr>
         <p:spPr>
           <a:xfrm>
-            <a:off x="15570184" y="36048092"/>
-            <a:ext cx="14113138" cy="5550119"/>
+            <a:off x="15570184" y="38325401"/>
+            <a:ext cx="14113138" cy="3995030"/>
           </a:xfrm>
           <a:prstGeom prst="rect">
             <a:avLst/>
@@ -6514,12 +11889,12 @@
                 <a:spcPct val="118000"/>
               </a:lnSpc>
               <a:spcAft>
-                <a:spcPts val="300"/>
+                <a:spcPts val="150"/>
               </a:spcAft>
               <a:buNone/>
             </a:pPr>
             <a:r>
-              <a:rPr lang="ko-KR" altLang="en-US" sz="1800" b="0" dirty="0">
+              <a:rPr lang="ko-KR" altLang="en-US" sz="1400" b="0" dirty="0">
                 <a:solidFill>
                   <a:schemeClr val="tx1">
                     <a:lumMod val="85000"/>
@@ -6539,12 +11914,12 @@
                 <a:spcPct val="118000"/>
               </a:lnSpc>
               <a:spcAft>
-                <a:spcPts val="300"/>
+                <a:spcPts val="150"/>
               </a:spcAft>
               <a:buNone/>
             </a:pPr>
             <a:r>
-              <a:rPr lang="ko-KR" altLang="en-US" sz="1800" b="0" dirty="0">
+              <a:rPr lang="ko-KR" altLang="en-US" sz="1400" b="0" dirty="0">
                 <a:solidFill>
                   <a:schemeClr val="tx1">
                     <a:lumMod val="85000"/>
@@ -6564,12 +11939,12 @@
                 <a:spcPct val="118000"/>
               </a:lnSpc>
               <a:spcAft>
-                <a:spcPts val="300"/>
+                <a:spcPts val="150"/>
               </a:spcAft>
               <a:buNone/>
             </a:pPr>
             <a:r>
-              <a:rPr lang="ko-KR" altLang="en-US" sz="1800" b="0" dirty="0">
+              <a:rPr lang="ko-KR" altLang="en-US" sz="1400" b="0" dirty="0">
                 <a:solidFill>
                   <a:schemeClr val="tx1">
                     <a:lumMod val="85000"/>
@@ -6589,12 +11964,12 @@
                 <a:spcPct val="118000"/>
               </a:lnSpc>
               <a:spcAft>
-                <a:spcPts val="300"/>
+                <a:spcPts val="150"/>
               </a:spcAft>
               <a:buNone/>
             </a:pPr>
             <a:r>
-              <a:rPr lang="ko-KR" altLang="en-US" sz="1800" b="0" dirty="0">
+              <a:rPr lang="ko-KR" altLang="en-US" sz="1400" b="0" dirty="0">
                 <a:solidFill>
                   <a:schemeClr val="tx1">
                     <a:lumMod val="85000"/>
@@ -6614,12 +11989,12 @@
                 <a:spcPct val="118000"/>
               </a:lnSpc>
               <a:spcAft>
-                <a:spcPts val="300"/>
+                <a:spcPts val="150"/>
               </a:spcAft>
               <a:buNone/>
             </a:pPr>
             <a:r>
-              <a:rPr lang="ko-KR" altLang="en-US" sz="1800" b="0" dirty="0">
+              <a:rPr lang="ko-KR" altLang="en-US" sz="1400" b="0" dirty="0">
                 <a:solidFill>
                   <a:schemeClr val="tx1">
                     <a:lumMod val="85000"/>
@@ -6639,12 +12014,12 @@
                 <a:spcPct val="118000"/>
               </a:lnSpc>
               <a:spcAft>
-                <a:spcPts val="300"/>
+                <a:spcPts val="150"/>
               </a:spcAft>
               <a:buNone/>
             </a:pPr>
             <a:r>
-              <a:rPr lang="ko-KR" altLang="en-US" sz="1800" b="0" dirty="0">
+              <a:rPr lang="ko-KR" altLang="en-US" sz="1400" b="0" dirty="0">
                 <a:solidFill>
                   <a:schemeClr val="tx1">
                     <a:lumMod val="85000"/>
@@ -6664,12 +12039,12 @@
                 <a:spcPct val="118000"/>
               </a:lnSpc>
               <a:spcAft>
-                <a:spcPts val="300"/>
+                <a:spcPts val="150"/>
               </a:spcAft>
               <a:buNone/>
             </a:pPr>
             <a:r>
-              <a:rPr lang="ko-KR" altLang="en-US" sz="1800" b="0" dirty="0">
+              <a:rPr lang="ko-KR" altLang="en-US" sz="1400" b="0" dirty="0">
                 <a:solidFill>
                   <a:schemeClr val="tx1">
                     <a:lumMod val="85000"/>
@@ -6689,12 +12064,12 @@
                 <a:spcPct val="118000"/>
               </a:lnSpc>
               <a:spcAft>
-                <a:spcPts val="300"/>
+                <a:spcPts val="150"/>
               </a:spcAft>
               <a:buNone/>
             </a:pPr>
             <a:r>
-              <a:rPr lang="ko-KR" altLang="en-US" sz="1800" b="0" dirty="0">
+              <a:rPr lang="ko-KR" altLang="en-US" sz="1400" b="0" dirty="0">
                 <a:solidFill>
                   <a:schemeClr val="tx1">
                     <a:lumMod val="85000"/>
